--- a/HCM_Meeting_5_5_2026.pptx
+++ b/HCM_Meeting_5_5_2026.pptx
@@ -145,90 +145,7 @@
     </mc:Fallback>
   </mc:AlternateContent>
   <c:chart>
-    <c:title>
-      <c:tx>
-        <c:rich>
-          <a:bodyPr rot="0" spcFirstLastPara="1" vertOverflow="ellipsis" vert="horz" wrap="square" anchor="ctr" anchorCtr="1"/>
-          <a:lstStyle/>
-          <a:p>
-            <a:pPr marL="0" marR="0" lvl="0" indent="0" algn="ctr" defTabSz="914400" rtl="0" eaLnBrk="1" fontAlgn="auto" latinLnBrk="0" hangingPunct="1">
-              <a:lnSpc>
-                <a:spcPct val="100000"/>
-              </a:lnSpc>
-              <a:spcBef>
-                <a:spcPts val="0"/>
-              </a:spcBef>
-              <a:spcAft>
-                <a:spcPts val="0"/>
-              </a:spcAft>
-              <a:buClrTx/>
-              <a:buSzTx/>
-              <a:buFontTx/>
-              <a:buNone/>
-              <a:tabLst/>
-              <a:defRPr sz="1400" b="0" i="0" u="none" strike="noStrike" kern="1200" spc="0" baseline="0">
-                <a:solidFill>
-                  <a:schemeClr val="bg1"/>
-                </a:solidFill>
-                <a:latin typeface="+mn-lt"/>
-                <a:ea typeface="+mn-ea"/>
-                <a:cs typeface="+mn-cs"/>
-              </a:defRPr>
-            </a:pPr>
-            <a:r>
-              <a:rPr lang="en-US" sz="1800" b="0" i="0" u="none" strike="noStrike" kern="1200" spc="0" baseline="0">
-                <a:solidFill>
-                  <a:schemeClr val="bg1"/>
-                </a:solidFill>
-              </a:rPr>
-              <a:t>Main Component of Revenue (in Cr.)</a:t>
-            </a:r>
-          </a:p>
-        </c:rich>
-      </c:tx>
-      <c:overlay val="0"/>
-      <c:spPr>
-        <a:solidFill>
-          <a:srgbClr val="E97132"/>
-        </a:solidFill>
-        <a:ln>
-          <a:noFill/>
-        </a:ln>
-        <a:effectLst/>
-      </c:spPr>
-      <c:txPr>
-        <a:bodyPr rot="0" spcFirstLastPara="1" vertOverflow="ellipsis" vert="horz" wrap="square" anchor="ctr" anchorCtr="1"/>
-        <a:lstStyle/>
-        <a:p>
-          <a:pPr marL="0" marR="0" lvl="0" indent="0" algn="ctr" defTabSz="914400" rtl="0" eaLnBrk="1" fontAlgn="auto" latinLnBrk="0" hangingPunct="1">
-            <a:lnSpc>
-              <a:spcPct val="100000"/>
-            </a:lnSpc>
-            <a:spcBef>
-              <a:spcPts val="0"/>
-            </a:spcBef>
-            <a:spcAft>
-              <a:spcPts val="0"/>
-            </a:spcAft>
-            <a:buClrTx/>
-            <a:buSzTx/>
-            <a:buFontTx/>
-            <a:buNone/>
-            <a:tabLst/>
-            <a:defRPr sz="1400" b="0" i="0" u="none" strike="noStrike" kern="1200" spc="0" baseline="0">
-              <a:solidFill>
-                <a:schemeClr val="bg1"/>
-              </a:solidFill>
-              <a:latin typeface="+mn-lt"/>
-              <a:ea typeface="+mn-ea"/>
-              <a:cs typeface="+mn-cs"/>
-            </a:defRPr>
-          </a:pPr>
-          <a:endParaRPr lang="en-US"/>
-        </a:p>
-      </c:txPr>
-    </c:title>
-    <c:autoTitleDeleted val="0"/>
+    <c:autoTitleDeleted val="1"/>
     <c:plotArea>
       <c:layout/>
       <c:barChart>
@@ -518,12 +435,12 @@
           <a:lstStyle/>
           <a:p>
             <a:pPr algn="ctr" rtl="0">
-              <a:defRPr lang="en-US" sz="1800" b="1" i="0" u="none" strike="noStrike" kern="1200" spc="0" baseline="0" dirty="0">
+              <a:defRPr sz="1440" b="1" i="0" u="none" strike="noStrike" kern="1200" spc="0" baseline="0">
                 <a:solidFill>
-                  <a:prstClr val="black">
+                  <a:schemeClr val="tx1">
                     <a:lumMod val="65000"/>
                     <a:lumOff val="35000"/>
-                  </a:prstClr>
+                  </a:schemeClr>
                 </a:solidFill>
                 <a:latin typeface="+mn-lt"/>
                 <a:ea typeface="+mn-ea"/>
@@ -531,17 +448,7 @@
               </a:defRPr>
             </a:pPr>
             <a:r>
-              <a:rPr lang="en-US" sz="1800" b="1" i="0" u="none" strike="noStrike" kern="1200" spc="0" baseline="0">
-                <a:solidFill>
-                  <a:prstClr val="black">
-                    <a:lumMod val="65000"/>
-                    <a:lumOff val="35000"/>
-                  </a:prstClr>
-                </a:solidFill>
-                <a:latin typeface="+mn-lt"/>
-                <a:ea typeface="+mn-ea"/>
-                <a:cs typeface="+mn-cs"/>
-              </a:rPr>
+              <a:rPr lang="en-US" b="1"/>
               <a:t>Minor Minerals</a:t>
             </a:r>
           </a:p>
@@ -560,12 +467,12 @@
         <a:lstStyle/>
         <a:p>
           <a:pPr algn="ctr" rtl="0">
-            <a:defRPr lang="en-US" sz="1800" b="1" i="0" u="none" strike="noStrike" kern="1200" spc="0" baseline="0" dirty="0">
+            <a:defRPr sz="1440" b="1" i="0" u="none" strike="noStrike" kern="1200" spc="0" baseline="0">
               <a:solidFill>
-                <a:prstClr val="black">
+                <a:schemeClr val="tx1">
                   <a:lumMod val="65000"/>
                   <a:lumOff val="35000"/>
-                </a:prstClr>
+                </a:schemeClr>
               </a:solidFill>
               <a:latin typeface="+mn-lt"/>
               <a:ea typeface="+mn-ea"/>
@@ -617,7 +524,17 @@
       </c:spPr>
     </c:backWall>
     <c:plotArea>
-      <c:layout/>
+      <c:layout>
+        <c:manualLayout>
+          <c:layoutTarget val="inner"/>
+          <c:xMode val="edge"/>
+          <c:yMode val="edge"/>
+          <c:x val="8.7322585242063044E-2"/>
+          <c:y val="7.4913216434337737E-2"/>
+          <c:w val="0.82535482951587391"/>
+          <c:h val="0.66671004399038991"/>
+        </c:manualLayout>
+      </c:layout>
       <c:pie3DChart>
         <c:varyColors val="1"/>
         <c:ser>
@@ -830,12 +747,13 @@
               </c:layout>
               <c:dLblPos val="bestFit"/>
               <c:showLegendKey val="0"/>
-              <c:showVal val="0"/>
+              <c:showVal val="1"/>
               <c:showCatName val="0"/>
               <c:showSerName val="0"/>
               <c:showPercent val="1"/>
               <c:showBubbleSize val="0"/>
-              <c:separator>,</c:separator>
+              <c:separator>
+</c:separator>
               <c:extLst>
                 <c:ext xmlns:c15="http://schemas.microsoft.com/office/drawing/2012/chart" uri="{CE6537A1-D6FC-4f65-9D91-7224C49458BB}"/>
                 <c:ext xmlns:c16="http://schemas.microsoft.com/office/drawing/2014/chart" uri="{C3380CC4-5D6E-409C-BE32-E72D297353CC}">
@@ -851,13 +769,11 @@
               <a:effectLst/>
             </c:spPr>
             <c:txPr>
-              <a:bodyPr rot="0" spcFirstLastPara="1" vertOverflow="ellipsis" vert="horz" wrap="square" lIns="38100" tIns="19050" rIns="38100" bIns="19050" anchor="ctr" anchorCtr="1">
-                <a:spAutoFit/>
-              </a:bodyPr>
+              <a:bodyPr rot="0" spcFirstLastPara="1" vertOverflow="ellipsis" vert="horz" wrap="square" anchor="ctr" anchorCtr="1"/>
               <a:lstStyle/>
               <a:p>
                 <a:pPr>
-                  <a:defRPr sz="1800" b="1" i="0" u="none" strike="noStrike" kern="1200" baseline="0">
+                  <a:defRPr sz="1200" b="1" i="0" u="none" strike="noStrike" kern="1200" baseline="0">
                     <a:solidFill>
                       <a:schemeClr val="tx1">
                         <a:lumMod val="75000"/>
@@ -874,12 +790,13 @@
             </c:txPr>
             <c:dLblPos val="outEnd"/>
             <c:showLegendKey val="0"/>
-            <c:showVal val="0"/>
+            <c:showVal val="1"/>
             <c:showCatName val="0"/>
             <c:showSerName val="0"/>
             <c:showPercent val="1"/>
             <c:showBubbleSize val="0"/>
-            <c:separator>,</c:separator>
+            <c:separator>
+</c:separator>
             <c:showLeaderLines val="1"/>
             <c:leaderLines>
               <c:spPr>
@@ -932,7 +849,7 @@
             <c:numRef>
               <c:f>Sheet1!$B$2:$B$8</c:f>
               <c:numCache>
-                <c:formatCode>General</c:formatCode>
+                <c:formatCode>_ * #,##0_ ;_ * \-#,##0_ ;_ * "-"??_ ;_ @_ </c:formatCode>
                 <c:ptCount val="7"/>
                 <c:pt idx="0">
                   <c:v>753.73</c:v>
@@ -1074,7 +991,7 @@
     <a:lstStyle/>
     <a:p>
       <a:pPr>
-        <a:defRPr/>
+        <a:defRPr sz="1200"/>
       </a:pPr>
       <a:endParaRPr lang="en-US"/>
     </a:p>
@@ -1106,7 +1023,7 @@
           <a:lstStyle/>
           <a:p>
             <a:pPr>
-              <a:defRPr sz="1862" b="1" i="0" u="none" strike="noStrike" kern="1200" spc="0" baseline="0">
+              <a:defRPr sz="1440" b="1" i="0" u="none" strike="noStrike" kern="1200" spc="0" baseline="0">
                 <a:solidFill>
                   <a:schemeClr val="tx1">
                     <a:lumMod val="65000"/>
@@ -1119,7 +1036,7 @@
               </a:defRPr>
             </a:pPr>
             <a:r>
-              <a:rPr lang="en-US" sz="1800" b="1"/>
+              <a:rPr lang="en-US" sz="1440" b="1"/>
               <a:t>Major Minerals</a:t>
             </a:r>
           </a:p>
@@ -1138,7 +1055,7 @@
         <a:lstStyle/>
         <a:p>
           <a:pPr>
-            <a:defRPr sz="1862" b="1" i="0" u="none" strike="noStrike" kern="1200" spc="0" baseline="0">
+            <a:defRPr sz="1440" b="1" i="0" u="none" strike="noStrike" kern="1200" spc="0" baseline="0">
               <a:solidFill>
                 <a:schemeClr val="tx1">
                   <a:lumMod val="65000"/>
@@ -1195,7 +1112,17 @@
       </c:spPr>
     </c:backWall>
     <c:plotArea>
-      <c:layout/>
+      <c:layout>
+        <c:manualLayout>
+          <c:layoutTarget val="inner"/>
+          <c:xMode val="edge"/>
+          <c:yMode val="edge"/>
+          <c:x val="8.7784706593975026E-2"/>
+          <c:y val="0.15479341188300988"/>
+          <c:w val="0.82443058681204995"/>
+          <c:h val="0.51675735429636505"/>
+        </c:manualLayout>
+      </c:layout>
       <c:pie3DChart>
         <c:varyColors val="1"/>
         <c:ser>
@@ -1398,6 +1325,55 @@
             </c:extLst>
           </c:dPt>
           <c:dLbls>
+            <c:dLbl>
+              <c:idx val="4"/>
+              <c:layout>
+                <c:manualLayout>
+                  <c:x val="-6.4361128918816318E-2"/>
+                  <c:y val="-1.2242058855963214E-2"/>
+                </c:manualLayout>
+              </c:layout>
+              <c:dLblPos val="bestFit"/>
+              <c:showLegendKey val="0"/>
+              <c:showVal val="1"/>
+              <c:showCatName val="0"/>
+              <c:showSerName val="0"/>
+              <c:showPercent val="1"/>
+              <c:showBubbleSize val="0"/>
+              <c:separator>
+</c:separator>
+              <c:extLst>
+                <c:ext xmlns:c15="http://schemas.microsoft.com/office/drawing/2012/chart" uri="{CE6537A1-D6FC-4f65-9D91-7224C49458BB}"/>
+                <c:ext xmlns:c16="http://schemas.microsoft.com/office/drawing/2014/chart" uri="{C3380CC4-5D6E-409C-BE32-E72D297353CC}">
+                  <c16:uniqueId val="{00000009-6548-4813-BCCE-90C07C854920}"/>
+                </c:ext>
+              </c:extLst>
+            </c:dLbl>
+            <c:dLbl>
+              <c:idx val="6"/>
+              <c:layout>
+                <c:manualLayout>
+                  <c:x val="6.2062517171715625E-2"/>
+                  <c:y val="-7.345235313577933E-3"/>
+                </c:manualLayout>
+              </c:layout>
+              <c:dLblPos val="bestFit"/>
+              <c:showLegendKey val="0"/>
+              <c:showVal val="1"/>
+              <c:showCatName val="0"/>
+              <c:showSerName val="0"/>
+              <c:showPercent val="1"/>
+              <c:showBubbleSize val="0"/>
+              <c:separator>
+</c:separator>
+              <c:extLst>
+                <c:ext xmlns:c15="http://schemas.microsoft.com/office/drawing/2012/chart" uri="{CE6537A1-D6FC-4f65-9D91-7224C49458BB}"/>
+                <c:ext xmlns:c16="http://schemas.microsoft.com/office/drawing/2014/chart" uri="{C3380CC4-5D6E-409C-BE32-E72D297353CC}">
+                  <c16:uniqueId val="{0000000D-6548-4813-BCCE-90C07C854920}"/>
+                </c:ext>
+              </c:extLst>
+            </c:dLbl>
+            <c:numFmt formatCode="General" sourceLinked="0"/>
             <c:spPr>
               <a:noFill/>
               <a:ln>
@@ -1412,7 +1388,7 @@
               <a:lstStyle/>
               <a:p>
                 <a:pPr>
-                  <a:defRPr sz="1800" b="1" i="0" u="none" strike="noStrike" kern="1200" baseline="0">
+                  <a:defRPr sz="1200" b="1" i="0" u="none" strike="noStrike" kern="1200" baseline="0">
                     <a:solidFill>
                       <a:schemeClr val="tx1">
                         <a:lumMod val="75000"/>
@@ -1429,11 +1405,13 @@
             </c:txPr>
             <c:dLblPos val="outEnd"/>
             <c:showLegendKey val="0"/>
-            <c:showVal val="0"/>
+            <c:showVal val="1"/>
             <c:showCatName val="0"/>
             <c:showSerName val="0"/>
             <c:showPercent val="1"/>
             <c:showBubbleSize val="0"/>
+            <c:separator>
+</c:separator>
             <c:showLeaderLines val="1"/>
             <c:leaderLines>
               <c:spPr>
@@ -1486,7 +1464,7 @@
             <c:numRef>
               <c:f>Sheet1!$B$2:$B$8</c:f>
               <c:numCache>
-                <c:formatCode>General</c:formatCode>
+                <c:formatCode>_ * #,##0_ ;_ * \-#,##0_ ;_ * "-"??_ ;_ @_ </c:formatCode>
                 <c:ptCount val="7"/>
                 <c:pt idx="0">
                   <c:v>2509.88</c:v>
@@ -1519,8 +1497,9 @@
           </c:extLst>
         </c:ser>
         <c:dLbls>
+          <c:dLblPos val="bestFit"/>
           <c:showLegendKey val="0"/>
-          <c:showVal val="0"/>
+          <c:showVal val="1"/>
           <c:showCatName val="0"/>
           <c:showSerName val="0"/>
           <c:showPercent val="0"/>
@@ -1542,10 +1521,10 @@
         <c:manualLayout>
           <c:xMode val="edge"/>
           <c:yMode val="edge"/>
-          <c:x val="1.7236330228337211E-2"/>
-          <c:y val="0.77232141824348244"/>
+          <c:x val="1.7236330228337215E-2"/>
+          <c:y val="0.74049206521797806"/>
           <c:w val="0.9631438585677472"/>
-          <c:h val="0.17980859789601672"/>
+          <c:h val="0.23612213217722028"/>
         </c:manualLayout>
       </c:layout>
       <c:overlay val="0"/>
@@ -1632,62 +1611,7 @@
     </mc:Fallback>
   </mc:AlternateContent>
   <c:chart>
-    <c:title>
-      <c:tx>
-        <c:rich>
-          <a:bodyPr rot="0" spcFirstLastPara="1" vertOverflow="ellipsis" vert="horz" wrap="square" anchor="ctr" anchorCtr="1"/>
-          <a:lstStyle/>
-          <a:p>
-            <a:pPr>
-              <a:defRPr sz="1400" b="0" i="0" u="none" strike="noStrike" kern="1200" spc="0" baseline="0">
-                <a:solidFill>
-                  <a:schemeClr val="bg1"/>
-                </a:solidFill>
-                <a:latin typeface="+mn-lt"/>
-                <a:ea typeface="+mn-ea"/>
-                <a:cs typeface="+mn-cs"/>
-              </a:defRPr>
-            </a:pPr>
-            <a:r>
-              <a:rPr lang="en-IN" sz="1800" b="1">
-                <a:solidFill>
-                  <a:schemeClr val="bg1"/>
-                </a:solidFill>
-              </a:rPr>
-              <a:t>Revenue Comparison (in Cr.)</a:t>
-            </a:r>
-          </a:p>
-        </c:rich>
-      </c:tx>
-      <c:overlay val="0"/>
-      <c:spPr>
-        <a:solidFill>
-          <a:schemeClr val="accent2"/>
-        </a:solidFill>
-        <a:ln>
-          <a:noFill/>
-        </a:ln>
-        <a:effectLst/>
-      </c:spPr>
-      <c:txPr>
-        <a:bodyPr rot="0" spcFirstLastPara="1" vertOverflow="ellipsis" vert="horz" wrap="square" anchor="ctr" anchorCtr="1"/>
-        <a:lstStyle/>
-        <a:p>
-          <a:pPr>
-            <a:defRPr sz="1400" b="0" i="0" u="none" strike="noStrike" kern="1200" spc="0" baseline="0">
-              <a:solidFill>
-                <a:schemeClr val="bg1"/>
-              </a:solidFill>
-              <a:latin typeface="+mn-lt"/>
-              <a:ea typeface="+mn-ea"/>
-              <a:cs typeface="+mn-cs"/>
-            </a:defRPr>
-          </a:pPr>
-          <a:endParaRPr lang="en-US"/>
-        </a:p>
-      </c:txPr>
-    </c:title>
-    <c:autoTitleDeleted val="0"/>
+    <c:autoTitleDeleted val="1"/>
     <c:plotArea>
       <c:layout/>
       <c:lineChart>
@@ -1710,7 +1634,7 @@
           <c:spPr>
             <a:ln w="28575" cap="rnd">
               <a:solidFill>
-                <a:schemeClr val="accent1"/>
+                <a:srgbClr val="C00000"/>
               </a:solidFill>
               <a:round/>
             </a:ln>
@@ -1745,7 +1669,7 @@
             <c:numFmt formatCode="#,##0" sourceLinked="0"/>
             <c:spPr>
               <a:solidFill>
-                <a:srgbClr val="156082"/>
+                <a:srgbClr val="C41313"/>
               </a:solidFill>
               <a:ln>
                 <a:solidFill>
@@ -14990,7 +14914,7 @@
         <p:spPr>
           <a:xfrm>
             <a:off x="515041" y="1196667"/>
-            <a:ext cx="11161918" cy="3332644"/>
+            <a:ext cx="11161918" cy="4939878"/>
           </a:xfrm>
           <a:prstGeom prst="rect">
             <a:avLst/>
@@ -15005,7 +14929,7 @@
           <a:p>
             <a:pPr marL="342900" indent="-342900" algn="just">
               <a:lnSpc>
-                <a:spcPct val="150000"/>
+                <a:spcPct val="200000"/>
               </a:lnSpc>
               <a:spcAft>
                 <a:spcPts val="800"/>
@@ -15014,7 +14938,7 @@
               <a:buChar char="q"/>
             </a:pPr>
             <a:r>
-              <a:rPr lang="en-US" sz="2000" err="1">
+              <a:rPr lang="en-US" sz="2400" dirty="0" err="1">
                 <a:latin typeface="DevLys 010" pitchFamily="2" charset="0"/>
                 <a:ea typeface="Calibri" panose="020F0502020204030204" pitchFamily="34" charset="0"/>
                 <a:cs typeface="Mangal" panose="02040503050203030202" pitchFamily="18" charset="0"/>
@@ -15022,7 +14946,7 @@
               <a:t>vjkoyh</a:t>
             </a:r>
             <a:r>
-              <a:rPr lang="en-US" sz="2000">
+              <a:rPr lang="en-US" sz="2400" dirty="0">
                 <a:latin typeface="DevLys 010" pitchFamily="2" charset="0"/>
                 <a:ea typeface="Calibri" panose="020F0502020204030204" pitchFamily="34" charset="0"/>
                 <a:cs typeface="Mangal" panose="02040503050203030202" pitchFamily="18" charset="0"/>
@@ -15030,7 +14954,7 @@
               <a:t> </a:t>
             </a:r>
             <a:r>
-              <a:rPr lang="en-US" sz="2000" err="1">
+              <a:rPr lang="en-US" sz="2400" dirty="0" err="1">
                 <a:latin typeface="DevLys 010" pitchFamily="2" charset="0"/>
                 <a:ea typeface="Calibri" panose="020F0502020204030204" pitchFamily="34" charset="0"/>
                 <a:cs typeface="Mangal" panose="02040503050203030202" pitchFamily="18" charset="0"/>
@@ -15038,7 +14962,7 @@
               <a:t>fgYl</a:t>
             </a:r>
             <a:r>
-              <a:rPr lang="en-US" sz="2000">
+              <a:rPr lang="en-US" sz="2400" dirty="0">
                 <a:latin typeface="DevLys 010" pitchFamily="2" charset="0"/>
                 <a:ea typeface="Calibri" panose="020F0502020204030204" pitchFamily="34" charset="0"/>
                 <a:cs typeface="Mangal" panose="02040503050203030202" pitchFamily="18" charset="0"/>
@@ -15046,7 +14970,7 @@
               <a:t> </a:t>
             </a:r>
             <a:r>
-              <a:rPr lang="en-US" sz="2000" err="1">
+              <a:rPr lang="en-US" sz="2400" dirty="0" err="1">
                 <a:latin typeface="DevLys 010" pitchFamily="2" charset="0"/>
                 <a:ea typeface="Calibri" panose="020F0502020204030204" pitchFamily="34" charset="0"/>
                 <a:cs typeface="Mangal" panose="02040503050203030202" pitchFamily="18" charset="0"/>
@@ -15054,7 +14978,7 @@
               <a:t>jsat</a:t>
             </a:r>
             <a:r>
-              <a:rPr lang="en-US" sz="2000">
+              <a:rPr lang="en-US" sz="2400" dirty="0">
                 <a:latin typeface="DevLys 010" pitchFamily="2" charset="0"/>
                 <a:ea typeface="Calibri" panose="020F0502020204030204" pitchFamily="34" charset="0"/>
                 <a:cs typeface="Mangal" panose="02040503050203030202" pitchFamily="18" charset="0"/>
@@ -15062,7 +14986,7 @@
               <a:t> ds 20 </a:t>
             </a:r>
             <a:r>
-              <a:rPr lang="en-US" sz="2000" err="1">
+              <a:rPr lang="en-US" sz="2400" dirty="0" err="1">
                 <a:latin typeface="DevLys 010" pitchFamily="2" charset="0"/>
                 <a:ea typeface="Calibri" panose="020F0502020204030204" pitchFamily="34" charset="0"/>
                 <a:cs typeface="Mangal" panose="02040503050203030202" pitchFamily="18" charset="0"/>
@@ -15070,7 +14994,7 @@
               <a:t>ftyksa</a:t>
             </a:r>
             <a:r>
-              <a:rPr lang="en-US" sz="2000">
+              <a:rPr lang="en-US" sz="2400" dirty="0">
                 <a:latin typeface="DevLys 010" pitchFamily="2" charset="0"/>
                 <a:ea typeface="Calibri" panose="020F0502020204030204" pitchFamily="34" charset="0"/>
                 <a:cs typeface="Mangal" panose="02040503050203030202" pitchFamily="18" charset="0"/>
@@ -15078,7 +15002,7 @@
               <a:t> </a:t>
             </a:r>
             <a:r>
-              <a:rPr lang="en-US" sz="2000" err="1">
+              <a:rPr lang="en-US" sz="2400" dirty="0" err="1">
                 <a:latin typeface="DevLys 010" pitchFamily="2" charset="0"/>
                 <a:ea typeface="Calibri" panose="020F0502020204030204" pitchFamily="34" charset="0"/>
                 <a:cs typeface="Mangal" panose="02040503050203030202" pitchFamily="18" charset="0"/>
@@ -15086,7 +15010,7 @@
               <a:t>esa</a:t>
             </a:r>
             <a:r>
-              <a:rPr lang="en-US" sz="2000">
+              <a:rPr lang="en-US" sz="2400" dirty="0">
                 <a:latin typeface="DevLys 010" pitchFamily="2" charset="0"/>
                 <a:ea typeface="Calibri" panose="020F0502020204030204" pitchFamily="34" charset="0"/>
                 <a:cs typeface="Mangal" panose="02040503050203030202" pitchFamily="18" charset="0"/>
@@ -15094,7 +15018,7 @@
               <a:t> ek- </a:t>
             </a:r>
             <a:r>
-              <a:rPr lang="en-US" sz="2000" err="1">
+              <a:rPr lang="en-US" sz="2400" dirty="0" err="1">
                 <a:latin typeface="DevLys 010" pitchFamily="2" charset="0"/>
                 <a:ea typeface="Calibri" panose="020F0502020204030204" pitchFamily="34" charset="0"/>
                 <a:cs typeface="Mangal" panose="02040503050203030202" pitchFamily="18" charset="0"/>
@@ -15102,7 +15026,7 @@
               <a:t>mPpre</a:t>
             </a:r>
             <a:r>
-              <a:rPr lang="en-US" sz="2000">
+              <a:rPr lang="en-US" sz="2400" dirty="0">
                 <a:latin typeface="DevLys 010" pitchFamily="2" charset="0"/>
                 <a:ea typeface="Calibri" panose="020F0502020204030204" pitchFamily="34" charset="0"/>
                 <a:cs typeface="Mangal" panose="02040503050203030202" pitchFamily="18" charset="0"/>
@@ -15110,7 +15034,7 @@
               <a:t> </a:t>
             </a:r>
             <a:r>
-              <a:rPr lang="en-US" sz="2000" err="1">
+              <a:rPr lang="en-US" sz="2400" dirty="0" err="1">
                 <a:latin typeface="DevLys 010" pitchFamily="2" charset="0"/>
                 <a:ea typeface="Calibri" panose="020F0502020204030204" pitchFamily="34" charset="0"/>
                 <a:cs typeface="Mangal" panose="02040503050203030202" pitchFamily="18" charset="0"/>
@@ -15118,7 +15042,7 @@
               <a:t>U;k;ky</a:t>
             </a:r>
             <a:r>
-              <a:rPr lang="en-US" sz="2000">
+              <a:rPr lang="en-US" sz="2400" dirty="0">
                 <a:latin typeface="DevLys 010" pitchFamily="2" charset="0"/>
                 <a:ea typeface="Calibri" panose="020F0502020204030204" pitchFamily="34" charset="0"/>
                 <a:cs typeface="Mangal" panose="02040503050203030202" pitchFamily="18" charset="0"/>
@@ -15126,7 +15050,7 @@
               <a:t>; }</a:t>
             </a:r>
             <a:r>
-              <a:rPr lang="en-US" sz="2000" err="1">
+              <a:rPr lang="en-US" sz="2400" dirty="0" err="1">
                 <a:latin typeface="DevLys 010" pitchFamily="2" charset="0"/>
                 <a:ea typeface="Calibri" panose="020F0502020204030204" pitchFamily="34" charset="0"/>
                 <a:cs typeface="Mangal" panose="02040503050203030202" pitchFamily="18" charset="0"/>
@@ -15134,7 +15058,7 @@
               <a:t>kjk</a:t>
             </a:r>
             <a:r>
-              <a:rPr lang="en-US" sz="2000">
+              <a:rPr lang="en-US" sz="2400" dirty="0">
                 <a:latin typeface="DevLys 010" pitchFamily="2" charset="0"/>
                 <a:ea typeface="Calibri" panose="020F0502020204030204" pitchFamily="34" charset="0"/>
                 <a:cs typeface="Mangal" panose="02040503050203030202" pitchFamily="18" charset="0"/>
@@ -15142,7 +15066,7 @@
               <a:t> [</a:t>
             </a:r>
             <a:r>
-              <a:rPr lang="en-US" sz="2000" err="1">
+              <a:rPr lang="en-US" sz="2400" dirty="0" err="1">
                 <a:latin typeface="DevLys 010" pitchFamily="2" charset="0"/>
                 <a:ea typeface="Calibri" panose="020F0502020204030204" pitchFamily="34" charset="0"/>
                 <a:cs typeface="Mangal" panose="02040503050203030202" pitchFamily="18" charset="0"/>
@@ -15150,7 +15074,7 @@
               <a:t>kuu</a:t>
             </a:r>
             <a:r>
-              <a:rPr lang="en-US" sz="2000">
+              <a:rPr lang="en-US" sz="2400" dirty="0">
                 <a:latin typeface="DevLys 010" pitchFamily="2" charset="0"/>
                 <a:ea typeface="Calibri" panose="020F0502020204030204" pitchFamily="34" charset="0"/>
                 <a:cs typeface="Mangal" panose="02040503050203030202" pitchFamily="18" charset="0"/>
@@ -15158,7 +15082,7 @@
               <a:t> </a:t>
             </a:r>
             <a:r>
-              <a:rPr lang="en-US" sz="2000" err="1">
+              <a:rPr lang="en-US" sz="2400" dirty="0" err="1">
                 <a:latin typeface="DevLys 010" pitchFamily="2" charset="0"/>
                 <a:ea typeface="Calibri" panose="020F0502020204030204" pitchFamily="34" charset="0"/>
                 <a:cs typeface="Mangal" panose="02040503050203030202" pitchFamily="18" charset="0"/>
@@ -15166,7 +15090,7 @@
               <a:t>iV~Vksa</a:t>
             </a:r>
             <a:r>
-              <a:rPr lang="en-US" sz="2000">
+              <a:rPr lang="en-US" sz="2400" dirty="0">
                 <a:latin typeface="DevLys 010" pitchFamily="2" charset="0"/>
                 <a:ea typeface="Calibri" panose="020F0502020204030204" pitchFamily="34" charset="0"/>
                 <a:cs typeface="Mangal" panose="02040503050203030202" pitchFamily="18" charset="0"/>
@@ -15174,7 +15098,7 @@
               <a:t> ds </a:t>
             </a:r>
             <a:r>
-              <a:rPr lang="en-US" sz="2000" err="1">
+              <a:rPr lang="en-US" sz="2400" dirty="0" err="1">
                 <a:latin typeface="DevLys 010" pitchFamily="2" charset="0"/>
                 <a:ea typeface="Calibri" panose="020F0502020204030204" pitchFamily="34" charset="0"/>
                 <a:cs typeface="Mangal" panose="02040503050203030202" pitchFamily="18" charset="0"/>
@@ -15182,7 +15106,7 @@
               <a:t>vkoaVu</a:t>
             </a:r>
             <a:r>
-              <a:rPr lang="en-US" sz="2000">
+              <a:rPr lang="en-US" sz="2400" dirty="0">
                 <a:latin typeface="DevLys 010" pitchFamily="2" charset="0"/>
                 <a:ea typeface="Calibri" panose="020F0502020204030204" pitchFamily="34" charset="0"/>
                 <a:cs typeface="Mangal" panose="02040503050203030202" pitchFamily="18" charset="0"/>
@@ -15190,7 +15114,7 @@
               <a:t> </a:t>
             </a:r>
             <a:r>
-              <a:rPr lang="en-US" sz="2000" err="1">
+              <a:rPr lang="en-US" sz="2400" dirty="0" err="1">
                 <a:latin typeface="DevLys 010" pitchFamily="2" charset="0"/>
                 <a:ea typeface="Calibri" panose="020F0502020204030204" pitchFamily="34" charset="0"/>
                 <a:cs typeface="Mangal" panose="02040503050203030202" pitchFamily="18" charset="0"/>
@@ -15198,7 +15122,7 @@
               <a:t>ij</a:t>
             </a:r>
             <a:r>
-              <a:rPr lang="en-US" sz="2000">
+              <a:rPr lang="en-US" sz="2400" dirty="0">
                 <a:latin typeface="DevLys 010" pitchFamily="2" charset="0"/>
                 <a:ea typeface="Calibri" panose="020F0502020204030204" pitchFamily="34" charset="0"/>
                 <a:cs typeface="Mangal" panose="02040503050203030202" pitchFamily="18" charset="0"/>
@@ -15206,14 +15130,14 @@
               <a:t> </a:t>
             </a:r>
             <a:r>
-              <a:rPr lang="en-US" sz="2000" err="1">
+              <a:rPr lang="en-US" sz="2400" dirty="0" err="1">
                 <a:latin typeface="DevLys 010" pitchFamily="2" charset="0"/>
                 <a:ea typeface="Calibri" panose="020F0502020204030204" pitchFamily="34" charset="0"/>
                 <a:cs typeface="Mangal" panose="02040503050203030202" pitchFamily="18" charset="0"/>
               </a:rPr>
               <a:t>jksd</a:t>
             </a:r>
-            <a:endParaRPr lang="en-US" sz="2000">
+            <a:endParaRPr lang="en-US" sz="2400" dirty="0">
               <a:latin typeface="DevLys 010" pitchFamily="2" charset="0"/>
               <a:ea typeface="Calibri" panose="020F0502020204030204" pitchFamily="34" charset="0"/>
               <a:cs typeface="Mangal" panose="02040503050203030202" pitchFamily="18" charset="0"/>
@@ -15222,7 +15146,7 @@
           <a:p>
             <a:pPr marL="342900" indent="-342900" algn="just">
               <a:lnSpc>
-                <a:spcPct val="150000"/>
+                <a:spcPct val="200000"/>
               </a:lnSpc>
               <a:spcAft>
                 <a:spcPts val="800"/>
@@ -15231,7 +15155,7 @@
               <a:buChar char="q"/>
             </a:pPr>
             <a:r>
-              <a:rPr lang="en-US" sz="2000" err="1">
+              <a:rPr lang="en-US" sz="2400" dirty="0" err="1">
                 <a:latin typeface="DevLys 010" pitchFamily="2" charset="0"/>
                 <a:ea typeface="Calibri" panose="020F0502020204030204" pitchFamily="34" charset="0"/>
                 <a:cs typeface="Mangal" panose="02040503050203030202" pitchFamily="18" charset="0"/>
@@ -15239,7 +15163,7 @@
               <a:t>cukl</a:t>
             </a:r>
             <a:r>
-              <a:rPr lang="en-US" sz="2000">
+              <a:rPr lang="en-US" sz="2400" dirty="0">
                 <a:latin typeface="DevLys 010" pitchFamily="2" charset="0"/>
                 <a:ea typeface="Calibri" panose="020F0502020204030204" pitchFamily="34" charset="0"/>
                 <a:cs typeface="Mangal" panose="02040503050203030202" pitchFamily="18" charset="0"/>
@@ -15247,7 +15171,7 @@
               <a:t> </a:t>
             </a:r>
             <a:r>
-              <a:rPr lang="en-US" sz="2000" err="1">
+              <a:rPr lang="en-US" sz="2400" dirty="0" err="1">
                 <a:latin typeface="DevLys 010" pitchFamily="2" charset="0"/>
                 <a:ea typeface="Calibri" panose="020F0502020204030204" pitchFamily="34" charset="0"/>
                 <a:cs typeface="Mangal" panose="02040503050203030202" pitchFamily="18" charset="0"/>
@@ -15255,7 +15179,7 @@
               <a:t>unh</a:t>
             </a:r>
             <a:r>
-              <a:rPr lang="en-US" sz="2000">
+              <a:rPr lang="en-US" sz="2400" dirty="0">
                 <a:latin typeface="DevLys 010" pitchFamily="2" charset="0"/>
                 <a:ea typeface="Calibri" panose="020F0502020204030204" pitchFamily="34" charset="0"/>
                 <a:cs typeface="Mangal" panose="02040503050203030202" pitchFamily="18" charset="0"/>
@@ -15263,7 +15187,7 @@
               <a:t> ds 4 </a:t>
             </a:r>
             <a:r>
-              <a:rPr lang="en-US" sz="2000" err="1">
+              <a:rPr lang="en-US" sz="2400" dirty="0" err="1">
                 <a:latin typeface="DevLys 010" pitchFamily="2" charset="0"/>
                 <a:ea typeface="Calibri" panose="020F0502020204030204" pitchFamily="34" charset="0"/>
                 <a:cs typeface="Mangal" panose="02040503050203030202" pitchFamily="18" charset="0"/>
@@ -15271,7 +15195,7 @@
               <a:t>ftyksa</a:t>
             </a:r>
             <a:r>
-              <a:rPr lang="en-US" sz="2000">
+              <a:rPr lang="en-US" sz="2400" dirty="0">
                 <a:latin typeface="DevLys 010" pitchFamily="2" charset="0"/>
                 <a:ea typeface="Calibri" panose="020F0502020204030204" pitchFamily="34" charset="0"/>
                 <a:cs typeface="Mangal" panose="02040503050203030202" pitchFamily="18" charset="0"/>
@@ -15279,7 +15203,7 @@
               <a:t> </a:t>
             </a:r>
             <a:r>
-              <a:rPr lang="en-US" sz="2000" err="1">
+              <a:rPr lang="en-US" sz="2400" dirty="0" err="1">
                 <a:latin typeface="DevLys 010" pitchFamily="2" charset="0"/>
                 <a:ea typeface="Calibri" panose="020F0502020204030204" pitchFamily="34" charset="0"/>
                 <a:cs typeface="Mangal" panose="02040503050203030202" pitchFamily="18" charset="0"/>
@@ -15287,7 +15211,7 @@
               <a:t>esa</a:t>
             </a:r>
             <a:r>
-              <a:rPr lang="en-US" sz="2000">
+              <a:rPr lang="en-US" sz="2400" dirty="0">
                 <a:latin typeface="DevLys 010" pitchFamily="2" charset="0"/>
                 <a:ea typeface="Calibri" panose="020F0502020204030204" pitchFamily="34" charset="0"/>
                 <a:cs typeface="Mangal" panose="02040503050203030202" pitchFamily="18" charset="0"/>
@@ -15295,7 +15219,7 @@
               <a:t> 93 </a:t>
             </a:r>
             <a:r>
-              <a:rPr lang="en-US" sz="2000" err="1">
+              <a:rPr lang="en-US" sz="2400" dirty="0" err="1">
                 <a:latin typeface="DevLys 010" pitchFamily="2" charset="0"/>
                 <a:ea typeface="Calibri" panose="020F0502020204030204" pitchFamily="34" charset="0"/>
                 <a:cs typeface="Mangal" panose="02040503050203030202" pitchFamily="18" charset="0"/>
@@ -15303,7 +15227,7 @@
               <a:t>vkoafVr@uhyke</a:t>
             </a:r>
             <a:r>
-              <a:rPr lang="en-US" sz="2000">
+              <a:rPr lang="en-US" sz="2400" dirty="0">
                 <a:latin typeface="DevLys 010" pitchFamily="2" charset="0"/>
                 <a:ea typeface="Calibri" panose="020F0502020204030204" pitchFamily="34" charset="0"/>
                 <a:cs typeface="Mangal" panose="02040503050203030202" pitchFamily="18" charset="0"/>
@@ -15311,7 +15235,7 @@
               <a:t> </a:t>
             </a:r>
             <a:r>
-              <a:rPr lang="en-US" sz="2000" err="1">
+              <a:rPr lang="en-US" sz="2400" dirty="0" err="1">
                 <a:latin typeface="DevLys 010" pitchFamily="2" charset="0"/>
                 <a:ea typeface="Calibri" panose="020F0502020204030204" pitchFamily="34" charset="0"/>
                 <a:cs typeface="Mangal" panose="02040503050203030202" pitchFamily="18" charset="0"/>
@@ -15319,7 +15243,7 @@
               <a:t>fd;s</a:t>
             </a:r>
             <a:r>
-              <a:rPr lang="en-US" sz="2000">
+              <a:rPr lang="en-US" sz="2400" dirty="0">
                 <a:latin typeface="DevLys 010" pitchFamily="2" charset="0"/>
                 <a:ea typeface="Calibri" panose="020F0502020204030204" pitchFamily="34" charset="0"/>
                 <a:cs typeface="Mangal" panose="02040503050203030202" pitchFamily="18" charset="0"/>
@@ -15327,7 +15251,7 @@
               <a:t> </a:t>
             </a:r>
             <a:r>
-              <a:rPr lang="en-US" sz="2000" err="1">
+              <a:rPr lang="en-US" sz="2400" dirty="0" err="1">
                 <a:latin typeface="DevLys 010" pitchFamily="2" charset="0"/>
                 <a:ea typeface="Calibri" panose="020F0502020204030204" pitchFamily="34" charset="0"/>
                 <a:cs typeface="Mangal" panose="02040503050203030202" pitchFamily="18" charset="0"/>
@@ -15335,7 +15259,7 @@
               <a:t>x;s</a:t>
             </a:r>
             <a:r>
-              <a:rPr lang="en-US" sz="2000">
+              <a:rPr lang="en-US" sz="2400" dirty="0">
                 <a:latin typeface="DevLys 010" pitchFamily="2" charset="0"/>
                 <a:ea typeface="Calibri" panose="020F0502020204030204" pitchFamily="34" charset="0"/>
                 <a:cs typeface="Mangal" panose="02040503050203030202" pitchFamily="18" charset="0"/>
@@ -15343,7 +15267,7 @@
               <a:t> </a:t>
             </a:r>
             <a:r>
-              <a:rPr lang="en-US" sz="2000" err="1">
+              <a:rPr lang="en-US" sz="2400" dirty="0" err="1">
                 <a:latin typeface="DevLys 010" pitchFamily="2" charset="0"/>
                 <a:ea typeface="Calibri" panose="020F0502020204030204" pitchFamily="34" charset="0"/>
                 <a:cs typeface="Mangal" panose="02040503050203030202" pitchFamily="18" charset="0"/>
@@ -15351,7 +15275,7 @@
               <a:t>IykWV~l</a:t>
             </a:r>
             <a:r>
-              <a:rPr lang="en-US" sz="2000">
+              <a:rPr lang="en-US" sz="2400" dirty="0">
                 <a:latin typeface="DevLys 010" pitchFamily="2" charset="0"/>
                 <a:ea typeface="Calibri" panose="020F0502020204030204" pitchFamily="34" charset="0"/>
                 <a:cs typeface="Mangal" panose="02040503050203030202" pitchFamily="18" charset="0"/>
@@ -15359,7 +15283,7 @@
               <a:t> dk ek- </a:t>
             </a:r>
             <a:r>
-              <a:rPr lang="en-US" sz="2000" err="1">
+              <a:rPr lang="en-US" sz="2400" dirty="0" err="1">
                 <a:latin typeface="DevLys 010" pitchFamily="2" charset="0"/>
                 <a:ea typeface="Calibri" panose="020F0502020204030204" pitchFamily="34" charset="0"/>
                 <a:cs typeface="Mangal" panose="02040503050203030202" pitchFamily="18" charset="0"/>
@@ -15367,7 +15291,7 @@
               <a:t>mPp</a:t>
             </a:r>
             <a:r>
-              <a:rPr lang="en-US" sz="2000">
+              <a:rPr lang="en-US" sz="2400" dirty="0">
                 <a:latin typeface="DevLys 010" pitchFamily="2" charset="0"/>
                 <a:ea typeface="Calibri" panose="020F0502020204030204" pitchFamily="34" charset="0"/>
                 <a:cs typeface="Mangal" panose="02040503050203030202" pitchFamily="18" charset="0"/>
@@ -15375,7 +15299,7 @@
               <a:t> </a:t>
             </a:r>
             <a:r>
-              <a:rPr lang="en-US" sz="2000" err="1">
+              <a:rPr lang="en-US" sz="2400" dirty="0" err="1">
                 <a:latin typeface="DevLys 010" pitchFamily="2" charset="0"/>
                 <a:ea typeface="Calibri" panose="020F0502020204030204" pitchFamily="34" charset="0"/>
                 <a:cs typeface="Mangal" panose="02040503050203030202" pitchFamily="18" charset="0"/>
@@ -15383,7 +15307,7 @@
               <a:t>U;k;ky</a:t>
             </a:r>
             <a:r>
-              <a:rPr lang="en-US" sz="2000">
+              <a:rPr lang="en-US" sz="2400" dirty="0">
                 <a:latin typeface="DevLys 010" pitchFamily="2" charset="0"/>
                 <a:ea typeface="Calibri" panose="020F0502020204030204" pitchFamily="34" charset="0"/>
                 <a:cs typeface="Mangal" panose="02040503050203030202" pitchFamily="18" charset="0"/>
@@ -15391,7 +15315,7 @@
               <a:t>; }</a:t>
             </a:r>
             <a:r>
-              <a:rPr lang="en-US" sz="2000" err="1">
+              <a:rPr lang="en-US" sz="2400" dirty="0" err="1">
                 <a:latin typeface="DevLys 010" pitchFamily="2" charset="0"/>
                 <a:ea typeface="Calibri" panose="020F0502020204030204" pitchFamily="34" charset="0"/>
                 <a:cs typeface="Mangal" panose="02040503050203030202" pitchFamily="18" charset="0"/>
@@ -15399,7 +15323,7 @@
               <a:t>kjk</a:t>
             </a:r>
             <a:r>
-              <a:rPr lang="en-US" sz="2000">
+              <a:rPr lang="en-US" sz="2400" dirty="0">
                 <a:latin typeface="DevLys 010" pitchFamily="2" charset="0"/>
                 <a:ea typeface="Calibri" panose="020F0502020204030204" pitchFamily="34" charset="0"/>
                 <a:cs typeface="Mangal" panose="02040503050203030202" pitchFamily="18" charset="0"/>
@@ -15407,14 +15331,14 @@
               <a:t> </a:t>
             </a:r>
             <a:r>
-              <a:rPr lang="en-US" sz="2000" err="1">
+              <a:rPr lang="en-US" sz="2400" dirty="0" err="1">
                 <a:latin typeface="DevLys 010" pitchFamily="2" charset="0"/>
                 <a:ea typeface="Calibri" panose="020F0502020204030204" pitchFamily="34" charset="0"/>
                 <a:cs typeface="Mangal" panose="02040503050203030202" pitchFamily="18" charset="0"/>
               </a:rPr>
               <a:t>fujLrhdj.kA</a:t>
             </a:r>
-            <a:endParaRPr lang="en-US" sz="2000">
+            <a:endParaRPr lang="en-US" sz="2400" dirty="0">
               <a:latin typeface="DevLys 010" pitchFamily="2" charset="0"/>
               <a:ea typeface="Calibri" panose="020F0502020204030204" pitchFamily="34" charset="0"/>
               <a:cs typeface="Mangal" panose="02040503050203030202" pitchFamily="18" charset="0"/>
@@ -15423,7 +15347,7 @@
           <a:p>
             <a:pPr marL="342900" indent="-342900" algn="just">
               <a:lnSpc>
-                <a:spcPct val="150000"/>
+                <a:spcPct val="200000"/>
               </a:lnSpc>
               <a:spcAft>
                 <a:spcPts val="800"/>
@@ -15432,7 +15356,7 @@
               <a:buChar char="q"/>
             </a:pPr>
             <a:r>
-              <a:rPr lang="en-US" sz="2000">
+              <a:rPr lang="en-US" sz="2400" dirty="0">
                 <a:latin typeface="Times New Roman" pitchFamily="18" charset="0"/>
                 <a:ea typeface="Calibri" panose="020F0502020204030204" pitchFamily="34" charset="0"/>
                 <a:cs typeface="Times New Roman" pitchFamily="18" charset="0"/>
@@ -15440,7 +15364,7 @@
               <a:t>EC </a:t>
             </a:r>
             <a:r>
-              <a:rPr lang="en-US" sz="2000" err="1">
+              <a:rPr lang="en-US" sz="2400" dirty="0" err="1">
                 <a:latin typeface="DevLys 010" pitchFamily="2" charset="0"/>
                 <a:ea typeface="Calibri" panose="020F0502020204030204" pitchFamily="34" charset="0"/>
                 <a:cs typeface="Mangal" panose="02040503050203030202" pitchFamily="18" charset="0"/>
@@ -15448,7 +15372,7 @@
               <a:t>tkjh</a:t>
             </a:r>
             <a:r>
-              <a:rPr lang="en-US" sz="2000">
+              <a:rPr lang="en-US" sz="2400" dirty="0">
                 <a:latin typeface="DevLys 010" pitchFamily="2" charset="0"/>
                 <a:ea typeface="Calibri" panose="020F0502020204030204" pitchFamily="34" charset="0"/>
                 <a:cs typeface="Mangal" panose="02040503050203030202" pitchFamily="18" charset="0"/>
@@ -15456,7 +15380,7 @@
               <a:t> </a:t>
             </a:r>
             <a:r>
-              <a:rPr lang="en-US" sz="2000" err="1">
+              <a:rPr lang="en-US" sz="2400" dirty="0" err="1">
                 <a:latin typeface="DevLys 010" pitchFamily="2" charset="0"/>
                 <a:ea typeface="Calibri" panose="020F0502020204030204" pitchFamily="34" charset="0"/>
                 <a:cs typeface="Mangal" panose="02040503050203030202" pitchFamily="18" charset="0"/>
@@ -15464,7 +15388,7 @@
               <a:t>gksus</a:t>
             </a:r>
             <a:r>
-              <a:rPr lang="en-US" sz="2000">
+              <a:rPr lang="en-US" sz="2400" dirty="0">
                 <a:latin typeface="DevLys 010" pitchFamily="2" charset="0"/>
                 <a:ea typeface="Calibri" panose="020F0502020204030204" pitchFamily="34" charset="0"/>
                 <a:cs typeface="Mangal" panose="02040503050203030202" pitchFamily="18" charset="0"/>
@@ -15472,7 +15396,7 @@
               <a:t> </a:t>
             </a:r>
             <a:r>
-              <a:rPr lang="en-US" sz="2000" err="1">
+              <a:rPr lang="en-US" sz="2400" dirty="0" err="1">
                 <a:latin typeface="DevLys 010" pitchFamily="2" charset="0"/>
                 <a:ea typeface="Calibri" panose="020F0502020204030204" pitchFamily="34" charset="0"/>
                 <a:cs typeface="Mangal" panose="02040503050203030202" pitchFamily="18" charset="0"/>
@@ -15480,7 +15404,7 @@
               <a:t>esa</a:t>
             </a:r>
             <a:r>
-              <a:rPr lang="en-US" sz="2000">
+              <a:rPr lang="en-US" sz="2400" dirty="0">
                 <a:latin typeface="DevLys 010" pitchFamily="2" charset="0"/>
                 <a:ea typeface="Calibri" panose="020F0502020204030204" pitchFamily="34" charset="0"/>
                 <a:cs typeface="Mangal" panose="02040503050203030202" pitchFamily="18" charset="0"/>
@@ -15488,7 +15412,7 @@
               <a:t> </a:t>
             </a:r>
             <a:r>
-              <a:rPr lang="en-US" sz="2000" err="1">
+              <a:rPr lang="en-US" sz="2400" dirty="0" err="1">
                 <a:latin typeface="DevLys 010" pitchFamily="2" charset="0"/>
                 <a:ea typeface="Calibri" panose="020F0502020204030204" pitchFamily="34" charset="0"/>
                 <a:cs typeface="Mangal" panose="02040503050203030202" pitchFamily="18" charset="0"/>
@@ -15496,7 +15420,7 @@
               <a:t>vU</a:t>
             </a:r>
             <a:r>
-              <a:rPr lang="en-US" sz="2000">
+              <a:rPr lang="en-US" sz="2400" dirty="0">
                 <a:latin typeface="DevLys 010" pitchFamily="2" charset="0"/>
                 <a:ea typeface="Calibri" panose="020F0502020204030204" pitchFamily="34" charset="0"/>
                 <a:cs typeface="Mangal" panose="02040503050203030202" pitchFamily="18" charset="0"/>
@@ -15504,7 +15428,7 @@
               <a:t>; </a:t>
             </a:r>
             <a:r>
-              <a:rPr lang="en-US" sz="2000" err="1">
+              <a:rPr lang="en-US" sz="2400" dirty="0" err="1">
                 <a:latin typeface="DevLys 010" pitchFamily="2" charset="0"/>
                 <a:ea typeface="Calibri" panose="020F0502020204030204" pitchFamily="34" charset="0"/>
                 <a:cs typeface="Mangal" panose="02040503050203030202" pitchFamily="18" charset="0"/>
@@ -15512,7 +15436,7 @@
               <a:t>jkT;ksa</a:t>
             </a:r>
             <a:r>
-              <a:rPr lang="en-US" sz="2000">
+              <a:rPr lang="en-US" sz="2400" dirty="0">
                 <a:latin typeface="DevLys 010" pitchFamily="2" charset="0"/>
                 <a:ea typeface="Calibri" panose="020F0502020204030204" pitchFamily="34" charset="0"/>
                 <a:cs typeface="Mangal" panose="02040503050203030202" pitchFamily="18" charset="0"/>
@@ -15520,7 +15444,7 @@
               <a:t> dh </a:t>
             </a:r>
             <a:r>
-              <a:rPr lang="en-US" sz="2000" err="1">
+              <a:rPr lang="en-US" sz="2400" dirty="0" err="1">
                 <a:latin typeface="DevLys 010" pitchFamily="2" charset="0"/>
                 <a:ea typeface="Calibri" panose="020F0502020204030204" pitchFamily="34" charset="0"/>
                 <a:cs typeface="Mangal" panose="02040503050203030202" pitchFamily="18" charset="0"/>
@@ -15528,7 +15452,7 @@
               <a:t>rqyuk</a:t>
             </a:r>
             <a:r>
-              <a:rPr lang="en-US" sz="2000">
+              <a:rPr lang="en-US" sz="2400" dirty="0">
                 <a:latin typeface="DevLys 010" pitchFamily="2" charset="0"/>
                 <a:ea typeface="Calibri" panose="020F0502020204030204" pitchFamily="34" charset="0"/>
                 <a:cs typeface="Mangal" panose="02040503050203030202" pitchFamily="18" charset="0"/>
@@ -15536,7 +15460,7 @@
               <a:t> </a:t>
             </a:r>
             <a:r>
-              <a:rPr lang="en-US" sz="2000" err="1">
+              <a:rPr lang="en-US" sz="2400" dirty="0" err="1">
                 <a:latin typeface="DevLys 010" pitchFamily="2" charset="0"/>
                 <a:ea typeface="Calibri" panose="020F0502020204030204" pitchFamily="34" charset="0"/>
                 <a:cs typeface="Mangal" panose="02040503050203030202" pitchFamily="18" charset="0"/>
@@ -15544,7 +15468,7 @@
               <a:t>esa</a:t>
             </a:r>
             <a:r>
-              <a:rPr lang="en-US" sz="2000">
+              <a:rPr lang="en-US" sz="2400" dirty="0">
                 <a:latin typeface="DevLys 010" pitchFamily="2" charset="0"/>
                 <a:ea typeface="Calibri" panose="020F0502020204030204" pitchFamily="34" charset="0"/>
                 <a:cs typeface="Mangal" panose="02040503050203030202" pitchFamily="18" charset="0"/>
@@ -15552,7 +15476,7 @@
               <a:t> vis{</a:t>
             </a:r>
             <a:r>
-              <a:rPr lang="en-US" sz="2000" err="1">
+              <a:rPr lang="en-US" sz="2400" dirty="0" err="1">
                 <a:latin typeface="DevLys 010" pitchFamily="2" charset="0"/>
                 <a:ea typeface="Calibri" panose="020F0502020204030204" pitchFamily="34" charset="0"/>
                 <a:cs typeface="Mangal" panose="02040503050203030202" pitchFamily="18" charset="0"/>
@@ -15560,7 +15484,7 @@
               <a:t>kkd`r</a:t>
             </a:r>
             <a:r>
-              <a:rPr lang="en-US" sz="2000">
+              <a:rPr lang="en-US" sz="2400" dirty="0">
                 <a:latin typeface="DevLys 010" pitchFamily="2" charset="0"/>
                 <a:ea typeface="Calibri" panose="020F0502020204030204" pitchFamily="34" charset="0"/>
                 <a:cs typeface="Mangal" panose="02040503050203030202" pitchFamily="18" charset="0"/>
@@ -15568,7 +15492,7 @@
               <a:t> </a:t>
             </a:r>
             <a:r>
-              <a:rPr lang="en-US" sz="2000" err="1">
+              <a:rPr lang="en-US" sz="2400" dirty="0" err="1">
                 <a:latin typeface="DevLys 010" pitchFamily="2" charset="0"/>
                 <a:ea typeface="Calibri" panose="020F0502020204030204" pitchFamily="34" charset="0"/>
                 <a:cs typeface="Mangal" panose="02040503050203030202" pitchFamily="18" charset="0"/>
@@ -15576,7 +15500,7 @@
               <a:t>vf</a:t>
             </a:r>
             <a:r>
-              <a:rPr lang="en-US" sz="2000">
+              <a:rPr lang="en-US" sz="2400" dirty="0">
                 <a:latin typeface="DevLys 010" pitchFamily="2" charset="0"/>
                 <a:ea typeface="Calibri" panose="020F0502020204030204" pitchFamily="34" charset="0"/>
                 <a:cs typeface="Mangal" panose="02040503050203030202" pitchFamily="18" charset="0"/>
@@ -15584,7 +15508,7 @@
               <a:t>/</a:t>
             </a:r>
             <a:r>
-              <a:rPr lang="en-US" sz="2000" err="1">
+              <a:rPr lang="en-US" sz="2400" dirty="0" err="1">
                 <a:latin typeface="DevLys 010" pitchFamily="2" charset="0"/>
                 <a:ea typeface="Calibri" panose="020F0502020204030204" pitchFamily="34" charset="0"/>
                 <a:cs typeface="Mangal" panose="02040503050203030202" pitchFamily="18" charset="0"/>
@@ -15592,7 +15516,7 @@
               <a:t>kd</a:t>
             </a:r>
             <a:r>
-              <a:rPr lang="en-US" sz="2000">
+              <a:rPr lang="en-US" sz="2400" dirty="0">
                 <a:latin typeface="DevLys 010" pitchFamily="2" charset="0"/>
                 <a:ea typeface="Calibri" panose="020F0502020204030204" pitchFamily="34" charset="0"/>
                 <a:cs typeface="Mangal" panose="02040503050203030202" pitchFamily="18" charset="0"/>
@@ -15600,14 +15524,14 @@
               <a:t> le; </a:t>
             </a:r>
             <a:r>
-              <a:rPr lang="en-US" sz="2000" err="1">
+              <a:rPr lang="en-US" sz="2400" dirty="0" err="1">
                 <a:latin typeface="DevLys 010" pitchFamily="2" charset="0"/>
                 <a:ea typeface="Calibri" panose="020F0502020204030204" pitchFamily="34" charset="0"/>
                 <a:cs typeface="Mangal" panose="02040503050203030202" pitchFamily="18" charset="0"/>
               </a:rPr>
               <a:t>yxuk</a:t>
             </a:r>
-            <a:endParaRPr lang="en-US" sz="2000">
+            <a:endParaRPr lang="en-US" sz="2400" dirty="0">
               <a:latin typeface="DevLys 010" pitchFamily="2" charset="0"/>
               <a:ea typeface="Calibri" panose="020F0502020204030204" pitchFamily="34" charset="0"/>
               <a:cs typeface="Mangal" panose="02040503050203030202" pitchFamily="18" charset="0"/>
@@ -15616,7 +15540,7 @@
           <a:p>
             <a:pPr marL="342900" indent="-342900" algn="just">
               <a:lnSpc>
-                <a:spcPct val="150000"/>
+                <a:spcPct val="200000"/>
               </a:lnSpc>
               <a:spcAft>
                 <a:spcPts val="800"/>
@@ -15625,7 +15549,7 @@
               <a:buChar char="q"/>
             </a:pPr>
             <a:r>
-              <a:rPr lang="en-US" sz="2000">
+              <a:rPr lang="en-US" sz="2400" dirty="0">
                 <a:latin typeface="DevLys 010" pitchFamily="2" charset="0"/>
                 <a:ea typeface="Calibri" panose="020F0502020204030204" pitchFamily="34" charset="0"/>
                 <a:cs typeface="Mangal" panose="02040503050203030202" pitchFamily="18" charset="0"/>
@@ -15633,7 +15557,7 @@
               <a:t>[</a:t>
             </a:r>
             <a:r>
-              <a:rPr lang="en-US" sz="2000" err="1">
+              <a:rPr lang="en-US" sz="2400" dirty="0" err="1">
                 <a:latin typeface="DevLys 010" pitchFamily="2" charset="0"/>
                 <a:ea typeface="Calibri" panose="020F0502020204030204" pitchFamily="34" charset="0"/>
                 <a:cs typeface="Mangal" panose="02040503050203030202" pitchFamily="18" charset="0"/>
@@ -15641,7 +15565,7 @@
               <a:t>kfut</a:t>
             </a:r>
             <a:r>
-              <a:rPr lang="en-US" sz="2000">
+              <a:rPr lang="en-US" sz="2400" dirty="0">
                 <a:latin typeface="DevLys 010" pitchFamily="2" charset="0"/>
                 <a:ea typeface="Calibri" panose="020F0502020204030204" pitchFamily="34" charset="0"/>
                 <a:cs typeface="Mangal" panose="02040503050203030202" pitchFamily="18" charset="0"/>
@@ -15649,7 +15573,7 @@
               <a:t> </a:t>
             </a:r>
             <a:r>
-              <a:rPr lang="en-US" sz="2000" err="1">
+              <a:rPr lang="en-US" sz="2400" dirty="0" err="1">
                 <a:latin typeface="DevLys 010" pitchFamily="2" charset="0"/>
                 <a:ea typeface="Calibri" panose="020F0502020204030204" pitchFamily="34" charset="0"/>
                 <a:cs typeface="Mangal" panose="02040503050203030202" pitchFamily="18" charset="0"/>
@@ -15657,7 +15581,7 @@
               <a:t>ykbZeLVksu</a:t>
             </a:r>
             <a:r>
-              <a:rPr lang="en-US" sz="2000">
+              <a:rPr lang="en-US" sz="2400" dirty="0">
                 <a:latin typeface="DevLys 010" pitchFamily="2" charset="0"/>
                 <a:ea typeface="Calibri" panose="020F0502020204030204" pitchFamily="34" charset="0"/>
                 <a:cs typeface="Mangal" panose="02040503050203030202" pitchFamily="18" charset="0"/>
@@ -15665,7 +15589,7 @@
               <a:t> ds viz/</a:t>
             </a:r>
             <a:r>
-              <a:rPr lang="en-US" sz="2000" err="1">
+              <a:rPr lang="en-US" sz="2400" dirty="0" err="1">
                 <a:latin typeface="DevLys 010" pitchFamily="2" charset="0"/>
                 <a:ea typeface="Calibri" panose="020F0502020204030204" pitchFamily="34" charset="0"/>
                 <a:cs typeface="Mangal" panose="02040503050203030202" pitchFamily="18" charset="0"/>
@@ -15673,7 +15597,7 @@
               <a:t>kku</a:t>
             </a:r>
             <a:r>
-              <a:rPr lang="en-US" sz="2000">
+              <a:rPr lang="en-US" sz="2400" dirty="0">
                 <a:latin typeface="DevLys 010" pitchFamily="2" charset="0"/>
                 <a:ea typeface="Calibri" panose="020F0502020204030204" pitchFamily="34" charset="0"/>
                 <a:cs typeface="Mangal" panose="02040503050203030202" pitchFamily="18" charset="0"/>
@@ -15681,7 +15605,7 @@
               <a:t> ls </a:t>
             </a:r>
             <a:r>
-              <a:rPr lang="en-US" sz="2000" err="1">
+              <a:rPr lang="en-US" sz="2400" dirty="0" err="1">
                 <a:latin typeface="DevLys 010" pitchFamily="2" charset="0"/>
                 <a:ea typeface="Calibri" panose="020F0502020204030204" pitchFamily="34" charset="0"/>
                 <a:cs typeface="Mangal" panose="02040503050203030202" pitchFamily="18" charset="0"/>
@@ -15689,7 +15613,7 @@
               <a:t>iz</a:t>
             </a:r>
             <a:r>
-              <a:rPr lang="en-US" sz="2000">
+              <a:rPr lang="en-US" sz="2400" dirty="0">
                 <a:latin typeface="DevLys 010" pitchFamily="2" charset="0"/>
                 <a:ea typeface="Calibri" panose="020F0502020204030204" pitchFamily="34" charset="0"/>
                 <a:cs typeface="Mangal" panose="02040503050203030202" pitchFamily="18" charset="0"/>
@@ -15697,7 +15621,7 @@
               <a:t>/</a:t>
             </a:r>
             <a:r>
-              <a:rPr lang="en-US" sz="2000" err="1">
+              <a:rPr lang="en-US" sz="2400" dirty="0" err="1">
                 <a:latin typeface="DevLys 010" pitchFamily="2" charset="0"/>
                 <a:ea typeface="Calibri" panose="020F0502020204030204" pitchFamily="34" charset="0"/>
                 <a:cs typeface="Mangal" panose="02040503050203030202" pitchFamily="18" charset="0"/>
@@ -15705,7 +15629,7 @@
               <a:t>kku</a:t>
             </a:r>
             <a:r>
-              <a:rPr lang="en-US" sz="2000">
+              <a:rPr lang="en-US" sz="2400" dirty="0">
                 <a:latin typeface="DevLys 010" pitchFamily="2" charset="0"/>
                 <a:ea typeface="Calibri" panose="020F0502020204030204" pitchFamily="34" charset="0"/>
                 <a:cs typeface="Mangal" panose="02040503050203030202" pitchFamily="18" charset="0"/>
@@ -15713,7 +15637,7 @@
               <a:t> [</a:t>
             </a:r>
             <a:r>
-              <a:rPr lang="en-US" sz="2000" err="1">
+              <a:rPr lang="en-US" sz="2400" dirty="0" err="1">
                 <a:latin typeface="DevLys 010" pitchFamily="2" charset="0"/>
                 <a:ea typeface="Calibri" panose="020F0502020204030204" pitchFamily="34" charset="0"/>
                 <a:cs typeface="Mangal" panose="02040503050203030202" pitchFamily="18" charset="0"/>
@@ -15721,7 +15645,7 @@
               <a:t>kfut</a:t>
             </a:r>
             <a:r>
-              <a:rPr lang="en-US" sz="2000">
+              <a:rPr lang="en-US" sz="2400" dirty="0">
                 <a:latin typeface="DevLys 010" pitchFamily="2" charset="0"/>
                 <a:ea typeface="Calibri" panose="020F0502020204030204" pitchFamily="34" charset="0"/>
                 <a:cs typeface="Mangal" panose="02040503050203030202" pitchFamily="18" charset="0"/>
@@ -15729,7 +15653,7 @@
               <a:t> </a:t>
             </a:r>
             <a:r>
-              <a:rPr lang="en-US" sz="2000" err="1">
+              <a:rPr lang="en-US" sz="2400" dirty="0" err="1">
                 <a:latin typeface="DevLys 010" pitchFamily="2" charset="0"/>
                 <a:ea typeface="Calibri" panose="020F0502020204030204" pitchFamily="34" charset="0"/>
                 <a:cs typeface="Mangal" panose="02040503050203030202" pitchFamily="18" charset="0"/>
@@ -15737,7 +15661,7 @@
               <a:t>gksus</a:t>
             </a:r>
             <a:r>
-              <a:rPr lang="en-US" sz="2000">
+              <a:rPr lang="en-US" sz="2400" dirty="0">
                 <a:latin typeface="DevLys 010" pitchFamily="2" charset="0"/>
                 <a:ea typeface="Calibri" panose="020F0502020204030204" pitchFamily="34" charset="0"/>
                 <a:cs typeface="Mangal" panose="02040503050203030202" pitchFamily="18" charset="0"/>
@@ -15745,7 +15669,7 @@
               <a:t> ls </a:t>
             </a:r>
             <a:r>
-              <a:rPr lang="en-US" sz="2000" err="1">
+              <a:rPr lang="en-US" sz="2400" dirty="0" err="1">
                 <a:latin typeface="DevLys 010" pitchFamily="2" charset="0"/>
                 <a:ea typeface="Calibri" panose="020F0502020204030204" pitchFamily="34" charset="0"/>
                 <a:cs typeface="Mangal" panose="02040503050203030202" pitchFamily="18" charset="0"/>
@@ -15753,7 +15677,7 @@
               <a:t>jkW;YVh</a:t>
             </a:r>
             <a:r>
-              <a:rPr lang="en-US" sz="2000">
+              <a:rPr lang="en-US" sz="2400" dirty="0">
                 <a:latin typeface="DevLys 010" pitchFamily="2" charset="0"/>
                 <a:ea typeface="Calibri" panose="020F0502020204030204" pitchFamily="34" charset="0"/>
                 <a:cs typeface="Mangal" panose="02040503050203030202" pitchFamily="18" charset="0"/>
@@ -15761,7 +15685,7 @@
               <a:t> :- 175@&amp; ds </a:t>
             </a:r>
             <a:r>
-              <a:rPr lang="en-US" sz="2000" err="1">
+              <a:rPr lang="en-US" sz="2400" dirty="0" err="1">
                 <a:latin typeface="DevLys 010" pitchFamily="2" charset="0"/>
                 <a:ea typeface="Calibri" panose="020F0502020204030204" pitchFamily="34" charset="0"/>
                 <a:cs typeface="Mangal" panose="02040503050203030202" pitchFamily="18" charset="0"/>
@@ -15769,7 +15693,7 @@
               <a:t>LFkku</a:t>
             </a:r>
             <a:r>
-              <a:rPr lang="en-US" sz="2000">
+              <a:rPr lang="en-US" sz="2400" dirty="0">
                 <a:latin typeface="DevLys 010" pitchFamily="2" charset="0"/>
                 <a:ea typeface="Calibri" panose="020F0502020204030204" pitchFamily="34" charset="0"/>
                 <a:cs typeface="Mangal" panose="02040503050203030202" pitchFamily="18" charset="0"/>
@@ -15777,7 +15701,7 @@
               <a:t> 80@&amp; </a:t>
             </a:r>
             <a:r>
-              <a:rPr lang="en-US" sz="2000" err="1">
+              <a:rPr lang="en-US" sz="2400" dirty="0" err="1">
                 <a:latin typeface="DevLys 010" pitchFamily="2" charset="0"/>
                 <a:ea typeface="Calibri" panose="020F0502020204030204" pitchFamily="34" charset="0"/>
                 <a:cs typeface="Mangal" panose="02040503050203030202" pitchFamily="18" charset="0"/>
@@ -15785,7 +15709,7 @@
               <a:t>izfrVu</a:t>
             </a:r>
             <a:r>
-              <a:rPr lang="en-US" sz="2000">
+              <a:rPr lang="en-US" sz="2400" dirty="0">
                 <a:latin typeface="DevLys 010" pitchFamily="2" charset="0"/>
                 <a:ea typeface="Calibri" panose="020F0502020204030204" pitchFamily="34" charset="0"/>
                 <a:cs typeface="Mangal" panose="02040503050203030202" pitchFamily="18" charset="0"/>
@@ -15793,14 +15717,14 @@
               <a:t> </a:t>
             </a:r>
             <a:r>
-              <a:rPr lang="en-US" sz="2000" err="1">
+              <a:rPr lang="en-US" sz="2400" dirty="0" err="1">
                 <a:latin typeface="DevLys 010" pitchFamily="2" charset="0"/>
                 <a:ea typeface="Calibri" panose="020F0502020204030204" pitchFamily="34" charset="0"/>
                 <a:cs typeface="Mangal" panose="02040503050203030202" pitchFamily="18" charset="0"/>
               </a:rPr>
               <a:t>gksuk</a:t>
             </a:r>
-            <a:endParaRPr lang="en-US" sz="2000">
+            <a:endParaRPr lang="en-US" sz="2400" dirty="0">
               <a:latin typeface="DevLys 010" pitchFamily="2" charset="0"/>
               <a:ea typeface="Calibri" panose="020F0502020204030204" pitchFamily="34" charset="0"/>
               <a:cs typeface="Mangal" panose="02040503050203030202" pitchFamily="18" charset="0"/>
@@ -15809,7 +15733,7 @@
           <a:p>
             <a:pPr marL="342900" indent="-342900" algn="just">
               <a:lnSpc>
-                <a:spcPct val="150000"/>
+                <a:spcPct val="200000"/>
               </a:lnSpc>
               <a:spcAft>
                 <a:spcPts val="800"/>
@@ -15818,7 +15742,7 @@
               <a:buChar char="q"/>
             </a:pPr>
             <a:r>
-              <a:rPr lang="en-US" sz="2000" err="1">
+              <a:rPr lang="en-US" sz="2400" dirty="0" err="1">
                 <a:latin typeface="DevLys 010" pitchFamily="2" charset="0"/>
                 <a:ea typeface="Calibri" panose="020F0502020204030204" pitchFamily="34" charset="0"/>
                 <a:cs typeface="Mangal" panose="02040503050203030202" pitchFamily="18" charset="0"/>
@@ -15826,7 +15750,7 @@
               <a:t>fodkl</a:t>
             </a:r>
             <a:r>
-              <a:rPr lang="en-US" sz="2000">
+              <a:rPr lang="en-US" sz="2400" dirty="0">
                 <a:latin typeface="DevLys 010" pitchFamily="2" charset="0"/>
                 <a:ea typeface="Calibri" panose="020F0502020204030204" pitchFamily="34" charset="0"/>
                 <a:cs typeface="Mangal" panose="02040503050203030202" pitchFamily="18" charset="0"/>
@@ -15834,7 +15758,7 @@
               <a:t> </a:t>
             </a:r>
             <a:r>
-              <a:rPr lang="en-US" sz="2000" err="1">
+              <a:rPr lang="en-US" sz="2400" dirty="0" err="1">
                 <a:latin typeface="DevLys 010" pitchFamily="2" charset="0"/>
                 <a:ea typeface="Calibri" panose="020F0502020204030204" pitchFamily="34" charset="0"/>
                 <a:cs typeface="Mangal" panose="02040503050203030202" pitchFamily="18" charset="0"/>
@@ -15842,7 +15766,7 @@
               <a:t>izkf</a:t>
             </a:r>
             <a:r>
-              <a:rPr lang="en-US" sz="2000">
+              <a:rPr lang="en-US" sz="2400" dirty="0">
                 <a:latin typeface="DevLys 010" pitchFamily="2" charset="0"/>
                 <a:ea typeface="Calibri" panose="020F0502020204030204" pitchFamily="34" charset="0"/>
                 <a:cs typeface="Mangal" panose="02040503050203030202" pitchFamily="18" charset="0"/>
@@ -15850,7 +15774,7 @@
               <a:t>/</a:t>
             </a:r>
             <a:r>
-              <a:rPr lang="en-US" sz="2000" err="1">
+              <a:rPr lang="en-US" sz="2400" dirty="0" err="1">
                 <a:latin typeface="DevLys 010" pitchFamily="2" charset="0"/>
                 <a:ea typeface="Calibri" panose="020F0502020204030204" pitchFamily="34" charset="0"/>
                 <a:cs typeface="Mangal" panose="02040503050203030202" pitchFamily="18" charset="0"/>
@@ -15858,7 +15782,7 @@
               <a:t>kdj.k</a:t>
             </a:r>
             <a:r>
-              <a:rPr lang="en-US" sz="2000">
+              <a:rPr lang="en-US" sz="2400" dirty="0">
                 <a:latin typeface="DevLys 010" pitchFamily="2" charset="0"/>
                 <a:ea typeface="Calibri" panose="020F0502020204030204" pitchFamily="34" charset="0"/>
                 <a:cs typeface="Mangal" panose="02040503050203030202" pitchFamily="18" charset="0"/>
@@ -15866,7 +15790,7 @@
               <a:t> ds {</a:t>
             </a:r>
             <a:r>
-              <a:rPr lang="en-US" sz="2000" err="1">
+              <a:rPr lang="en-US" sz="2400" dirty="0" err="1">
                 <a:latin typeface="DevLys 010" pitchFamily="2" charset="0"/>
                 <a:ea typeface="Calibri" panose="020F0502020204030204" pitchFamily="34" charset="0"/>
                 <a:cs typeface="Mangal" panose="02040503050203030202" pitchFamily="18" charset="0"/>
@@ -15874,7 +15798,7 @@
               <a:t>ks</a:t>
             </a:r>
             <a:r>
-              <a:rPr lang="en-US" sz="2000">
+              <a:rPr lang="en-US" sz="2400" dirty="0">
                 <a:latin typeface="DevLys 010" pitchFamily="2" charset="0"/>
                 <a:ea typeface="Calibri" panose="020F0502020204030204" pitchFamily="34" charset="0"/>
                 <a:cs typeface="Mangal" panose="02040503050203030202" pitchFamily="18" charset="0"/>
@@ -15882,7 +15806,7 @@
               <a:t>=</a:t>
             </a:r>
             <a:r>
-              <a:rPr lang="en-US" sz="2000" err="1">
+              <a:rPr lang="en-US" sz="2400" dirty="0" err="1">
                 <a:latin typeface="DevLys 010" pitchFamily="2" charset="0"/>
                 <a:ea typeface="Calibri" panose="020F0502020204030204" pitchFamily="34" charset="0"/>
                 <a:cs typeface="Mangal" panose="02040503050203030202" pitchFamily="18" charset="0"/>
@@ -15890,7 +15814,7 @@
               <a:t>ksa</a:t>
             </a:r>
             <a:r>
-              <a:rPr lang="en-US" sz="2000">
+              <a:rPr lang="en-US" sz="2400" dirty="0">
                 <a:latin typeface="DevLys 010" pitchFamily="2" charset="0"/>
                 <a:ea typeface="Calibri" panose="020F0502020204030204" pitchFamily="34" charset="0"/>
                 <a:cs typeface="Mangal" panose="02040503050203030202" pitchFamily="18" charset="0"/>
@@ -15898,7 +15822,7 @@
               <a:t> </a:t>
             </a:r>
             <a:r>
-              <a:rPr lang="en-US" sz="2000" err="1">
+              <a:rPr lang="en-US" sz="2400" dirty="0" err="1">
                 <a:latin typeface="DevLys 010" pitchFamily="2" charset="0"/>
                 <a:ea typeface="Calibri" panose="020F0502020204030204" pitchFamily="34" charset="0"/>
                 <a:cs typeface="Mangal" panose="02040503050203030202" pitchFamily="18" charset="0"/>
@@ -15906,7 +15830,7 @@
               <a:t>esa</a:t>
             </a:r>
             <a:r>
-              <a:rPr lang="en-US" sz="2000">
+              <a:rPr lang="en-US" sz="2400" dirty="0">
                 <a:latin typeface="DevLys 010" pitchFamily="2" charset="0"/>
                 <a:ea typeface="Calibri" panose="020F0502020204030204" pitchFamily="34" charset="0"/>
                 <a:cs typeface="Mangal" panose="02040503050203030202" pitchFamily="18" charset="0"/>
@@ -15914,7 +15838,7 @@
               <a:t> </a:t>
             </a:r>
             <a:r>
-              <a:rPr lang="en-US" sz="2000" err="1">
+              <a:rPr lang="en-US" sz="2400" dirty="0" err="1">
                 <a:latin typeface="DevLys 010" pitchFamily="2" charset="0"/>
                 <a:ea typeface="Calibri" panose="020F0502020204030204" pitchFamily="34" charset="0"/>
                 <a:cs typeface="Mangal" panose="02040503050203030202" pitchFamily="18" charset="0"/>
@@ -15922,7 +15846,7 @@
               <a:t>IykWV~l</a:t>
             </a:r>
             <a:r>
-              <a:rPr lang="en-US" sz="2000">
+              <a:rPr lang="en-US" sz="2400" dirty="0">
                 <a:latin typeface="DevLys 010" pitchFamily="2" charset="0"/>
                 <a:ea typeface="Calibri" panose="020F0502020204030204" pitchFamily="34" charset="0"/>
                 <a:cs typeface="Mangal" panose="02040503050203030202" pitchFamily="18" charset="0"/>
@@ -15930,7 +15854,7 @@
               <a:t> dh </a:t>
             </a:r>
             <a:r>
-              <a:rPr lang="en-US" sz="2000" err="1">
+              <a:rPr lang="en-US" sz="2400" dirty="0" err="1">
                 <a:latin typeface="DevLys 010" pitchFamily="2" charset="0"/>
                 <a:ea typeface="Calibri" panose="020F0502020204030204" pitchFamily="34" charset="0"/>
                 <a:cs typeface="Mangal" panose="02040503050203030202" pitchFamily="18" charset="0"/>
@@ -15938,7 +15862,7 @@
               <a:t>uhykeh</a:t>
             </a:r>
             <a:r>
-              <a:rPr lang="en-US" sz="2000">
+              <a:rPr lang="en-US" sz="2400" dirty="0">
                 <a:latin typeface="DevLys 010" pitchFamily="2" charset="0"/>
                 <a:ea typeface="Calibri" panose="020F0502020204030204" pitchFamily="34" charset="0"/>
                 <a:cs typeface="Mangal" panose="02040503050203030202" pitchFamily="18" charset="0"/>
@@ -15946,7 +15870,7 @@
               <a:t> </a:t>
             </a:r>
             <a:r>
-              <a:rPr lang="en-US" sz="2000" err="1">
+              <a:rPr lang="en-US" sz="2400" dirty="0" err="1">
                 <a:latin typeface="DevLys 010" pitchFamily="2" charset="0"/>
                 <a:ea typeface="Calibri" panose="020F0502020204030204" pitchFamily="34" charset="0"/>
                 <a:cs typeface="Mangal" panose="02040503050203030202" pitchFamily="18" charset="0"/>
@@ -15954,7 +15878,7 @@
               <a:t>ijUrq</a:t>
             </a:r>
             <a:r>
-              <a:rPr lang="en-US" sz="2000">
+              <a:rPr lang="en-US" sz="2400" dirty="0">
                 <a:latin typeface="DevLys 010" pitchFamily="2" charset="0"/>
                 <a:ea typeface="Calibri" panose="020F0502020204030204" pitchFamily="34" charset="0"/>
                 <a:cs typeface="Mangal" panose="02040503050203030202" pitchFamily="18" charset="0"/>
@@ -15962,7 +15886,7 @@
               <a:t> </a:t>
             </a:r>
             <a:r>
-              <a:rPr lang="en-US" sz="2000" err="1">
+              <a:rPr lang="en-US" sz="2400" dirty="0" err="1">
                 <a:latin typeface="DevLys 010" pitchFamily="2" charset="0"/>
                 <a:ea typeface="Calibri" panose="020F0502020204030204" pitchFamily="34" charset="0"/>
                 <a:cs typeface="Mangal" panose="02040503050203030202" pitchFamily="18" charset="0"/>
@@ -15970,7 +15894,7 @@
               <a:t>fudk</a:t>
             </a:r>
             <a:r>
-              <a:rPr lang="en-US" sz="2000">
+              <a:rPr lang="en-US" sz="2400" dirty="0">
                 <a:latin typeface="DevLys 010" pitchFamily="2" charset="0"/>
                 <a:ea typeface="Calibri" panose="020F0502020204030204" pitchFamily="34" charset="0"/>
                 <a:cs typeface="Mangal" panose="02040503050203030202" pitchFamily="18" charset="0"/>
@@ -15978,7 +15902,7 @@
               <a:t>; }</a:t>
             </a:r>
             <a:r>
-              <a:rPr lang="en-US" sz="2000" err="1">
+              <a:rPr lang="en-US" sz="2400" dirty="0" err="1">
                 <a:latin typeface="DevLys 010" pitchFamily="2" charset="0"/>
                 <a:ea typeface="Calibri" panose="020F0502020204030204" pitchFamily="34" charset="0"/>
                 <a:cs typeface="Mangal" panose="02040503050203030202" pitchFamily="18" charset="0"/>
@@ -15986,7 +15910,7 @@
               <a:t>kjk</a:t>
             </a:r>
             <a:r>
-              <a:rPr lang="en-US" sz="2000">
+              <a:rPr lang="en-US" sz="2400" dirty="0">
                 <a:latin typeface="DevLys 010" pitchFamily="2" charset="0"/>
                 <a:ea typeface="Calibri" panose="020F0502020204030204" pitchFamily="34" charset="0"/>
                 <a:cs typeface="Mangal" panose="02040503050203030202" pitchFamily="18" charset="0"/>
@@ -15994,7 +15918,7 @@
               <a:t> ,</a:t>
             </a:r>
             <a:r>
-              <a:rPr lang="en-US" sz="2000" err="1">
+              <a:rPr lang="en-US" sz="2400" dirty="0" err="1">
                 <a:latin typeface="DevLys 010" pitchFamily="2" charset="0"/>
                 <a:ea typeface="Calibri" panose="020F0502020204030204" pitchFamily="34" charset="0"/>
                 <a:cs typeface="Mangal" panose="02040503050203030202" pitchFamily="18" charset="0"/>
@@ -16002,7 +15926,7 @@
               <a:t>uvkslh</a:t>
             </a:r>
             <a:r>
-              <a:rPr lang="en-US" sz="2000">
+              <a:rPr lang="en-US" sz="2400" dirty="0">
                 <a:latin typeface="DevLys 010" pitchFamily="2" charset="0"/>
                 <a:ea typeface="Calibri" panose="020F0502020204030204" pitchFamily="34" charset="0"/>
                 <a:cs typeface="Mangal" panose="02040503050203030202" pitchFamily="18" charset="0"/>
@@ -16010,7 +15934,7 @@
               <a:t> </a:t>
             </a:r>
             <a:r>
-              <a:rPr lang="en-US" sz="2000" err="1">
+              <a:rPr lang="en-US" sz="2400" dirty="0" err="1">
                 <a:latin typeface="DevLys 010" pitchFamily="2" charset="0"/>
                 <a:ea typeface="Calibri" panose="020F0502020204030204" pitchFamily="34" charset="0"/>
                 <a:cs typeface="Mangal" panose="02040503050203030202" pitchFamily="18" charset="0"/>
@@ -16018,7 +15942,7 @@
               <a:t>nsus</a:t>
             </a:r>
             <a:r>
-              <a:rPr lang="en-US" sz="2000">
+              <a:rPr lang="en-US" sz="2400" dirty="0">
                 <a:latin typeface="DevLys 010" pitchFamily="2" charset="0"/>
                 <a:ea typeface="Calibri" panose="020F0502020204030204" pitchFamily="34" charset="0"/>
                 <a:cs typeface="Mangal" panose="02040503050203030202" pitchFamily="18" charset="0"/>
@@ -16026,7 +15950,7 @@
               <a:t> </a:t>
             </a:r>
             <a:r>
-              <a:rPr lang="en-US" sz="2000" err="1">
+              <a:rPr lang="en-US" sz="2400" dirty="0" err="1">
                 <a:latin typeface="DevLys 010" pitchFamily="2" charset="0"/>
                 <a:ea typeface="Calibri" panose="020F0502020204030204" pitchFamily="34" charset="0"/>
                 <a:cs typeface="Mangal" panose="02040503050203030202" pitchFamily="18" charset="0"/>
@@ -16034,7 +15958,7 @@
               <a:t>esa</a:t>
             </a:r>
             <a:r>
-              <a:rPr lang="en-US" sz="2000">
+              <a:rPr lang="en-US" sz="2400" dirty="0">
                 <a:latin typeface="DevLys 010" pitchFamily="2" charset="0"/>
                 <a:ea typeface="Calibri" panose="020F0502020204030204" pitchFamily="34" charset="0"/>
                 <a:cs typeface="Mangal" panose="02040503050203030202" pitchFamily="18" charset="0"/>
@@ -16042,14 +15966,14 @@
               <a:t> </a:t>
             </a:r>
             <a:r>
-              <a:rPr lang="en-US" sz="2000" err="1">
+              <a:rPr lang="en-US" sz="2400" dirty="0" err="1">
                 <a:latin typeface="DevLys 010" pitchFamily="2" charset="0"/>
                 <a:ea typeface="Calibri" panose="020F0502020204030204" pitchFamily="34" charset="0"/>
                 <a:cs typeface="Mangal" panose="02040503050203030202" pitchFamily="18" charset="0"/>
               </a:rPr>
               <a:t>vkukdkuh@nsjh</a:t>
             </a:r>
-            <a:endParaRPr lang="en-US" sz="2000">
+            <a:endParaRPr lang="en-US" sz="2400" dirty="0">
               <a:latin typeface="DevLys 010" pitchFamily="2" charset="0"/>
               <a:ea typeface="Calibri" panose="020F0502020204030204" pitchFamily="34" charset="0"/>
               <a:cs typeface="Mangal" panose="02040503050203030202" pitchFamily="18" charset="0"/>
@@ -16058,7 +15982,7 @@
           <a:p>
             <a:pPr marL="342900" indent="-342900">
               <a:lnSpc>
-                <a:spcPct val="150000"/>
+                <a:spcPct val="200000"/>
               </a:lnSpc>
               <a:spcAft>
                 <a:spcPts val="800"/>
@@ -16067,7 +15991,7 @@
               <a:buChar char="q"/>
             </a:pPr>
             <a:r>
-              <a:rPr lang="en-US" sz="2000" err="1">
+              <a:rPr lang="en-US" sz="2400" dirty="0" err="1">
                 <a:latin typeface="DevLys 010" pitchFamily="2" charset="0"/>
                 <a:ea typeface="Calibri" panose="020F0502020204030204" pitchFamily="34" charset="0"/>
                 <a:cs typeface="Mangal" panose="02040503050203030202" pitchFamily="18" charset="0"/>
@@ -16075,7 +15999,7 @@
               <a:t>Hkkjr</a:t>
             </a:r>
             <a:r>
-              <a:rPr lang="en-US" sz="2000">
+              <a:rPr lang="en-US" sz="2400" dirty="0">
                 <a:latin typeface="DevLys 010" pitchFamily="2" charset="0"/>
                 <a:ea typeface="Calibri" panose="020F0502020204030204" pitchFamily="34" charset="0"/>
                 <a:cs typeface="Mangal" panose="02040503050203030202" pitchFamily="18" charset="0"/>
@@ -16083,7 +16007,7 @@
               <a:t> </a:t>
             </a:r>
             <a:r>
-              <a:rPr lang="en-US" sz="2000" err="1">
+              <a:rPr lang="en-US" sz="2400" dirty="0" err="1">
                 <a:latin typeface="DevLys 010" pitchFamily="2" charset="0"/>
                 <a:ea typeface="Calibri" panose="020F0502020204030204" pitchFamily="34" charset="0"/>
                 <a:cs typeface="Mangal" panose="02040503050203030202" pitchFamily="18" charset="0"/>
@@ -16091,7 +16015,7 @@
               <a:t>ljdkj</a:t>
             </a:r>
             <a:r>
-              <a:rPr lang="en-US" sz="2000">
+              <a:rPr lang="en-US" sz="2400" dirty="0">
                 <a:latin typeface="DevLys 010" pitchFamily="2" charset="0"/>
                 <a:ea typeface="Calibri" panose="020F0502020204030204" pitchFamily="34" charset="0"/>
                 <a:cs typeface="Mangal" panose="02040503050203030202" pitchFamily="18" charset="0"/>
@@ -16099,7 +16023,7 @@
               <a:t> }</a:t>
             </a:r>
             <a:r>
-              <a:rPr lang="en-US" sz="2000" err="1">
+              <a:rPr lang="en-US" sz="2400" dirty="0" err="1">
                 <a:latin typeface="DevLys 010" pitchFamily="2" charset="0"/>
                 <a:ea typeface="Calibri" panose="020F0502020204030204" pitchFamily="34" charset="0"/>
                 <a:cs typeface="Mangal" panose="02040503050203030202" pitchFamily="18" charset="0"/>
@@ -16107,7 +16031,7 @@
               <a:t>kjk</a:t>
             </a:r>
             <a:r>
-              <a:rPr lang="en-US" sz="2000">
+              <a:rPr lang="en-US" sz="2400" dirty="0">
                 <a:latin typeface="DevLys 010" pitchFamily="2" charset="0"/>
                 <a:ea typeface="Calibri" panose="020F0502020204030204" pitchFamily="34" charset="0"/>
                 <a:cs typeface="Mangal" panose="02040503050203030202" pitchFamily="18" charset="0"/>
@@ -16115,7 +16039,7 @@
               <a:t> </a:t>
             </a:r>
             <a:r>
-              <a:rPr lang="en-US" sz="2000" err="1">
+              <a:rPr lang="en-US" sz="2400" dirty="0" err="1">
                 <a:latin typeface="DevLys 010" pitchFamily="2" charset="0"/>
                 <a:ea typeface="Calibri" panose="020F0502020204030204" pitchFamily="34" charset="0"/>
                 <a:cs typeface="Mangal" panose="02040503050203030202" pitchFamily="18" charset="0"/>
@@ -16123,7 +16047,7 @@
               <a:t>flrEcj</a:t>
             </a:r>
             <a:r>
-              <a:rPr lang="en-US" sz="2000">
+              <a:rPr lang="en-US" sz="2400" dirty="0">
                 <a:latin typeface="DevLys 010" pitchFamily="2" charset="0"/>
                 <a:ea typeface="Calibri" panose="020F0502020204030204" pitchFamily="34" charset="0"/>
                 <a:cs typeface="Mangal" panose="02040503050203030202" pitchFamily="18" charset="0"/>
@@ -16131,7 +16055,7 @@
               <a:t>] 2017 ls [</a:t>
             </a:r>
             <a:r>
-              <a:rPr lang="en-US" sz="2000" err="1">
+              <a:rPr lang="en-US" sz="2400" dirty="0" err="1">
                 <a:latin typeface="DevLys 010" pitchFamily="2" charset="0"/>
                 <a:ea typeface="Calibri" panose="020F0502020204030204" pitchFamily="34" charset="0"/>
                 <a:cs typeface="Mangal" panose="02040503050203030202" pitchFamily="18" charset="0"/>
@@ -16139,7 +16063,7 @@
               <a:t>kfut</a:t>
             </a:r>
             <a:r>
-              <a:rPr lang="en-US" sz="2000">
+              <a:rPr lang="en-US" sz="2400" dirty="0">
                 <a:latin typeface="DevLys 010" pitchFamily="2" charset="0"/>
                 <a:ea typeface="Calibri" panose="020F0502020204030204" pitchFamily="34" charset="0"/>
                 <a:cs typeface="Mangal" panose="02040503050203030202" pitchFamily="18" charset="0"/>
@@ -16147,7 +16071,7 @@
               <a:t> </a:t>
             </a:r>
             <a:r>
-              <a:rPr lang="en-US" sz="2000" err="1">
+              <a:rPr lang="en-US" sz="2400" dirty="0" err="1">
                 <a:latin typeface="DevLys 010" pitchFamily="2" charset="0"/>
                 <a:ea typeface="Calibri" panose="020F0502020204030204" pitchFamily="34" charset="0"/>
                 <a:cs typeface="Mangal" panose="02040503050203030202" pitchFamily="18" charset="0"/>
@@ -16155,7 +16079,7 @@
               <a:t>ykbZeLVksu</a:t>
             </a:r>
             <a:r>
-              <a:rPr lang="en-US" sz="2000">
+              <a:rPr lang="en-US" sz="2400" dirty="0">
                 <a:latin typeface="DevLys 010" pitchFamily="2" charset="0"/>
                 <a:ea typeface="Calibri" panose="020F0502020204030204" pitchFamily="34" charset="0"/>
                 <a:cs typeface="Mangal" panose="02040503050203030202" pitchFamily="18" charset="0"/>
@@ -16163,7 +16087,7 @@
               <a:t> dh </a:t>
             </a:r>
             <a:r>
-              <a:rPr lang="en-US" sz="2000" err="1">
+              <a:rPr lang="en-US" sz="2400" dirty="0" err="1">
                 <a:latin typeface="DevLys 010" pitchFamily="2" charset="0"/>
                 <a:ea typeface="Calibri" panose="020F0502020204030204" pitchFamily="34" charset="0"/>
                 <a:cs typeface="Mangal" panose="02040503050203030202" pitchFamily="18" charset="0"/>
@@ -16171,7 +16095,7 @@
               <a:t>jkW;YVh</a:t>
             </a:r>
             <a:r>
-              <a:rPr lang="en-US" sz="2000">
+              <a:rPr lang="en-US" sz="2400" dirty="0">
                 <a:latin typeface="DevLys 010" pitchFamily="2" charset="0"/>
                 <a:ea typeface="Calibri" panose="020F0502020204030204" pitchFamily="34" charset="0"/>
                 <a:cs typeface="Mangal" panose="02040503050203030202" pitchFamily="18" charset="0"/>
@@ -16179,7 +16103,7 @@
               <a:t> </a:t>
             </a:r>
             <a:r>
-              <a:rPr lang="en-US" sz="2000" err="1">
+              <a:rPr lang="en-US" sz="2400" dirty="0" err="1">
                 <a:latin typeface="DevLys 010" pitchFamily="2" charset="0"/>
                 <a:ea typeface="Calibri" panose="020F0502020204030204" pitchFamily="34" charset="0"/>
                 <a:cs typeface="Mangal" panose="02040503050203030202" pitchFamily="18" charset="0"/>
@@ -16187,7 +16111,7 @@
               <a:t>njksa</a:t>
             </a:r>
             <a:r>
-              <a:rPr lang="en-US" sz="2000">
+              <a:rPr lang="en-US" sz="2400" dirty="0">
                 <a:latin typeface="DevLys 010" pitchFamily="2" charset="0"/>
                 <a:ea typeface="Calibri" panose="020F0502020204030204" pitchFamily="34" charset="0"/>
                 <a:cs typeface="Mangal" panose="02040503050203030202" pitchFamily="18" charset="0"/>
@@ -16195,7 +16119,7 @@
               <a:t> </a:t>
             </a:r>
             <a:r>
-              <a:rPr lang="en-US" sz="2000" err="1">
+              <a:rPr lang="en-US" sz="2400" dirty="0" err="1">
                 <a:latin typeface="DevLys 010" pitchFamily="2" charset="0"/>
                 <a:ea typeface="Calibri" panose="020F0502020204030204" pitchFamily="34" charset="0"/>
                 <a:cs typeface="Mangal" panose="02040503050203030202" pitchFamily="18" charset="0"/>
@@ -16203,7 +16127,7 @@
               <a:t>esa</a:t>
             </a:r>
             <a:r>
-              <a:rPr lang="en-US" sz="2000">
+              <a:rPr lang="en-US" sz="2400" dirty="0">
                 <a:latin typeface="DevLys 010" pitchFamily="2" charset="0"/>
                 <a:ea typeface="Calibri" panose="020F0502020204030204" pitchFamily="34" charset="0"/>
                 <a:cs typeface="Mangal" panose="02040503050203030202" pitchFamily="18" charset="0"/>
@@ -16211,7 +16135,7 @@
               <a:t> </a:t>
             </a:r>
             <a:r>
-              <a:rPr lang="en-US" sz="2000" err="1">
+              <a:rPr lang="en-US" sz="2400" dirty="0" err="1">
                 <a:latin typeface="DevLys 010" pitchFamily="2" charset="0"/>
                 <a:ea typeface="Calibri" panose="020F0502020204030204" pitchFamily="34" charset="0"/>
                 <a:cs typeface="Mangal" panose="02040503050203030202" pitchFamily="18" charset="0"/>
@@ -16219,7 +16143,7 @@
               <a:t>o``f</a:t>
             </a:r>
             <a:r>
-              <a:rPr lang="en-US" sz="2000">
+              <a:rPr lang="en-US" sz="2400" dirty="0">
                 <a:latin typeface="DevLys 010" pitchFamily="2" charset="0"/>
                 <a:ea typeface="Calibri" panose="020F0502020204030204" pitchFamily="34" charset="0"/>
                 <a:cs typeface="Mangal" panose="02040503050203030202" pitchFamily="18" charset="0"/>
@@ -16227,7 +16151,7 @@
               <a:t>) </a:t>
             </a:r>
             <a:r>
-              <a:rPr lang="en-US" sz="2000" err="1">
+              <a:rPr lang="en-US" sz="2400" dirty="0" err="1">
                 <a:latin typeface="DevLys 010" pitchFamily="2" charset="0"/>
                 <a:ea typeface="Calibri" panose="020F0502020204030204" pitchFamily="34" charset="0"/>
                 <a:cs typeface="Mangal" panose="02040503050203030202" pitchFamily="18" charset="0"/>
@@ -16235,7 +16159,7 @@
               <a:t>ugha</a:t>
             </a:r>
             <a:r>
-              <a:rPr lang="en-US" sz="2000">
+              <a:rPr lang="en-US" sz="2400" dirty="0">
                 <a:latin typeface="DevLys 010" pitchFamily="2" charset="0"/>
                 <a:ea typeface="Calibri" panose="020F0502020204030204" pitchFamily="34" charset="0"/>
                 <a:cs typeface="Mangal" panose="02040503050203030202" pitchFamily="18" charset="0"/>
@@ -16243,14 +16167,14 @@
               <a:t> dh </a:t>
             </a:r>
             <a:r>
-              <a:rPr lang="en-US" sz="2000" err="1">
+              <a:rPr lang="en-US" sz="2400" dirty="0" err="1">
                 <a:latin typeface="DevLys 010" pitchFamily="2" charset="0"/>
                 <a:ea typeface="Calibri" panose="020F0502020204030204" pitchFamily="34" charset="0"/>
                 <a:cs typeface="Mangal" panose="02040503050203030202" pitchFamily="18" charset="0"/>
               </a:rPr>
               <a:t>xbZA</a:t>
             </a:r>
-            <a:endParaRPr lang="en-US" sz="2000">
+            <a:endParaRPr lang="en-US" sz="2400" dirty="0">
               <a:latin typeface="DevLys 010" pitchFamily="2" charset="0"/>
               <a:ea typeface="Calibri" panose="020F0502020204030204" pitchFamily="34" charset="0"/>
               <a:cs typeface="Mangal" panose="02040503050203030202" pitchFamily="18" charset="0"/>
@@ -16929,7 +16853,7 @@
         <p:spPr>
           <a:xfrm>
             <a:off x="515041" y="1196667"/>
-            <a:ext cx="11161918" cy="3435492"/>
+            <a:ext cx="11161918" cy="5191229"/>
           </a:xfrm>
           <a:prstGeom prst="rect">
             <a:avLst/>
@@ -16944,7 +16868,7 @@
           <a:p>
             <a:pPr marL="342900" indent="-342900" algn="just">
               <a:lnSpc>
-                <a:spcPct val="107000"/>
+                <a:spcPct val="150000"/>
               </a:lnSpc>
               <a:spcAft>
                 <a:spcPts val="800"/>
@@ -16953,7 +16877,7 @@
               <a:buChar char="q"/>
             </a:pPr>
             <a:r>
-              <a:rPr lang="en-US" sz="2000" err="1">
+              <a:rPr lang="en-US" sz="2400" dirty="0" err="1">
                 <a:latin typeface="DevLys 010" pitchFamily="2" charset="0"/>
                 <a:ea typeface="Calibri" panose="020F0502020204030204" pitchFamily="34" charset="0"/>
                 <a:cs typeface="Mangal" panose="02040503050203030202" pitchFamily="18" charset="0"/>
@@ -16961,7 +16885,7 @@
               <a:t>iz</a:t>
             </a:r>
             <a:r>
-              <a:rPr lang="en-US" sz="2000">
+              <a:rPr lang="en-US" sz="2400" dirty="0">
                 <a:latin typeface="DevLys 010" pitchFamily="2" charset="0"/>
                 <a:ea typeface="Calibri" panose="020F0502020204030204" pitchFamily="34" charset="0"/>
                 <a:cs typeface="Mangal" panose="02040503050203030202" pitchFamily="18" charset="0"/>
@@ -16969,7 +16893,7 @@
               <a:t>/</a:t>
             </a:r>
             <a:r>
-              <a:rPr lang="en-US" sz="2000" err="1">
+              <a:rPr lang="en-US" sz="2400" dirty="0" err="1">
                 <a:latin typeface="DevLys 010" pitchFamily="2" charset="0"/>
                 <a:ea typeface="Calibri" panose="020F0502020204030204" pitchFamily="34" charset="0"/>
                 <a:cs typeface="Mangal" panose="02040503050203030202" pitchFamily="18" charset="0"/>
@@ -16977,7 +16901,7 @@
               <a:t>kku</a:t>
             </a:r>
             <a:r>
-              <a:rPr lang="en-US" sz="2000">
+              <a:rPr lang="en-US" sz="2400" dirty="0">
                 <a:latin typeface="DevLys 010" pitchFamily="2" charset="0"/>
                 <a:ea typeface="Calibri" panose="020F0502020204030204" pitchFamily="34" charset="0"/>
                 <a:cs typeface="Mangal" panose="02040503050203030202" pitchFamily="18" charset="0"/>
@@ -16985,7 +16909,7 @@
               <a:t> [</a:t>
             </a:r>
             <a:r>
-              <a:rPr lang="en-US" sz="2000" err="1">
+              <a:rPr lang="en-US" sz="2400" dirty="0" err="1">
                 <a:latin typeface="DevLys 010" pitchFamily="2" charset="0"/>
                 <a:ea typeface="Calibri" panose="020F0502020204030204" pitchFamily="34" charset="0"/>
                 <a:cs typeface="Mangal" panose="02040503050203030202" pitchFamily="18" charset="0"/>
@@ -16993,7 +16917,7 @@
               <a:t>kfut</a:t>
             </a:r>
             <a:r>
-              <a:rPr lang="en-US" sz="2000">
+              <a:rPr lang="en-US" sz="2400" dirty="0">
                 <a:latin typeface="DevLys 010" pitchFamily="2" charset="0"/>
                 <a:ea typeface="Calibri" panose="020F0502020204030204" pitchFamily="34" charset="0"/>
                 <a:cs typeface="Mangal" panose="02040503050203030202" pitchFamily="18" charset="0"/>
@@ -17004,7 +16928,7 @@
           <a:p>
             <a:pPr marL="1139825" indent="-403225" algn="just">
               <a:lnSpc>
-                <a:spcPct val="107000"/>
+                <a:spcPct val="150000"/>
               </a:lnSpc>
               <a:spcAft>
                 <a:spcPts val="800"/>
@@ -17013,7 +16937,7 @@
               <a:buChar char="v"/>
             </a:pPr>
             <a:r>
-              <a:rPr lang="en-US" sz="2000">
+              <a:rPr lang="en-US" sz="2400" dirty="0">
                 <a:latin typeface="DevLys 010" pitchFamily="2" charset="0"/>
                 <a:ea typeface="Calibri" panose="020F0502020204030204" pitchFamily="34" charset="0"/>
                 <a:cs typeface="Mangal" panose="02040503050203030202" pitchFamily="18" charset="0"/>
@@ -17021,7 +16945,7 @@
               <a:t>------------ </a:t>
             </a:r>
             <a:r>
-              <a:rPr lang="en-US" sz="2000" err="1">
+              <a:rPr lang="en-US" sz="2400" dirty="0" err="1">
                 <a:latin typeface="DevLys 010" pitchFamily="2" charset="0"/>
                 <a:ea typeface="Calibri" panose="020F0502020204030204" pitchFamily="34" charset="0"/>
                 <a:cs typeface="Mangal" panose="02040503050203030202" pitchFamily="18" charset="0"/>
@@ -17029,7 +16953,7 @@
               <a:t>CykWDl</a:t>
             </a:r>
             <a:r>
-              <a:rPr lang="en-US" sz="2000">
+              <a:rPr lang="en-US" sz="2400" dirty="0">
                 <a:latin typeface="DevLys 010" pitchFamily="2" charset="0"/>
                 <a:ea typeface="Calibri" panose="020F0502020204030204" pitchFamily="34" charset="0"/>
                 <a:cs typeface="Mangal" panose="02040503050203030202" pitchFamily="18" charset="0"/>
@@ -17037,7 +16961,7 @@
               <a:t> ¼xksYM------] </a:t>
             </a:r>
             <a:r>
-              <a:rPr lang="en-US" sz="2000" err="1">
+              <a:rPr lang="en-US" sz="2400" dirty="0" err="1">
                 <a:latin typeface="DevLys 010" pitchFamily="2" charset="0"/>
                 <a:ea typeface="Calibri" panose="020F0502020204030204" pitchFamily="34" charset="0"/>
                 <a:cs typeface="Mangal" panose="02040503050203030202" pitchFamily="18" charset="0"/>
@@ -17045,7 +16969,7 @@
               <a:t>dkWij</a:t>
             </a:r>
             <a:r>
-              <a:rPr lang="en-US" sz="2000">
+              <a:rPr lang="en-US" sz="2400" dirty="0">
                 <a:latin typeface="DevLys 010" pitchFamily="2" charset="0"/>
                 <a:ea typeface="Calibri" panose="020F0502020204030204" pitchFamily="34" charset="0"/>
                 <a:cs typeface="Mangal" panose="02040503050203030202" pitchFamily="18" charset="0"/>
@@ -17053,7 +16977,7 @@
               <a:t> -----------------] </a:t>
             </a:r>
             <a:r>
-              <a:rPr lang="en-US" sz="2000" err="1">
+              <a:rPr lang="en-US" sz="2400" dirty="0" err="1">
                 <a:latin typeface="DevLys 010" pitchFamily="2" charset="0"/>
                 <a:ea typeface="Calibri" panose="020F0502020204030204" pitchFamily="34" charset="0"/>
                 <a:cs typeface="Mangal" panose="02040503050203030202" pitchFamily="18" charset="0"/>
@@ -17061,7 +16985,7 @@
               <a:t>ykbZeLVksu</a:t>
             </a:r>
             <a:r>
-              <a:rPr lang="en-US" sz="2000">
+              <a:rPr lang="en-US" sz="2400" dirty="0">
                 <a:latin typeface="DevLys 010" pitchFamily="2" charset="0"/>
                 <a:ea typeface="Calibri" panose="020F0502020204030204" pitchFamily="34" charset="0"/>
                 <a:cs typeface="Mangal" panose="02040503050203030202" pitchFamily="18" charset="0"/>
@@ -17069,7 +16993,7 @@
               <a:t> -----] </a:t>
             </a:r>
             <a:r>
-              <a:rPr lang="en-US" sz="2000" err="1">
+              <a:rPr lang="en-US" sz="2400" dirty="0" err="1">
                 <a:latin typeface="DevLys 010" pitchFamily="2" charset="0"/>
                 <a:ea typeface="Calibri" panose="020F0502020204030204" pitchFamily="34" charset="0"/>
                 <a:cs typeface="Mangal" panose="02040503050203030202" pitchFamily="18" charset="0"/>
@@ -17077,7 +17001,7 @@
               <a:t>vk;ju</a:t>
             </a:r>
             <a:r>
-              <a:rPr lang="en-US" sz="2000">
+              <a:rPr lang="en-US" sz="2400" dirty="0">
                 <a:latin typeface="DevLys 010" pitchFamily="2" charset="0"/>
                 <a:ea typeface="Calibri" panose="020F0502020204030204" pitchFamily="34" charset="0"/>
                 <a:cs typeface="Mangal" panose="02040503050203030202" pitchFamily="18" charset="0"/>
@@ -17085,7 +17009,7 @@
               <a:t> </a:t>
             </a:r>
             <a:r>
-              <a:rPr lang="en-US" sz="2000" err="1">
+              <a:rPr lang="en-US" sz="2400" dirty="0" err="1">
                 <a:latin typeface="DevLys 010" pitchFamily="2" charset="0"/>
                 <a:ea typeface="Calibri" panose="020F0502020204030204" pitchFamily="34" charset="0"/>
                 <a:cs typeface="Mangal" panose="02040503050203030202" pitchFamily="18" charset="0"/>
@@ -17093,7 +17017,7 @@
               <a:t>vksj</a:t>
             </a:r>
             <a:r>
-              <a:rPr lang="en-US" sz="2000">
+              <a:rPr lang="en-US" sz="2400" dirty="0">
                 <a:latin typeface="DevLys 010" pitchFamily="2" charset="0"/>
                 <a:ea typeface="Calibri" panose="020F0502020204030204" pitchFamily="34" charset="0"/>
                 <a:cs typeface="Mangal" panose="02040503050203030202" pitchFamily="18" charset="0"/>
@@ -17104,7 +17028,7 @@
           <a:p>
             <a:pPr marL="342900" indent="-342900" algn="just">
               <a:lnSpc>
-                <a:spcPct val="107000"/>
+                <a:spcPct val="150000"/>
               </a:lnSpc>
               <a:spcAft>
                 <a:spcPts val="800"/>
@@ -17113,7 +17037,7 @@
               <a:buChar char="q"/>
             </a:pPr>
             <a:r>
-              <a:rPr lang="en-US" sz="2000">
+              <a:rPr lang="en-US" sz="2400" dirty="0">
                 <a:latin typeface="DevLys 010" pitchFamily="2" charset="0"/>
                 <a:ea typeface="Calibri" panose="020F0502020204030204" pitchFamily="34" charset="0"/>
                 <a:cs typeface="Mangal" panose="02040503050203030202" pitchFamily="18" charset="0"/>
@@ -17121,7 +17045,7 @@
               <a:t>viz/</a:t>
             </a:r>
             <a:r>
-              <a:rPr lang="en-US" sz="2000" err="1">
+              <a:rPr lang="en-US" sz="2400" dirty="0" err="1">
                 <a:latin typeface="DevLys 010" pitchFamily="2" charset="0"/>
                 <a:ea typeface="Calibri" panose="020F0502020204030204" pitchFamily="34" charset="0"/>
                 <a:cs typeface="Mangal" panose="02040503050203030202" pitchFamily="18" charset="0"/>
@@ -17129,7 +17053,7 @@
               <a:t>kku</a:t>
             </a:r>
             <a:r>
-              <a:rPr lang="en-US" sz="2000">
+              <a:rPr lang="en-US" sz="2400" dirty="0">
                 <a:latin typeface="DevLys 010" pitchFamily="2" charset="0"/>
                 <a:ea typeface="Calibri" panose="020F0502020204030204" pitchFamily="34" charset="0"/>
                 <a:cs typeface="Mangal" panose="02040503050203030202" pitchFamily="18" charset="0"/>
@@ -17137,7 +17061,7 @@
               <a:t> [</a:t>
             </a:r>
             <a:r>
-              <a:rPr lang="en-US" sz="2000" err="1">
+              <a:rPr lang="en-US" sz="2400" dirty="0" err="1">
                 <a:latin typeface="DevLys 010" pitchFamily="2" charset="0"/>
                 <a:ea typeface="Calibri" panose="020F0502020204030204" pitchFamily="34" charset="0"/>
                 <a:cs typeface="Mangal" panose="02040503050203030202" pitchFamily="18" charset="0"/>
@@ -17145,7 +17069,7 @@
               <a:t>kfut</a:t>
             </a:r>
             <a:r>
-              <a:rPr lang="en-US" sz="2000">
+              <a:rPr lang="en-US" sz="2400" dirty="0">
                 <a:latin typeface="DevLys 010" pitchFamily="2" charset="0"/>
                 <a:ea typeface="Calibri" panose="020F0502020204030204" pitchFamily="34" charset="0"/>
                 <a:cs typeface="Mangal" panose="02040503050203030202" pitchFamily="18" charset="0"/>
@@ -17156,7 +17080,7 @@
           <a:p>
             <a:pPr marL="1081088" indent="-403225" algn="just">
               <a:lnSpc>
-                <a:spcPct val="107000"/>
+                <a:spcPct val="150000"/>
               </a:lnSpc>
               <a:spcAft>
                 <a:spcPts val="800"/>
@@ -17165,7 +17089,7 @@
               <a:buChar char="v"/>
             </a:pPr>
             <a:r>
-              <a:rPr lang="en-US" sz="2000">
+              <a:rPr lang="en-US" sz="2400" dirty="0">
                 <a:latin typeface="DevLys 010" pitchFamily="2" charset="0"/>
                 <a:ea typeface="Calibri" panose="020F0502020204030204" pitchFamily="34" charset="0"/>
                 <a:cs typeface="Mangal" panose="02040503050203030202" pitchFamily="18" charset="0"/>
@@ -17173,7 +17097,7 @@
               <a:t>------------ </a:t>
             </a:r>
             <a:r>
-              <a:rPr lang="en-US" sz="2000" err="1">
+              <a:rPr lang="en-US" sz="2400" dirty="0" err="1">
                 <a:latin typeface="DevLys 010" pitchFamily="2" charset="0"/>
                 <a:ea typeface="Calibri" panose="020F0502020204030204" pitchFamily="34" charset="0"/>
                 <a:cs typeface="Mangal" panose="02040503050203030202" pitchFamily="18" charset="0"/>
@@ -17181,7 +17105,7 @@
               <a:t>IykWV</a:t>
             </a:r>
             <a:r>
-              <a:rPr lang="en-US" sz="2000">
+              <a:rPr lang="en-US" sz="2400" dirty="0">
                 <a:latin typeface="DevLys 010" pitchFamily="2" charset="0"/>
                 <a:ea typeface="Calibri" panose="020F0502020204030204" pitchFamily="34" charset="0"/>
                 <a:cs typeface="Mangal" panose="02040503050203030202" pitchFamily="18" charset="0"/>
@@ -17189,7 +17113,7 @@
               <a:t>~~l ¼ekcZy------] </a:t>
             </a:r>
             <a:r>
-              <a:rPr lang="en-US" sz="2000" err="1">
+              <a:rPr lang="en-US" sz="2400" dirty="0" err="1">
                 <a:latin typeface="DevLys 010" pitchFamily="2" charset="0"/>
                 <a:ea typeface="Calibri" panose="020F0502020204030204" pitchFamily="34" charset="0"/>
                 <a:cs typeface="Mangal" panose="02040503050203030202" pitchFamily="18" charset="0"/>
@@ -17197,7 +17121,7 @@
               <a:t>xszukbZV</a:t>
             </a:r>
             <a:r>
-              <a:rPr lang="en-US" sz="2000">
+              <a:rPr lang="en-US" sz="2400" dirty="0">
                 <a:latin typeface="DevLys 010" pitchFamily="2" charset="0"/>
                 <a:ea typeface="Calibri" panose="020F0502020204030204" pitchFamily="34" charset="0"/>
                 <a:cs typeface="Mangal" panose="02040503050203030202" pitchFamily="18" charset="0"/>
@@ -17205,7 +17129,7 @@
               <a:t> -----------------] </a:t>
             </a:r>
             <a:r>
-              <a:rPr lang="en-US" sz="2000" err="1">
+              <a:rPr lang="en-US" sz="2400" dirty="0" err="1">
                 <a:latin typeface="DevLys 010" pitchFamily="2" charset="0"/>
                 <a:ea typeface="Calibri" panose="020F0502020204030204" pitchFamily="34" charset="0"/>
                 <a:cs typeface="Mangal" panose="02040503050203030202" pitchFamily="18" charset="0"/>
@@ -17213,7 +17137,7 @@
               <a:t>ls.MLVksu</a:t>
             </a:r>
             <a:r>
-              <a:rPr lang="en-US" sz="2000">
+              <a:rPr lang="en-US" sz="2400" dirty="0">
                 <a:latin typeface="DevLys 010" pitchFamily="2" charset="0"/>
                 <a:ea typeface="Calibri" panose="020F0502020204030204" pitchFamily="34" charset="0"/>
                 <a:cs typeface="Mangal" panose="02040503050203030202" pitchFamily="18" charset="0"/>
@@ -17221,7 +17145,7 @@
               <a:t> -----] </a:t>
             </a:r>
             <a:r>
-              <a:rPr lang="en-US" sz="2000" err="1">
+              <a:rPr lang="en-US" sz="2400" dirty="0" err="1">
                 <a:latin typeface="DevLys 010" pitchFamily="2" charset="0"/>
                 <a:ea typeface="Calibri" panose="020F0502020204030204" pitchFamily="34" charset="0"/>
                 <a:cs typeface="Mangal" panose="02040503050203030202" pitchFamily="18" charset="0"/>
@@ -17229,7 +17153,7 @@
               <a:t>eslujhLVksu</a:t>
             </a:r>
             <a:r>
-              <a:rPr lang="en-US" sz="2000">
+              <a:rPr lang="en-US" sz="2400" dirty="0">
                 <a:latin typeface="DevLys 010" pitchFamily="2" charset="0"/>
                 <a:ea typeface="Calibri" panose="020F0502020204030204" pitchFamily="34" charset="0"/>
                 <a:cs typeface="Mangal" panose="02040503050203030202" pitchFamily="18" charset="0"/>
@@ -17240,7 +17164,7 @@
           <a:p>
             <a:pPr marL="1081088" indent="-403225" algn="just">
               <a:lnSpc>
-                <a:spcPct val="107000"/>
+                <a:spcPct val="150000"/>
               </a:lnSpc>
               <a:spcAft>
                 <a:spcPts val="800"/>
@@ -17249,7 +17173,7 @@
               <a:buChar char="v"/>
             </a:pPr>
             <a:r>
-              <a:rPr lang="en-US" sz="2000">
+              <a:rPr lang="en-US" sz="2400" dirty="0">
                 <a:latin typeface="DevLys 010" pitchFamily="2" charset="0"/>
                 <a:ea typeface="Calibri" panose="020F0502020204030204" pitchFamily="34" charset="0"/>
                 <a:cs typeface="Mangal" panose="02040503050203030202" pitchFamily="18" charset="0"/>
@@ -17257,7 +17181,7 @@
               <a:t>------------ </a:t>
             </a:r>
             <a:r>
-              <a:rPr lang="en-US" sz="2000" err="1">
+              <a:rPr lang="en-US" sz="2400" dirty="0" err="1">
                 <a:latin typeface="DevLys 010" pitchFamily="2" charset="0"/>
                 <a:ea typeface="Calibri" panose="020F0502020204030204" pitchFamily="34" charset="0"/>
                 <a:cs typeface="Mangal" panose="02040503050203030202" pitchFamily="18" charset="0"/>
@@ -17265,7 +17189,7 @@
               <a:t>IykWV</a:t>
             </a:r>
             <a:r>
-              <a:rPr lang="en-US" sz="2000">
+              <a:rPr lang="en-US" sz="2400" dirty="0">
                 <a:latin typeface="DevLys 010" pitchFamily="2" charset="0"/>
                 <a:ea typeface="Calibri" panose="020F0502020204030204" pitchFamily="34" charset="0"/>
                 <a:cs typeface="Mangal" panose="02040503050203030202" pitchFamily="18" charset="0"/>
@@ -17276,7 +17200,7 @@
           <a:p>
             <a:pPr marL="342900" indent="-342900" algn="just">
               <a:lnSpc>
-                <a:spcPct val="107000"/>
+                <a:spcPct val="150000"/>
               </a:lnSpc>
               <a:spcAft>
                 <a:spcPts val="800"/>
@@ -17285,7 +17209,7 @@
               <a:buChar char="q"/>
             </a:pPr>
             <a:r>
-              <a:rPr lang="en-US" sz="2000" err="1">
+              <a:rPr lang="en-US" sz="2400" dirty="0" err="1">
                 <a:latin typeface="DevLys 010" pitchFamily="2" charset="0"/>
                 <a:ea typeface="Calibri" panose="020F0502020204030204" pitchFamily="34" charset="0"/>
                 <a:cs typeface="Mangal" panose="02040503050203030202" pitchFamily="18" charset="0"/>
@@ -17293,7 +17217,7 @@
               <a:t>izh</a:t>
             </a:r>
             <a:r>
-              <a:rPr lang="en-US" sz="2000">
+              <a:rPr lang="en-US" sz="2400" dirty="0">
                 <a:latin typeface="DevLys 010" pitchFamily="2" charset="0"/>
                 <a:ea typeface="Calibri" panose="020F0502020204030204" pitchFamily="34" charset="0"/>
                 <a:cs typeface="Mangal" panose="02040503050203030202" pitchFamily="18" charset="0"/>
@@ -17301,7 +17225,7 @@
               <a:t>&amp;,</a:t>
             </a:r>
             <a:r>
-              <a:rPr lang="en-US" sz="2000" err="1">
+              <a:rPr lang="en-US" sz="2400" dirty="0" err="1">
                 <a:latin typeface="DevLys 010" pitchFamily="2" charset="0"/>
                 <a:ea typeface="Calibri" panose="020F0502020204030204" pitchFamily="34" charset="0"/>
                 <a:cs typeface="Mangal" panose="02040503050203030202" pitchFamily="18" charset="0"/>
@@ -17309,7 +17233,7 @@
               <a:t>EcsMsM</a:t>
             </a:r>
             <a:r>
-              <a:rPr lang="en-US" sz="2000">
+              <a:rPr lang="en-US" sz="2400" dirty="0">
                 <a:latin typeface="DevLys 010" pitchFamily="2" charset="0"/>
                 <a:ea typeface="Calibri" panose="020F0502020204030204" pitchFamily="34" charset="0"/>
                 <a:cs typeface="Mangal" panose="02040503050203030202" pitchFamily="18" charset="0"/>
@@ -17317,14 +17241,14 @@
               <a:t> </a:t>
             </a:r>
             <a:r>
-              <a:rPr lang="en-US" sz="2000" err="1">
+              <a:rPr lang="en-US" sz="2400" dirty="0" err="1">
                 <a:latin typeface="DevLys 010" pitchFamily="2" charset="0"/>
                 <a:ea typeface="Calibri" panose="020F0502020204030204" pitchFamily="34" charset="0"/>
                 <a:cs typeface="Mangal" panose="02040503050203030202" pitchFamily="18" charset="0"/>
               </a:rPr>
               <a:t>CykWDl@IykWV~l</a:t>
             </a:r>
-            <a:endParaRPr lang="en-US" sz="2000">
+            <a:endParaRPr lang="en-US" sz="2400" dirty="0">
               <a:latin typeface="DevLys 010" pitchFamily="2" charset="0"/>
               <a:ea typeface="Calibri" panose="020F0502020204030204" pitchFamily="34" charset="0"/>
               <a:cs typeface="Mangal" panose="02040503050203030202" pitchFamily="18" charset="0"/>
@@ -17333,7 +17257,7 @@
           <a:p>
             <a:pPr marL="1081088" indent="-403225" algn="just">
               <a:lnSpc>
-                <a:spcPct val="107000"/>
+                <a:spcPct val="150000"/>
               </a:lnSpc>
               <a:spcAft>
                 <a:spcPts val="800"/>
@@ -17342,7 +17266,7 @@
               <a:buChar char="v"/>
             </a:pPr>
             <a:r>
-              <a:rPr lang="en-US" sz="2000" err="1">
+              <a:rPr lang="en-US" sz="2400" dirty="0" err="1">
                 <a:latin typeface="DevLys 010" pitchFamily="2" charset="0"/>
                 <a:ea typeface="Calibri" panose="020F0502020204030204" pitchFamily="34" charset="0"/>
                 <a:cs typeface="Mangal" panose="02040503050203030202" pitchFamily="18" charset="0"/>
@@ -17350,7 +17274,7 @@
               <a:t>iz</a:t>
             </a:r>
             <a:r>
-              <a:rPr lang="en-US" sz="2000">
+              <a:rPr lang="en-US" sz="2400" dirty="0">
                 <a:latin typeface="DevLys 010" pitchFamily="2" charset="0"/>
                 <a:ea typeface="Calibri" panose="020F0502020204030204" pitchFamily="34" charset="0"/>
                 <a:cs typeface="Mangal" panose="02040503050203030202" pitchFamily="18" charset="0"/>
@@ -17358,7 +17282,7 @@
               <a:t>/</a:t>
             </a:r>
             <a:r>
-              <a:rPr lang="en-US" sz="2000" err="1">
+              <a:rPr lang="en-US" sz="2400" dirty="0" err="1">
                 <a:latin typeface="DevLys 010" pitchFamily="2" charset="0"/>
                 <a:ea typeface="Calibri" panose="020F0502020204030204" pitchFamily="34" charset="0"/>
                 <a:cs typeface="Mangal" panose="02040503050203030202" pitchFamily="18" charset="0"/>
@@ -17366,7 +17290,7 @@
               <a:t>kku</a:t>
             </a:r>
             <a:r>
-              <a:rPr lang="en-US" sz="2000">
+              <a:rPr lang="en-US" sz="2400" dirty="0">
                 <a:latin typeface="DevLys 010" pitchFamily="2" charset="0"/>
                 <a:ea typeface="Calibri" panose="020F0502020204030204" pitchFamily="34" charset="0"/>
                 <a:cs typeface="Mangal" panose="02040503050203030202" pitchFamily="18" charset="0"/>
@@ -17374,7 +17298,7 @@
               <a:t> [</a:t>
             </a:r>
             <a:r>
-              <a:rPr lang="en-US" sz="2000" err="1">
+              <a:rPr lang="en-US" sz="2400" dirty="0" err="1">
                 <a:latin typeface="DevLys 010" pitchFamily="2" charset="0"/>
                 <a:ea typeface="Calibri" panose="020F0502020204030204" pitchFamily="34" charset="0"/>
                 <a:cs typeface="Mangal" panose="02040503050203030202" pitchFamily="18" charset="0"/>
@@ -17382,7 +17306,7 @@
               <a:t>kfut</a:t>
             </a:r>
             <a:r>
-              <a:rPr lang="en-US" sz="2000">
+              <a:rPr lang="en-US" sz="2400" dirty="0">
                 <a:latin typeface="DevLys 010" pitchFamily="2" charset="0"/>
                 <a:ea typeface="Calibri" panose="020F0502020204030204" pitchFamily="34" charset="0"/>
                 <a:cs typeface="Mangal" panose="02040503050203030202" pitchFamily="18" charset="0"/>
@@ -17390,14 +17314,14 @@
               <a:t> % ------------ </a:t>
             </a:r>
             <a:r>
-              <a:rPr lang="en-US" sz="2000" err="1">
+              <a:rPr lang="en-US" sz="2400" dirty="0" err="1">
                 <a:latin typeface="DevLys 010" pitchFamily="2" charset="0"/>
                 <a:ea typeface="Calibri" panose="020F0502020204030204" pitchFamily="34" charset="0"/>
                 <a:cs typeface="Mangal" panose="02040503050203030202" pitchFamily="18" charset="0"/>
               </a:rPr>
               <a:t>CykWDl</a:t>
             </a:r>
-            <a:endParaRPr lang="en-US" sz="2000">
+            <a:endParaRPr lang="en-US" sz="2400" dirty="0">
               <a:latin typeface="DevLys 010" pitchFamily="2" charset="0"/>
               <a:ea typeface="Calibri" panose="020F0502020204030204" pitchFamily="34" charset="0"/>
               <a:cs typeface="Mangal" panose="02040503050203030202" pitchFamily="18" charset="0"/>
@@ -17406,7 +17330,7 @@
           <a:p>
             <a:pPr marL="1081088" indent="-403225" algn="just">
               <a:lnSpc>
-                <a:spcPct val="107000"/>
+                <a:spcPct val="150000"/>
               </a:lnSpc>
               <a:spcAft>
                 <a:spcPts val="800"/>
@@ -17415,7 +17339,7 @@
               <a:buChar char="v"/>
             </a:pPr>
             <a:r>
-              <a:rPr lang="en-US" sz="2000">
+              <a:rPr lang="en-US" sz="2400" dirty="0">
                 <a:latin typeface="DevLys 010" pitchFamily="2" charset="0"/>
                 <a:ea typeface="Calibri" panose="020F0502020204030204" pitchFamily="34" charset="0"/>
                 <a:cs typeface="Mangal" panose="02040503050203030202" pitchFamily="18" charset="0"/>
@@ -17423,7 +17347,7 @@
               <a:t>viz/</a:t>
             </a:r>
             <a:r>
-              <a:rPr lang="en-US" sz="2000" err="1">
+              <a:rPr lang="en-US" sz="2400" dirty="0" err="1">
                 <a:latin typeface="DevLys 010" pitchFamily="2" charset="0"/>
                 <a:ea typeface="Calibri" panose="020F0502020204030204" pitchFamily="34" charset="0"/>
                 <a:cs typeface="Mangal" panose="02040503050203030202" pitchFamily="18" charset="0"/>
@@ -17431,7 +17355,7 @@
               <a:t>kku</a:t>
             </a:r>
             <a:r>
-              <a:rPr lang="en-US" sz="2000">
+              <a:rPr lang="en-US" sz="2400" dirty="0">
                 <a:latin typeface="DevLys 010" pitchFamily="2" charset="0"/>
                 <a:ea typeface="Calibri" panose="020F0502020204030204" pitchFamily="34" charset="0"/>
                 <a:cs typeface="Mangal" panose="02040503050203030202" pitchFamily="18" charset="0"/>
@@ -17439,7 +17363,7 @@
               <a:t> [</a:t>
             </a:r>
             <a:r>
-              <a:rPr lang="en-US" sz="2000" err="1">
+              <a:rPr lang="en-US" sz="2400" dirty="0" err="1">
                 <a:latin typeface="DevLys 010" pitchFamily="2" charset="0"/>
                 <a:ea typeface="Calibri" panose="020F0502020204030204" pitchFamily="34" charset="0"/>
                 <a:cs typeface="Mangal" panose="02040503050203030202" pitchFamily="18" charset="0"/>
@@ -17447,7 +17371,7 @@
               <a:t>kfut</a:t>
             </a:r>
             <a:r>
-              <a:rPr lang="en-US" sz="2000">
+              <a:rPr lang="en-US" sz="2400" dirty="0">
                 <a:latin typeface="DevLys 010" pitchFamily="2" charset="0"/>
                 <a:ea typeface="Calibri" panose="020F0502020204030204" pitchFamily="34" charset="0"/>
                 <a:cs typeface="Mangal" panose="02040503050203030202" pitchFamily="18" charset="0"/>
@@ -17455,7 +17379,7 @@
               <a:t> % ------------ </a:t>
             </a:r>
             <a:r>
-              <a:rPr lang="en-US" sz="2000" err="1">
+              <a:rPr lang="en-US" sz="2400" dirty="0" err="1">
                 <a:latin typeface="DevLys 010" pitchFamily="2" charset="0"/>
                 <a:ea typeface="Calibri" panose="020F0502020204030204" pitchFamily="34" charset="0"/>
                 <a:cs typeface="Mangal" panose="02040503050203030202" pitchFamily="18" charset="0"/>
@@ -17463,7 +17387,7 @@
               <a:t>IykWV</a:t>
             </a:r>
             <a:r>
-              <a:rPr lang="en-US" sz="2000">
+              <a:rPr lang="en-US" sz="2400" dirty="0">
                 <a:latin typeface="DevLys 010" pitchFamily="2" charset="0"/>
                 <a:ea typeface="Calibri" panose="020F0502020204030204" pitchFamily="34" charset="0"/>
                 <a:cs typeface="Mangal" panose="02040503050203030202" pitchFamily="18" charset="0"/>
@@ -22043,7 +21967,7 @@
         <p:spPr>
           <a:xfrm>
             <a:off x="549070" y="1244736"/>
-            <a:ext cx="11168906" cy="3743012"/>
+            <a:ext cx="11168906" cy="4842416"/>
           </a:xfrm>
           <a:prstGeom prst="rect">
             <a:avLst/>
@@ -22070,102 +21994,102 @@
               <a:buChar char="q"/>
             </a:pPr>
             <a:r>
-              <a:rPr lang="en-IN" sz="2000">
+              <a:rPr lang="en-IN" sz="2400" dirty="0">
                 <a:latin typeface="DevLys 010" pitchFamily="2" charset="0"/>
               </a:rPr>
               <a:t>[</a:t>
             </a:r>
             <a:r>
-              <a:rPr lang="en-IN" sz="2000" err="1">
+              <a:rPr lang="en-IN" sz="2400" dirty="0" err="1">
                 <a:latin typeface="DevLys 010" pitchFamily="2" charset="0"/>
               </a:rPr>
               <a:t>kuu</a:t>
             </a:r>
             <a:r>
-              <a:rPr lang="en-IN" sz="2000">
+              <a:rPr lang="en-IN" sz="2400" dirty="0">
                 <a:latin typeface="DevLys 010" pitchFamily="2" charset="0"/>
               </a:rPr>
               <a:t> </a:t>
             </a:r>
             <a:r>
-              <a:rPr lang="en-IN" sz="2000" err="1">
+              <a:rPr lang="en-IN" sz="2400" dirty="0" err="1">
                 <a:latin typeface="DevLys 010" pitchFamily="2" charset="0"/>
               </a:rPr>
               <a:t>iV~Vk</a:t>
             </a:r>
             <a:r>
-              <a:rPr lang="en-IN" sz="2000">
+              <a:rPr lang="en-IN" sz="2400" dirty="0">
                 <a:latin typeface="DevLys 010" pitchFamily="2" charset="0"/>
               </a:rPr>
               <a:t> {</a:t>
             </a:r>
             <a:r>
-              <a:rPr lang="en-IN" sz="2000" err="1">
+              <a:rPr lang="en-IN" sz="2400" dirty="0" err="1">
                 <a:latin typeface="DevLys 010" pitchFamily="2" charset="0"/>
               </a:rPr>
               <a:t>ks</a:t>
             </a:r>
             <a:r>
-              <a:rPr lang="en-IN" sz="2000">
+              <a:rPr lang="en-IN" sz="2400" dirty="0">
                 <a:latin typeface="DevLys 010" pitchFamily="2" charset="0"/>
               </a:rPr>
               <a:t>=</a:t>
             </a:r>
             <a:r>
-              <a:rPr lang="en-IN" sz="2000" err="1">
+              <a:rPr lang="en-IN" sz="2400" dirty="0" err="1">
                 <a:latin typeface="DevLys 010" pitchFamily="2" charset="0"/>
               </a:rPr>
               <a:t>ksa</a:t>
             </a:r>
             <a:r>
-              <a:rPr lang="en-IN" sz="2000">
+              <a:rPr lang="en-IN" sz="2400" dirty="0">
                 <a:latin typeface="DevLys 010" pitchFamily="2" charset="0"/>
               </a:rPr>
               <a:t> dh </a:t>
             </a:r>
             <a:r>
-              <a:rPr lang="en-IN" sz="2000" err="1">
+              <a:rPr lang="en-IN" sz="2400" dirty="0" err="1">
                 <a:latin typeface="DevLys 010" pitchFamily="2" charset="0"/>
               </a:rPr>
               <a:t>ft;ks</a:t>
             </a:r>
             <a:r>
-              <a:rPr lang="en-IN" sz="2000">
+              <a:rPr lang="en-IN" sz="2400" dirty="0">
                 <a:latin typeface="DevLys 010" pitchFamily="2" charset="0"/>
               </a:rPr>
               <a:t> </a:t>
             </a:r>
             <a:r>
-              <a:rPr lang="en-IN" sz="2000" err="1">
+              <a:rPr lang="en-IN" sz="2400" dirty="0" err="1">
                 <a:latin typeface="DevLys 010" pitchFamily="2" charset="0"/>
               </a:rPr>
               <a:t>QSfUlx</a:t>
             </a:r>
             <a:r>
-              <a:rPr lang="en-IN" sz="2000">
+              <a:rPr lang="en-IN" sz="2400" dirty="0">
                 <a:latin typeface="DevLys 010" pitchFamily="2" charset="0"/>
               </a:rPr>
               <a:t> </a:t>
             </a:r>
             <a:r>
-              <a:rPr lang="en-IN" sz="2000" err="1">
+              <a:rPr lang="en-IN" sz="2400" dirty="0" err="1">
                 <a:latin typeface="DevLys 010" pitchFamily="2" charset="0"/>
               </a:rPr>
               <a:t>izfØ;k</a:t>
             </a:r>
             <a:r>
-              <a:rPr lang="en-IN" sz="2000">
+              <a:rPr lang="en-IN" sz="2400" dirty="0">
                 <a:latin typeface="DevLys 010" pitchFamily="2" charset="0"/>
               </a:rPr>
               <a:t>/</a:t>
             </a:r>
             <a:r>
-              <a:rPr lang="en-IN" sz="2000" err="1">
+              <a:rPr lang="en-IN" sz="2400" dirty="0" err="1">
                 <a:latin typeface="DevLys 010" pitchFamily="2" charset="0"/>
               </a:rPr>
               <a:t>khu</a:t>
             </a:r>
-            <a:endParaRPr lang="en-IN" sz="2000">
+            <a:endParaRPr lang="en-IN" sz="2400" dirty="0">
               <a:latin typeface="DevLys 010" pitchFamily="2" charset="0"/>
             </a:endParaRPr>
           </a:p>
@@ -22184,222 +22108,222 @@
               <a:buChar char="q"/>
             </a:pPr>
             <a:r>
-              <a:rPr lang="en-IN" sz="2000" err="1">
+              <a:rPr lang="en-IN" sz="2400" dirty="0" err="1">
                 <a:latin typeface="DevLys 010" pitchFamily="2" charset="0"/>
               </a:rPr>
               <a:t>joUuk</a:t>
             </a:r>
             <a:r>
-              <a:rPr lang="en-IN" sz="2000">
+              <a:rPr lang="en-IN" sz="2400" dirty="0">
                 <a:latin typeface="DevLys 010" pitchFamily="2" charset="0"/>
               </a:rPr>
               <a:t> </a:t>
             </a:r>
             <a:r>
-              <a:rPr lang="en-IN" sz="2000" err="1">
+              <a:rPr lang="en-IN" sz="2400" dirty="0" err="1">
                 <a:latin typeface="DevLys 010" pitchFamily="2" charset="0"/>
               </a:rPr>
               <a:t>dUQesZ'ku</a:t>
             </a:r>
             <a:r>
-              <a:rPr lang="en-IN" sz="2000" baseline="0">
+              <a:rPr lang="en-IN" sz="2400" baseline="0" dirty="0">
                 <a:latin typeface="DevLys 010" pitchFamily="2" charset="0"/>
               </a:rPr>
               <a:t> </a:t>
             </a:r>
             <a:r>
-              <a:rPr lang="en-IN" sz="2000" baseline="0" err="1">
+              <a:rPr lang="en-IN" sz="2400" baseline="0" dirty="0" err="1">
                 <a:latin typeface="DevLys 010" pitchFamily="2" charset="0"/>
               </a:rPr>
               <a:t>esa</a:t>
             </a:r>
             <a:r>
-              <a:rPr lang="en-IN" sz="2000" baseline="0">
+              <a:rPr lang="en-IN" sz="2400" baseline="0" dirty="0">
                 <a:latin typeface="DevLys 010" pitchFamily="2" charset="0"/>
               </a:rPr>
               <a:t> </a:t>
             </a:r>
             <a:r>
-              <a:rPr lang="en-IN" sz="2000">
+              <a:rPr lang="en-IN" sz="2400" dirty="0">
                 <a:latin typeface="DevLys 010" pitchFamily="2" charset="0"/>
               </a:rPr>
               <a:t>[</a:t>
             </a:r>
             <a:r>
-              <a:rPr lang="en-IN" sz="2000" err="1">
+              <a:rPr lang="en-IN" sz="2400" dirty="0" err="1">
                 <a:latin typeface="DevLys 010" pitchFamily="2" charset="0"/>
               </a:rPr>
               <a:t>kfut</a:t>
             </a:r>
             <a:r>
-              <a:rPr lang="en-IN" sz="2000">
+              <a:rPr lang="en-IN" sz="2400" dirty="0">
                 <a:latin typeface="DevLys 010" pitchFamily="2" charset="0"/>
               </a:rPr>
               <a:t> ds </a:t>
             </a:r>
             <a:r>
-              <a:rPr lang="en-IN" sz="2000" err="1">
+              <a:rPr lang="en-IN" sz="2400" dirty="0" err="1">
                 <a:latin typeface="DevLys 010" pitchFamily="2" charset="0"/>
               </a:rPr>
               <a:t>otu</a:t>
             </a:r>
             <a:r>
-              <a:rPr lang="en-IN" sz="2000">
+              <a:rPr lang="en-IN" sz="2400" dirty="0">
                 <a:latin typeface="DevLys 010" pitchFamily="2" charset="0"/>
               </a:rPr>
               <a:t> </a:t>
             </a:r>
             <a:r>
-              <a:rPr lang="en-IN" sz="2000" err="1">
+              <a:rPr lang="en-IN" sz="2400" dirty="0" err="1">
                 <a:latin typeface="DevLys 010" pitchFamily="2" charset="0"/>
               </a:rPr>
               <a:t>esa</a:t>
             </a:r>
             <a:r>
-              <a:rPr lang="en-IN" sz="2000">
+              <a:rPr lang="en-IN" sz="2400" dirty="0">
                 <a:latin typeface="DevLys 010" pitchFamily="2" charset="0"/>
               </a:rPr>
               <a:t> </a:t>
             </a:r>
             <a:r>
-              <a:rPr lang="en-IN" sz="2000" err="1">
+              <a:rPr lang="en-IN" sz="2400" dirty="0" err="1">
                 <a:latin typeface="DevLys 010" pitchFamily="2" charset="0"/>
               </a:rPr>
               <a:t>laHkkfor</a:t>
             </a:r>
             <a:r>
-              <a:rPr lang="en-IN" sz="2000">
+              <a:rPr lang="en-IN" sz="2400" dirty="0">
                 <a:latin typeface="DevLys 010" pitchFamily="2" charset="0"/>
               </a:rPr>
               <a:t> </a:t>
             </a:r>
             <a:r>
-              <a:rPr lang="en-IN" sz="2000" err="1">
+              <a:rPr lang="en-IN" sz="2400" dirty="0" err="1">
                 <a:latin typeface="DevLys 010" pitchFamily="2" charset="0"/>
               </a:rPr>
               <a:t>ifjorZu</a:t>
             </a:r>
             <a:r>
-              <a:rPr lang="en-IN" sz="2000" baseline="0">
+              <a:rPr lang="en-IN" sz="2400" baseline="0" dirty="0">
                 <a:latin typeface="DevLys 010" pitchFamily="2" charset="0"/>
               </a:rPr>
               <a:t> </a:t>
             </a:r>
             <a:r>
-              <a:rPr lang="en-IN" sz="2000" baseline="0" err="1">
+              <a:rPr lang="en-IN" sz="2400" baseline="0" dirty="0" err="1">
                 <a:latin typeface="DevLys 010" pitchFamily="2" charset="0"/>
               </a:rPr>
               <a:t>dks</a:t>
             </a:r>
             <a:r>
-              <a:rPr lang="en-IN" sz="2000" baseline="0">
+              <a:rPr lang="en-IN" sz="2400" baseline="0" dirty="0">
                 <a:latin typeface="DevLys 010" pitchFamily="2" charset="0"/>
               </a:rPr>
               <a:t> </a:t>
             </a:r>
             <a:r>
-              <a:rPr lang="en-IN" sz="2000" baseline="0" err="1">
+              <a:rPr lang="en-IN" sz="2400" baseline="0" dirty="0" err="1">
                 <a:latin typeface="DevLys 010" pitchFamily="2" charset="0"/>
               </a:rPr>
               <a:t>jksdus</a:t>
             </a:r>
             <a:r>
-              <a:rPr lang="en-IN" sz="2000" baseline="0">
+              <a:rPr lang="en-IN" sz="2400" baseline="0" dirty="0">
                 <a:latin typeface="DevLys 010" pitchFamily="2" charset="0"/>
               </a:rPr>
               <a:t> </a:t>
             </a:r>
             <a:r>
-              <a:rPr lang="en-IN" sz="2000" baseline="0" err="1">
+              <a:rPr lang="en-IN" sz="2400" baseline="0" dirty="0" err="1">
                 <a:latin typeface="DevLys 010" pitchFamily="2" charset="0"/>
               </a:rPr>
               <a:t>gsrq</a:t>
             </a:r>
             <a:r>
-              <a:rPr lang="en-IN" sz="2000" baseline="0">
+              <a:rPr lang="en-IN" sz="2400" baseline="0" dirty="0">
                 <a:latin typeface="DevLys 010" pitchFamily="2" charset="0"/>
               </a:rPr>
               <a:t> ,d </a:t>
             </a:r>
             <a:r>
-              <a:rPr lang="en-IN" sz="2000" baseline="0" err="1">
+              <a:rPr lang="en-IN" sz="2400" baseline="0" dirty="0" err="1">
                 <a:latin typeface="DevLys 010" pitchFamily="2" charset="0"/>
               </a:rPr>
               <a:t>gh</a:t>
             </a:r>
             <a:r>
-              <a:rPr lang="en-IN" sz="2000" baseline="0">
+              <a:rPr lang="en-IN" sz="2400" baseline="0" dirty="0">
                 <a:latin typeface="DevLys 010" pitchFamily="2" charset="0"/>
               </a:rPr>
               <a:t> </a:t>
             </a:r>
             <a:r>
-              <a:rPr lang="en-IN" sz="2000" baseline="0" err="1">
+              <a:rPr lang="en-IN" sz="2400" baseline="0" dirty="0" err="1">
                 <a:latin typeface="DevLys 010" pitchFamily="2" charset="0"/>
               </a:rPr>
               <a:t>lkW¶Vos;j</a:t>
             </a:r>
             <a:r>
-              <a:rPr lang="en-IN" sz="2000" baseline="0">
+              <a:rPr lang="en-IN" sz="2400" baseline="0" dirty="0">
                 <a:latin typeface="DevLys 010" pitchFamily="2" charset="0"/>
               </a:rPr>
               <a:t> </a:t>
             </a:r>
             <a:r>
-              <a:rPr lang="en-IN" sz="2000" baseline="0" err="1">
+              <a:rPr lang="en-IN" sz="2400" baseline="0" dirty="0" err="1">
                 <a:latin typeface="DevLys 010" pitchFamily="2" charset="0"/>
               </a:rPr>
               <a:t>rFkk</a:t>
             </a:r>
             <a:r>
-              <a:rPr lang="en-IN" sz="2000" baseline="0">
+              <a:rPr lang="en-IN" sz="2400" baseline="0" dirty="0">
                 <a:latin typeface="DevLys 010" pitchFamily="2" charset="0"/>
               </a:rPr>
               <a:t> </a:t>
             </a:r>
             <a:r>
-              <a:rPr lang="en-IN" sz="2000" baseline="0" err="1">
+              <a:rPr lang="en-IN" sz="2400" baseline="0" dirty="0" err="1">
                 <a:latin typeface="DevLys 010" pitchFamily="2" charset="0"/>
               </a:rPr>
               <a:t>vk</a:t>
             </a:r>
             <a:r>
-              <a:rPr lang="en-IN" sz="2000" baseline="0">
+              <a:rPr lang="en-IN" sz="2400" baseline="0" dirty="0">
                 <a:latin typeface="DevLys 010" pitchFamily="2" charset="0"/>
               </a:rPr>
               <a:t>/</a:t>
             </a:r>
             <a:r>
-              <a:rPr lang="en-IN" sz="2000" baseline="0" err="1">
+              <a:rPr lang="en-IN" sz="2400" baseline="0" dirty="0" err="1">
                 <a:latin typeface="DevLys 010" pitchFamily="2" charset="0"/>
               </a:rPr>
               <a:t>kqfud</a:t>
             </a:r>
             <a:r>
-              <a:rPr lang="en-IN" sz="2000" baseline="0">
+              <a:rPr lang="en-IN" sz="2400" baseline="0" dirty="0">
                 <a:latin typeface="DevLys 010" pitchFamily="2" charset="0"/>
               </a:rPr>
               <a:t> </a:t>
             </a:r>
             <a:r>
-              <a:rPr lang="en-IN" sz="2000" baseline="0" err="1">
+              <a:rPr lang="en-IN" sz="2400" baseline="0" dirty="0" err="1">
                 <a:latin typeface="DevLys 010" pitchFamily="2" charset="0"/>
               </a:rPr>
               <a:t>rduhd</a:t>
             </a:r>
             <a:r>
-              <a:rPr lang="en-IN" sz="2000" baseline="0">
+              <a:rPr lang="en-IN" sz="2400" baseline="0" dirty="0">
                 <a:latin typeface="DevLys 010" pitchFamily="2" charset="0"/>
               </a:rPr>
               <a:t> dk </a:t>
             </a:r>
             <a:r>
-              <a:rPr lang="en-IN" sz="2000" baseline="0" err="1">
+              <a:rPr lang="en-IN" sz="2400" baseline="0" dirty="0" err="1">
                 <a:latin typeface="DevLys 010" pitchFamily="2" charset="0"/>
               </a:rPr>
               <a:t>mi;ksx</a:t>
             </a:r>
-            <a:endParaRPr lang="en-IN" sz="2000">
+            <a:endParaRPr lang="en-IN" sz="2400" dirty="0">
               <a:latin typeface="DevLys 010" pitchFamily="2" charset="0"/>
             </a:endParaRPr>
           </a:p>
@@ -22418,157 +22342,157 @@
               <a:buChar char="q"/>
             </a:pPr>
             <a:r>
-              <a:rPr lang="en-IN" sz="2000">
+              <a:rPr lang="en-IN" sz="2400" dirty="0">
                 <a:latin typeface="DevLys 010" pitchFamily="2" charset="0"/>
               </a:rPr>
               <a:t>[</a:t>
             </a:r>
             <a:r>
-              <a:rPr lang="en-IN" sz="2000" err="1">
+              <a:rPr lang="en-IN" sz="2400" dirty="0" err="1">
                 <a:latin typeface="DevLys 010" pitchFamily="2" charset="0"/>
               </a:rPr>
               <a:t>kfut</a:t>
             </a:r>
             <a:r>
-              <a:rPr lang="en-IN" sz="2000">
+              <a:rPr lang="en-IN" sz="2400" dirty="0">
                 <a:latin typeface="DevLys 010" pitchFamily="2" charset="0"/>
               </a:rPr>
               <a:t> ds </a:t>
             </a:r>
             <a:r>
-              <a:rPr lang="en-IN" sz="2000" err="1">
+              <a:rPr lang="en-IN" sz="2400" dirty="0" err="1">
                 <a:latin typeface="DevLys 010" pitchFamily="2" charset="0"/>
               </a:rPr>
               <a:t>ifjogu</a:t>
             </a:r>
             <a:r>
-              <a:rPr lang="en-IN" sz="2000">
+              <a:rPr lang="en-IN" sz="2400" dirty="0">
                 <a:latin typeface="DevLys 010" pitchFamily="2" charset="0"/>
               </a:rPr>
               <a:t> dh </a:t>
             </a:r>
             <a:r>
-              <a:rPr lang="en-IN" sz="2000" err="1">
+              <a:rPr lang="en-IN" sz="2400" dirty="0" err="1">
                 <a:latin typeface="DevLys 010" pitchFamily="2" charset="0"/>
               </a:rPr>
               <a:t>ekWfuVfjax</a:t>
             </a:r>
             <a:r>
-              <a:rPr lang="en-IN" sz="2000" baseline="0">
+              <a:rPr lang="en-IN" sz="2400" baseline="0" dirty="0">
                 <a:latin typeface="DevLys 010" pitchFamily="2" charset="0"/>
               </a:rPr>
               <a:t> </a:t>
             </a:r>
             <a:r>
-              <a:rPr lang="en-IN" sz="2000" baseline="0" err="1">
+              <a:rPr lang="en-IN" sz="2400" baseline="0" dirty="0" err="1">
                 <a:latin typeface="DevLys 010" pitchFamily="2" charset="0"/>
               </a:rPr>
               <a:t>gsrq</a:t>
             </a:r>
             <a:r>
-              <a:rPr lang="en-IN" sz="2000" baseline="0">
+              <a:rPr lang="en-IN" sz="2400" baseline="0" dirty="0">
                 <a:latin typeface="DevLys 010" pitchFamily="2" charset="0"/>
               </a:rPr>
               <a:t> </a:t>
             </a:r>
             <a:r>
-              <a:rPr lang="en-IN" sz="2000" baseline="0" err="1">
+              <a:rPr lang="en-IN" sz="2400" baseline="0" dirty="0" err="1">
                 <a:latin typeface="DevLys 010" pitchFamily="2" charset="0"/>
               </a:rPr>
               <a:t>okguksa</a:t>
             </a:r>
             <a:r>
-              <a:rPr lang="en-IN" sz="2000" baseline="0">
+              <a:rPr lang="en-IN" sz="2400" baseline="0" dirty="0">
                 <a:latin typeface="DevLys 010" pitchFamily="2" charset="0"/>
               </a:rPr>
               <a:t> </a:t>
             </a:r>
             <a:r>
-              <a:rPr lang="en-IN" sz="2000" baseline="0" err="1">
+              <a:rPr lang="en-IN" sz="2400" baseline="0" dirty="0" err="1">
                 <a:latin typeface="DevLys 010" pitchFamily="2" charset="0"/>
               </a:rPr>
               <a:t>esa</a:t>
             </a:r>
             <a:r>
-              <a:rPr lang="en-IN" sz="2000" baseline="0">
+              <a:rPr lang="en-IN" sz="2400" baseline="0" dirty="0">
                 <a:latin typeface="DevLys 010" pitchFamily="2" charset="0"/>
               </a:rPr>
               <a:t> </a:t>
             </a:r>
             <a:r>
-              <a:rPr lang="en-IN" sz="2000" baseline="0" err="1">
+              <a:rPr lang="en-IN" sz="2400" baseline="0" dirty="0" err="1">
                 <a:latin typeface="DevLys 010" pitchFamily="2" charset="0"/>
               </a:rPr>
               <a:t>vkj</a:t>
             </a:r>
             <a:r>
-              <a:rPr lang="en-IN" sz="2000" baseline="0">
+              <a:rPr lang="en-IN" sz="2400" baseline="0" dirty="0">
                 <a:latin typeface="DevLys 010" pitchFamily="2" charset="0"/>
               </a:rPr>
               <a:t>-,Q-</a:t>
             </a:r>
             <a:r>
-              <a:rPr lang="en-IN" sz="2000" baseline="0" err="1">
+              <a:rPr lang="en-IN" sz="2400" baseline="0" dirty="0" err="1">
                 <a:latin typeface="DevLys 010" pitchFamily="2" charset="0"/>
               </a:rPr>
               <a:t>vkbZ</a:t>
             </a:r>
             <a:r>
-              <a:rPr lang="en-IN" sz="2000" baseline="0">
+              <a:rPr lang="en-IN" sz="2400" baseline="0" dirty="0">
                 <a:latin typeface="DevLys 010" pitchFamily="2" charset="0"/>
               </a:rPr>
               <a:t>-</a:t>
             </a:r>
             <a:r>
-              <a:rPr lang="en-IN" sz="2000" baseline="0" err="1">
+              <a:rPr lang="en-IN" sz="2400" baseline="0" dirty="0" err="1">
                 <a:latin typeface="DevLys 010" pitchFamily="2" charset="0"/>
               </a:rPr>
               <a:t>Mh</a:t>
             </a:r>
             <a:r>
-              <a:rPr lang="en-IN" sz="2000" baseline="0">
+              <a:rPr lang="en-IN" sz="2400" baseline="0" dirty="0">
                 <a:latin typeface="DevLys 010" pitchFamily="2" charset="0"/>
               </a:rPr>
               <a:t>- o </a:t>
             </a:r>
             <a:r>
-              <a:rPr lang="en-IN" sz="2000" baseline="0" err="1">
+              <a:rPr lang="en-IN" sz="2400" baseline="0" dirty="0" err="1">
                 <a:latin typeface="DevLys 010" pitchFamily="2" charset="0"/>
               </a:rPr>
               <a:t>th</a:t>
             </a:r>
             <a:r>
-              <a:rPr lang="en-IN" sz="2000" baseline="0">
+              <a:rPr lang="en-IN" sz="2400" baseline="0" dirty="0">
                 <a:latin typeface="DevLys 010" pitchFamily="2" charset="0"/>
               </a:rPr>
               <a:t>-</a:t>
             </a:r>
             <a:r>
-              <a:rPr lang="en-IN" sz="2000" baseline="0" err="1">
+              <a:rPr lang="en-IN" sz="2400" baseline="0" dirty="0" err="1">
                 <a:latin typeface="DevLys 010" pitchFamily="2" charset="0"/>
               </a:rPr>
               <a:t>ih</a:t>
             </a:r>
             <a:r>
-              <a:rPr lang="en-IN" sz="2000" baseline="0">
+              <a:rPr lang="en-IN" sz="2400" baseline="0" dirty="0">
                 <a:latin typeface="DevLys 010" pitchFamily="2" charset="0"/>
               </a:rPr>
               <a:t>-,l- dk </a:t>
             </a:r>
             <a:r>
-              <a:rPr lang="en-IN" sz="2000" baseline="0" err="1">
+              <a:rPr lang="en-IN" sz="2400" baseline="0" dirty="0" err="1">
                 <a:latin typeface="DevLys 010" pitchFamily="2" charset="0"/>
               </a:rPr>
               <a:t>mi;ksx</a:t>
             </a:r>
             <a:r>
-              <a:rPr lang="en-IN" sz="2000" baseline="0">
+              <a:rPr lang="en-IN" sz="2400" baseline="0" dirty="0">
                 <a:latin typeface="DevLys 010" pitchFamily="2" charset="0"/>
               </a:rPr>
               <a:t> </a:t>
             </a:r>
             <a:r>
-              <a:rPr lang="en-IN" sz="2000">
+              <a:rPr lang="en-IN" sz="2400" dirty="0">
                 <a:latin typeface="DevLys 010" pitchFamily="2" charset="0"/>
               </a:rPr>
               <a:t> </a:t>
@@ -22589,240 +22513,240 @@
               <a:buChar char="q"/>
             </a:pPr>
             <a:r>
-              <a:rPr lang="en-IN" sz="2000" err="1">
+              <a:rPr lang="en-IN" sz="2400" dirty="0" err="1">
                 <a:latin typeface="DevLys 010" pitchFamily="2" charset="0"/>
               </a:rPr>
               <a:t>jkW;YVh</a:t>
             </a:r>
             <a:r>
-              <a:rPr lang="en-IN" sz="2000">
+              <a:rPr lang="en-IN" sz="2400" dirty="0">
                 <a:latin typeface="DevLys 010" pitchFamily="2" charset="0"/>
               </a:rPr>
               <a:t> </a:t>
             </a:r>
             <a:r>
-              <a:rPr lang="en-IN" sz="2000" err="1">
+              <a:rPr lang="en-IN" sz="2400" dirty="0" err="1">
                 <a:latin typeface="DevLys 010" pitchFamily="2" charset="0"/>
               </a:rPr>
               <a:t>olwyh</a:t>
             </a:r>
             <a:r>
-              <a:rPr lang="en-IN" sz="2000">
+              <a:rPr lang="en-IN" sz="2400" dirty="0">
                 <a:latin typeface="DevLys 010" pitchFamily="2" charset="0"/>
               </a:rPr>
               <a:t> </a:t>
             </a:r>
             <a:r>
-              <a:rPr lang="en-IN" sz="2000" err="1">
+              <a:rPr lang="en-IN" sz="2400" dirty="0" err="1">
                 <a:latin typeface="DevLys 010" pitchFamily="2" charset="0"/>
               </a:rPr>
               <a:t>Bsdsnkjksa</a:t>
             </a:r>
             <a:r>
-              <a:rPr lang="en-IN" sz="2000" baseline="0">
+              <a:rPr lang="en-IN" sz="2400" baseline="0" dirty="0">
                 <a:latin typeface="DevLys 010" pitchFamily="2" charset="0"/>
               </a:rPr>
               <a:t> </a:t>
             </a:r>
             <a:r>
-              <a:rPr lang="en-IN" sz="2000" baseline="0" err="1">
+              <a:rPr lang="en-IN" sz="2400" baseline="0" dirty="0" err="1">
                 <a:latin typeface="DevLys 010" pitchFamily="2" charset="0"/>
               </a:rPr>
               <a:t>dks</a:t>
             </a:r>
             <a:r>
-              <a:rPr lang="en-IN" sz="2000" baseline="0">
+              <a:rPr lang="en-IN" sz="2400" baseline="0" dirty="0">
                 <a:latin typeface="DevLys 010" pitchFamily="2" charset="0"/>
               </a:rPr>
               <a:t> </a:t>
             </a:r>
             <a:r>
-              <a:rPr lang="en-IN" sz="2000" baseline="0" err="1">
+              <a:rPr lang="en-IN" sz="2400" baseline="0" dirty="0" err="1">
                 <a:latin typeface="DevLys 010" pitchFamily="2" charset="0"/>
               </a:rPr>
               <a:t>vkj</a:t>
             </a:r>
             <a:r>
-              <a:rPr lang="en-IN" sz="2000" baseline="0">
+              <a:rPr lang="en-IN" sz="2400" baseline="0" dirty="0">
                 <a:latin typeface="DevLys 010" pitchFamily="2" charset="0"/>
               </a:rPr>
               <a:t>-,Q-</a:t>
             </a:r>
             <a:r>
-              <a:rPr lang="en-IN" sz="2000" baseline="0" err="1">
+              <a:rPr lang="en-IN" sz="2400" baseline="0" dirty="0" err="1">
                 <a:latin typeface="DevLys 010" pitchFamily="2" charset="0"/>
               </a:rPr>
               <a:t>vkbZ</a:t>
             </a:r>
             <a:r>
-              <a:rPr lang="en-IN" sz="2000" baseline="0">
+              <a:rPr lang="en-IN" sz="2400" baseline="0" dirty="0">
                 <a:latin typeface="DevLys 010" pitchFamily="2" charset="0"/>
               </a:rPr>
               <a:t>-</a:t>
             </a:r>
             <a:r>
-              <a:rPr lang="en-IN" sz="2000" baseline="0" err="1">
+              <a:rPr lang="en-IN" sz="2400" baseline="0" dirty="0" err="1">
                 <a:latin typeface="DevLys 010" pitchFamily="2" charset="0"/>
               </a:rPr>
               <a:t>Mh</a:t>
             </a:r>
             <a:r>
-              <a:rPr lang="en-IN" sz="2000" baseline="0">
+              <a:rPr lang="en-IN" sz="2400" baseline="0" dirty="0">
                 <a:latin typeface="DevLys 010" pitchFamily="2" charset="0"/>
               </a:rPr>
               <a:t>- ;</a:t>
             </a:r>
             <a:r>
-              <a:rPr lang="en-IN" sz="2000" baseline="0" err="1">
+              <a:rPr lang="en-IN" sz="2400" baseline="0" dirty="0" err="1">
                 <a:latin typeface="DevLys 010" pitchFamily="2" charset="0"/>
               </a:rPr>
               <a:t>qDr</a:t>
             </a:r>
             <a:r>
-              <a:rPr lang="en-IN" sz="2000" baseline="0">
+              <a:rPr lang="en-IN" sz="2400" baseline="0" dirty="0">
                 <a:latin typeface="DevLys 010" pitchFamily="2" charset="0"/>
               </a:rPr>
               <a:t> </a:t>
             </a:r>
             <a:r>
-              <a:rPr lang="en-IN" sz="2000" baseline="0" err="1">
+              <a:rPr lang="en-IN" sz="2400" baseline="0" dirty="0" err="1">
                 <a:latin typeface="DevLys 010" pitchFamily="2" charset="0"/>
               </a:rPr>
               <a:t>pSdiksLV</a:t>
             </a:r>
             <a:r>
-              <a:rPr lang="en-IN" sz="2000" baseline="0">
+              <a:rPr lang="en-IN" sz="2400" baseline="0" dirty="0">
                 <a:latin typeface="DevLys 010" pitchFamily="2" charset="0"/>
               </a:rPr>
               <a:t> </a:t>
             </a:r>
             <a:r>
-              <a:rPr lang="en-IN" sz="2000" baseline="0" err="1">
+              <a:rPr lang="en-IN" sz="2400" baseline="0" dirty="0" err="1">
                 <a:latin typeface="DevLys 010" pitchFamily="2" charset="0"/>
               </a:rPr>
               <a:t>LFkkfir</a:t>
             </a:r>
             <a:r>
-              <a:rPr lang="en-IN" sz="2000" baseline="0">
+              <a:rPr lang="en-IN" sz="2400" baseline="0" dirty="0">
                 <a:latin typeface="DevLys 010" pitchFamily="2" charset="0"/>
               </a:rPr>
               <a:t> </a:t>
             </a:r>
             <a:r>
-              <a:rPr lang="en-IN" sz="2000" baseline="0" err="1">
+              <a:rPr lang="en-IN" sz="2400" baseline="0" dirty="0" err="1">
                 <a:latin typeface="DevLys 010" pitchFamily="2" charset="0"/>
               </a:rPr>
               <a:t>djus</a:t>
             </a:r>
             <a:r>
-              <a:rPr lang="en-IN" sz="2000" baseline="0">
+              <a:rPr lang="en-IN" sz="2400" baseline="0" dirty="0">
                 <a:latin typeface="DevLys 010" pitchFamily="2" charset="0"/>
               </a:rPr>
               <a:t> </a:t>
             </a:r>
             <a:r>
-              <a:rPr lang="en-IN" sz="2000" baseline="0" err="1">
+              <a:rPr lang="en-IN" sz="2400" baseline="0" dirty="0" err="1">
                 <a:latin typeface="DevLys 010" pitchFamily="2" charset="0"/>
               </a:rPr>
               <a:t>rFkk</a:t>
             </a:r>
             <a:r>
-              <a:rPr lang="en-IN" sz="2000" baseline="0">
+              <a:rPr lang="en-IN" sz="2400" baseline="0" dirty="0">
                 <a:latin typeface="DevLys 010" pitchFamily="2" charset="0"/>
               </a:rPr>
               <a:t> </a:t>
             </a:r>
             <a:r>
-              <a:rPr lang="en-IN" sz="2000" baseline="0" err="1">
+              <a:rPr lang="en-IN" sz="2400" baseline="0" dirty="0" err="1">
                 <a:latin typeface="DevLys 010" pitchFamily="2" charset="0"/>
               </a:rPr>
               <a:t>vkWuykbZu</a:t>
             </a:r>
             <a:r>
-              <a:rPr lang="en-IN" sz="2000" baseline="0">
+              <a:rPr lang="en-IN" sz="2400" baseline="0" dirty="0">
                 <a:latin typeface="DevLys 010" pitchFamily="2" charset="0"/>
               </a:rPr>
               <a:t> </a:t>
             </a:r>
             <a:r>
-              <a:rPr lang="en-IN" sz="2000" baseline="0" err="1">
+              <a:rPr lang="en-IN" sz="2400" baseline="0" dirty="0" err="1">
                 <a:latin typeface="DevLys 010" pitchFamily="2" charset="0"/>
               </a:rPr>
               <a:t>jkf'k</a:t>
             </a:r>
             <a:r>
-              <a:rPr lang="en-IN" sz="2000" baseline="0">
+              <a:rPr lang="en-IN" sz="2400" baseline="0" dirty="0">
                 <a:latin typeface="DevLys 010" pitchFamily="2" charset="0"/>
               </a:rPr>
               <a:t> </a:t>
             </a:r>
             <a:r>
-              <a:rPr lang="en-IN" sz="2000" baseline="0" err="1">
+              <a:rPr lang="en-IN" sz="2400" baseline="0" dirty="0" err="1">
                 <a:latin typeface="DevLys 010" pitchFamily="2" charset="0"/>
               </a:rPr>
               <a:t>tek</a:t>
             </a:r>
             <a:r>
-              <a:rPr lang="en-IN" sz="2000" baseline="0">
+              <a:rPr lang="en-IN" sz="2400" baseline="0" dirty="0">
                 <a:latin typeface="DevLys 010" pitchFamily="2" charset="0"/>
               </a:rPr>
               <a:t> </a:t>
             </a:r>
             <a:r>
-              <a:rPr lang="en-IN" sz="2000" baseline="0" err="1">
+              <a:rPr lang="en-IN" sz="2400" baseline="0" dirty="0" err="1">
                 <a:latin typeface="DevLys 010" pitchFamily="2" charset="0"/>
               </a:rPr>
               <a:t>dj</a:t>
             </a:r>
             <a:r>
-              <a:rPr lang="en-IN" sz="2000" baseline="0">
+              <a:rPr lang="en-IN" sz="2400" baseline="0" dirty="0">
                 <a:latin typeface="DevLys 010" pitchFamily="2" charset="0"/>
               </a:rPr>
               <a:t> </a:t>
             </a:r>
             <a:r>
-              <a:rPr lang="en-IN" sz="2000" baseline="0" err="1">
+              <a:rPr lang="en-IN" sz="2400" baseline="0" dirty="0" err="1">
                 <a:latin typeface="DevLys 010" pitchFamily="2" charset="0"/>
               </a:rPr>
               <a:t>jlhn</a:t>
             </a:r>
             <a:r>
-              <a:rPr lang="en-IN" sz="2000" baseline="0">
+              <a:rPr lang="en-IN" sz="2400" baseline="0" dirty="0">
                 <a:latin typeface="DevLys 010" pitchFamily="2" charset="0"/>
               </a:rPr>
               <a:t> </a:t>
             </a:r>
             <a:r>
-              <a:rPr lang="en-IN" sz="2000" baseline="0" err="1">
+              <a:rPr lang="en-IN" sz="2400" baseline="0" dirty="0" err="1">
                 <a:latin typeface="DevLys 010" pitchFamily="2" charset="0"/>
               </a:rPr>
               <a:t>tkjh</a:t>
             </a:r>
             <a:r>
-              <a:rPr lang="en-IN" sz="2000" baseline="0">
+              <a:rPr lang="en-IN" sz="2400" baseline="0" dirty="0">
                 <a:latin typeface="DevLys 010" pitchFamily="2" charset="0"/>
               </a:rPr>
               <a:t> </a:t>
             </a:r>
             <a:r>
-              <a:rPr lang="en-IN" sz="2000" baseline="0" err="1">
+              <a:rPr lang="en-IN" sz="2400" baseline="0" dirty="0" err="1">
                 <a:latin typeface="DevLys 010" pitchFamily="2" charset="0"/>
               </a:rPr>
               <a:t>djuk</a:t>
             </a:r>
             <a:r>
-              <a:rPr lang="en-IN" sz="2000" baseline="0">
+              <a:rPr lang="en-IN" sz="2400" baseline="0" dirty="0">
                 <a:latin typeface="DevLys 010" pitchFamily="2" charset="0"/>
               </a:rPr>
               <a:t> </a:t>
             </a:r>
             <a:r>
-              <a:rPr lang="en-IN" sz="2000" baseline="0" err="1">
+              <a:rPr lang="en-IN" sz="2400" baseline="0" dirty="0" err="1">
                 <a:latin typeface="DevLys 010" pitchFamily="2" charset="0"/>
               </a:rPr>
               <a:t>izLrkforA</a:t>
             </a:r>
-            <a:endParaRPr lang="en-IN" sz="2000">
+            <a:endParaRPr lang="en-IN" sz="2400" dirty="0">
               <a:latin typeface="DevLys 010" pitchFamily="2" charset="0"/>
             </a:endParaRPr>
           </a:p>
@@ -22845,60 +22769,60 @@
               <a:defRPr/>
             </a:pPr>
             <a:r>
-              <a:rPr lang="en-IN" sz="2000" err="1">
+              <a:rPr lang="en-IN" sz="2400" dirty="0" err="1">
                 <a:latin typeface="DevLys 010" pitchFamily="2" charset="0"/>
               </a:rPr>
               <a:t>voS</a:t>
             </a:r>
             <a:r>
-              <a:rPr lang="en-IN" sz="2000">
+              <a:rPr lang="en-IN" sz="2400" dirty="0">
                 <a:latin typeface="DevLys 010" pitchFamily="2" charset="0"/>
               </a:rPr>
               <a:t>/k [</a:t>
             </a:r>
             <a:r>
-              <a:rPr lang="en-IN" sz="2000" err="1">
+              <a:rPr lang="en-IN" sz="2400" dirty="0" err="1">
                 <a:latin typeface="DevLys 010" pitchFamily="2" charset="0"/>
               </a:rPr>
               <a:t>kuu</a:t>
             </a:r>
             <a:r>
-              <a:rPr lang="en-IN" sz="2000">
+              <a:rPr lang="en-IN" sz="2400" dirty="0">
                 <a:latin typeface="DevLys 010" pitchFamily="2" charset="0"/>
               </a:rPr>
               <a:t> </a:t>
             </a:r>
             <a:r>
-              <a:rPr lang="en-IN" sz="2000" err="1">
+              <a:rPr lang="en-IN" sz="2400" dirty="0" err="1">
                 <a:latin typeface="DevLys 010" pitchFamily="2" charset="0"/>
               </a:rPr>
               <a:t>LFkyksa</a:t>
             </a:r>
             <a:r>
-              <a:rPr lang="en-IN" sz="2000">
+              <a:rPr lang="en-IN" sz="2400" dirty="0">
                 <a:latin typeface="DevLys 010" pitchFamily="2" charset="0"/>
               </a:rPr>
               <a:t> dh </a:t>
             </a:r>
             <a:r>
-              <a:rPr lang="en-IN" sz="2000" err="1">
+              <a:rPr lang="en-IN" sz="2400" dirty="0" err="1">
                 <a:latin typeface="DevLys 010" pitchFamily="2" charset="0"/>
               </a:rPr>
               <a:t>ft;ks</a:t>
             </a:r>
             <a:r>
-              <a:rPr lang="en-IN" sz="2000" baseline="0">
+              <a:rPr lang="en-IN" sz="2400" baseline="0" dirty="0">
                 <a:latin typeface="DevLys 010" pitchFamily="2" charset="0"/>
               </a:rPr>
               <a:t> </a:t>
             </a:r>
             <a:r>
-              <a:rPr lang="en-IN" sz="2000" baseline="0" err="1">
+              <a:rPr lang="en-IN" sz="2400" baseline="0" dirty="0" err="1">
                 <a:latin typeface="DevLys 010" pitchFamily="2" charset="0"/>
               </a:rPr>
               <a:t>QsfUlax</a:t>
             </a:r>
-            <a:endParaRPr lang="en-IN" sz="2000">
+            <a:endParaRPr lang="en-IN" sz="2400" dirty="0">
               <a:latin typeface="DevLys 010" pitchFamily="2" charset="0"/>
             </a:endParaRPr>
           </a:p>
@@ -25323,7 +25247,7 @@
         </p:nvSpPr>
         <p:spPr>
           <a:xfrm>
-            <a:off x="496027" y="1213783"/>
+            <a:off x="340424" y="1454026"/>
             <a:ext cx="11229247" cy="5004594"/>
           </a:xfrm>
         </p:spPr>
@@ -25335,7 +25259,7 @@
           <a:p>
             <a:pPr marL="465138" indent="-465138" algn="just">
               <a:lnSpc>
-                <a:spcPct val="150000"/>
+                <a:spcPct val="100000"/>
               </a:lnSpc>
               <a:spcBef>
                 <a:spcPts val="1200"/>
@@ -25347,85 +25271,85 @@
               <a:buChar char="q"/>
             </a:pPr>
             <a:r>
-              <a:rPr lang="en-US" sz="2000">
+              <a:rPr lang="en-US" sz="2000" dirty="0">
                 <a:latin typeface="DevLys 010" pitchFamily="2" charset="0"/>
               </a:rPr>
               <a:t>82 </a:t>
             </a:r>
             <a:r>
-              <a:rPr lang="en-US" sz="2000" err="1">
+              <a:rPr lang="en-US" sz="2000" dirty="0" err="1">
                 <a:latin typeface="DevLys 010" pitchFamily="2" charset="0"/>
               </a:rPr>
               <a:t>fofHkUu</a:t>
             </a:r>
             <a:r>
-              <a:rPr lang="en-US" sz="2000">
+              <a:rPr lang="en-US" sz="2000" dirty="0">
                 <a:latin typeface="DevLys 010" pitchFamily="2" charset="0"/>
               </a:rPr>
               <a:t> </a:t>
             </a:r>
             <a:r>
-              <a:rPr lang="en-US" sz="2000" err="1">
+              <a:rPr lang="en-US" sz="2000" dirty="0" err="1">
                 <a:latin typeface="DevLys 010" pitchFamily="2" charset="0"/>
               </a:rPr>
               <a:t>izdkj</a:t>
             </a:r>
             <a:r>
-              <a:rPr lang="en-US" sz="2000">
+              <a:rPr lang="en-US" sz="2000" dirty="0">
                 <a:latin typeface="DevLys 010" pitchFamily="2" charset="0"/>
               </a:rPr>
               <a:t> ds [</a:t>
             </a:r>
             <a:r>
-              <a:rPr lang="en-US" sz="2000" err="1">
+              <a:rPr lang="en-US" sz="2000" dirty="0" err="1">
                 <a:latin typeface="DevLys 010" pitchFamily="2" charset="0"/>
               </a:rPr>
               <a:t>kfut</a:t>
             </a:r>
             <a:r>
-              <a:rPr lang="en-US" sz="2000">
+              <a:rPr lang="en-US" sz="2000" dirty="0">
                 <a:latin typeface="DevLys 010" pitchFamily="2" charset="0"/>
               </a:rPr>
               <a:t> </a:t>
             </a:r>
             <a:r>
-              <a:rPr lang="en-US" sz="2000" err="1">
+              <a:rPr lang="en-US" sz="2000" dirty="0" err="1">
                 <a:latin typeface="DevLys 010" pitchFamily="2" charset="0"/>
               </a:rPr>
               <a:t>miyCèk</a:t>
             </a:r>
             <a:r>
-              <a:rPr lang="en-US" sz="2000">
-                <a:latin typeface="DevLys 010" pitchFamily="2" charset="0"/>
-              </a:rPr>
-              <a:t>] 58 [</a:t>
-            </a:r>
-            <a:r>
-              <a:rPr lang="en-US" sz="2000" err="1">
+              <a:rPr lang="en-US" sz="2000" dirty="0">
+                <a:latin typeface="DevLys 010" pitchFamily="2" charset="0"/>
+              </a:rPr>
+              <a:t>] 57 [</a:t>
+            </a:r>
+            <a:r>
+              <a:rPr lang="en-US" sz="2000" dirty="0" err="1">
                 <a:latin typeface="DevLys 010" pitchFamily="2" charset="0"/>
               </a:rPr>
               <a:t>kfutksa</a:t>
             </a:r>
             <a:r>
-              <a:rPr lang="en-US" sz="2000">
+              <a:rPr lang="en-US" sz="2000" dirty="0">
                 <a:latin typeface="DevLys 010" pitchFamily="2" charset="0"/>
               </a:rPr>
               <a:t> dk </a:t>
             </a:r>
             <a:r>
-              <a:rPr lang="en-US" sz="2000" err="1">
+              <a:rPr lang="en-US" sz="2000" dirty="0" err="1">
                 <a:latin typeface="DevLys 010" pitchFamily="2" charset="0"/>
               </a:rPr>
               <a:t>mRiknu</a:t>
             </a:r>
-            <a:endParaRPr lang="en-US" sz="2000">
+            <a:endParaRPr lang="en-US" sz="2000" dirty="0">
               <a:latin typeface="DevLys 010" pitchFamily="2" charset="0"/>
             </a:endParaRPr>
           </a:p>
           <a:p>
             <a:pPr marL="465138" indent="-465138" algn="just">
               <a:lnSpc>
-                <a:spcPct val="150000"/>
+                <a:spcPct val="100000"/>
               </a:lnSpc>
               <a:spcBef>
                 <a:spcPts val="1200"/>
@@ -25437,184 +25361,184 @@
               <a:buChar char="q"/>
             </a:pPr>
             <a:r>
-              <a:rPr lang="en-US" sz="2000" err="1">
+              <a:rPr lang="en-US" sz="2000" dirty="0" err="1">
                 <a:latin typeface="DevLys 010" pitchFamily="2" charset="0"/>
               </a:rPr>
               <a:t>iz</a:t>
             </a:r>
             <a:r>
-              <a:rPr lang="en-US" sz="2000">
+              <a:rPr lang="en-US" sz="2000" dirty="0">
                 <a:latin typeface="DevLys 010" pitchFamily="2" charset="0"/>
               </a:rPr>
               <a:t>/</a:t>
             </a:r>
             <a:r>
-              <a:rPr lang="en-US" sz="2000" err="1">
+              <a:rPr lang="en-US" sz="2000" dirty="0" err="1">
                 <a:latin typeface="DevLys 010" pitchFamily="2" charset="0"/>
               </a:rPr>
               <a:t>kku</a:t>
             </a:r>
             <a:r>
-              <a:rPr lang="en-US" sz="2000">
+              <a:rPr lang="en-US" sz="2000" dirty="0">
                 <a:latin typeface="DevLys 010" pitchFamily="2" charset="0"/>
               </a:rPr>
               <a:t> [</a:t>
             </a:r>
             <a:r>
-              <a:rPr lang="en-US" sz="2000" err="1">
+              <a:rPr lang="en-US" sz="2000" dirty="0" err="1">
                 <a:latin typeface="DevLys 010" pitchFamily="2" charset="0"/>
               </a:rPr>
               <a:t>kfut</a:t>
             </a:r>
             <a:r>
-              <a:rPr lang="en-US" sz="2000">
+              <a:rPr lang="en-US" sz="2000" dirty="0">
                 <a:latin typeface="DevLys 010" pitchFamily="2" charset="0"/>
               </a:rPr>
               <a:t> ds </a:t>
             </a:r>
             <a:r>
-              <a:rPr lang="en-US" sz="2000" strike="sngStrike">
+              <a:rPr lang="en-US" sz="2000" dirty="0">
                 <a:solidFill>
                   <a:srgbClr val="C00000"/>
                 </a:solidFill>
                 <a:latin typeface="DevLys 010" pitchFamily="2" charset="0"/>
               </a:rPr>
-              <a:t>3500</a:t>
-            </a:r>
-            <a:r>
-              <a:rPr lang="en-US" sz="2000">
+              <a:t>3395</a:t>
+            </a:r>
+            <a:r>
+              <a:rPr lang="en-US" sz="2000" dirty="0">
                 <a:latin typeface="DevLys 010" pitchFamily="2" charset="0"/>
               </a:rPr>
               <a:t>] viz/</a:t>
             </a:r>
             <a:r>
-              <a:rPr lang="en-US" sz="2000" err="1">
+              <a:rPr lang="en-US" sz="2000" dirty="0" err="1">
                 <a:latin typeface="DevLys 010" pitchFamily="2" charset="0"/>
               </a:rPr>
               <a:t>kku</a:t>
             </a:r>
             <a:r>
-              <a:rPr lang="en-US" sz="2000">
+              <a:rPr lang="en-US" sz="2000" dirty="0">
                 <a:latin typeface="DevLys 010" pitchFamily="2" charset="0"/>
               </a:rPr>
               <a:t> [</a:t>
             </a:r>
             <a:r>
-              <a:rPr lang="en-US" sz="2000" err="1">
+              <a:rPr lang="en-US" sz="2000" dirty="0" err="1">
                 <a:latin typeface="DevLys 010" pitchFamily="2" charset="0"/>
               </a:rPr>
               <a:t>kfut</a:t>
             </a:r>
             <a:r>
-              <a:rPr lang="en-US" sz="2000">
+              <a:rPr lang="en-US" sz="2000" dirty="0">
                 <a:latin typeface="DevLys 010" pitchFamily="2" charset="0"/>
               </a:rPr>
               <a:t> ds </a:t>
             </a:r>
             <a:r>
-              <a:rPr lang="en-US" sz="2000" strike="sngStrike">
+              <a:rPr lang="en-US" sz="2000" dirty="0">
                 <a:solidFill>
                   <a:srgbClr val="C00000"/>
                 </a:solidFill>
                 <a:latin typeface="DevLys 010" pitchFamily="2" charset="0"/>
               </a:rPr>
-              <a:t>13500</a:t>
-            </a:r>
-            <a:r>
-              <a:rPr lang="en-US" sz="2000">
+              <a:t>13428</a:t>
+            </a:r>
+            <a:r>
+              <a:rPr lang="en-US" sz="2000" dirty="0">
                 <a:latin typeface="DevLys 010" pitchFamily="2" charset="0"/>
               </a:rPr>
               <a:t> [</a:t>
             </a:r>
             <a:r>
-              <a:rPr lang="en-US" sz="2000" err="1">
+              <a:rPr lang="en-US" sz="2000" dirty="0" err="1">
                 <a:latin typeface="DevLys 010" pitchFamily="2" charset="0"/>
               </a:rPr>
               <a:t>kuu</a:t>
             </a:r>
             <a:r>
-              <a:rPr lang="en-US" sz="2000">
+              <a:rPr lang="en-US" sz="2000" dirty="0">
                 <a:latin typeface="DevLys 010" pitchFamily="2" charset="0"/>
               </a:rPr>
               <a:t> </a:t>
             </a:r>
             <a:r>
-              <a:rPr lang="en-US" sz="2000" err="1">
+              <a:rPr lang="en-US" sz="2000" dirty="0" err="1">
                 <a:latin typeface="DevLys 010" pitchFamily="2" charset="0"/>
               </a:rPr>
               <a:t>iV~Vs</a:t>
             </a:r>
             <a:r>
-              <a:rPr lang="en-US" sz="2000">
+              <a:rPr lang="en-US" sz="2000" dirty="0">
                 <a:latin typeface="DevLys 010" pitchFamily="2" charset="0"/>
               </a:rPr>
               <a:t> ,</a:t>
             </a:r>
             <a:r>
-              <a:rPr lang="en-US" sz="2000" err="1">
+              <a:rPr lang="en-US" sz="2000" dirty="0" err="1">
                 <a:latin typeface="DevLys 010" pitchFamily="2" charset="0"/>
               </a:rPr>
               <a:t>oa</a:t>
             </a:r>
             <a:r>
-              <a:rPr lang="en-US" sz="2000">
+              <a:rPr lang="en-US" sz="2000" dirty="0">
                 <a:latin typeface="DevLys 010" pitchFamily="2" charset="0"/>
               </a:rPr>
               <a:t> </a:t>
             </a:r>
             <a:r>
-              <a:rPr lang="en-US" sz="2000" err="1">
+              <a:rPr lang="en-US" sz="2000" dirty="0" err="1">
                 <a:latin typeface="DevLys 010" pitchFamily="2" charset="0"/>
               </a:rPr>
               <a:t>Dokjh</a:t>
             </a:r>
             <a:r>
-              <a:rPr lang="en-US" sz="2000">
+              <a:rPr lang="en-US" sz="2000" dirty="0">
                 <a:latin typeface="DevLys 010" pitchFamily="2" charset="0"/>
               </a:rPr>
               <a:t> </a:t>
             </a:r>
             <a:r>
-              <a:rPr lang="en-US" sz="2000" err="1">
+              <a:rPr lang="en-US" sz="2000" dirty="0" err="1">
                 <a:latin typeface="DevLys 010" pitchFamily="2" charset="0"/>
               </a:rPr>
               <a:t>ykbZlsal</a:t>
             </a:r>
             <a:r>
-              <a:rPr lang="en-US" sz="2000">
+              <a:rPr lang="en-US" sz="2000" dirty="0">
                 <a:latin typeface="DevLys 010" pitchFamily="2" charset="0"/>
               </a:rPr>
               <a:t> </a:t>
             </a:r>
             <a:r>
-              <a:rPr lang="en-US" sz="2000" strike="sngStrike">
+              <a:rPr lang="en-US" sz="2000" dirty="0">
                 <a:solidFill>
                   <a:srgbClr val="C00000"/>
                 </a:solidFill>
                 <a:latin typeface="DevLys 010" pitchFamily="2" charset="0"/>
               </a:rPr>
-              <a:t>17165</a:t>
-            </a:r>
-            <a:r>
-              <a:rPr lang="en-US" sz="2000">
+              <a:t>16508</a:t>
+            </a:r>
+            <a:r>
+              <a:rPr lang="en-US" sz="2000" dirty="0">
                 <a:latin typeface="DevLys 010" pitchFamily="2" charset="0"/>
               </a:rPr>
               <a:t> </a:t>
             </a:r>
             <a:r>
-              <a:rPr lang="en-US" sz="2000" err="1">
+              <a:rPr lang="en-US" sz="2000" dirty="0" err="1">
                 <a:latin typeface="DevLys 010" pitchFamily="2" charset="0"/>
               </a:rPr>
               <a:t>izHkkoh</a:t>
             </a:r>
-            <a:endParaRPr lang="en-US" sz="2000">
+            <a:endParaRPr lang="en-US" sz="2000" dirty="0">
               <a:latin typeface="DevLys 010" pitchFamily="2" charset="0"/>
             </a:endParaRPr>
           </a:p>
           <a:p>
             <a:pPr marL="465138" indent="-465138" algn="just">
               <a:lnSpc>
-                <a:spcPct val="150000"/>
+                <a:spcPct val="100000"/>
               </a:lnSpc>
               <a:spcBef>
                 <a:spcPts val="1200"/>
@@ -25626,103 +25550,103 @@
               <a:buChar char="q"/>
             </a:pPr>
             <a:r>
-              <a:rPr lang="en-US" sz="2000">
+              <a:rPr lang="en-US" sz="2000" dirty="0">
                 <a:latin typeface="DevLys 010" pitchFamily="2" charset="0"/>
               </a:rPr>
               <a:t>[</a:t>
             </a:r>
             <a:r>
-              <a:rPr lang="en-US" sz="2000" err="1">
+              <a:rPr lang="en-US" sz="2000" dirty="0" err="1">
                 <a:latin typeface="DevLys 010" pitchFamily="2" charset="0"/>
               </a:rPr>
               <a:t>kfut</a:t>
             </a:r>
             <a:r>
-              <a:rPr lang="en-US" sz="2000">
+              <a:rPr lang="en-US" sz="2000" dirty="0">
                 <a:latin typeface="DevLys 010" pitchFamily="2" charset="0"/>
               </a:rPr>
               <a:t> </a:t>
             </a:r>
             <a:r>
-              <a:rPr lang="en-US" sz="2000" err="1">
+              <a:rPr lang="en-US" sz="2000" dirty="0" err="1">
                 <a:latin typeface="DevLys 010" pitchFamily="2" charset="0"/>
               </a:rPr>
               <a:t>iksVk'k</a:t>
             </a:r>
             <a:r>
-              <a:rPr lang="en-US" sz="2000">
+              <a:rPr lang="en-US" sz="2000" dirty="0">
                 <a:latin typeface="DevLys 010" pitchFamily="2" charset="0"/>
               </a:rPr>
               <a:t> ds </a:t>
             </a:r>
             <a:r>
-              <a:rPr lang="en-US" sz="2000" err="1">
+              <a:rPr lang="en-US" sz="2000" dirty="0" err="1">
                 <a:latin typeface="DevLys 010" pitchFamily="2" charset="0"/>
               </a:rPr>
               <a:t>lokZf</a:t>
             </a:r>
             <a:r>
-              <a:rPr lang="en-US" sz="2000">
+              <a:rPr lang="en-US" sz="2000" dirty="0">
                 <a:latin typeface="DevLys 010" pitchFamily="2" charset="0"/>
               </a:rPr>
               <a:t>/</a:t>
             </a:r>
             <a:r>
-              <a:rPr lang="en-US" sz="2000" err="1">
+              <a:rPr lang="en-US" sz="2000" dirty="0" err="1">
                 <a:latin typeface="DevLys 010" pitchFamily="2" charset="0"/>
               </a:rPr>
               <a:t>kd</a:t>
             </a:r>
             <a:r>
-              <a:rPr lang="en-US" sz="2000">
+              <a:rPr lang="en-US" sz="2000" dirty="0">
                 <a:latin typeface="DevLys 010" pitchFamily="2" charset="0"/>
               </a:rPr>
               <a:t> </a:t>
             </a:r>
             <a:r>
-              <a:rPr lang="en-US" sz="2000" err="1">
+              <a:rPr lang="en-US" sz="2000" dirty="0" err="1">
                 <a:latin typeface="DevLys 010" pitchFamily="2" charset="0"/>
               </a:rPr>
               <a:t>Hk.Mkj</a:t>
             </a:r>
             <a:r>
-              <a:rPr lang="en-US" sz="2000">
+              <a:rPr lang="en-US" sz="2000" dirty="0">
                 <a:latin typeface="DevLys 010" pitchFamily="2" charset="0"/>
               </a:rPr>
               <a:t> </a:t>
             </a:r>
             <a:r>
-              <a:rPr lang="en-US" sz="2000" err="1">
+              <a:rPr lang="en-US" sz="2000" dirty="0" err="1">
                 <a:latin typeface="DevLys 010" pitchFamily="2" charset="0"/>
               </a:rPr>
               <a:t>jkT</a:t>
             </a:r>
             <a:r>
-              <a:rPr lang="en-US" sz="2000">
+              <a:rPr lang="en-US" sz="2000" dirty="0">
                 <a:latin typeface="DevLys 010" pitchFamily="2" charset="0"/>
               </a:rPr>
               <a:t>; </a:t>
             </a:r>
             <a:r>
-              <a:rPr lang="en-US" sz="2000" err="1">
+              <a:rPr lang="en-US" sz="2000" dirty="0" err="1">
                 <a:latin typeface="DevLys 010" pitchFamily="2" charset="0"/>
               </a:rPr>
               <a:t>esa</a:t>
             </a:r>
             <a:r>
-              <a:rPr lang="en-US" sz="2000">
+              <a:rPr lang="en-US" sz="2000" dirty="0">
                 <a:latin typeface="DevLys 010" pitchFamily="2" charset="0"/>
               </a:rPr>
               <a:t> </a:t>
             </a:r>
             <a:r>
-              <a:rPr lang="en-US" sz="2000" err="1">
+              <a:rPr lang="en-US" sz="2000" dirty="0" err="1">
                 <a:latin typeface="DevLys 010" pitchFamily="2" charset="0"/>
               </a:rPr>
               <a:t>miyC</a:t>
             </a:r>
             <a:r>
-              <a:rPr lang="en-US" sz="2000">
+              <a:rPr lang="en-US" sz="2000" dirty="0">
                 <a:latin typeface="DevLys 010" pitchFamily="2" charset="0"/>
               </a:rPr>
               <a:t>/k</a:t>
@@ -25731,7 +25655,7 @@
           <a:p>
             <a:pPr marL="465138" indent="-465138" algn="just">
               <a:lnSpc>
-                <a:spcPct val="150000"/>
+                <a:spcPct val="100000"/>
               </a:lnSpc>
               <a:spcBef>
                 <a:spcPts val="1200"/>
@@ -25743,97 +25667,97 @@
               <a:buChar char="q"/>
             </a:pPr>
             <a:r>
-              <a:rPr lang="en-US" sz="2000">
+              <a:rPr lang="en-US" sz="2000" dirty="0">
                 <a:latin typeface="DevLys 010" pitchFamily="2" charset="0"/>
               </a:rPr>
               <a:t>[</a:t>
             </a:r>
             <a:r>
-              <a:rPr lang="en-US" sz="2000" err="1">
+              <a:rPr lang="en-US" sz="2000" dirty="0" err="1">
                 <a:latin typeface="DevLys 010" pitchFamily="2" charset="0"/>
               </a:rPr>
               <a:t>kfut</a:t>
             </a:r>
             <a:r>
-              <a:rPr lang="en-US" sz="2000">
+              <a:rPr lang="en-US" sz="2000" dirty="0">
                 <a:latin typeface="DevLys 010" pitchFamily="2" charset="0"/>
               </a:rPr>
               <a:t> </a:t>
             </a:r>
             <a:r>
-              <a:rPr lang="en-US" sz="2000" err="1">
+              <a:rPr lang="en-US" sz="2000" dirty="0" err="1">
                 <a:latin typeface="DevLys 010" pitchFamily="2" charset="0"/>
               </a:rPr>
               <a:t>mRiknu</a:t>
             </a:r>
             <a:r>
-              <a:rPr lang="en-US" sz="2000">
+              <a:rPr lang="en-US" sz="2000" dirty="0">
                 <a:latin typeface="DevLys 010" pitchFamily="2" charset="0"/>
               </a:rPr>
               <a:t> ds </a:t>
             </a:r>
             <a:r>
-              <a:rPr lang="en-US" sz="2000" err="1">
+              <a:rPr lang="en-US" sz="2000" dirty="0" err="1">
                 <a:latin typeface="DevLys 010" pitchFamily="2" charset="0"/>
               </a:rPr>
               <a:t>ewY</a:t>
             </a:r>
             <a:r>
-              <a:rPr lang="en-US" sz="2000">
-                <a:latin typeface="DevLys 010" pitchFamily="2" charset="0"/>
-              </a:rPr>
-              <a:t>; ¼---- izfr'kr½ dh </a:t>
-            </a:r>
-            <a:r>
-              <a:rPr lang="en-US" sz="2000" err="1">
+              <a:rPr lang="en-US" sz="2000" dirty="0">
+                <a:latin typeface="DevLys 010" pitchFamily="2" charset="0"/>
+              </a:rPr>
+              <a:t>; dh </a:t>
+            </a:r>
+            <a:r>
+              <a:rPr lang="en-US" sz="2000" dirty="0" err="1">
                 <a:latin typeface="DevLys 010" pitchFamily="2" charset="0"/>
               </a:rPr>
               <a:t>n`f"V</a:t>
             </a:r>
             <a:r>
-              <a:rPr lang="en-US" sz="2000">
+              <a:rPr lang="en-US" sz="2000" dirty="0">
                 <a:latin typeface="DevLys 010" pitchFamily="2" charset="0"/>
               </a:rPr>
               <a:t> ls </a:t>
             </a:r>
             <a:r>
-              <a:rPr lang="en-US" sz="2000" err="1">
+              <a:rPr lang="en-US" sz="2000" dirty="0" err="1">
                 <a:latin typeface="DevLys 010" pitchFamily="2" charset="0"/>
               </a:rPr>
               <a:t>jkT</a:t>
             </a:r>
             <a:r>
-              <a:rPr lang="en-US" sz="2000">
+              <a:rPr lang="en-US" sz="2000" dirty="0">
                 <a:latin typeface="DevLys 010" pitchFamily="2" charset="0"/>
               </a:rPr>
               <a:t>; dk </a:t>
             </a:r>
             <a:r>
-              <a:rPr lang="en-US" sz="2000" err="1">
+              <a:rPr lang="en-US" sz="2000" dirty="0" err="1">
                 <a:latin typeface="DevLys 010" pitchFamily="2" charset="0"/>
               </a:rPr>
               <a:t>rhljk</a:t>
             </a:r>
             <a:r>
-              <a:rPr lang="en-US" sz="2000">
+              <a:rPr lang="en-US" sz="2000" dirty="0">
                 <a:latin typeface="DevLys 010" pitchFamily="2" charset="0"/>
               </a:rPr>
               <a:t> </a:t>
             </a:r>
             <a:r>
-              <a:rPr lang="en-US" sz="2000" err="1">
+              <a:rPr lang="en-US" sz="2000" dirty="0" err="1">
                 <a:latin typeface="DevLys 010" pitchFamily="2" charset="0"/>
               </a:rPr>
               <a:t>LFkku</a:t>
             </a:r>
-            <a:endParaRPr lang="en-US" sz="2000">
+            <a:endParaRPr lang="en-US" sz="2000" dirty="0">
               <a:latin typeface="DevLys 010" pitchFamily="2" charset="0"/>
             </a:endParaRPr>
           </a:p>
           <a:p>
             <a:pPr marL="465138" indent="-465138" algn="just">
               <a:lnSpc>
-                <a:spcPct val="150000"/>
+                <a:spcPct val="100000"/>
               </a:lnSpc>
               <a:spcBef>
                 <a:spcPts val="1200"/>
@@ -25845,79 +25769,79 @@
               <a:buChar char="q"/>
             </a:pPr>
             <a:r>
-              <a:rPr lang="en-US" sz="2000" err="1">
+              <a:rPr lang="en-US" sz="2000" dirty="0" err="1">
                 <a:latin typeface="DevLys 010" pitchFamily="2" charset="0"/>
               </a:rPr>
               <a:t>lhlk</a:t>
             </a:r>
             <a:r>
-              <a:rPr lang="en-US" sz="2000">
+              <a:rPr lang="en-US" sz="2000" dirty="0">
                 <a:latin typeface="DevLys 010" pitchFamily="2" charset="0"/>
               </a:rPr>
               <a:t>] </a:t>
             </a:r>
             <a:r>
-              <a:rPr lang="en-US" sz="2000" err="1">
+              <a:rPr lang="en-US" sz="2000" dirty="0" err="1">
                 <a:latin typeface="DevLys 010" pitchFamily="2" charset="0"/>
               </a:rPr>
               <a:t>tLrk</a:t>
             </a:r>
             <a:r>
-              <a:rPr lang="en-US" sz="2000">
+              <a:rPr lang="en-US" sz="2000" dirty="0">
                 <a:latin typeface="DevLys 010" pitchFamily="2" charset="0"/>
               </a:rPr>
               <a:t>] </a:t>
             </a:r>
             <a:r>
-              <a:rPr lang="en-US" sz="2000" err="1">
+              <a:rPr lang="en-US" sz="2000" dirty="0" err="1">
                 <a:latin typeface="DevLys 010" pitchFamily="2" charset="0"/>
               </a:rPr>
               <a:t>lsysukbV</a:t>
             </a:r>
             <a:r>
-              <a:rPr lang="en-US" sz="2000">
+              <a:rPr lang="en-US" sz="2000" dirty="0">
                 <a:latin typeface="DevLys 010" pitchFamily="2" charset="0"/>
               </a:rPr>
               <a:t> o </a:t>
             </a:r>
             <a:r>
-              <a:rPr lang="en-US" sz="2000" err="1">
+              <a:rPr lang="en-US" sz="2000" dirty="0" err="1">
                 <a:latin typeface="DevLys 010" pitchFamily="2" charset="0"/>
               </a:rPr>
               <a:t>oksysLVksukbV</a:t>
             </a:r>
             <a:r>
-              <a:rPr lang="en-US" sz="2000">
+              <a:rPr lang="en-US" sz="2000" dirty="0">
                 <a:latin typeface="DevLys 010" pitchFamily="2" charset="0"/>
               </a:rPr>
               <a:t> dk ,</a:t>
             </a:r>
             <a:r>
-              <a:rPr lang="en-US" sz="2000" err="1">
+              <a:rPr lang="en-US" sz="2000" dirty="0" err="1">
                 <a:latin typeface="DevLys 010" pitchFamily="2" charset="0"/>
               </a:rPr>
               <a:t>dek</a:t>
             </a:r>
             <a:r>
-              <a:rPr lang="en-US" sz="2000">
+              <a:rPr lang="en-US" sz="2000" dirty="0">
                 <a:latin typeface="DevLys 010" pitchFamily="2" charset="0"/>
               </a:rPr>
               <a:t>= </a:t>
             </a:r>
             <a:r>
-              <a:rPr lang="en-US" sz="2000" err="1">
+              <a:rPr lang="en-US" sz="2000" dirty="0" err="1">
                 <a:latin typeface="DevLys 010" pitchFamily="2" charset="0"/>
               </a:rPr>
               <a:t>mRiknd</a:t>
             </a:r>
-            <a:endParaRPr lang="en-US" sz="2000">
+            <a:endParaRPr lang="en-US" sz="2000" dirty="0">
               <a:latin typeface="DevLys 010" pitchFamily="2" charset="0"/>
             </a:endParaRPr>
           </a:p>
           <a:p>
             <a:pPr marL="465138" indent="-465138" algn="just">
               <a:lnSpc>
-                <a:spcPct val="150000"/>
+                <a:spcPct val="100000"/>
               </a:lnSpc>
               <a:spcBef>
                 <a:spcPts val="1200"/>
@@ -25929,19 +25853,146 @@
               <a:buChar char="q"/>
             </a:pPr>
             <a:r>
-              <a:rPr lang="en-US" sz="2000" err="1">
+              <a:rPr lang="en-US" sz="2000" dirty="0" err="1">
                 <a:latin typeface="DevLys 010" pitchFamily="2" charset="0"/>
               </a:rPr>
               <a:t>dSYlkbV</a:t>
             </a:r>
             <a:r>
-              <a:rPr lang="en-US" sz="2000">
-                <a:latin typeface="DevLys 010" pitchFamily="2" charset="0"/>
-              </a:rPr>
-              <a:t>] </a:t>
-            </a:r>
-            <a:r>
-              <a:rPr lang="en-US" sz="2000">
+              <a:rPr lang="en-US" sz="2000" dirty="0">
+                <a:latin typeface="DevLys 010" pitchFamily="2" charset="0"/>
+              </a:rPr>
+              <a:t> ,</a:t>
+            </a:r>
+            <a:r>
+              <a:rPr lang="en-US" sz="2000" dirty="0" err="1">
+                <a:latin typeface="DevLys 010" pitchFamily="2" charset="0"/>
+              </a:rPr>
+              <a:t>oa</a:t>
+            </a:r>
+            <a:r>
+              <a:rPr lang="en-US" sz="2000" dirty="0">
+                <a:latin typeface="DevLys 010" pitchFamily="2" charset="0"/>
+              </a:rPr>
+              <a:t> </a:t>
+            </a:r>
+            <a:r>
+              <a:rPr lang="en-US" sz="2000" dirty="0" err="1">
+                <a:latin typeface="DevLys 010" pitchFamily="2" charset="0"/>
+              </a:rPr>
+              <a:t>ftIle</a:t>
+            </a:r>
+            <a:r>
+              <a:rPr lang="en-US" sz="2000" dirty="0">
+                <a:latin typeface="DevLys 010" pitchFamily="2" charset="0"/>
+              </a:rPr>
+              <a:t> dk </a:t>
+            </a:r>
+            <a:r>
+              <a:rPr lang="en-US" sz="2000" dirty="0" err="1">
+                <a:latin typeface="DevLys 010" pitchFamily="2" charset="0"/>
+              </a:rPr>
+              <a:t>yxHkx</a:t>
+            </a:r>
+            <a:r>
+              <a:rPr lang="en-US" sz="2000" dirty="0">
+                <a:latin typeface="DevLys 010" pitchFamily="2" charset="0"/>
+              </a:rPr>
+              <a:t> </a:t>
+            </a:r>
+            <a:r>
+              <a:rPr lang="en-US" sz="2000" dirty="0" err="1">
+                <a:latin typeface="DevLys 010" pitchFamily="2" charset="0"/>
+              </a:rPr>
+              <a:t>iwjk</a:t>
+            </a:r>
+            <a:r>
+              <a:rPr lang="en-US" sz="2000" dirty="0">
+                <a:latin typeface="DevLys 010" pitchFamily="2" charset="0"/>
+              </a:rPr>
+              <a:t> </a:t>
+            </a:r>
+            <a:r>
+              <a:rPr lang="en-US" sz="2000" dirty="0" err="1">
+                <a:latin typeface="DevLys 010" pitchFamily="2" charset="0"/>
+              </a:rPr>
+              <a:t>mRiknu</a:t>
+            </a:r>
+            <a:r>
+              <a:rPr lang="en-US" sz="2000" dirty="0">
+                <a:latin typeface="DevLys 010" pitchFamily="2" charset="0"/>
+              </a:rPr>
+              <a:t> </a:t>
+            </a:r>
+            <a:r>
+              <a:rPr lang="en-US" sz="2000" dirty="0">
+                <a:latin typeface="Cambria" panose="02040503050406030204" pitchFamily="18" charset="0"/>
+                <a:ea typeface="Cambria" panose="02040503050406030204" pitchFamily="18" charset="0"/>
+              </a:rPr>
+              <a:t>,</a:t>
+            </a:r>
+            <a:r>
+              <a:rPr lang="en-US" sz="2000" dirty="0" err="1">
+                <a:latin typeface="DevLys 010" pitchFamily="2" charset="0"/>
+              </a:rPr>
+              <a:t>pk¡nh</a:t>
+            </a:r>
+            <a:r>
+              <a:rPr lang="en-US" sz="2000" dirty="0">
+                <a:latin typeface="DevLys 010" pitchFamily="2" charset="0"/>
+              </a:rPr>
+              <a:t> dk </a:t>
+            </a:r>
+            <a:r>
+              <a:rPr lang="en-US" sz="2000" dirty="0" err="1">
+                <a:latin typeface="DevLys 010" pitchFamily="2" charset="0"/>
+              </a:rPr>
+              <a:t>lcls</a:t>
+            </a:r>
+            <a:r>
+              <a:rPr lang="en-US" sz="2000" dirty="0">
+                <a:latin typeface="DevLys 010" pitchFamily="2" charset="0"/>
+              </a:rPr>
+              <a:t> </a:t>
+            </a:r>
+            <a:r>
+              <a:rPr lang="en-US" sz="2000" dirty="0" err="1">
+                <a:latin typeface="DevLys 010" pitchFamily="2" charset="0"/>
+              </a:rPr>
+              <a:t>cMk</a:t>
+            </a:r>
+            <a:r>
+              <a:rPr lang="en-US" sz="2000" dirty="0">
+                <a:latin typeface="DevLys 010" pitchFamily="2" charset="0"/>
+              </a:rPr>
+              <a:t> </a:t>
+            </a:r>
+            <a:r>
+              <a:rPr lang="en-US" sz="2000" dirty="0" err="1">
+                <a:latin typeface="DevLys 010" pitchFamily="2" charset="0"/>
+              </a:rPr>
+              <a:t>mRiknd</a:t>
+            </a:r>
+            <a:r>
+              <a:rPr lang="en-US" sz="2000" dirty="0">
+                <a:latin typeface="DevLys 010" pitchFamily="2" charset="0"/>
+              </a:rPr>
+              <a:t> ,</a:t>
+            </a:r>
+            <a:r>
+              <a:rPr lang="en-US" sz="2000" dirty="0" err="1">
+                <a:latin typeface="DevLys 010" pitchFamily="2" charset="0"/>
+              </a:rPr>
+              <a:t>oa</a:t>
+            </a:r>
+            <a:r>
+              <a:rPr lang="en-US" sz="2000" dirty="0">
+                <a:latin typeface="DevLys 010" pitchFamily="2" charset="0"/>
+              </a:rPr>
+              <a:t> </a:t>
+            </a:r>
+            <a:r>
+              <a:rPr lang="en-US" sz="2000" dirty="0">
                 <a:solidFill>
                   <a:srgbClr val="C00000"/>
                 </a:solidFill>
@@ -25950,7 +26001,7 @@
               <a:t>,l-,e-,l- </a:t>
             </a:r>
             <a:r>
-              <a:rPr lang="en-US" sz="2000" err="1">
+              <a:rPr lang="en-US" sz="2000" dirty="0" err="1">
                 <a:solidFill>
                   <a:srgbClr val="C00000"/>
                 </a:solidFill>
@@ -25959,7 +26010,7 @@
               <a:t>xszM</a:t>
             </a:r>
             <a:r>
-              <a:rPr lang="en-US" sz="2000">
+              <a:rPr lang="en-US" sz="2000" dirty="0">
                 <a:solidFill>
                   <a:srgbClr val="C00000"/>
                 </a:solidFill>
@@ -25968,7 +26019,7 @@
               <a:t> </a:t>
             </a:r>
             <a:r>
-              <a:rPr lang="en-US" sz="2000" err="1">
+              <a:rPr lang="en-US" sz="2000" dirty="0" err="1">
                 <a:solidFill>
                   <a:srgbClr val="C00000"/>
                 </a:solidFill>
@@ -25977,7 +26028,7 @@
               <a:t>ykbZeLVksu</a:t>
             </a:r>
             <a:r>
-              <a:rPr lang="en-US" sz="2000">
+              <a:rPr lang="en-US" sz="2000" dirty="0">
                 <a:solidFill>
                   <a:srgbClr val="C00000"/>
                 </a:solidFill>
@@ -25986,121 +26037,64 @@
               <a:t> </a:t>
             </a:r>
             <a:r>
-              <a:rPr lang="en-US" sz="2000">
-                <a:latin typeface="DevLys 010" pitchFamily="2" charset="0"/>
-              </a:rPr>
-              <a:t>,</a:t>
-            </a:r>
-            <a:r>
-              <a:rPr lang="en-US" sz="2000" err="1">
-                <a:latin typeface="DevLys 010" pitchFamily="2" charset="0"/>
-              </a:rPr>
-              <a:t>oa</a:t>
-            </a:r>
-            <a:r>
-              <a:rPr lang="en-US" sz="2000">
+              <a:rPr lang="en-US" sz="2000" dirty="0">
+                <a:latin typeface="DevLys 010" pitchFamily="2" charset="0"/>
+              </a:rPr>
+              <a:t>dk </a:t>
+            </a:r>
+            <a:r>
+              <a:rPr lang="en-US" sz="2000" dirty="0" err="1">
+                <a:latin typeface="DevLys 010" pitchFamily="2" charset="0"/>
+              </a:rPr>
+              <a:t>nwljk</a:t>
+            </a:r>
+            <a:r>
+              <a:rPr lang="en-US" sz="2000" dirty="0">
                 <a:latin typeface="DevLys 010" pitchFamily="2" charset="0"/>
               </a:rPr>
               <a:t> </a:t>
             </a:r>
             <a:r>
-              <a:rPr lang="en-US" sz="2000" err="1">
-                <a:latin typeface="DevLys 010" pitchFamily="2" charset="0"/>
-              </a:rPr>
-              <a:t>ftIle</a:t>
-            </a:r>
-            <a:r>
-              <a:rPr lang="en-US" sz="2000">
-                <a:latin typeface="DevLys 010" pitchFamily="2" charset="0"/>
-              </a:rPr>
-              <a:t> dk </a:t>
-            </a:r>
-            <a:r>
-              <a:rPr lang="en-US" sz="2000" err="1">
-                <a:latin typeface="DevLys 010" pitchFamily="2" charset="0"/>
-              </a:rPr>
-              <a:t>yxHkx</a:t>
-            </a:r>
-            <a:r>
-              <a:rPr lang="en-US" sz="2000">
+              <a:rPr lang="en-US" sz="2000" dirty="0" err="1">
+                <a:latin typeface="DevLys 010" pitchFamily="2" charset="0"/>
+              </a:rPr>
+              <a:t>lcls</a:t>
+            </a:r>
+            <a:r>
+              <a:rPr lang="en-US" sz="2000" dirty="0">
                 <a:latin typeface="DevLys 010" pitchFamily="2" charset="0"/>
               </a:rPr>
               <a:t> </a:t>
             </a:r>
             <a:r>
-              <a:rPr lang="en-US" sz="2000" err="1">
-                <a:latin typeface="DevLys 010" pitchFamily="2" charset="0"/>
-              </a:rPr>
-              <a:t>iwjk</a:t>
-            </a:r>
-            <a:r>
-              <a:rPr lang="en-US" sz="2000">
+              <a:rPr lang="en-US" sz="2000" dirty="0" err="1">
+                <a:latin typeface="DevLys 010" pitchFamily="2" charset="0"/>
+              </a:rPr>
+              <a:t>cMk</a:t>
+            </a:r>
+            <a:r>
+              <a:rPr lang="en-US" sz="2000" dirty="0">
                 <a:latin typeface="DevLys 010" pitchFamily="2" charset="0"/>
               </a:rPr>
               <a:t> </a:t>
             </a:r>
             <a:r>
-              <a:rPr lang="en-US" sz="2000" err="1">
-                <a:latin typeface="DevLys 010" pitchFamily="2" charset="0"/>
-              </a:rPr>
-              <a:t>mRiknu</a:t>
-            </a:r>
-            <a:r>
-              <a:rPr lang="en-US" sz="2000">
-                <a:latin typeface="DevLys 010" pitchFamily="2" charset="0"/>
-              </a:rPr>
-              <a:t> o </a:t>
-            </a:r>
-            <a:r>
-              <a:rPr lang="en-US" sz="2000" err="1">
-                <a:latin typeface="DevLys 010" pitchFamily="2" charset="0"/>
-              </a:rPr>
-              <a:t>pk¡nh</a:t>
-            </a:r>
-            <a:r>
-              <a:rPr lang="en-US" sz="2000">
-                <a:latin typeface="DevLys 010" pitchFamily="2" charset="0"/>
-              </a:rPr>
-              <a:t> dk </a:t>
-            </a:r>
-            <a:r>
-              <a:rPr lang="en-US" sz="2000" err="1">
-                <a:latin typeface="DevLys 010" pitchFamily="2" charset="0"/>
-              </a:rPr>
-              <a:t>lcls</a:t>
-            </a:r>
-            <a:r>
-              <a:rPr lang="en-US" sz="2000">
+              <a:rPr lang="en-US" sz="2000" dirty="0" err="1">
+                <a:latin typeface="DevLys 010" pitchFamily="2" charset="0"/>
+              </a:rPr>
+              <a:t>mRiknd</a:t>
+            </a:r>
+            <a:r>
+              <a:rPr lang="en-US" sz="2000" dirty="0">
                 <a:latin typeface="DevLys 010" pitchFamily="2" charset="0"/>
               </a:rPr>
               <a:t> </a:t>
             </a:r>
-            <a:r>
-              <a:rPr lang="en-US" sz="2000" err="1">
-                <a:latin typeface="DevLys 010" pitchFamily="2" charset="0"/>
-              </a:rPr>
-              <a:t>cMk</a:t>
-            </a:r>
-            <a:r>
-              <a:rPr lang="en-US" sz="2000">
-                <a:latin typeface="DevLys 010" pitchFamily="2" charset="0"/>
-              </a:rPr>
-              <a:t> </a:t>
-            </a:r>
-            <a:r>
-              <a:rPr lang="en-US" sz="2000" err="1">
-                <a:latin typeface="DevLys 010" pitchFamily="2" charset="0"/>
-              </a:rPr>
-              <a:t>mRiknd</a:t>
-            </a:r>
-            <a:endParaRPr lang="en-US" sz="2000">
-              <a:latin typeface="DevLys 010" pitchFamily="2" charset="0"/>
-            </a:endParaRPr>
           </a:p>
           <a:p>
             <a:pPr marL="465138" indent="-465138" algn="just">
               <a:lnSpc>
-                <a:spcPct val="150000"/>
+                <a:spcPct val="100000"/>
               </a:lnSpc>
               <a:spcBef>
                 <a:spcPts val="1200"/>
@@ -26112,81 +26106,84 @@
               <a:buChar char="q"/>
             </a:pPr>
             <a:r>
-              <a:rPr lang="en-US" sz="2000" err="1">
+              <a:rPr lang="en-US" sz="2000" dirty="0" err="1">
                 <a:latin typeface="DevLys 010" pitchFamily="2" charset="0"/>
               </a:rPr>
               <a:t>dPps</a:t>
             </a:r>
             <a:r>
-              <a:rPr lang="en-US" sz="2000">
+              <a:rPr lang="en-US" sz="2000" dirty="0">
                 <a:latin typeface="DevLys 010" pitchFamily="2" charset="0"/>
               </a:rPr>
               <a:t> </a:t>
             </a:r>
             <a:r>
-              <a:rPr lang="en-US" sz="2000" err="1">
+              <a:rPr lang="en-US" sz="2000" dirty="0" err="1">
                 <a:latin typeface="DevLys 010" pitchFamily="2" charset="0"/>
               </a:rPr>
               <a:t>rsy</a:t>
             </a:r>
             <a:r>
-              <a:rPr lang="en-US" sz="2000">
+              <a:rPr lang="en-US" sz="2000" dirty="0">
                 <a:latin typeface="DevLys 010" pitchFamily="2" charset="0"/>
               </a:rPr>
               <a:t> ¼vkWQ&amp;'kkssj½ dk </a:t>
             </a:r>
             <a:r>
-              <a:rPr lang="en-US" sz="2000" err="1">
+              <a:rPr lang="en-US" sz="2000" dirty="0" err="1">
                 <a:latin typeface="DevLys 010" pitchFamily="2" charset="0"/>
               </a:rPr>
               <a:t>nwljk</a:t>
             </a:r>
             <a:r>
-              <a:rPr lang="en-US" sz="2000">
+              <a:rPr lang="en-US" sz="2000" dirty="0">
                 <a:latin typeface="DevLys 010" pitchFamily="2" charset="0"/>
               </a:rPr>
               <a:t> </a:t>
             </a:r>
             <a:r>
-              <a:rPr lang="en-US" sz="2000" err="1">
+              <a:rPr lang="en-US" sz="2000" dirty="0" err="1">
                 <a:latin typeface="DevLys 010" pitchFamily="2" charset="0"/>
               </a:rPr>
               <a:t>lcls</a:t>
             </a:r>
             <a:r>
-              <a:rPr lang="en-US" sz="2000">
+              <a:rPr lang="en-US" sz="2000" dirty="0">
                 <a:latin typeface="DevLys 010" pitchFamily="2" charset="0"/>
               </a:rPr>
               <a:t> </a:t>
             </a:r>
             <a:r>
-              <a:rPr lang="en-US" sz="2000" err="1">
+              <a:rPr lang="en-US" sz="2000" dirty="0" err="1">
                 <a:latin typeface="DevLys 010" pitchFamily="2" charset="0"/>
               </a:rPr>
               <a:t>cM+k</a:t>
             </a:r>
             <a:r>
-              <a:rPr lang="en-US" sz="2000">
+              <a:rPr lang="en-US" sz="2000" dirty="0">
                 <a:latin typeface="DevLys 010" pitchFamily="2" charset="0"/>
               </a:rPr>
               <a:t> </a:t>
             </a:r>
             <a:r>
-              <a:rPr lang="en-US" sz="2000" err="1">
+              <a:rPr lang="en-US" sz="2000" dirty="0" err="1">
                 <a:latin typeface="DevLys 010" pitchFamily="2" charset="0"/>
               </a:rPr>
               <a:t>mRiknd</a:t>
             </a:r>
-            <a:endParaRPr lang="en-US" sz="2000">
+            <a:endParaRPr lang="en-US" sz="2000" dirty="0">
               <a:latin typeface="DevLys 010" pitchFamily="2" charset="0"/>
             </a:endParaRPr>
           </a:p>
           <a:p>
             <a:pPr algn="just">
+              <a:lnSpc>
+                <a:spcPct val="100000"/>
+              </a:lnSpc>
               <a:buFont typeface="Wingdings" panose="05000000000000000000" pitchFamily="2" charset="2"/>
               <a:buChar char="q"/>
             </a:pPr>
-            <a:endParaRPr lang="en-US" sz="2000" b="1">
+            <a:endParaRPr lang="en-US" sz="2000" b="1" dirty="0">
               <a:latin typeface="DevLys 010" pitchFamily="2" charset="0"/>
             </a:endParaRPr>
           </a:p>
@@ -26473,9 +26470,19 @@
               </a:rPr>
               <a:t>ksr</a:t>
             </a:r>
-            <a:endParaRPr lang="en-US" altLang="en-US" sz="3600" b="1" dirty="0">
-              <a:latin typeface="DevLys 010" pitchFamily="2" charset="0"/>
-            </a:endParaRPr>
+            <a:r>
+              <a:rPr lang="en-US" altLang="en-US" sz="3600" b="1" dirty="0">
+                <a:latin typeface="DevLys 010" pitchFamily="2" charset="0"/>
+              </a:rPr>
+              <a:t> </a:t>
+            </a:r>
+            <a:r>
+              <a:rPr lang="en-US" altLang="en-US" sz="3600" dirty="0">
+                <a:latin typeface="+mj-lt"/>
+                <a:ea typeface="Cambria" panose="02040503050406030204" pitchFamily="18" charset="0"/>
+              </a:rPr>
+              <a:t>(1/2)</a:t>
+            </a:r>
           </a:p>
         </p:txBody>
       </p:sp>
@@ -26836,8 +26843,8 @@
         </p:nvSpPr>
         <p:spPr>
           <a:xfrm>
-            <a:off x="10529455" y="147415"/>
-            <a:ext cx="1524000" cy="400110"/>
+            <a:off x="10646835" y="76214"/>
+            <a:ext cx="1421176" cy="646331"/>
           </a:xfrm>
           <a:prstGeom prst="rect">
             <a:avLst/>
@@ -26850,6 +26857,7 @@
           </a:bodyPr>
           <a:lstStyle/>
           <a:p>
+            <a:pPr algn="ctr"/>
             <a:r>
               <a:rPr lang="en-US" sz="2000" b="1" dirty="0" err="1">
                 <a:latin typeface="DevLys 010" pitchFamily="2" charset="0"/>
@@ -26861,6 +26869,15 @@
                 <a:latin typeface="DevLys 010" pitchFamily="2" charset="0"/>
               </a:rPr>
               <a:t> 2025&amp;26</a:t>
+            </a:r>
+          </a:p>
+          <a:p>
+            <a:pPr algn="ctr"/>
+            <a:r>
+              <a:rPr lang="en-US" sz="1600" b="1" dirty="0">
+                <a:latin typeface="+mj-lt"/>
+              </a:rPr>
+              <a:t>(in Cr.)</a:t>
             </a:r>
           </a:p>
         </p:txBody>
@@ -27147,36 +27164,48 @@
               <a:buNone/>
             </a:pPr>
             <a:r>
-              <a:rPr lang="en-US" altLang="en-US" sz="3600" b="1" err="1">
+              <a:rPr lang="en-US" altLang="en-US" sz="3600" b="1" dirty="0" err="1">
                 <a:latin typeface="DevLys 010" pitchFamily="2" charset="0"/>
               </a:rPr>
               <a:t>jktLo</a:t>
             </a:r>
             <a:r>
-              <a:rPr lang="en-US" altLang="en-US" sz="3600" b="1">
+              <a:rPr lang="en-US" altLang="en-US" sz="3600" b="1" dirty="0">
                 <a:latin typeface="DevLys 010" pitchFamily="2" charset="0"/>
               </a:rPr>
               <a:t> ds </a:t>
             </a:r>
             <a:r>
-              <a:rPr lang="en-US" altLang="en-US" sz="3600" b="1" err="1">
+              <a:rPr lang="en-US" altLang="en-US" sz="3600" b="1" dirty="0" err="1">
                 <a:latin typeface="DevLys 010" pitchFamily="2" charset="0"/>
               </a:rPr>
               <a:t>izeq</a:t>
             </a:r>
             <a:r>
-              <a:rPr lang="en-US" altLang="en-US" sz="3600" b="1">
+              <a:rPr lang="en-US" altLang="en-US" sz="3600" b="1" dirty="0">
                 <a:latin typeface="DevLys 010" pitchFamily="2" charset="0"/>
               </a:rPr>
               <a:t>[k L=</a:t>
             </a:r>
             <a:r>
-              <a:rPr lang="en-US" altLang="en-US" sz="3600" b="1" err="1">
+              <a:rPr lang="en-US" altLang="en-US" sz="3600" b="1" dirty="0" err="1">
                 <a:latin typeface="DevLys 010" pitchFamily="2" charset="0"/>
               </a:rPr>
               <a:t>ksr</a:t>
             </a:r>
-            <a:endParaRPr lang="en-US" altLang="en-US" sz="3600" b="1">
+            <a:r>
+              <a:rPr lang="en-US" altLang="en-US" sz="3600" b="1" dirty="0">
+                <a:latin typeface="DevLys 010" pitchFamily="2" charset="0"/>
+              </a:rPr>
+              <a:t> </a:t>
+            </a:r>
+            <a:r>
+              <a:rPr lang="en-US" altLang="en-US" sz="3600" dirty="0">
+                <a:ea typeface="Cambria" panose="02040503050406030204" pitchFamily="18" charset="0"/>
+              </a:rPr>
+              <a:t>(2/2)</a:t>
+            </a:r>
+            <a:endParaRPr lang="en-US" altLang="en-US" sz="3600" b="1" dirty="0">
               <a:latin typeface="DevLys 010" pitchFamily="2" charset="0"/>
             </a:endParaRPr>
           </a:p>
@@ -27525,49 +27554,6 @@
           </a:fontRef>
         </p:style>
       </p:cxnSp>
-      <p:sp>
-        <p:nvSpPr>
-          <p:cNvPr id="2" name="TextBox 1">
-            <a:extLst>
-              <a:ext uri="{FF2B5EF4-FFF2-40B4-BE49-F238E27FC236}">
-                <a16:creationId xmlns:a16="http://schemas.microsoft.com/office/drawing/2014/main" id="{16067FB4-5345-194E-B1A4-50DBD02C7A6D}"/>
-              </a:ext>
-            </a:extLst>
-          </p:cNvPr>
-          <p:cNvSpPr txBox="1"/>
-          <p:nvPr/>
-        </p:nvSpPr>
-        <p:spPr>
-          <a:xfrm>
-            <a:off x="10556570" y="213429"/>
-            <a:ext cx="1524000" cy="400110"/>
-          </a:xfrm>
-          <a:prstGeom prst="rect">
-            <a:avLst/>
-          </a:prstGeom>
-          <a:noFill/>
-        </p:spPr>
-        <p:txBody>
-          <a:bodyPr wrap="square" rtlCol="0">
-            <a:spAutoFit/>
-          </a:bodyPr>
-          <a:lstStyle/>
-          <a:p>
-            <a:r>
-              <a:rPr lang="en-US" sz="2000" b="1" dirty="0" err="1">
-                <a:latin typeface="DevLys 010" pitchFamily="2" charset="0"/>
-              </a:rPr>
-              <a:t>o"kZ</a:t>
-            </a:r>
-            <a:r>
-              <a:rPr lang="en-US" sz="2000" b="1" dirty="0">
-                <a:latin typeface="DevLys 010" pitchFamily="2" charset="0"/>
-              </a:rPr>
-              <a:t> 2025&amp;26</a:t>
-            </a:r>
-          </a:p>
-        </p:txBody>
-      </p:sp>
       <p:graphicFrame>
         <p:nvGraphicFramePr>
           <p:cNvPr id="9" name="Chart 8">
@@ -27581,7 +27567,7 @@
           <p:nvPr>
             <p:extLst>
               <p:ext uri="{D42A27DB-BD31-4B8C-83A1-F6EECF244321}">
-                <p14:modId xmlns:p14="http://schemas.microsoft.com/office/powerpoint/2010/main" val="2328196044"/>
+                <p14:modId xmlns:p14="http://schemas.microsoft.com/office/powerpoint/2010/main" val="3754328850"/>
               </p:ext>
             </p:extLst>
           </p:nvPr>
@@ -27609,7 +27595,7 @@
           <p:nvPr>
             <p:extLst>
               <p:ext uri="{D42A27DB-BD31-4B8C-83A1-F6EECF244321}">
-                <p14:modId xmlns:p14="http://schemas.microsoft.com/office/powerpoint/2010/main" val="2699582711"/>
+                <p14:modId xmlns:p14="http://schemas.microsoft.com/office/powerpoint/2010/main" val="647965078"/>
               </p:ext>
             </p:extLst>
           </p:nvPr>
@@ -27624,6 +27610,59 @@
           </a:graphicData>
         </a:graphic>
       </p:graphicFrame>
+      <p:sp>
+        <p:nvSpPr>
+          <p:cNvPr id="12" name="TextBox 11">
+            <a:extLst>
+              <a:ext uri="{FF2B5EF4-FFF2-40B4-BE49-F238E27FC236}">
+                <a16:creationId xmlns:a16="http://schemas.microsoft.com/office/drawing/2014/main" id="{3904A79D-7711-AB14-BC68-B730348E4FD9}"/>
+              </a:ext>
+            </a:extLst>
+          </p:cNvPr>
+          <p:cNvSpPr txBox="1"/>
+          <p:nvPr/>
+        </p:nvSpPr>
+        <p:spPr>
+          <a:xfrm>
+            <a:off x="10632279" y="111493"/>
+            <a:ext cx="1421176" cy="646331"/>
+          </a:xfrm>
+          <a:prstGeom prst="rect">
+            <a:avLst/>
+          </a:prstGeom>
+          <a:noFill/>
+        </p:spPr>
+        <p:txBody>
+          <a:bodyPr wrap="square" rtlCol="0">
+            <a:spAutoFit/>
+          </a:bodyPr>
+          <a:lstStyle/>
+          <a:p>
+            <a:pPr algn="ctr"/>
+            <a:r>
+              <a:rPr lang="en-US" sz="2000" b="1" dirty="0" err="1">
+                <a:latin typeface="DevLys 010" pitchFamily="2" charset="0"/>
+              </a:rPr>
+              <a:t>o"kZ</a:t>
+            </a:r>
+            <a:r>
+              <a:rPr lang="en-US" sz="2000" b="1" dirty="0">
+                <a:latin typeface="DevLys 010" pitchFamily="2" charset="0"/>
+              </a:rPr>
+              <a:t> 2025&amp;26</a:t>
+            </a:r>
+          </a:p>
+          <a:p>
+            <a:pPr algn="ctr"/>
+            <a:r>
+              <a:rPr lang="en-US" sz="1600" b="1" dirty="0">
+                <a:latin typeface="+mj-lt"/>
+              </a:rPr>
+              <a:t>(in Cr.)</a:t>
+            </a:r>
+          </a:p>
+        </p:txBody>
+      </p:sp>
     </p:spTree>
     <p:extLst>
       <p:ext uri="{BB962C8B-B14F-4D97-AF65-F5344CB8AC3E}">
@@ -27676,8 +27715,8 @@
         </p:nvSpPr>
         <p:spPr bwMode="auto">
           <a:xfrm>
-            <a:off x="0" y="106646"/>
-            <a:ext cx="9391402" cy="597279"/>
+            <a:off x="-1" y="106646"/>
+            <a:ext cx="11714795" cy="597279"/>
           </a:xfrm>
           <a:prstGeom prst="rect">
             <a:avLst/>
@@ -27876,98 +27915,107 @@
               <a:buNone/>
             </a:pPr>
             <a:r>
-              <a:rPr lang="en-US" altLang="en-US" sz="3600" b="1" err="1">
+              <a:rPr lang="en-US" altLang="en-US" sz="3600" b="1" dirty="0" err="1">
                 <a:latin typeface="DevLys 010" pitchFamily="2" charset="0"/>
               </a:rPr>
               <a:t>foxr</a:t>
             </a:r>
             <a:r>
-              <a:rPr lang="en-US" altLang="en-US" sz="3600" b="1">
+              <a:rPr lang="en-US" altLang="en-US" sz="3600" b="1" dirty="0">
                 <a:latin typeface="DevLys 010" pitchFamily="2" charset="0"/>
               </a:rPr>
               <a:t> </a:t>
             </a:r>
             <a:r>
-              <a:rPr lang="en-US" altLang="en-US" sz="3600" b="1" err="1">
+              <a:rPr lang="en-US" altLang="en-US" sz="3600" b="1" dirty="0" err="1">
                 <a:latin typeface="DevLys 010" pitchFamily="2" charset="0"/>
               </a:rPr>
               <a:t>rhu</a:t>
             </a:r>
             <a:r>
-              <a:rPr lang="en-US" altLang="en-US" sz="3600" b="1">
+              <a:rPr lang="en-US" altLang="en-US" sz="3600" b="1" dirty="0">
                 <a:latin typeface="DevLys 010" pitchFamily="2" charset="0"/>
               </a:rPr>
               <a:t> </a:t>
             </a:r>
             <a:r>
-              <a:rPr lang="en-US" altLang="en-US" sz="3600" b="1" err="1">
+              <a:rPr lang="en-US" altLang="en-US" sz="3600" b="1" dirty="0" err="1">
                 <a:latin typeface="DevLys 010" pitchFamily="2" charset="0"/>
               </a:rPr>
               <a:t>o"kksZa</a:t>
             </a:r>
             <a:r>
-              <a:rPr lang="en-US" altLang="en-US" sz="3600" b="1">
+              <a:rPr lang="en-US" altLang="en-US" sz="3600" b="1" dirty="0">
                 <a:latin typeface="DevLys 010" pitchFamily="2" charset="0"/>
               </a:rPr>
               <a:t> dh </a:t>
             </a:r>
             <a:r>
-              <a:rPr lang="en-US" altLang="en-US" sz="3600" b="1" err="1">
+              <a:rPr lang="en-US" altLang="en-US" sz="3600" b="1" dirty="0" err="1">
                 <a:latin typeface="DevLys 010" pitchFamily="2" charset="0"/>
               </a:rPr>
               <a:t>ekgokj</a:t>
             </a:r>
             <a:r>
-              <a:rPr lang="en-US" altLang="en-US" sz="3600" b="1">
+              <a:rPr lang="en-US" altLang="en-US" sz="3600" b="1" dirty="0">
                 <a:latin typeface="DevLys 010" pitchFamily="2" charset="0"/>
               </a:rPr>
               <a:t> </a:t>
             </a:r>
             <a:r>
-              <a:rPr lang="en-US" altLang="en-US" sz="3600" b="1" err="1">
+              <a:rPr lang="en-US" altLang="en-US" sz="3600" b="1" dirty="0" err="1">
                 <a:latin typeface="DevLys 010" pitchFamily="2" charset="0"/>
               </a:rPr>
               <a:t>jktLo</a:t>
             </a:r>
             <a:r>
-              <a:rPr lang="en-US" altLang="en-US" sz="3600" b="1">
+              <a:rPr lang="en-US" altLang="en-US" sz="3600" b="1" dirty="0">
                 <a:latin typeface="DevLys 010" pitchFamily="2" charset="0"/>
               </a:rPr>
               <a:t> </a:t>
             </a:r>
             <a:r>
-              <a:rPr lang="en-US" altLang="en-US" sz="3600" b="1" err="1">
+              <a:rPr lang="en-US" altLang="en-US" sz="3600" b="1" dirty="0" err="1">
                 <a:latin typeface="DevLys 010" pitchFamily="2" charset="0"/>
               </a:rPr>
               <a:t>izkfIr</a:t>
             </a:r>
             <a:r>
-              <a:rPr lang="en-US" altLang="en-US" sz="3600" b="1">
+              <a:rPr lang="en-US" altLang="en-US" sz="3600" b="1" dirty="0">
                 <a:latin typeface="DevLys 010" pitchFamily="2" charset="0"/>
               </a:rPr>
               <a:t> dh </a:t>
             </a:r>
             <a:r>
-              <a:rPr lang="en-US" altLang="en-US" sz="3600" b="1" err="1">
+              <a:rPr lang="en-US" altLang="en-US" sz="3600" b="1" dirty="0" err="1">
                 <a:latin typeface="DevLys 010" pitchFamily="2" charset="0"/>
               </a:rPr>
               <a:t>rqyukRed</a:t>
             </a:r>
             <a:r>
-              <a:rPr lang="en-US" altLang="en-US" sz="3600" b="1">
+              <a:rPr lang="en-US" altLang="en-US" sz="3600" b="1" dirty="0">
                 <a:latin typeface="DevLys 010" pitchFamily="2" charset="0"/>
               </a:rPr>
               <a:t> </a:t>
             </a:r>
             <a:r>
-              <a:rPr lang="en-US" altLang="en-US" sz="3600" b="1" err="1">
+              <a:rPr lang="en-US" altLang="en-US" sz="3600" b="1" dirty="0" err="1">
                 <a:latin typeface="DevLys 010" pitchFamily="2" charset="0"/>
               </a:rPr>
               <a:t>fLFkfr</a:t>
             </a:r>
-            <a:endParaRPr lang="en-US" altLang="en-US" sz="3600" b="1">
-              <a:latin typeface="DevLys 010" pitchFamily="2" charset="0"/>
-            </a:endParaRPr>
+            <a:r>
+              <a:rPr lang="en-US" altLang="en-US" sz="3600" b="1" dirty="0">
+                <a:latin typeface="DevLys 010" pitchFamily="2" charset="0"/>
+              </a:rPr>
+              <a:t> </a:t>
+            </a:r>
+            <a:r>
+              <a:rPr lang="en-US" altLang="en-US" sz="3000" b="1" dirty="0">
+                <a:latin typeface="+mj-lt"/>
+              </a:rPr>
+              <a:t>(in Cr. )</a:t>
+            </a:r>
           </a:p>
         </p:txBody>
       </p:sp>
@@ -28330,7 +28378,7 @@
             <p:ph idx="1"/>
             <p:extLst>
               <p:ext uri="{D42A27DB-BD31-4B8C-83A1-F6EECF244321}">
-                <p14:modId xmlns:p14="http://schemas.microsoft.com/office/powerpoint/2010/main" val="542630305"/>
+                <p14:modId xmlns:p14="http://schemas.microsoft.com/office/powerpoint/2010/main" val="1701803193"/>
               </p:ext>
             </p:extLst>
           </p:nvPr>
@@ -29041,17 +29089,19 @@
         </p:nvSpPr>
         <p:spPr>
           <a:xfrm>
-            <a:off x="509016" y="1207611"/>
+            <a:off x="509016" y="1042356"/>
             <a:ext cx="11140440" cy="4351338"/>
           </a:xfrm>
         </p:spPr>
         <p:txBody>
-          <a:bodyPr/>
+          <a:bodyPr>
+            <a:noAutofit/>
+          </a:bodyPr>
           <a:lstStyle/>
           <a:p>
-            <a:pPr algn="just">
+            <a:pPr marL="363538" indent="-363538" algn="just">
               <a:lnSpc>
-                <a:spcPct val="150000"/>
+                <a:spcPct val="250000"/>
               </a:lnSpc>
               <a:spcAft>
                 <a:spcPts val="600"/>
@@ -29060,106 +29110,106 @@
               <a:buChar char="q"/>
             </a:pPr>
             <a:r>
-              <a:rPr lang="en-US" sz="2000" err="1">
+              <a:rPr lang="en-US" sz="2400" dirty="0" err="1">
                 <a:latin typeface="DevLys 010" pitchFamily="2" charset="0"/>
               </a:rPr>
               <a:t>vjkoyh</a:t>
             </a:r>
             <a:r>
-              <a:rPr lang="en-US" sz="2000">
+              <a:rPr lang="en-US" sz="2400" dirty="0">
                 <a:latin typeface="DevLys 010" pitchFamily="2" charset="0"/>
               </a:rPr>
               <a:t> </a:t>
             </a:r>
             <a:r>
-              <a:rPr lang="en-US" sz="2000" err="1">
+              <a:rPr lang="en-US" sz="2400" dirty="0" err="1">
                 <a:latin typeface="DevLys 010" pitchFamily="2" charset="0"/>
               </a:rPr>
               <a:t>fgYl</a:t>
             </a:r>
             <a:r>
-              <a:rPr lang="en-US" sz="2000">
+              <a:rPr lang="en-US" sz="2400" dirty="0">
                 <a:latin typeface="DevLys 010" pitchFamily="2" charset="0"/>
               </a:rPr>
               <a:t> </a:t>
             </a:r>
             <a:r>
-              <a:rPr lang="en-US" sz="2000" err="1">
+              <a:rPr lang="en-US" sz="2400" dirty="0" err="1">
                 <a:latin typeface="DevLys 010" pitchFamily="2" charset="0"/>
               </a:rPr>
               <a:t>jsat</a:t>
             </a:r>
             <a:r>
-              <a:rPr lang="en-US" sz="2000">
+              <a:rPr lang="en-US" sz="2400" dirty="0">
                 <a:latin typeface="DevLys 010" pitchFamily="2" charset="0"/>
               </a:rPr>
               <a:t> ds 20 </a:t>
             </a:r>
             <a:r>
-              <a:rPr lang="en-US" sz="2000" err="1">
+              <a:rPr lang="en-US" sz="2400" dirty="0" err="1">
                 <a:latin typeface="DevLys 010" pitchFamily="2" charset="0"/>
               </a:rPr>
               <a:t>ftyksa</a:t>
             </a:r>
             <a:r>
-              <a:rPr lang="en-US" sz="2000">
+              <a:rPr lang="en-US" sz="2400" dirty="0">
                 <a:latin typeface="DevLys 010" pitchFamily="2" charset="0"/>
               </a:rPr>
               <a:t> </a:t>
             </a:r>
             <a:r>
-              <a:rPr lang="en-US" sz="2000" err="1">
+              <a:rPr lang="en-US" sz="2400" dirty="0" err="1">
                 <a:latin typeface="DevLys 010" pitchFamily="2" charset="0"/>
               </a:rPr>
               <a:t>esa</a:t>
             </a:r>
             <a:r>
-              <a:rPr lang="en-US" sz="2000">
+              <a:rPr lang="en-US" sz="2400" dirty="0">
                 <a:latin typeface="DevLys 010" pitchFamily="2" charset="0"/>
               </a:rPr>
               <a:t> </a:t>
             </a:r>
             <a:r>
-              <a:rPr lang="en-US" sz="2000" err="1">
+              <a:rPr lang="en-US" sz="2400" dirty="0" err="1">
                 <a:latin typeface="DevLys 010" pitchFamily="2" charset="0"/>
               </a:rPr>
               <a:t>uhykeh@vkoaVu</a:t>
             </a:r>
             <a:r>
-              <a:rPr lang="en-US" sz="2000">
+              <a:rPr lang="en-US" sz="2400" dirty="0">
                 <a:latin typeface="DevLys 010" pitchFamily="2" charset="0"/>
               </a:rPr>
               <a:t> </a:t>
             </a:r>
             <a:r>
-              <a:rPr lang="en-US" sz="2000" err="1">
+              <a:rPr lang="en-US" sz="2400" dirty="0" err="1">
                 <a:latin typeface="DevLys 010" pitchFamily="2" charset="0"/>
               </a:rPr>
               <a:t>ij</a:t>
             </a:r>
             <a:r>
-              <a:rPr lang="en-US" sz="2000">
+              <a:rPr lang="en-US" sz="2400" dirty="0">
                 <a:latin typeface="DevLys 010" pitchFamily="2" charset="0"/>
               </a:rPr>
               <a:t> </a:t>
             </a:r>
             <a:r>
-              <a:rPr lang="en-US" sz="2000" err="1">
+              <a:rPr lang="en-US" sz="2400" dirty="0" err="1">
                 <a:latin typeface="DevLys 010" pitchFamily="2" charset="0"/>
               </a:rPr>
               <a:t>jksd</a:t>
             </a:r>
             <a:r>
-              <a:rPr lang="en-US" sz="2000">
+              <a:rPr lang="en-US" sz="2400" dirty="0">
                 <a:latin typeface="DevLys 010" pitchFamily="2" charset="0"/>
               </a:rPr>
               <a:t> </a:t>
             </a:r>
           </a:p>
           <a:p>
-            <a:pPr algn="just">
+            <a:pPr marL="363538" indent="-363538" algn="just">
               <a:lnSpc>
-                <a:spcPct val="150000"/>
+                <a:spcPct val="250000"/>
               </a:lnSpc>
               <a:spcAft>
                 <a:spcPts val="600"/>
@@ -29168,187 +29218,187 @@
               <a:buChar char="q"/>
             </a:pPr>
             <a:r>
-              <a:rPr lang="en-US" sz="2000" err="1">
+              <a:rPr lang="en-US" sz="2400" dirty="0" err="1">
                 <a:latin typeface="DevLys 010" pitchFamily="2" charset="0"/>
               </a:rPr>
               <a:t>ctjh</a:t>
             </a:r>
             <a:r>
-              <a:rPr lang="en-US" sz="2000">
+              <a:rPr lang="en-US" sz="2400" dirty="0">
                 <a:latin typeface="DevLys 010" pitchFamily="2" charset="0"/>
               </a:rPr>
               <a:t> ds </a:t>
             </a:r>
             <a:r>
-              <a:rPr lang="en-US" sz="2000" err="1">
+              <a:rPr lang="en-US" sz="2400" dirty="0" err="1">
                 <a:latin typeface="DevLys 010" pitchFamily="2" charset="0"/>
               </a:rPr>
               <a:t>izeq</a:t>
             </a:r>
             <a:r>
-              <a:rPr lang="en-US" sz="2000">
+              <a:rPr lang="en-US" sz="2400" dirty="0">
                 <a:latin typeface="DevLys 010" pitchFamily="2" charset="0"/>
               </a:rPr>
               <a:t>[k L=</a:t>
             </a:r>
             <a:r>
-              <a:rPr lang="en-US" sz="2000" err="1">
+              <a:rPr lang="en-US" sz="2400" dirty="0" err="1">
                 <a:latin typeface="DevLys 010" pitchFamily="2" charset="0"/>
               </a:rPr>
               <a:t>ksr</a:t>
             </a:r>
             <a:r>
-              <a:rPr lang="en-US" sz="2000">
+              <a:rPr lang="en-US" sz="2400" dirty="0">
                 <a:latin typeface="DevLys 010" pitchFamily="2" charset="0"/>
               </a:rPr>
               <a:t> </a:t>
             </a:r>
             <a:r>
-              <a:rPr lang="en-US" sz="2000" err="1">
+              <a:rPr lang="en-US" sz="2400" dirty="0" err="1">
                 <a:latin typeface="DevLys 010" pitchFamily="2" charset="0"/>
               </a:rPr>
               <a:t>cukl</a:t>
             </a:r>
             <a:r>
-              <a:rPr lang="en-US" sz="2000">
+              <a:rPr lang="en-US" sz="2400" dirty="0">
                 <a:latin typeface="DevLys 010" pitchFamily="2" charset="0"/>
               </a:rPr>
               <a:t> </a:t>
             </a:r>
             <a:r>
-              <a:rPr lang="en-US" sz="2000" err="1">
+              <a:rPr lang="en-US" sz="2400" dirty="0" err="1">
                 <a:latin typeface="DevLys 010" pitchFamily="2" charset="0"/>
               </a:rPr>
               <a:t>unh</a:t>
             </a:r>
             <a:r>
-              <a:rPr lang="en-US" sz="2000">
+              <a:rPr lang="en-US" sz="2400" dirty="0">
                 <a:latin typeface="DevLys 010" pitchFamily="2" charset="0"/>
               </a:rPr>
               <a:t> ds 4 </a:t>
             </a:r>
             <a:r>
-              <a:rPr lang="en-US" sz="2000" err="1">
+              <a:rPr lang="en-US" sz="2400" dirty="0" err="1">
                 <a:latin typeface="DevLys 010" pitchFamily="2" charset="0"/>
               </a:rPr>
               <a:t>ftyksa</a:t>
             </a:r>
             <a:r>
-              <a:rPr lang="en-US" sz="2000">
+              <a:rPr lang="en-US" sz="2400" dirty="0">
                 <a:latin typeface="DevLys 010" pitchFamily="2" charset="0"/>
               </a:rPr>
               <a:t> ¼HkhyokM+k] </a:t>
             </a:r>
             <a:r>
-              <a:rPr lang="en-US" sz="2000" err="1">
+              <a:rPr lang="en-US" sz="2400" dirty="0" err="1">
                 <a:latin typeface="DevLys 010" pitchFamily="2" charset="0"/>
               </a:rPr>
               <a:t>vtesj</a:t>
             </a:r>
             <a:r>
-              <a:rPr lang="en-US" sz="2000">
+              <a:rPr lang="en-US" sz="2400" dirty="0">
                 <a:latin typeface="DevLys 010" pitchFamily="2" charset="0"/>
               </a:rPr>
               <a:t>] </a:t>
             </a:r>
             <a:r>
-              <a:rPr lang="en-US" sz="2000" err="1">
+              <a:rPr lang="en-US" sz="2400" dirty="0" err="1">
                 <a:latin typeface="DevLys 010" pitchFamily="2" charset="0"/>
               </a:rPr>
               <a:t>Vksad</a:t>
             </a:r>
             <a:r>
-              <a:rPr lang="en-US" sz="2000">
+              <a:rPr lang="en-US" sz="2400" dirty="0">
                 <a:latin typeface="DevLys 010" pitchFamily="2" charset="0"/>
               </a:rPr>
               <a:t> o </a:t>
             </a:r>
             <a:r>
-              <a:rPr lang="en-US" sz="2000" err="1">
+              <a:rPr lang="en-US" sz="2400" dirty="0" err="1">
                 <a:latin typeface="DevLys 010" pitchFamily="2" charset="0"/>
               </a:rPr>
               <a:t>lokbZek</a:t>
             </a:r>
             <a:r>
-              <a:rPr lang="en-US" sz="2000">
+              <a:rPr lang="en-US" sz="2400" dirty="0">
                 <a:latin typeface="DevLys 010" pitchFamily="2" charset="0"/>
               </a:rPr>
               <a:t>/kksiqj½ ds 93 </a:t>
             </a:r>
             <a:r>
-              <a:rPr lang="en-US" sz="2000" err="1">
+              <a:rPr lang="en-US" sz="2400" dirty="0" err="1">
                 <a:latin typeface="DevLys 010" pitchFamily="2" charset="0"/>
               </a:rPr>
               <a:t>IykWV~l</a:t>
             </a:r>
             <a:r>
-              <a:rPr lang="en-US" sz="2000">
+              <a:rPr lang="en-US" sz="2400" dirty="0">
                 <a:latin typeface="DevLys 010" pitchFamily="2" charset="0"/>
               </a:rPr>
               <a:t> dh </a:t>
             </a:r>
             <a:r>
-              <a:rPr lang="en-US" sz="2000" err="1">
+              <a:rPr lang="en-US" sz="2400" dirty="0" err="1">
                 <a:latin typeface="DevLys 010" pitchFamily="2" charset="0"/>
               </a:rPr>
               <a:t>uhykeh</a:t>
             </a:r>
             <a:r>
-              <a:rPr lang="en-US" sz="2000">
+              <a:rPr lang="en-US" sz="2400" dirty="0">
                 <a:latin typeface="DevLys 010" pitchFamily="2" charset="0"/>
               </a:rPr>
               <a:t>@,yvksvkbZ@yht </a:t>
             </a:r>
             <a:r>
-              <a:rPr lang="en-US" sz="2000" err="1">
+              <a:rPr lang="en-US" sz="2400" dirty="0" err="1">
                 <a:latin typeface="DevLys 010" pitchFamily="2" charset="0"/>
               </a:rPr>
               <a:t>dks</a:t>
             </a:r>
             <a:r>
-              <a:rPr lang="en-US" sz="2000">
+              <a:rPr lang="en-US" sz="2400" dirty="0">
                 <a:latin typeface="DevLys 010" pitchFamily="2" charset="0"/>
               </a:rPr>
               <a:t> ek- </a:t>
             </a:r>
             <a:r>
-              <a:rPr lang="en-US" sz="2000" err="1">
+              <a:rPr lang="en-US" sz="2400" dirty="0" err="1">
                 <a:latin typeface="DevLys 010" pitchFamily="2" charset="0"/>
               </a:rPr>
               <a:t>U;k;ky</a:t>
             </a:r>
             <a:r>
-              <a:rPr lang="en-US" sz="2000">
+              <a:rPr lang="en-US" sz="2400" dirty="0">
                 <a:latin typeface="DevLys 010" pitchFamily="2" charset="0"/>
               </a:rPr>
               <a:t>; }</a:t>
             </a:r>
             <a:r>
-              <a:rPr lang="en-US" sz="2000" err="1">
+              <a:rPr lang="en-US" sz="2400" dirty="0" err="1">
                 <a:latin typeface="DevLys 010" pitchFamily="2" charset="0"/>
               </a:rPr>
               <a:t>kjk</a:t>
             </a:r>
             <a:r>
-              <a:rPr lang="en-US" sz="2000">
+              <a:rPr lang="en-US" sz="2400" dirty="0">
                 <a:latin typeface="DevLys 010" pitchFamily="2" charset="0"/>
               </a:rPr>
               <a:t> </a:t>
             </a:r>
             <a:r>
-              <a:rPr lang="en-US" sz="2000" err="1">
+              <a:rPr lang="en-US" sz="2400" dirty="0" err="1">
                 <a:latin typeface="DevLys 010" pitchFamily="2" charset="0"/>
               </a:rPr>
               <a:t>fujLr</a:t>
             </a:r>
-            <a:endParaRPr lang="en-US" sz="2000">
+            <a:endParaRPr lang="en-US" sz="2400" dirty="0">
               <a:latin typeface="DevLys 010" pitchFamily="2" charset="0"/>
             </a:endParaRPr>
           </a:p>
           <a:p>
-            <a:pPr algn="just">
+            <a:pPr marL="363538" indent="-363538" algn="just">
               <a:lnSpc>
-                <a:spcPct val="150000"/>
+                <a:spcPct val="250000"/>
               </a:lnSpc>
               <a:spcAft>
                 <a:spcPts val="600"/>
@@ -29357,217 +29407,217 @@
               <a:buChar char="q"/>
             </a:pPr>
             <a:r>
-              <a:rPr lang="en-US" sz="2000" err="1">
+              <a:rPr lang="en-US" sz="2400" dirty="0" err="1">
                 <a:latin typeface="DevLys 010" pitchFamily="2" charset="0"/>
               </a:rPr>
               <a:t>cnyrs</a:t>
             </a:r>
             <a:r>
-              <a:rPr lang="en-US" sz="2000">
+              <a:rPr lang="en-US" sz="2400" dirty="0">
                 <a:latin typeface="DevLys 010" pitchFamily="2" charset="0"/>
               </a:rPr>
               <a:t> </a:t>
             </a:r>
             <a:r>
-              <a:rPr lang="en-US" sz="2000" err="1">
+              <a:rPr lang="en-US" sz="2400" dirty="0" err="1">
                 <a:latin typeface="DevLys 010" pitchFamily="2" charset="0"/>
               </a:rPr>
               <a:t>oSf'od</a:t>
             </a:r>
             <a:r>
-              <a:rPr lang="en-US" sz="2000">
+              <a:rPr lang="en-US" sz="2400" dirty="0">
                 <a:latin typeface="DevLys 010" pitchFamily="2" charset="0"/>
               </a:rPr>
               <a:t> </a:t>
             </a:r>
             <a:r>
-              <a:rPr lang="en-US" sz="2000" err="1">
+              <a:rPr lang="en-US" sz="2400" dirty="0" err="1">
                 <a:latin typeface="DevLys 010" pitchFamily="2" charset="0"/>
               </a:rPr>
               <a:t>ifjn</a:t>
             </a:r>
             <a:r>
-              <a:rPr lang="en-US" sz="2000">
+              <a:rPr lang="en-US" sz="2400" dirty="0">
                 <a:latin typeface="DevLys 010" pitchFamily="2" charset="0"/>
               </a:rPr>
               <a:t>`'; ds </a:t>
             </a:r>
             <a:r>
-              <a:rPr lang="en-US" sz="2000" err="1">
+              <a:rPr lang="en-US" sz="2400" dirty="0" err="1">
                 <a:latin typeface="DevLys 010" pitchFamily="2" charset="0"/>
               </a:rPr>
               <a:t>dkj.k</a:t>
             </a:r>
             <a:r>
-              <a:rPr lang="en-US" sz="2000">
+              <a:rPr lang="en-US" sz="2400" dirty="0">
                 <a:latin typeface="DevLys 010" pitchFamily="2" charset="0"/>
               </a:rPr>
               <a:t> [</a:t>
             </a:r>
             <a:r>
-              <a:rPr lang="en-US" sz="2000" err="1">
+              <a:rPr lang="en-US" sz="2400" dirty="0" err="1">
                 <a:latin typeface="DevLys 010" pitchFamily="2" charset="0"/>
               </a:rPr>
               <a:t>kfut</a:t>
             </a:r>
             <a:r>
-              <a:rPr lang="en-US" sz="2000">
+              <a:rPr lang="en-US" sz="2400" dirty="0">
                 <a:latin typeface="DevLys 010" pitchFamily="2" charset="0"/>
               </a:rPr>
               <a:t> </a:t>
             </a:r>
             <a:r>
-              <a:rPr lang="en-US" sz="2000" err="1">
+              <a:rPr lang="en-US" sz="2400" dirty="0" err="1">
                 <a:latin typeface="DevLys 010" pitchFamily="2" charset="0"/>
               </a:rPr>
               <a:t>DokVZt</a:t>
             </a:r>
             <a:r>
-              <a:rPr lang="en-US" sz="2000">
+              <a:rPr lang="en-US" sz="2400" dirty="0">
                 <a:latin typeface="DevLys 010" pitchFamily="2" charset="0"/>
               </a:rPr>
               <a:t>] </a:t>
             </a:r>
             <a:r>
-              <a:rPr lang="en-US" sz="2000" err="1">
+              <a:rPr lang="en-US" sz="2400" dirty="0" err="1">
                 <a:latin typeface="DevLys 010" pitchFamily="2" charset="0"/>
               </a:rPr>
               <a:t>QSYlikj</a:t>
             </a:r>
             <a:r>
-              <a:rPr lang="en-US" sz="2000">
+              <a:rPr lang="en-US" sz="2400" dirty="0">
                 <a:latin typeface="DevLys 010" pitchFamily="2" charset="0"/>
               </a:rPr>
               <a:t> o Dys dk </a:t>
             </a:r>
             <a:r>
-              <a:rPr lang="en-US" sz="2000" err="1">
+              <a:rPr lang="en-US" sz="2400" dirty="0" err="1">
                 <a:latin typeface="DevLys 010" pitchFamily="2" charset="0"/>
               </a:rPr>
               <a:t>mRiknu</a:t>
             </a:r>
             <a:r>
-              <a:rPr lang="en-US" sz="2000">
+              <a:rPr lang="en-US" sz="2400" dirty="0">
                 <a:latin typeface="DevLys 010" pitchFamily="2" charset="0"/>
               </a:rPr>
               <a:t> </a:t>
             </a:r>
             <a:r>
-              <a:rPr lang="en-US" sz="2000" err="1">
+              <a:rPr lang="en-US" sz="2400" dirty="0" err="1">
                 <a:latin typeface="DevLys 010" pitchFamily="2" charset="0"/>
               </a:rPr>
               <a:t>izHkkfor</a:t>
             </a:r>
-            <a:endParaRPr lang="en-US" sz="2000">
+            <a:endParaRPr lang="en-US" sz="2400" dirty="0">
               <a:latin typeface="DevLys 010" pitchFamily="2" charset="0"/>
             </a:endParaRPr>
           </a:p>
           <a:p>
-            <a:pPr algn="just">
+            <a:pPr marL="363538" indent="-363538" algn="just">
               <a:lnSpc>
-                <a:spcPct val="150000"/>
+                <a:spcPct val="250000"/>
               </a:lnSpc>
               <a:buFont typeface="Wingdings" panose="05000000000000000000" pitchFamily="2" charset="2"/>
               <a:buChar char="q"/>
             </a:pPr>
             <a:r>
-              <a:rPr lang="en-US" sz="2000">
+              <a:rPr lang="en-US" sz="2400" dirty="0">
                 <a:latin typeface="DevLys 010" pitchFamily="2" charset="0"/>
               </a:rPr>
               <a:t>[</a:t>
             </a:r>
             <a:r>
-              <a:rPr lang="en-US" sz="2000" err="1">
+              <a:rPr lang="en-US" sz="2400" dirty="0" err="1">
                 <a:latin typeface="DevLys 010" pitchFamily="2" charset="0"/>
               </a:rPr>
               <a:t>kfut</a:t>
             </a:r>
             <a:r>
-              <a:rPr lang="en-US" sz="2000">
+              <a:rPr lang="en-US" sz="2400" dirty="0">
                 <a:latin typeface="DevLys 010" pitchFamily="2" charset="0"/>
               </a:rPr>
               <a:t> </a:t>
             </a:r>
             <a:r>
-              <a:rPr lang="en-US" sz="2000" err="1">
+              <a:rPr lang="en-US" sz="2400" dirty="0" err="1">
                 <a:latin typeface="DevLys 010" pitchFamily="2" charset="0"/>
               </a:rPr>
               <a:t>ykbZeLVksu</a:t>
             </a:r>
             <a:r>
-              <a:rPr lang="en-US" sz="2000">
+              <a:rPr lang="en-US" sz="2400" dirty="0">
                 <a:latin typeface="DevLys 010" pitchFamily="2" charset="0"/>
               </a:rPr>
               <a:t>] </a:t>
             </a:r>
             <a:r>
-              <a:rPr lang="en-US" sz="2000" err="1">
+              <a:rPr lang="en-US" sz="2400" dirty="0" err="1">
                 <a:latin typeface="DevLys 010" pitchFamily="2" charset="0"/>
               </a:rPr>
               <a:t>ysM</a:t>
             </a:r>
             <a:r>
-              <a:rPr lang="en-US" sz="2000">
+              <a:rPr lang="en-US" sz="2400" dirty="0">
                 <a:latin typeface="DevLys 010" pitchFamily="2" charset="0"/>
               </a:rPr>
               <a:t> o </a:t>
             </a:r>
             <a:r>
-              <a:rPr lang="en-US" sz="2000" err="1">
+              <a:rPr lang="en-US" sz="2400" dirty="0" err="1">
                 <a:latin typeface="DevLys 010" pitchFamily="2" charset="0"/>
               </a:rPr>
               <a:t>ftad</a:t>
             </a:r>
             <a:r>
-              <a:rPr lang="en-US" sz="2000">
+              <a:rPr lang="en-US" sz="2400" dirty="0">
                 <a:latin typeface="DevLys 010" pitchFamily="2" charset="0"/>
               </a:rPr>
               <a:t> ds </a:t>
             </a:r>
             <a:r>
-              <a:rPr lang="en-US" sz="2000" err="1">
+              <a:rPr lang="en-US" sz="2400" dirty="0" err="1">
                 <a:latin typeface="DevLys 010" pitchFamily="2" charset="0"/>
               </a:rPr>
               <a:t>mRiknu</a:t>
             </a:r>
             <a:r>
-              <a:rPr lang="en-US" sz="2000">
+              <a:rPr lang="en-US" sz="2400" dirty="0">
                 <a:latin typeface="DevLys 010" pitchFamily="2" charset="0"/>
               </a:rPr>
               <a:t> </a:t>
             </a:r>
             <a:r>
-              <a:rPr lang="en-US" sz="2000" err="1">
+              <a:rPr lang="en-US" sz="2400" dirty="0" err="1">
                 <a:latin typeface="DevLys 010" pitchFamily="2" charset="0"/>
               </a:rPr>
               <a:t>esa</a:t>
             </a:r>
             <a:r>
-              <a:rPr lang="en-US" sz="2000">
+              <a:rPr lang="en-US" sz="2400" dirty="0">
                 <a:latin typeface="DevLys 010" pitchFamily="2" charset="0"/>
               </a:rPr>
               <a:t> vis{</a:t>
             </a:r>
             <a:r>
-              <a:rPr lang="en-US" sz="2000" err="1">
+              <a:rPr lang="en-US" sz="2400" dirty="0" err="1">
                 <a:latin typeface="DevLys 010" pitchFamily="2" charset="0"/>
               </a:rPr>
               <a:t>kkd`r</a:t>
             </a:r>
             <a:r>
-              <a:rPr lang="en-US" sz="2000">
+              <a:rPr lang="en-US" sz="2400" dirty="0">
                 <a:latin typeface="DevLys 010" pitchFamily="2" charset="0"/>
               </a:rPr>
               <a:t> de </a:t>
             </a:r>
             <a:r>
-              <a:rPr lang="en-US" sz="2000" err="1">
+              <a:rPr lang="en-US" sz="2400" dirty="0" err="1">
                 <a:latin typeface="DevLys 010" pitchFamily="2" charset="0"/>
               </a:rPr>
               <a:t>o`f</a:t>
             </a:r>
             <a:r>
-              <a:rPr lang="en-US" sz="2000">
+              <a:rPr lang="en-US" sz="2400" dirty="0">
                 <a:latin typeface="DevLys 010" pitchFamily="2" charset="0"/>
               </a:rPr>
               <a:t>)</a:t>
@@ -29575,10 +29625,13 @@
           </a:p>
           <a:p>
             <a:pPr algn="just">
+              <a:lnSpc>
+                <a:spcPct val="250000"/>
+              </a:lnSpc>
               <a:buFont typeface="Wingdings" panose="05000000000000000000" pitchFamily="2" charset="2"/>
               <a:buChar char="q"/>
             </a:pPr>
-            <a:endParaRPr lang="en-US" b="1" dirty="0">
+            <a:endParaRPr lang="en-US" sz="2400" b="1" dirty="0">
               <a:latin typeface="DevLys 010" pitchFamily="2" charset="0"/>
             </a:endParaRPr>
           </a:p>
@@ -30177,7 +30230,7 @@
         </p:nvSpPr>
         <p:spPr>
           <a:xfrm>
-            <a:off x="630828" y="2731369"/>
+            <a:off x="453619" y="4020731"/>
             <a:ext cx="10930344" cy="2438400"/>
           </a:xfrm>
           <a:prstGeom prst="rect">
@@ -30219,7 +30272,7 @@
               <a:buChar char="q"/>
             </a:pPr>
             <a:r>
-              <a:rPr lang="en-US" sz="2000" err="1">
+              <a:rPr lang="en-US" sz="2400" dirty="0" err="1">
                 <a:latin typeface="DevLys 010" pitchFamily="2" charset="0"/>
                 <a:ea typeface="Calibri" panose="020F0502020204030204" pitchFamily="34" charset="0"/>
                 <a:cs typeface="Mangal" panose="02040503050203030202" pitchFamily="18" charset="0"/>
@@ -30227,7 +30280,7 @@
               <a:t>vk</a:t>
             </a:r>
             <a:r>
-              <a:rPr lang="en-US" sz="2000">
+              <a:rPr lang="en-US" sz="2400" dirty="0">
                 <a:latin typeface="DevLys 010" pitchFamily="2" charset="0"/>
                 <a:ea typeface="Calibri" panose="020F0502020204030204" pitchFamily="34" charset="0"/>
                 <a:cs typeface="Mangal" panose="02040503050203030202" pitchFamily="18" charset="0"/>
@@ -30235,7 +30288,7 @@
               <a:t>; y{; % 14001 </a:t>
             </a:r>
             <a:r>
-              <a:rPr lang="en-US" sz="2000" err="1">
+              <a:rPr lang="en-US" sz="2400" dirty="0" err="1">
                 <a:latin typeface="DevLys 010" pitchFamily="2" charset="0"/>
                 <a:ea typeface="Calibri" panose="020F0502020204030204" pitchFamily="34" charset="0"/>
                 <a:cs typeface="Mangal" panose="02040503050203030202" pitchFamily="18" charset="0"/>
@@ -30243,7 +30296,7 @@
               <a:t>djksM</a:t>
             </a:r>
             <a:r>
-              <a:rPr lang="en-US" sz="2000">
+              <a:rPr lang="en-US" sz="2400" dirty="0">
                 <a:latin typeface="DevLys 010" pitchFamily="2" charset="0"/>
                 <a:ea typeface="Calibri" panose="020F0502020204030204" pitchFamily="34" charset="0"/>
                 <a:cs typeface="Mangal" panose="02040503050203030202" pitchFamily="18" charset="0"/>
@@ -30263,7 +30316,7 @@
               <a:buChar char="q"/>
             </a:pPr>
             <a:r>
-              <a:rPr lang="en-US" sz="2000" err="1">
+              <a:rPr lang="en-US" sz="2400" dirty="0" err="1">
                 <a:latin typeface="DevLys 010" pitchFamily="2" charset="0"/>
                 <a:ea typeface="Calibri" panose="020F0502020204030204" pitchFamily="34" charset="0"/>
                 <a:cs typeface="Mangal" panose="02040503050203030202" pitchFamily="18" charset="0"/>
@@ -30271,7 +30324,7 @@
               <a:t>viszy</a:t>
             </a:r>
             <a:r>
-              <a:rPr lang="en-US" sz="2000">
+              <a:rPr lang="en-US" sz="2400" dirty="0">
                 <a:latin typeface="DevLys 010" pitchFamily="2" charset="0"/>
                 <a:ea typeface="Calibri" panose="020F0502020204030204" pitchFamily="34" charset="0"/>
                 <a:cs typeface="Mangal" panose="02040503050203030202" pitchFamily="18" charset="0"/>
@@ -30279,7 +30332,7 @@
               <a:t> </a:t>
             </a:r>
             <a:r>
-              <a:rPr lang="en-US" sz="2000" err="1">
+              <a:rPr lang="en-US" sz="2400" dirty="0" err="1">
                 <a:latin typeface="DevLys 010" pitchFamily="2" charset="0"/>
                 <a:ea typeface="Calibri" panose="020F0502020204030204" pitchFamily="34" charset="0"/>
                 <a:cs typeface="Mangal" panose="02040503050203030202" pitchFamily="18" charset="0"/>
@@ -30287,7 +30340,39 @@
               <a:t>ekg</a:t>
             </a:r>
             <a:r>
-              <a:rPr lang="en-US" sz="2000">
+              <a:rPr lang="en-US" sz="2400" dirty="0">
+                <a:latin typeface="DevLys 010" pitchFamily="2" charset="0"/>
+                <a:ea typeface="Calibri" panose="020F0502020204030204" pitchFamily="34" charset="0"/>
+                <a:cs typeface="Mangal" panose="02040503050203030202" pitchFamily="18" charset="0"/>
+              </a:rPr>
+              <a:t> dk y{; % 840 </a:t>
+            </a:r>
+            <a:r>
+              <a:rPr lang="en-US" sz="2400" dirty="0" err="1">
+                <a:latin typeface="DevLys 010" pitchFamily="2" charset="0"/>
+                <a:ea typeface="Calibri" panose="020F0502020204030204" pitchFamily="34" charset="0"/>
+                <a:cs typeface="Mangal" panose="02040503050203030202" pitchFamily="18" charset="0"/>
+              </a:rPr>
+              <a:t>djksM</a:t>
+            </a:r>
+            <a:r>
+              <a:rPr lang="en-US" sz="2400" dirty="0">
+                <a:latin typeface="DevLys 010" pitchFamily="2" charset="0"/>
+                <a:ea typeface="Calibri" panose="020F0502020204030204" pitchFamily="34" charset="0"/>
+                <a:cs typeface="Mangal" panose="02040503050203030202" pitchFamily="18" charset="0"/>
+              </a:rPr>
+              <a:t>+] </a:t>
+            </a:r>
+            <a:r>
+              <a:rPr lang="en-US" sz="2400" dirty="0" err="1">
+                <a:latin typeface="DevLys 010" pitchFamily="2" charset="0"/>
+                <a:ea typeface="Calibri" panose="020F0502020204030204" pitchFamily="34" charset="0"/>
+                <a:cs typeface="Mangal" panose="02040503050203030202" pitchFamily="18" charset="0"/>
+              </a:rPr>
+              <a:t>jktLo</a:t>
+            </a:r>
+            <a:r>
+              <a:rPr lang="en-US" sz="2400" dirty="0">
                 <a:latin typeface="DevLys 010" pitchFamily="2" charset="0"/>
                 <a:ea typeface="Calibri" panose="020F0502020204030204" pitchFamily="34" charset="0"/>
                 <a:cs typeface="Mangal" panose="02040503050203030202" pitchFamily="18" charset="0"/>
@@ -30295,23 +30380,23 @@
               <a:t> </a:t>
             </a:r>
             <a:r>
-              <a:rPr lang="en-US" sz="2000" err="1">
-                <a:latin typeface="DevLys 010" pitchFamily="2" charset="0"/>
-                <a:ea typeface="Calibri" panose="020F0502020204030204" pitchFamily="34" charset="0"/>
-                <a:cs typeface="Mangal" panose="02040503050203030202" pitchFamily="18" charset="0"/>
-              </a:rPr>
-              <a:t>dk</a:t>
-            </a:r>
-            <a:r>
-              <a:rPr lang="en-US" sz="2000">
-                <a:latin typeface="DevLys 010" pitchFamily="2" charset="0"/>
-                <a:ea typeface="Calibri" panose="020F0502020204030204" pitchFamily="34" charset="0"/>
-                <a:cs typeface="Mangal" panose="02040503050203030202" pitchFamily="18" charset="0"/>
-              </a:rPr>
-              <a:t> y{; % 840 </a:t>
-            </a:r>
-            <a:r>
-              <a:rPr lang="en-US" sz="2000" err="1">
+              <a:rPr lang="en-US" sz="2400" dirty="0" err="1">
+                <a:latin typeface="DevLys 010" pitchFamily="2" charset="0"/>
+                <a:ea typeface="Calibri" panose="020F0502020204030204" pitchFamily="34" charset="0"/>
+                <a:cs typeface="Mangal" panose="02040503050203030202" pitchFamily="18" charset="0"/>
+              </a:rPr>
+              <a:t>izkfIr</a:t>
+            </a:r>
+            <a:r>
+              <a:rPr lang="en-US" sz="2400" dirty="0">
+                <a:latin typeface="DevLys 010" pitchFamily="2" charset="0"/>
+                <a:ea typeface="Calibri" panose="020F0502020204030204" pitchFamily="34" charset="0"/>
+                <a:cs typeface="Mangal" panose="02040503050203030202" pitchFamily="18" charset="0"/>
+              </a:rPr>
+              <a:t> % 545 </a:t>
+            </a:r>
+            <a:r>
+              <a:rPr lang="en-US" sz="2400" dirty="0" err="1">
                 <a:latin typeface="DevLys 010" pitchFamily="2" charset="0"/>
                 <a:ea typeface="Calibri" panose="020F0502020204030204" pitchFamily="34" charset="0"/>
                 <a:cs typeface="Mangal" panose="02040503050203030202" pitchFamily="18" charset="0"/>
@@ -30319,47 +30404,15 @@
               <a:t>djksM</a:t>
             </a:r>
             <a:r>
-              <a:rPr lang="en-US" sz="2000">
-                <a:latin typeface="DevLys 010" pitchFamily="2" charset="0"/>
-                <a:ea typeface="Calibri" panose="020F0502020204030204" pitchFamily="34" charset="0"/>
-                <a:cs typeface="Mangal" panose="02040503050203030202" pitchFamily="18" charset="0"/>
-              </a:rPr>
-              <a:t>+] </a:t>
-            </a:r>
-            <a:r>
-              <a:rPr lang="en-US" sz="2000" err="1">
-                <a:latin typeface="DevLys 010" pitchFamily="2" charset="0"/>
-                <a:ea typeface="Calibri" panose="020F0502020204030204" pitchFamily="34" charset="0"/>
-                <a:cs typeface="Mangal" panose="02040503050203030202" pitchFamily="18" charset="0"/>
-              </a:rPr>
-              <a:t>jktLo</a:t>
-            </a:r>
-            <a:r>
-              <a:rPr lang="en-US" sz="2000">
-                <a:latin typeface="DevLys 010" pitchFamily="2" charset="0"/>
-                <a:ea typeface="Calibri" panose="020F0502020204030204" pitchFamily="34" charset="0"/>
-                <a:cs typeface="Mangal" panose="02040503050203030202" pitchFamily="18" charset="0"/>
-              </a:rPr>
-              <a:t> </a:t>
-            </a:r>
-            <a:r>
-              <a:rPr lang="en-US" sz="2000" err="1">
-                <a:latin typeface="DevLys 010" pitchFamily="2" charset="0"/>
-                <a:ea typeface="Calibri" panose="020F0502020204030204" pitchFamily="34" charset="0"/>
-                <a:cs typeface="Mangal" panose="02040503050203030202" pitchFamily="18" charset="0"/>
-              </a:rPr>
-              <a:t>izkfIr</a:t>
-            </a:r>
-            <a:r>
-              <a:rPr lang="en-US" sz="2000">
-                <a:latin typeface="DevLys 010" pitchFamily="2" charset="0"/>
-                <a:ea typeface="Calibri" panose="020F0502020204030204" pitchFamily="34" charset="0"/>
-                <a:cs typeface="Mangal" panose="02040503050203030202" pitchFamily="18" charset="0"/>
-              </a:rPr>
-              <a:t> % 545 </a:t>
-            </a:r>
-            <a:r>
-              <a:rPr lang="en-US" sz="2000" err="1">
+              <a:rPr lang="en-US" sz="2400" dirty="0">
+                <a:latin typeface="DevLys 010" pitchFamily="2" charset="0"/>
+                <a:ea typeface="Calibri" panose="020F0502020204030204" pitchFamily="34" charset="0"/>
+                <a:cs typeface="Mangal" panose="02040503050203030202" pitchFamily="18" charset="0"/>
+              </a:rPr>
+              <a:t>+ ¼295 </a:t>
+            </a:r>
+            <a:r>
+              <a:rPr lang="en-US" sz="2400" dirty="0" err="1">
                 <a:latin typeface="DevLys 010" pitchFamily="2" charset="0"/>
                 <a:ea typeface="Calibri" panose="020F0502020204030204" pitchFamily="34" charset="0"/>
                 <a:cs typeface="Mangal" panose="02040503050203030202" pitchFamily="18" charset="0"/>
@@ -30367,42 +30420,13 @@
               <a:t>djksM</a:t>
             </a:r>
             <a:r>
-              <a:rPr lang="en-US" sz="2000">
-                <a:latin typeface="DevLys 010" pitchFamily="2" charset="0"/>
-                <a:ea typeface="Calibri" panose="020F0502020204030204" pitchFamily="34" charset="0"/>
-                <a:cs typeface="Mangal" panose="02040503050203030202" pitchFamily="18" charset="0"/>
-              </a:rPr>
-              <a:t>+ ¼295 </a:t>
-            </a:r>
-            <a:r>
-              <a:rPr lang="en-US" sz="2000" err="1">
-                <a:latin typeface="DevLys 010" pitchFamily="2" charset="0"/>
-                <a:ea typeface="Calibri" panose="020F0502020204030204" pitchFamily="34" charset="0"/>
-                <a:cs typeface="Mangal" panose="02040503050203030202" pitchFamily="18" charset="0"/>
-              </a:rPr>
-              <a:t>djksM</a:t>
-            </a:r>
-            <a:r>
-              <a:rPr lang="en-US" sz="2000">
-                <a:latin typeface="DevLys 010" pitchFamily="2" charset="0"/>
-                <a:ea typeface="Calibri" panose="020F0502020204030204" pitchFamily="34" charset="0"/>
-                <a:cs typeface="Mangal" panose="02040503050203030202" pitchFamily="18" charset="0"/>
-              </a:rPr>
-              <a:t>+ </a:t>
-            </a:r>
-            <a:r>
-              <a:rPr lang="en-US" sz="2000" err="1">
-                <a:latin typeface="DevLys 010" pitchFamily="2" charset="0"/>
-                <a:ea typeface="Calibri" panose="020F0502020204030204" pitchFamily="34" charset="0"/>
-                <a:cs typeface="Mangal" panose="02040503050203030202" pitchFamily="18" charset="0"/>
-              </a:rPr>
-              <a:t>de½</a:t>
-            </a:r>
-            <a:endParaRPr lang="en-US" sz="2000">
-              <a:latin typeface="DevLys 010" pitchFamily="2" charset="0"/>
-              <a:ea typeface="Calibri" panose="020F0502020204030204" pitchFamily="34" charset="0"/>
-              <a:cs typeface="Mangal" panose="02040503050203030202" pitchFamily="18" charset="0"/>
-            </a:endParaRPr>
+              <a:rPr lang="en-US" sz="2400" dirty="0">
+                <a:latin typeface="DevLys 010" pitchFamily="2" charset="0"/>
+                <a:ea typeface="Calibri" panose="020F0502020204030204" pitchFamily="34" charset="0"/>
+                <a:cs typeface="Mangal" panose="02040503050203030202" pitchFamily="18" charset="0"/>
+              </a:rPr>
+              <a:t>+ de½</a:t>
+            </a:r>
           </a:p>
           <a:p>
             <a:pPr marL="180000" indent="-342900" algn="just">
@@ -30416,39 +30440,15 @@
               <a:buChar char="q"/>
             </a:pPr>
             <a:r>
-              <a:rPr lang="en-US" sz="2000" err="1">
-                <a:latin typeface="DevLys 010" pitchFamily="2" charset="0"/>
-                <a:ea typeface="Calibri" panose="020F0502020204030204" pitchFamily="34" charset="0"/>
-                <a:cs typeface="Mangal" panose="02040503050203030202" pitchFamily="18" charset="0"/>
-              </a:rPr>
-              <a:t>deh</a:t>
-            </a:r>
-            <a:r>
-              <a:rPr lang="en-US" sz="2000">
-                <a:latin typeface="DevLys 010" pitchFamily="2" charset="0"/>
-                <a:ea typeface="Calibri" panose="020F0502020204030204" pitchFamily="34" charset="0"/>
-                <a:cs typeface="Mangal" panose="02040503050203030202" pitchFamily="18" charset="0"/>
-              </a:rPr>
-              <a:t> </a:t>
-            </a:r>
-            <a:r>
-              <a:rPr lang="en-US" sz="2000" err="1">
-                <a:latin typeface="DevLys 010" pitchFamily="2" charset="0"/>
-                <a:ea typeface="Calibri" panose="020F0502020204030204" pitchFamily="34" charset="0"/>
-                <a:cs typeface="Mangal" panose="02040503050203030202" pitchFamily="18" charset="0"/>
-              </a:rPr>
-              <a:t>dk</a:t>
-            </a:r>
-            <a:r>
-              <a:rPr lang="en-US" sz="2000">
-                <a:latin typeface="DevLys 010" pitchFamily="2" charset="0"/>
-                <a:ea typeface="Calibri" panose="020F0502020204030204" pitchFamily="34" charset="0"/>
-                <a:cs typeface="Mangal" panose="02040503050203030202" pitchFamily="18" charset="0"/>
-              </a:rPr>
-              <a:t> </a:t>
-            </a:r>
-            <a:r>
-              <a:rPr lang="en-US" sz="2000" err="1">
+              <a:rPr lang="en-US" sz="2400" dirty="0">
+                <a:latin typeface="DevLys 010" pitchFamily="2" charset="0"/>
+                <a:ea typeface="Calibri" panose="020F0502020204030204" pitchFamily="34" charset="0"/>
+                <a:cs typeface="Mangal" panose="02040503050203030202" pitchFamily="18" charset="0"/>
+              </a:rPr>
+              <a:t>deh dk </a:t>
+            </a:r>
+            <a:r>
+              <a:rPr lang="en-US" sz="2400" dirty="0" err="1">
                 <a:latin typeface="DevLys 010" pitchFamily="2" charset="0"/>
                 <a:ea typeface="Calibri" panose="020F0502020204030204" pitchFamily="34" charset="0"/>
                 <a:cs typeface="Mangal" panose="02040503050203030202" pitchFamily="18" charset="0"/>
@@ -30456,7 +30456,7 @@
               <a:t>dkj.k</a:t>
             </a:r>
             <a:r>
-              <a:rPr lang="en-US" sz="2000">
+              <a:rPr lang="en-US" sz="2400" dirty="0">
                 <a:latin typeface="DevLys 010" pitchFamily="2" charset="0"/>
                 <a:ea typeface="Calibri" panose="020F0502020204030204" pitchFamily="34" charset="0"/>
                 <a:cs typeface="Mangal" panose="02040503050203030202" pitchFamily="18" charset="0"/>
@@ -30476,7 +30476,7 @@
               <a:buChar char="v"/>
             </a:pPr>
             <a:r>
-              <a:rPr lang="en-US" sz="2000" err="1">
+              <a:rPr lang="en-US" sz="2400" dirty="0" err="1">
                 <a:latin typeface="DevLys 010" pitchFamily="2" charset="0"/>
                 <a:ea typeface="Calibri" panose="020F0502020204030204" pitchFamily="34" charset="0"/>
                 <a:cs typeface="Mangal" panose="02040503050203030202" pitchFamily="18" charset="0"/>
@@ -30484,7 +30484,7 @@
               <a:t>ekpZ</a:t>
             </a:r>
             <a:r>
-              <a:rPr lang="en-US" sz="2000">
+              <a:rPr lang="en-US" sz="2400" dirty="0">
                 <a:latin typeface="DevLys 010" pitchFamily="2" charset="0"/>
                 <a:ea typeface="Calibri" panose="020F0502020204030204" pitchFamily="34" charset="0"/>
                 <a:cs typeface="Mangal" panose="02040503050203030202" pitchFamily="18" charset="0"/>
@@ -30492,7 +30492,7 @@
               <a:t>] 2025 </a:t>
             </a:r>
             <a:r>
-              <a:rPr lang="en-US" sz="2000" err="1">
+              <a:rPr lang="en-US" sz="2400" dirty="0" err="1">
                 <a:latin typeface="DevLys 010" pitchFamily="2" charset="0"/>
                 <a:ea typeface="Calibri" panose="020F0502020204030204" pitchFamily="34" charset="0"/>
                 <a:cs typeface="Mangal" panose="02040503050203030202" pitchFamily="18" charset="0"/>
@@ -30500,7 +30500,7 @@
               <a:t>esa</a:t>
             </a:r>
             <a:r>
-              <a:rPr lang="en-US" sz="2000">
+              <a:rPr lang="en-US" sz="2400" dirty="0">
                 <a:latin typeface="DevLys 010" pitchFamily="2" charset="0"/>
                 <a:ea typeface="Calibri" panose="020F0502020204030204" pitchFamily="34" charset="0"/>
                 <a:cs typeface="Mangal" panose="02040503050203030202" pitchFamily="18" charset="0"/>
@@ -30508,7 +30508,7 @@
               <a:t> </a:t>
             </a:r>
             <a:r>
-              <a:rPr lang="en-US" sz="2000" err="1">
+              <a:rPr lang="en-US" sz="2400" dirty="0" err="1">
                 <a:latin typeface="DevLys 010" pitchFamily="2" charset="0"/>
                 <a:ea typeface="Calibri" panose="020F0502020204030204" pitchFamily="34" charset="0"/>
                 <a:cs typeface="Mangal" panose="02040503050203030202" pitchFamily="18" charset="0"/>
@@ -30516,7 +30516,7 @@
               <a:t>vfxze</a:t>
             </a:r>
             <a:r>
-              <a:rPr lang="en-US" sz="2000">
+              <a:rPr lang="en-US" sz="2400" dirty="0">
                 <a:latin typeface="DevLys 010" pitchFamily="2" charset="0"/>
                 <a:ea typeface="Calibri" panose="020F0502020204030204" pitchFamily="34" charset="0"/>
                 <a:cs typeface="Mangal" panose="02040503050203030202" pitchFamily="18" charset="0"/>
@@ -30524,7 +30524,7 @@
               <a:t> </a:t>
             </a:r>
             <a:r>
-              <a:rPr lang="en-US" sz="2000" err="1">
+              <a:rPr lang="en-US" sz="2400" dirty="0" err="1">
                 <a:latin typeface="DevLys 010" pitchFamily="2" charset="0"/>
                 <a:ea typeface="Calibri" panose="020F0502020204030204" pitchFamily="34" charset="0"/>
                 <a:cs typeface="Mangal" panose="02040503050203030202" pitchFamily="18" charset="0"/>
@@ -30532,7 +30532,7 @@
               <a:t>izkfIr</a:t>
             </a:r>
             <a:r>
-              <a:rPr lang="en-US" sz="2000">
+              <a:rPr lang="en-US" sz="2400" dirty="0">
                 <a:latin typeface="DevLys 010" pitchFamily="2" charset="0"/>
                 <a:ea typeface="Calibri" panose="020F0502020204030204" pitchFamily="34" charset="0"/>
                 <a:cs typeface="Mangal" panose="02040503050203030202" pitchFamily="18" charset="0"/>
@@ -30540,7 +30540,7 @@
               <a:t> % 198 </a:t>
             </a:r>
             <a:r>
-              <a:rPr lang="en-US" sz="2000" err="1">
+              <a:rPr lang="en-US" sz="2400" dirty="0" err="1">
                 <a:latin typeface="DevLys 010" pitchFamily="2" charset="0"/>
                 <a:ea typeface="Calibri" panose="020F0502020204030204" pitchFamily="34" charset="0"/>
                 <a:cs typeface="Mangal" panose="02040503050203030202" pitchFamily="18" charset="0"/>
@@ -30548,7 +30548,7 @@
               <a:t>djksM</a:t>
             </a:r>
             <a:r>
-              <a:rPr lang="en-US" sz="2000">
+              <a:rPr lang="en-US" sz="2400" dirty="0">
                 <a:latin typeface="DevLys 010" pitchFamily="2" charset="0"/>
                 <a:ea typeface="Calibri" panose="020F0502020204030204" pitchFamily="34" charset="0"/>
                 <a:cs typeface="Mangal" panose="02040503050203030202" pitchFamily="18" charset="0"/>
@@ -30568,7 +30568,7 @@
               <a:buChar char="v"/>
             </a:pPr>
             <a:r>
-              <a:rPr lang="en-US" sz="2000" err="1">
+              <a:rPr lang="en-US" sz="2400" dirty="0" err="1">
                 <a:latin typeface="DevLys 010" pitchFamily="2" charset="0"/>
                 <a:ea typeface="Calibri" panose="020F0502020204030204" pitchFamily="34" charset="0"/>
                 <a:cs typeface="Mangal" panose="02040503050203030202" pitchFamily="18" charset="0"/>
@@ -30576,7 +30576,7 @@
               <a:t>vjkoyh</a:t>
             </a:r>
             <a:r>
-              <a:rPr lang="en-US" sz="2000">
+              <a:rPr lang="en-US" sz="2400" dirty="0">
                 <a:latin typeface="DevLys 010" pitchFamily="2" charset="0"/>
                 <a:ea typeface="Calibri" panose="020F0502020204030204" pitchFamily="34" charset="0"/>
                 <a:cs typeface="Mangal" panose="02040503050203030202" pitchFamily="18" charset="0"/>
@@ -30584,7 +30584,7 @@
               <a:t> </a:t>
             </a:r>
             <a:r>
-              <a:rPr lang="en-US" sz="2000" err="1">
+              <a:rPr lang="en-US" sz="2400" dirty="0" err="1">
                 <a:latin typeface="DevLys 010" pitchFamily="2" charset="0"/>
                 <a:ea typeface="Calibri" panose="020F0502020204030204" pitchFamily="34" charset="0"/>
                 <a:cs typeface="Mangal" panose="02040503050203030202" pitchFamily="18" charset="0"/>
@@ -30592,7 +30592,7 @@
               <a:t>fgYl</a:t>
             </a:r>
             <a:r>
-              <a:rPr lang="en-US" sz="2000">
+              <a:rPr lang="en-US" sz="2400" dirty="0">
                 <a:latin typeface="DevLys 010" pitchFamily="2" charset="0"/>
                 <a:ea typeface="Calibri" panose="020F0502020204030204" pitchFamily="34" charset="0"/>
                 <a:cs typeface="Mangal" panose="02040503050203030202" pitchFamily="18" charset="0"/>
@@ -30600,7 +30600,7 @@
               <a:t> </a:t>
             </a:r>
             <a:r>
-              <a:rPr lang="en-US" sz="2000" err="1">
+              <a:rPr lang="en-US" sz="2400" dirty="0" err="1">
                 <a:latin typeface="DevLys 010" pitchFamily="2" charset="0"/>
                 <a:ea typeface="Calibri" panose="020F0502020204030204" pitchFamily="34" charset="0"/>
                 <a:cs typeface="Mangal" panose="02040503050203030202" pitchFamily="18" charset="0"/>
@@ -30608,7 +30608,23 @@
               <a:t>jsat</a:t>
             </a:r>
             <a:r>
-              <a:rPr lang="en-US" sz="2000">
+              <a:rPr lang="en-US" sz="2400" dirty="0">
+                <a:latin typeface="DevLys 010" pitchFamily="2" charset="0"/>
+                <a:ea typeface="Calibri" panose="020F0502020204030204" pitchFamily="34" charset="0"/>
+                <a:cs typeface="Mangal" panose="02040503050203030202" pitchFamily="18" charset="0"/>
+              </a:rPr>
+              <a:t> ds 20 </a:t>
+            </a:r>
+            <a:r>
+              <a:rPr lang="en-US" sz="2400" dirty="0" err="1">
+                <a:latin typeface="DevLys 010" pitchFamily="2" charset="0"/>
+                <a:ea typeface="Calibri" panose="020F0502020204030204" pitchFamily="34" charset="0"/>
+                <a:cs typeface="Mangal" panose="02040503050203030202" pitchFamily="18" charset="0"/>
+              </a:rPr>
+              <a:t>ftyksa</a:t>
+            </a:r>
+            <a:r>
+              <a:rPr lang="en-US" sz="2400" dirty="0">
                 <a:latin typeface="DevLys 010" pitchFamily="2" charset="0"/>
                 <a:ea typeface="Calibri" panose="020F0502020204030204" pitchFamily="34" charset="0"/>
                 <a:cs typeface="Mangal" panose="02040503050203030202" pitchFamily="18" charset="0"/>
@@ -30616,31 +30632,15 @@
               <a:t> </a:t>
             </a:r>
             <a:r>
-              <a:rPr lang="en-US" sz="2000" err="1">
-                <a:latin typeface="DevLys 010" pitchFamily="2" charset="0"/>
-                <a:ea typeface="Calibri" panose="020F0502020204030204" pitchFamily="34" charset="0"/>
-                <a:cs typeface="Mangal" panose="02040503050203030202" pitchFamily="18" charset="0"/>
-              </a:rPr>
-              <a:t>ds</a:t>
-            </a:r>
-            <a:r>
-              <a:rPr lang="en-US" sz="2000">
-                <a:latin typeface="DevLys 010" pitchFamily="2" charset="0"/>
-                <a:ea typeface="Calibri" panose="020F0502020204030204" pitchFamily="34" charset="0"/>
-                <a:cs typeface="Mangal" panose="02040503050203030202" pitchFamily="18" charset="0"/>
-              </a:rPr>
-              <a:t> 20 </a:t>
-            </a:r>
-            <a:r>
-              <a:rPr lang="en-US" sz="2000" err="1">
-                <a:latin typeface="DevLys 010" pitchFamily="2" charset="0"/>
-                <a:ea typeface="Calibri" panose="020F0502020204030204" pitchFamily="34" charset="0"/>
-                <a:cs typeface="Mangal" panose="02040503050203030202" pitchFamily="18" charset="0"/>
-              </a:rPr>
-              <a:t>ftyksa</a:t>
-            </a:r>
-            <a:r>
-              <a:rPr lang="en-US" sz="2000">
+              <a:rPr lang="en-US" sz="2400" dirty="0" err="1">
+                <a:latin typeface="DevLys 010" pitchFamily="2" charset="0"/>
+                <a:ea typeface="Calibri" panose="020F0502020204030204" pitchFamily="34" charset="0"/>
+                <a:cs typeface="Mangal" panose="02040503050203030202" pitchFamily="18" charset="0"/>
+              </a:rPr>
+              <a:t>esa</a:t>
+            </a:r>
+            <a:r>
+              <a:rPr lang="en-US" sz="2400" dirty="0">
                 <a:latin typeface="DevLys 010" pitchFamily="2" charset="0"/>
                 <a:ea typeface="Calibri" panose="020F0502020204030204" pitchFamily="34" charset="0"/>
                 <a:cs typeface="Mangal" panose="02040503050203030202" pitchFamily="18" charset="0"/>
@@ -30648,15 +30648,15 @@
               <a:t> </a:t>
             </a:r>
             <a:r>
-              <a:rPr lang="en-US" sz="2000" err="1">
-                <a:latin typeface="DevLys 010" pitchFamily="2" charset="0"/>
-                <a:ea typeface="Calibri" panose="020F0502020204030204" pitchFamily="34" charset="0"/>
-                <a:cs typeface="Mangal" panose="02040503050203030202" pitchFamily="18" charset="0"/>
-              </a:rPr>
-              <a:t>esa</a:t>
-            </a:r>
-            <a:r>
-              <a:rPr lang="en-US" sz="2000">
+              <a:rPr lang="en-US" sz="2400" dirty="0" err="1">
+                <a:latin typeface="DevLys 010" pitchFamily="2" charset="0"/>
+                <a:ea typeface="Calibri" panose="020F0502020204030204" pitchFamily="34" charset="0"/>
+                <a:cs typeface="Mangal" panose="02040503050203030202" pitchFamily="18" charset="0"/>
+              </a:rPr>
+              <a:t>uhykeh@vkoaVu</a:t>
+            </a:r>
+            <a:r>
+              <a:rPr lang="en-US" sz="2400" dirty="0">
                 <a:latin typeface="DevLys 010" pitchFamily="2" charset="0"/>
                 <a:ea typeface="Calibri" panose="020F0502020204030204" pitchFamily="34" charset="0"/>
                 <a:cs typeface="Mangal" panose="02040503050203030202" pitchFamily="18" charset="0"/>
@@ -30664,15 +30664,15 @@
               <a:t> </a:t>
             </a:r>
             <a:r>
-              <a:rPr lang="en-US" sz="2000" err="1">
-                <a:latin typeface="DevLys 010" pitchFamily="2" charset="0"/>
-                <a:ea typeface="Calibri" panose="020F0502020204030204" pitchFamily="34" charset="0"/>
-                <a:cs typeface="Mangal" panose="02040503050203030202" pitchFamily="18" charset="0"/>
-              </a:rPr>
-              <a:t>uhykeh@vkoaVu</a:t>
-            </a:r>
-            <a:r>
-              <a:rPr lang="en-US" sz="2000">
+              <a:rPr lang="en-US" sz="2400" dirty="0" err="1">
+                <a:latin typeface="DevLys 010" pitchFamily="2" charset="0"/>
+                <a:ea typeface="Calibri" panose="020F0502020204030204" pitchFamily="34" charset="0"/>
+                <a:cs typeface="Mangal" panose="02040503050203030202" pitchFamily="18" charset="0"/>
+              </a:rPr>
+              <a:t>ij</a:t>
+            </a:r>
+            <a:r>
+              <a:rPr lang="en-US" sz="2400" dirty="0">
                 <a:latin typeface="DevLys 010" pitchFamily="2" charset="0"/>
                 <a:ea typeface="Calibri" panose="020F0502020204030204" pitchFamily="34" charset="0"/>
                 <a:cs typeface="Mangal" panose="02040503050203030202" pitchFamily="18" charset="0"/>
@@ -30680,23 +30680,7 @@
               <a:t> </a:t>
             </a:r>
             <a:r>
-              <a:rPr lang="en-US" sz="2000" err="1">
-                <a:latin typeface="DevLys 010" pitchFamily="2" charset="0"/>
-                <a:ea typeface="Calibri" panose="020F0502020204030204" pitchFamily="34" charset="0"/>
-                <a:cs typeface="Mangal" panose="02040503050203030202" pitchFamily="18" charset="0"/>
-              </a:rPr>
-              <a:t>ij</a:t>
-            </a:r>
-            <a:r>
-              <a:rPr lang="en-US" sz="2000">
-                <a:latin typeface="DevLys 010" pitchFamily="2" charset="0"/>
-                <a:ea typeface="Calibri" panose="020F0502020204030204" pitchFamily="34" charset="0"/>
-                <a:cs typeface="Mangal" panose="02040503050203030202" pitchFamily="18" charset="0"/>
-              </a:rPr>
-              <a:t> </a:t>
-            </a:r>
-            <a:r>
-              <a:rPr lang="en-US" sz="2000" err="1">
+              <a:rPr lang="en-US" sz="2400" dirty="0" err="1">
                 <a:latin typeface="DevLys 010" pitchFamily="2" charset="0"/>
                 <a:ea typeface="Calibri" panose="020F0502020204030204" pitchFamily="34" charset="0"/>
                 <a:cs typeface="Mangal" panose="02040503050203030202" pitchFamily="18" charset="0"/>
@@ -30704,7 +30688,7 @@
               <a:t>jksd</a:t>
             </a:r>
             <a:r>
-              <a:rPr lang="en-US" sz="2000">
+              <a:rPr lang="en-US" sz="2400" dirty="0">
                 <a:latin typeface="DevLys 010" pitchFamily="2" charset="0"/>
                 <a:ea typeface="Calibri" panose="020F0502020204030204" pitchFamily="34" charset="0"/>
                 <a:cs typeface="Mangal" panose="02040503050203030202" pitchFamily="18" charset="0"/>
@@ -30724,7 +30708,7 @@
               <a:buChar char="v"/>
             </a:pPr>
             <a:r>
-              <a:rPr lang="en-US" sz="2000" err="1">
+              <a:rPr lang="en-US" sz="2400" dirty="0" err="1">
                 <a:latin typeface="DevLys 010" pitchFamily="2" charset="0"/>
                 <a:ea typeface="Calibri" panose="020F0502020204030204" pitchFamily="34" charset="0"/>
                 <a:cs typeface="Mangal" panose="02040503050203030202" pitchFamily="18" charset="0"/>
@@ -30732,7 +30716,7 @@
               <a:t>cnyrs</a:t>
             </a:r>
             <a:r>
-              <a:rPr lang="en-US" sz="2000">
+              <a:rPr lang="en-US" sz="2400" dirty="0">
                 <a:latin typeface="DevLys 010" pitchFamily="2" charset="0"/>
                 <a:ea typeface="Calibri" panose="020F0502020204030204" pitchFamily="34" charset="0"/>
                 <a:cs typeface="Mangal" panose="02040503050203030202" pitchFamily="18" charset="0"/>
@@ -30740,7 +30724,7 @@
               <a:t> </a:t>
             </a:r>
             <a:r>
-              <a:rPr lang="en-US" sz="2000" err="1">
+              <a:rPr lang="en-US" sz="2400" dirty="0" err="1">
                 <a:latin typeface="DevLys 010" pitchFamily="2" charset="0"/>
                 <a:ea typeface="Calibri" panose="020F0502020204030204" pitchFamily="34" charset="0"/>
                 <a:cs typeface="Mangal" panose="02040503050203030202" pitchFamily="18" charset="0"/>
@@ -30748,7 +30732,7 @@
               <a:t>oSf'od</a:t>
             </a:r>
             <a:r>
-              <a:rPr lang="en-US" sz="2000">
+              <a:rPr lang="en-US" sz="2400" dirty="0">
                 <a:latin typeface="DevLys 010" pitchFamily="2" charset="0"/>
                 <a:ea typeface="Calibri" panose="020F0502020204030204" pitchFamily="34" charset="0"/>
                 <a:cs typeface="Mangal" panose="02040503050203030202" pitchFamily="18" charset="0"/>
@@ -30756,7 +30740,7 @@
               <a:t> </a:t>
             </a:r>
             <a:r>
-              <a:rPr lang="en-US" sz="2000" err="1">
+              <a:rPr lang="en-US" sz="2400" dirty="0" err="1">
                 <a:latin typeface="DevLys 010" pitchFamily="2" charset="0"/>
                 <a:ea typeface="Calibri" panose="020F0502020204030204" pitchFamily="34" charset="0"/>
                 <a:cs typeface="Mangal" panose="02040503050203030202" pitchFamily="18" charset="0"/>
@@ -30764,23 +30748,39 @@
               <a:t>ifjn</a:t>
             </a:r>
             <a:r>
-              <a:rPr lang="en-US" sz="2000">
-                <a:latin typeface="DevLys 010" pitchFamily="2" charset="0"/>
-                <a:ea typeface="Calibri" panose="020F0502020204030204" pitchFamily="34" charset="0"/>
-                <a:cs typeface="Mangal" panose="02040503050203030202" pitchFamily="18" charset="0"/>
-              </a:rPr>
-              <a:t>`'; </a:t>
-            </a:r>
-            <a:r>
-              <a:rPr lang="en-US" sz="2000" err="1">
-                <a:latin typeface="DevLys 010" pitchFamily="2" charset="0"/>
-                <a:ea typeface="Calibri" panose="020F0502020204030204" pitchFamily="34" charset="0"/>
-                <a:cs typeface="Mangal" panose="02040503050203030202" pitchFamily="18" charset="0"/>
-              </a:rPr>
-              <a:t>ds</a:t>
-            </a:r>
-            <a:r>
-              <a:rPr lang="en-US" sz="2000">
+              <a:rPr lang="en-US" sz="2400" dirty="0">
+                <a:latin typeface="DevLys 010" pitchFamily="2" charset="0"/>
+                <a:ea typeface="Calibri" panose="020F0502020204030204" pitchFamily="34" charset="0"/>
+                <a:cs typeface="Mangal" panose="02040503050203030202" pitchFamily="18" charset="0"/>
+              </a:rPr>
+              <a:t>`'; ds </a:t>
+            </a:r>
+            <a:r>
+              <a:rPr lang="en-US" sz="2400" dirty="0" err="1">
+                <a:latin typeface="DevLys 010" pitchFamily="2" charset="0"/>
+                <a:ea typeface="Calibri" panose="020F0502020204030204" pitchFamily="34" charset="0"/>
+                <a:cs typeface="Mangal" panose="02040503050203030202" pitchFamily="18" charset="0"/>
+              </a:rPr>
+              <a:t>dkj.k</a:t>
+            </a:r>
+            <a:r>
+              <a:rPr lang="en-US" sz="2400" dirty="0">
+                <a:latin typeface="DevLys 010" pitchFamily="2" charset="0"/>
+                <a:ea typeface="Calibri" panose="020F0502020204030204" pitchFamily="34" charset="0"/>
+                <a:cs typeface="Mangal" panose="02040503050203030202" pitchFamily="18" charset="0"/>
+              </a:rPr>
+              <a:t> [</a:t>
+            </a:r>
+            <a:r>
+              <a:rPr lang="en-US" sz="2400" dirty="0" err="1">
+                <a:latin typeface="DevLys 010" pitchFamily="2" charset="0"/>
+                <a:ea typeface="Calibri" panose="020F0502020204030204" pitchFamily="34" charset="0"/>
+                <a:cs typeface="Mangal" panose="02040503050203030202" pitchFamily="18" charset="0"/>
+              </a:rPr>
+              <a:t>kfut</a:t>
+            </a:r>
+            <a:r>
+              <a:rPr lang="en-US" sz="2400" dirty="0">
                 <a:latin typeface="DevLys 010" pitchFamily="2" charset="0"/>
                 <a:ea typeface="Calibri" panose="020F0502020204030204" pitchFamily="34" charset="0"/>
                 <a:cs typeface="Mangal" panose="02040503050203030202" pitchFamily="18" charset="0"/>
@@ -30788,31 +30788,47 @@
               <a:t> </a:t>
             </a:r>
             <a:r>
-              <a:rPr lang="en-US" sz="2000" err="1">
-                <a:latin typeface="DevLys 010" pitchFamily="2" charset="0"/>
-                <a:ea typeface="Calibri" panose="020F0502020204030204" pitchFamily="34" charset="0"/>
-                <a:cs typeface="Mangal" panose="02040503050203030202" pitchFamily="18" charset="0"/>
-              </a:rPr>
-              <a:t>dkj.k</a:t>
-            </a:r>
-            <a:r>
-              <a:rPr lang="en-US" sz="2000">
-                <a:latin typeface="DevLys 010" pitchFamily="2" charset="0"/>
-                <a:ea typeface="Calibri" panose="020F0502020204030204" pitchFamily="34" charset="0"/>
-                <a:cs typeface="Mangal" panose="02040503050203030202" pitchFamily="18" charset="0"/>
-              </a:rPr>
-              <a:t> [</a:t>
-            </a:r>
-            <a:r>
-              <a:rPr lang="en-US" sz="2000" err="1">
-                <a:latin typeface="DevLys 010" pitchFamily="2" charset="0"/>
-                <a:ea typeface="Calibri" panose="020F0502020204030204" pitchFamily="34" charset="0"/>
-                <a:cs typeface="Mangal" panose="02040503050203030202" pitchFamily="18" charset="0"/>
-              </a:rPr>
-              <a:t>kfut</a:t>
-            </a:r>
-            <a:r>
-              <a:rPr lang="en-US" sz="2000">
+              <a:rPr lang="en-US" sz="2400" dirty="0" err="1">
+                <a:latin typeface="DevLys 010" pitchFamily="2" charset="0"/>
+                <a:ea typeface="Calibri" panose="020F0502020204030204" pitchFamily="34" charset="0"/>
+                <a:cs typeface="Mangal" panose="02040503050203030202" pitchFamily="18" charset="0"/>
+              </a:rPr>
+              <a:t>DokVZt</a:t>
+            </a:r>
+            <a:r>
+              <a:rPr lang="en-US" sz="2400" dirty="0">
+                <a:latin typeface="DevLys 010" pitchFamily="2" charset="0"/>
+                <a:ea typeface="Calibri" panose="020F0502020204030204" pitchFamily="34" charset="0"/>
+                <a:cs typeface="Mangal" panose="02040503050203030202" pitchFamily="18" charset="0"/>
+              </a:rPr>
+              <a:t>] </a:t>
+            </a:r>
+            <a:r>
+              <a:rPr lang="en-US" sz="2400" dirty="0" err="1">
+                <a:latin typeface="DevLys 010" pitchFamily="2" charset="0"/>
+                <a:ea typeface="Calibri" panose="020F0502020204030204" pitchFamily="34" charset="0"/>
+                <a:cs typeface="Mangal" panose="02040503050203030202" pitchFamily="18" charset="0"/>
+              </a:rPr>
+              <a:t>QSYlikj</a:t>
+            </a:r>
+            <a:r>
+              <a:rPr lang="en-US" sz="2400" dirty="0">
+                <a:latin typeface="DevLys 010" pitchFamily="2" charset="0"/>
+                <a:ea typeface="Calibri" panose="020F0502020204030204" pitchFamily="34" charset="0"/>
+                <a:cs typeface="Mangal" panose="02040503050203030202" pitchFamily="18" charset="0"/>
+              </a:rPr>
+              <a:t> o Dys ds </a:t>
+            </a:r>
+            <a:r>
+              <a:rPr lang="en-US" sz="2400" dirty="0" err="1">
+                <a:latin typeface="DevLys 010" pitchFamily="2" charset="0"/>
+                <a:ea typeface="Calibri" panose="020F0502020204030204" pitchFamily="34" charset="0"/>
+                <a:cs typeface="Mangal" panose="02040503050203030202" pitchFamily="18" charset="0"/>
+              </a:rPr>
+              <a:t>mRiknu</a:t>
+            </a:r>
+            <a:r>
+              <a:rPr lang="en-US" sz="2400" dirty="0">
                 <a:latin typeface="DevLys 010" pitchFamily="2" charset="0"/>
                 <a:ea typeface="Calibri" panose="020F0502020204030204" pitchFamily="34" charset="0"/>
                 <a:cs typeface="Mangal" panose="02040503050203030202" pitchFamily="18" charset="0"/>
@@ -30820,87 +30836,7 @@
               <a:t> </a:t>
             </a:r>
             <a:r>
-              <a:rPr lang="en-US" sz="2000" err="1">
-                <a:latin typeface="DevLys 010" pitchFamily="2" charset="0"/>
-                <a:ea typeface="Calibri" panose="020F0502020204030204" pitchFamily="34" charset="0"/>
-                <a:cs typeface="Mangal" panose="02040503050203030202" pitchFamily="18" charset="0"/>
-              </a:rPr>
-              <a:t>DokVZt</a:t>
-            </a:r>
-            <a:r>
-              <a:rPr lang="en-US" sz="2000">
-                <a:latin typeface="DevLys 010" pitchFamily="2" charset="0"/>
-                <a:ea typeface="Calibri" panose="020F0502020204030204" pitchFamily="34" charset="0"/>
-                <a:cs typeface="Mangal" panose="02040503050203030202" pitchFamily="18" charset="0"/>
-              </a:rPr>
-              <a:t>] </a:t>
-            </a:r>
-            <a:r>
-              <a:rPr lang="en-US" sz="2000" err="1">
-                <a:latin typeface="DevLys 010" pitchFamily="2" charset="0"/>
-                <a:ea typeface="Calibri" panose="020F0502020204030204" pitchFamily="34" charset="0"/>
-                <a:cs typeface="Mangal" panose="02040503050203030202" pitchFamily="18" charset="0"/>
-              </a:rPr>
-              <a:t>QSYlikj</a:t>
-            </a:r>
-            <a:r>
-              <a:rPr lang="en-US" sz="2000">
-                <a:latin typeface="DevLys 010" pitchFamily="2" charset="0"/>
-                <a:ea typeface="Calibri" panose="020F0502020204030204" pitchFamily="34" charset="0"/>
-                <a:cs typeface="Mangal" panose="02040503050203030202" pitchFamily="18" charset="0"/>
-              </a:rPr>
-              <a:t> o </a:t>
-            </a:r>
-            <a:r>
-              <a:rPr lang="en-US" sz="2000" err="1">
-                <a:latin typeface="DevLys 010" pitchFamily="2" charset="0"/>
-                <a:ea typeface="Calibri" panose="020F0502020204030204" pitchFamily="34" charset="0"/>
-                <a:cs typeface="Mangal" panose="02040503050203030202" pitchFamily="18" charset="0"/>
-              </a:rPr>
-              <a:t>Dys</a:t>
-            </a:r>
-            <a:r>
-              <a:rPr lang="en-US" sz="2000">
-                <a:latin typeface="DevLys 010" pitchFamily="2" charset="0"/>
-                <a:ea typeface="Calibri" panose="020F0502020204030204" pitchFamily="34" charset="0"/>
-                <a:cs typeface="Mangal" panose="02040503050203030202" pitchFamily="18" charset="0"/>
-              </a:rPr>
-              <a:t> </a:t>
-            </a:r>
-            <a:r>
-              <a:rPr lang="en-US" sz="2000" err="1">
-                <a:latin typeface="DevLys 010" pitchFamily="2" charset="0"/>
-                <a:ea typeface="Calibri" panose="020F0502020204030204" pitchFamily="34" charset="0"/>
-                <a:cs typeface="Mangal" panose="02040503050203030202" pitchFamily="18" charset="0"/>
-              </a:rPr>
-              <a:t>ds</a:t>
-            </a:r>
-            <a:r>
-              <a:rPr lang="en-US" sz="2000">
-                <a:latin typeface="DevLys 010" pitchFamily="2" charset="0"/>
-                <a:ea typeface="Calibri" panose="020F0502020204030204" pitchFamily="34" charset="0"/>
-                <a:cs typeface="Mangal" panose="02040503050203030202" pitchFamily="18" charset="0"/>
-              </a:rPr>
-              <a:t> </a:t>
-            </a:r>
-            <a:r>
-              <a:rPr lang="en-US" sz="2000" err="1">
-                <a:latin typeface="DevLys 010" pitchFamily="2" charset="0"/>
-                <a:ea typeface="Calibri" panose="020F0502020204030204" pitchFamily="34" charset="0"/>
-                <a:cs typeface="Mangal" panose="02040503050203030202" pitchFamily="18" charset="0"/>
-              </a:rPr>
-              <a:t>mRiknu</a:t>
-            </a:r>
-            <a:r>
-              <a:rPr lang="en-US" sz="2000">
-                <a:latin typeface="DevLys 010" pitchFamily="2" charset="0"/>
-                <a:ea typeface="Calibri" panose="020F0502020204030204" pitchFamily="34" charset="0"/>
-                <a:cs typeface="Mangal" panose="02040503050203030202" pitchFamily="18" charset="0"/>
-              </a:rPr>
-              <a:t> </a:t>
-            </a:r>
-            <a:r>
-              <a:rPr lang="en-US" sz="2000" err="1">
+              <a:rPr lang="en-US" sz="2400" dirty="0" err="1">
                 <a:latin typeface="DevLys 010" pitchFamily="2" charset="0"/>
                 <a:ea typeface="Calibri" panose="020F0502020204030204" pitchFamily="34" charset="0"/>
                 <a:cs typeface="Mangal" panose="02040503050203030202" pitchFamily="18" charset="0"/>
@@ -30908,31 +30844,15 @@
               <a:t>esa</a:t>
             </a:r>
             <a:r>
-              <a:rPr lang="en-US" sz="2000">
-                <a:latin typeface="DevLys 010" pitchFamily="2" charset="0"/>
-                <a:ea typeface="Calibri" panose="020F0502020204030204" pitchFamily="34" charset="0"/>
-                <a:cs typeface="Mangal" panose="02040503050203030202" pitchFamily="18" charset="0"/>
-              </a:rPr>
-              <a:t> </a:t>
-            </a:r>
-            <a:r>
-              <a:rPr lang="en-US" sz="2000" err="1">
-                <a:latin typeface="DevLys 010" pitchFamily="2" charset="0"/>
-                <a:ea typeface="Calibri" panose="020F0502020204030204" pitchFamily="34" charset="0"/>
-                <a:cs typeface="Mangal" panose="02040503050203030202" pitchFamily="18" charset="0"/>
-              </a:rPr>
-              <a:t>deh</a:t>
-            </a:r>
-            <a:r>
-              <a:rPr lang="en-US" sz="2000">
-                <a:latin typeface="DevLys 010" pitchFamily="2" charset="0"/>
-                <a:ea typeface="Calibri" panose="020F0502020204030204" pitchFamily="34" charset="0"/>
-                <a:cs typeface="Mangal" panose="02040503050203030202" pitchFamily="18" charset="0"/>
-              </a:rPr>
-              <a:t> % </a:t>
-            </a:r>
-            <a:r>
-              <a:rPr lang="en-US" sz="2000" err="1">
+              <a:rPr lang="en-US" sz="2400" dirty="0">
+                <a:latin typeface="DevLys 010" pitchFamily="2" charset="0"/>
+                <a:ea typeface="Calibri" panose="020F0502020204030204" pitchFamily="34" charset="0"/>
+                <a:cs typeface="Mangal" panose="02040503050203030202" pitchFamily="18" charset="0"/>
+              </a:rPr>
+              <a:t> deh % </a:t>
+            </a:r>
+            <a:r>
+              <a:rPr lang="en-US" sz="2400" dirty="0" err="1">
                 <a:latin typeface="DevLys 010" pitchFamily="2" charset="0"/>
                 <a:ea typeface="Calibri" panose="020F0502020204030204" pitchFamily="34" charset="0"/>
                 <a:cs typeface="Mangal" panose="02040503050203030202" pitchFamily="18" charset="0"/>
@@ -30940,7 +30860,7 @@
               <a:t>yxHkx</a:t>
             </a:r>
             <a:r>
-              <a:rPr lang="en-US" sz="2000">
+              <a:rPr lang="en-US" sz="2400" dirty="0">
                 <a:latin typeface="DevLys 010" pitchFamily="2" charset="0"/>
                 <a:ea typeface="Calibri" panose="020F0502020204030204" pitchFamily="34" charset="0"/>
                 <a:cs typeface="Mangal" panose="02040503050203030202" pitchFamily="18" charset="0"/>
@@ -30948,7 +30868,7 @@
               <a:t> 15 </a:t>
             </a:r>
             <a:r>
-              <a:rPr lang="en-US" sz="2000" err="1">
+              <a:rPr lang="en-US" sz="2400" dirty="0" err="1">
                 <a:latin typeface="DevLys 010" pitchFamily="2" charset="0"/>
                 <a:ea typeface="Calibri" panose="020F0502020204030204" pitchFamily="34" charset="0"/>
                 <a:cs typeface="Mangal" panose="02040503050203030202" pitchFamily="18" charset="0"/>
@@ -30956,26 +30876,13 @@
               <a:t>djksM</a:t>
             </a:r>
             <a:r>
-              <a:rPr lang="en-US" sz="2000">
-                <a:latin typeface="DevLys 010" pitchFamily="2" charset="0"/>
-                <a:ea typeface="Calibri" panose="020F0502020204030204" pitchFamily="34" charset="0"/>
-                <a:cs typeface="Mangal" panose="02040503050203030202" pitchFamily="18" charset="0"/>
-              </a:rPr>
-              <a:t>+ dh </a:t>
-            </a:r>
-            <a:r>
-              <a:rPr lang="en-US" sz="2000" err="1">
-                <a:latin typeface="DevLys 010" pitchFamily="2" charset="0"/>
-                <a:ea typeface="Calibri" panose="020F0502020204030204" pitchFamily="34" charset="0"/>
-                <a:cs typeface="Mangal" panose="02040503050203030202" pitchFamily="18" charset="0"/>
-              </a:rPr>
-              <a:t>deh</a:t>
-            </a:r>
-            <a:endParaRPr lang="en-US" sz="2000">
-              <a:latin typeface="DevLys 010" pitchFamily="2" charset="0"/>
-              <a:ea typeface="Calibri" panose="020F0502020204030204" pitchFamily="34" charset="0"/>
-              <a:cs typeface="Mangal" panose="02040503050203030202" pitchFamily="18" charset="0"/>
-            </a:endParaRPr>
+              <a:rPr lang="en-US" sz="2400" dirty="0">
+                <a:latin typeface="DevLys 010" pitchFamily="2" charset="0"/>
+                <a:ea typeface="Calibri" panose="020F0502020204030204" pitchFamily="34" charset="0"/>
+                <a:cs typeface="Mangal" panose="02040503050203030202" pitchFamily="18" charset="0"/>
+              </a:rPr>
+              <a:t>+ dh deh</a:t>
+            </a:r>
           </a:p>
           <a:p>
             <a:pPr marL="720000" indent="-342900" algn="just">
@@ -30986,7 +30893,7 @@
               <a:buChar char="v"/>
             </a:pPr>
             <a:r>
-              <a:rPr lang="en-US" sz="2000" err="1">
+              <a:rPr lang="en-US" sz="2400" dirty="0" err="1">
                 <a:latin typeface="DevLys 010" pitchFamily="2" charset="0"/>
                 <a:ea typeface="Calibri" panose="020F0502020204030204" pitchFamily="34" charset="0"/>
                 <a:cs typeface="Mangal" panose="02040503050203030202" pitchFamily="18" charset="0"/>
@@ -30994,7 +30901,7 @@
               <a:t>fgUnqLrku</a:t>
             </a:r>
             <a:r>
-              <a:rPr lang="en-US" sz="2000">
+              <a:rPr lang="en-US" sz="2400" dirty="0">
                 <a:latin typeface="DevLys 010" pitchFamily="2" charset="0"/>
                 <a:ea typeface="Calibri" panose="020F0502020204030204" pitchFamily="34" charset="0"/>
                 <a:cs typeface="Mangal" panose="02040503050203030202" pitchFamily="18" charset="0"/>
@@ -31002,7 +30909,7 @@
               <a:t> </a:t>
             </a:r>
             <a:r>
-              <a:rPr lang="en-US" sz="2000" err="1">
+              <a:rPr lang="en-US" sz="2400" dirty="0" err="1">
                 <a:latin typeface="DevLys 010" pitchFamily="2" charset="0"/>
                 <a:ea typeface="Calibri" panose="020F0502020204030204" pitchFamily="34" charset="0"/>
                 <a:cs typeface="Mangal" panose="02040503050203030202" pitchFamily="18" charset="0"/>
@@ -31010,7 +30917,7 @@
               <a:t>ftad</a:t>
             </a:r>
             <a:r>
-              <a:rPr lang="en-US" sz="2000">
+              <a:rPr lang="en-US" sz="2400" dirty="0">
                 <a:latin typeface="DevLys 010" pitchFamily="2" charset="0"/>
                 <a:ea typeface="Calibri" panose="020F0502020204030204" pitchFamily="34" charset="0"/>
                 <a:cs typeface="Mangal" panose="02040503050203030202" pitchFamily="18" charset="0"/>
@@ -31018,7 +30925,7 @@
               <a:t> </a:t>
             </a:r>
             <a:r>
-              <a:rPr lang="en-US" sz="2000" err="1">
+              <a:rPr lang="en-US" sz="2400" dirty="0" err="1">
                 <a:latin typeface="DevLys 010" pitchFamily="2" charset="0"/>
                 <a:ea typeface="Calibri" panose="020F0502020204030204" pitchFamily="34" charset="0"/>
                 <a:cs typeface="Mangal" panose="02040503050203030202" pitchFamily="18" charset="0"/>
@@ -31026,7 +30933,7 @@
               <a:t>fy</a:t>
             </a:r>
             <a:r>
-              <a:rPr lang="en-US" sz="2000">
+              <a:rPr lang="en-US" sz="2400" dirty="0">
                 <a:latin typeface="DevLys 010" pitchFamily="2" charset="0"/>
                 <a:ea typeface="Calibri" panose="020F0502020204030204" pitchFamily="34" charset="0"/>
                 <a:cs typeface="Mangal" panose="02040503050203030202" pitchFamily="18" charset="0"/>
@@ -31034,7 +30941,7 @@
               <a:t>- </a:t>
             </a:r>
             <a:r>
-              <a:rPr lang="en-US" sz="2000" err="1">
+              <a:rPr lang="en-US" sz="2400" dirty="0" err="1">
                 <a:latin typeface="DevLys 010" pitchFamily="2" charset="0"/>
                 <a:ea typeface="Calibri" panose="020F0502020204030204" pitchFamily="34" charset="0"/>
                 <a:cs typeface="Mangal" panose="02040503050203030202" pitchFamily="18" charset="0"/>
@@ -31042,7 +30949,7 @@
               <a:t>esa</a:t>
             </a:r>
             <a:r>
-              <a:rPr lang="en-US" sz="2000">
+              <a:rPr lang="en-US" sz="2400" dirty="0">
                 <a:latin typeface="DevLys 010" pitchFamily="2" charset="0"/>
                 <a:ea typeface="Calibri" panose="020F0502020204030204" pitchFamily="34" charset="0"/>
                 <a:cs typeface="Mangal" panose="02040503050203030202" pitchFamily="18" charset="0"/>
@@ -31050,7 +30957,7 @@
               <a:t> </a:t>
             </a:r>
             <a:r>
-              <a:rPr lang="en-US" sz="2000" err="1">
+              <a:rPr lang="en-US" sz="2400" dirty="0" err="1">
                 <a:latin typeface="DevLys 010" pitchFamily="2" charset="0"/>
                 <a:ea typeface="Calibri" panose="020F0502020204030204" pitchFamily="34" charset="0"/>
                 <a:cs typeface="Mangal" panose="02040503050203030202" pitchFamily="18" charset="0"/>
@@ -31058,7 +30965,23 @@
               <a:t>gM+rky</a:t>
             </a:r>
             <a:r>
-              <a:rPr lang="en-US" sz="2000">
+              <a:rPr lang="en-US" sz="2400" dirty="0">
+                <a:latin typeface="DevLys 010" pitchFamily="2" charset="0"/>
+                <a:ea typeface="Calibri" panose="020F0502020204030204" pitchFamily="34" charset="0"/>
+                <a:cs typeface="Mangal" panose="02040503050203030202" pitchFamily="18" charset="0"/>
+              </a:rPr>
+              <a:t> ls </a:t>
+            </a:r>
+            <a:r>
+              <a:rPr lang="en-US" sz="2400" dirty="0" err="1">
+                <a:latin typeface="DevLys 010" pitchFamily="2" charset="0"/>
+                <a:ea typeface="Calibri" panose="020F0502020204030204" pitchFamily="34" charset="0"/>
+                <a:cs typeface="Mangal" panose="02040503050203030202" pitchFamily="18" charset="0"/>
+              </a:rPr>
+              <a:t>mRiknu</a:t>
+            </a:r>
+            <a:r>
+              <a:rPr lang="en-US" sz="2400" dirty="0">
                 <a:latin typeface="DevLys 010" pitchFamily="2" charset="0"/>
                 <a:ea typeface="Calibri" panose="020F0502020204030204" pitchFamily="34" charset="0"/>
                 <a:cs typeface="Mangal" panose="02040503050203030202" pitchFamily="18" charset="0"/>
@@ -31066,39 +30989,7 @@
               <a:t> </a:t>
             </a:r>
             <a:r>
-              <a:rPr lang="en-US" sz="2000" err="1">
-                <a:latin typeface="DevLys 010" pitchFamily="2" charset="0"/>
-                <a:ea typeface="Calibri" panose="020F0502020204030204" pitchFamily="34" charset="0"/>
-                <a:cs typeface="Mangal" panose="02040503050203030202" pitchFamily="18" charset="0"/>
-              </a:rPr>
-              <a:t>ls</a:t>
-            </a:r>
-            <a:r>
-              <a:rPr lang="en-US" sz="2000">
-                <a:latin typeface="DevLys 010" pitchFamily="2" charset="0"/>
-                <a:ea typeface="Calibri" panose="020F0502020204030204" pitchFamily="34" charset="0"/>
-                <a:cs typeface="Mangal" panose="02040503050203030202" pitchFamily="18" charset="0"/>
-              </a:rPr>
-              <a:t> </a:t>
-            </a:r>
-            <a:r>
-              <a:rPr lang="en-US" sz="2000" err="1">
-                <a:latin typeface="DevLys 010" pitchFamily="2" charset="0"/>
-                <a:ea typeface="Calibri" panose="020F0502020204030204" pitchFamily="34" charset="0"/>
-                <a:cs typeface="Mangal" panose="02040503050203030202" pitchFamily="18" charset="0"/>
-              </a:rPr>
-              <a:t>mRiknu</a:t>
-            </a:r>
-            <a:r>
-              <a:rPr lang="en-US" sz="2000">
-                <a:latin typeface="DevLys 010" pitchFamily="2" charset="0"/>
-                <a:ea typeface="Calibri" panose="020F0502020204030204" pitchFamily="34" charset="0"/>
-                <a:cs typeface="Mangal" panose="02040503050203030202" pitchFamily="18" charset="0"/>
-              </a:rPr>
-              <a:t> </a:t>
-            </a:r>
-            <a:r>
-              <a:rPr lang="en-US" sz="2000" err="1">
+              <a:rPr lang="en-US" sz="2400" dirty="0" err="1">
                 <a:latin typeface="DevLys 010" pitchFamily="2" charset="0"/>
                 <a:ea typeface="Calibri" panose="020F0502020204030204" pitchFamily="34" charset="0"/>
                 <a:cs typeface="Mangal" panose="02040503050203030202" pitchFamily="18" charset="0"/>
@@ -31106,7 +30997,7 @@
               <a:t>izHkkfor</a:t>
             </a:r>
             <a:r>
-              <a:rPr lang="en-US" sz="2000">
+              <a:rPr lang="en-US" sz="2400" dirty="0">
                 <a:latin typeface="DevLys 010" pitchFamily="2" charset="0"/>
                 <a:ea typeface="Calibri" panose="020F0502020204030204" pitchFamily="34" charset="0"/>
                 <a:cs typeface="Mangal" panose="02040503050203030202" pitchFamily="18" charset="0"/>
@@ -31114,7 +31005,7 @@
               <a:t> % </a:t>
             </a:r>
             <a:r>
-              <a:rPr lang="en-US" sz="2000" err="1">
+              <a:rPr lang="en-US" sz="2400" dirty="0" err="1">
                 <a:latin typeface="DevLys 010" pitchFamily="2" charset="0"/>
                 <a:ea typeface="Calibri" panose="020F0502020204030204" pitchFamily="34" charset="0"/>
                 <a:cs typeface="Mangal" panose="02040503050203030202" pitchFamily="18" charset="0"/>
@@ -31122,7 +31013,7 @@
               <a:t>yxHkx</a:t>
             </a:r>
             <a:r>
-              <a:rPr lang="en-US" sz="2000">
+              <a:rPr lang="en-US" sz="2400" dirty="0">
                 <a:latin typeface="DevLys 010" pitchFamily="2" charset="0"/>
                 <a:ea typeface="Calibri" panose="020F0502020204030204" pitchFamily="34" charset="0"/>
                 <a:cs typeface="Mangal" panose="02040503050203030202" pitchFamily="18" charset="0"/>
@@ -31130,7 +31021,7 @@
               <a:t> 15 </a:t>
             </a:r>
             <a:r>
-              <a:rPr lang="en-US" sz="2000" err="1">
+              <a:rPr lang="en-US" sz="2400" dirty="0" err="1">
                 <a:latin typeface="DevLys 010" pitchFamily="2" charset="0"/>
                 <a:ea typeface="Calibri" panose="020F0502020204030204" pitchFamily="34" charset="0"/>
                 <a:cs typeface="Mangal" panose="02040503050203030202" pitchFamily="18" charset="0"/>
@@ -31138,26 +31029,13 @@
               <a:t>djksM</a:t>
             </a:r>
             <a:r>
-              <a:rPr lang="en-US" sz="2000">
-                <a:latin typeface="DevLys 010" pitchFamily="2" charset="0"/>
-                <a:ea typeface="Calibri" panose="020F0502020204030204" pitchFamily="34" charset="0"/>
-                <a:cs typeface="Mangal" panose="02040503050203030202" pitchFamily="18" charset="0"/>
-              </a:rPr>
-              <a:t>+ dh </a:t>
-            </a:r>
-            <a:r>
-              <a:rPr lang="en-US" sz="2000" err="1">
-                <a:latin typeface="DevLys 010" pitchFamily="2" charset="0"/>
-                <a:ea typeface="Calibri" panose="020F0502020204030204" pitchFamily="34" charset="0"/>
-                <a:cs typeface="Mangal" panose="02040503050203030202" pitchFamily="18" charset="0"/>
-              </a:rPr>
-              <a:t>deh</a:t>
-            </a:r>
-            <a:endParaRPr lang="en-US" sz="2000">
-              <a:latin typeface="DevLys 010" pitchFamily="2" charset="0"/>
-              <a:ea typeface="Calibri" panose="020F0502020204030204" pitchFamily="34" charset="0"/>
-              <a:cs typeface="Mangal" panose="02040503050203030202" pitchFamily="18" charset="0"/>
-            </a:endParaRPr>
+              <a:rPr lang="en-US" sz="2400" dirty="0">
+                <a:latin typeface="DevLys 010" pitchFamily="2" charset="0"/>
+                <a:ea typeface="Calibri" panose="020F0502020204030204" pitchFamily="34" charset="0"/>
+                <a:cs typeface="Mangal" panose="02040503050203030202" pitchFamily="18" charset="0"/>
+              </a:rPr>
+              <a:t>+ dh deh</a:t>
+            </a:r>
           </a:p>
         </p:txBody>
       </p:sp>
@@ -33919,8 +33797,8 @@
         </p:nvSpPr>
         <p:spPr>
           <a:xfrm>
-            <a:off x="504966" y="1196667"/>
-            <a:ext cx="11161918" cy="3290709"/>
+            <a:off x="504966" y="1290017"/>
+            <a:ext cx="11161918" cy="4939878"/>
           </a:xfrm>
           <a:prstGeom prst="rect">
             <a:avLst/>
@@ -33935,7 +33813,7 @@
           <a:p>
             <a:pPr marL="342900" indent="-342900" algn="just">
               <a:lnSpc>
-                <a:spcPct val="150000"/>
+                <a:spcPct val="200000"/>
               </a:lnSpc>
               <a:spcAft>
                 <a:spcPts val="800"/>
@@ -33944,7 +33822,7 @@
               <a:buChar char="q"/>
             </a:pPr>
             <a:r>
-              <a:rPr lang="en-US" sz="2000" err="1">
+              <a:rPr lang="en-US" sz="2400" dirty="0" err="1">
                 <a:latin typeface="DevLys 010" pitchFamily="2" charset="0"/>
                 <a:ea typeface="Calibri" panose="020F0502020204030204" pitchFamily="34" charset="0"/>
                 <a:cs typeface="Mangal" panose="02040503050203030202" pitchFamily="18" charset="0"/>
@@ -33952,7 +33830,7 @@
               <a:t>vjkoyh</a:t>
             </a:r>
             <a:r>
-              <a:rPr lang="en-US" sz="2000">
+              <a:rPr lang="en-US" sz="2400" dirty="0">
                 <a:latin typeface="DevLys 010" pitchFamily="2" charset="0"/>
                 <a:ea typeface="Calibri" panose="020F0502020204030204" pitchFamily="34" charset="0"/>
                 <a:cs typeface="Mangal" panose="02040503050203030202" pitchFamily="18" charset="0"/>
@@ -33960,7 +33838,7 @@
               <a:t> </a:t>
             </a:r>
             <a:r>
-              <a:rPr lang="en-US" sz="2000" err="1">
+              <a:rPr lang="en-US" sz="2400" dirty="0" err="1">
                 <a:latin typeface="DevLys 010" pitchFamily="2" charset="0"/>
                 <a:ea typeface="Calibri" panose="020F0502020204030204" pitchFamily="34" charset="0"/>
                 <a:cs typeface="Mangal" panose="02040503050203030202" pitchFamily="18" charset="0"/>
@@ -33968,7 +33846,7 @@
               <a:t>ftyksa</a:t>
             </a:r>
             <a:r>
-              <a:rPr lang="en-US" sz="2000">
+              <a:rPr lang="en-US" sz="2400" dirty="0">
                 <a:latin typeface="DevLys 010" pitchFamily="2" charset="0"/>
                 <a:ea typeface="Calibri" panose="020F0502020204030204" pitchFamily="34" charset="0"/>
                 <a:cs typeface="Mangal" panose="02040503050203030202" pitchFamily="18" charset="0"/>
@@ -33976,7 +33854,7 @@
               <a:t> </a:t>
             </a:r>
             <a:r>
-              <a:rPr lang="en-US" sz="2000" err="1">
+              <a:rPr lang="en-US" sz="2400" dirty="0" err="1">
                 <a:latin typeface="DevLys 010" pitchFamily="2" charset="0"/>
                 <a:ea typeface="Calibri" panose="020F0502020204030204" pitchFamily="34" charset="0"/>
                 <a:cs typeface="Mangal" panose="02040503050203030202" pitchFamily="18" charset="0"/>
@@ -33984,7 +33862,7 @@
               <a:t>dks</a:t>
             </a:r>
             <a:r>
-              <a:rPr lang="en-US" sz="2000">
+              <a:rPr lang="en-US" sz="2400" dirty="0">
                 <a:latin typeface="DevLys 010" pitchFamily="2" charset="0"/>
                 <a:ea typeface="Calibri" panose="020F0502020204030204" pitchFamily="34" charset="0"/>
                 <a:cs typeface="Mangal" panose="02040503050203030202" pitchFamily="18" charset="0"/>
@@ -33992,7 +33870,7 @@
               <a:t> </a:t>
             </a:r>
             <a:r>
-              <a:rPr lang="en-US" sz="2000" err="1">
+              <a:rPr lang="en-US" sz="2400" dirty="0" err="1">
                 <a:latin typeface="DevLys 010" pitchFamily="2" charset="0"/>
                 <a:ea typeface="Calibri" panose="020F0502020204030204" pitchFamily="34" charset="0"/>
                 <a:cs typeface="Mangal" panose="02040503050203030202" pitchFamily="18" charset="0"/>
@@ -34000,7 +33878,7 @@
               <a:t>NksM+dj</a:t>
             </a:r>
             <a:r>
-              <a:rPr lang="en-US" sz="2000">
+              <a:rPr lang="en-US" sz="2400" dirty="0">
                 <a:latin typeface="DevLys 010" pitchFamily="2" charset="0"/>
                 <a:ea typeface="Calibri" panose="020F0502020204030204" pitchFamily="34" charset="0"/>
                 <a:cs typeface="Mangal" panose="02040503050203030202" pitchFamily="18" charset="0"/>
@@ -34008,7 +33886,7 @@
               <a:t> '</a:t>
             </a:r>
             <a:r>
-              <a:rPr lang="en-US" sz="2000" err="1">
+              <a:rPr lang="en-US" sz="2400" dirty="0" err="1">
                 <a:latin typeface="DevLys 010" pitchFamily="2" charset="0"/>
                 <a:ea typeface="Calibri" panose="020F0502020204030204" pitchFamily="34" charset="0"/>
                 <a:cs typeface="Mangal" panose="02040503050203030202" pitchFamily="18" charset="0"/>
@@ -34016,7 +33894,7 @@
               <a:t>ks"k</a:t>
             </a:r>
             <a:r>
-              <a:rPr lang="en-US" sz="2000">
+              <a:rPr lang="en-US" sz="2400" dirty="0">
                 <a:latin typeface="DevLys 010" pitchFamily="2" charset="0"/>
                 <a:ea typeface="Calibri" panose="020F0502020204030204" pitchFamily="34" charset="0"/>
                 <a:cs typeface="Mangal" panose="02040503050203030202" pitchFamily="18" charset="0"/>
@@ -34024,7 +33902,7 @@
               <a:t> </a:t>
             </a:r>
             <a:r>
-              <a:rPr lang="en-US" sz="2000" err="1">
+              <a:rPr lang="en-US" sz="2400" dirty="0" err="1">
                 <a:latin typeface="DevLys 010" pitchFamily="2" charset="0"/>
                 <a:ea typeface="Calibri" panose="020F0502020204030204" pitchFamily="34" charset="0"/>
                 <a:cs typeface="Mangal" panose="02040503050203030202" pitchFamily="18" charset="0"/>
@@ -34032,7 +33910,7 @@
               <a:t>ftyksa</a:t>
             </a:r>
             <a:r>
-              <a:rPr lang="en-US" sz="2000">
+              <a:rPr lang="en-US" sz="2400" dirty="0">
                 <a:latin typeface="DevLys 010" pitchFamily="2" charset="0"/>
                 <a:ea typeface="Calibri" panose="020F0502020204030204" pitchFamily="34" charset="0"/>
                 <a:cs typeface="Mangal" panose="02040503050203030202" pitchFamily="18" charset="0"/>
@@ -34040,7 +33918,7 @@
               <a:t> </a:t>
             </a:r>
             <a:r>
-              <a:rPr lang="en-US" sz="2000" err="1">
+              <a:rPr lang="en-US" sz="2400" dirty="0" err="1">
                 <a:latin typeface="DevLys 010" pitchFamily="2" charset="0"/>
                 <a:ea typeface="Calibri" panose="020F0502020204030204" pitchFamily="34" charset="0"/>
                 <a:cs typeface="Mangal" panose="02040503050203030202" pitchFamily="18" charset="0"/>
@@ -34048,7 +33926,7 @@
               <a:t>esa</a:t>
             </a:r>
             <a:r>
-              <a:rPr lang="en-US" sz="2000">
+              <a:rPr lang="en-US" sz="2400" dirty="0">
                 <a:latin typeface="DevLys 010" pitchFamily="2" charset="0"/>
                 <a:ea typeface="Calibri" panose="020F0502020204030204" pitchFamily="34" charset="0"/>
                 <a:cs typeface="Mangal" panose="02040503050203030202" pitchFamily="18" charset="0"/>
@@ -34056,7 +33934,7 @@
               <a:t> </a:t>
             </a:r>
             <a:r>
-              <a:rPr lang="en-US" sz="2000" err="1">
+              <a:rPr lang="en-US" sz="2400" dirty="0" err="1">
                 <a:latin typeface="DevLys 010" pitchFamily="2" charset="0"/>
                 <a:ea typeface="Calibri" panose="020F0502020204030204" pitchFamily="34" charset="0"/>
                 <a:cs typeface="Mangal" panose="02040503050203030202" pitchFamily="18" charset="0"/>
@@ -34064,7 +33942,7 @@
               <a:t>vfèkdre</a:t>
             </a:r>
             <a:r>
-              <a:rPr lang="en-US" sz="2000">
+              <a:rPr lang="en-US" sz="2400" dirty="0">
                 <a:latin typeface="DevLys 010" pitchFamily="2" charset="0"/>
                 <a:ea typeface="Calibri" panose="020F0502020204030204" pitchFamily="34" charset="0"/>
                 <a:cs typeface="Mangal" panose="02040503050203030202" pitchFamily="18" charset="0"/>
@@ -34072,7 +33950,7 @@
               <a:t> </a:t>
             </a:r>
             <a:r>
-              <a:rPr lang="en-US" sz="2000" err="1">
+              <a:rPr lang="en-US" sz="2400" dirty="0" err="1">
                 <a:latin typeface="DevLys 010" pitchFamily="2" charset="0"/>
                 <a:ea typeface="Calibri" panose="020F0502020204030204" pitchFamily="34" charset="0"/>
                 <a:cs typeface="Mangal" panose="02040503050203030202" pitchFamily="18" charset="0"/>
@@ -34080,7 +33958,7 @@
               <a:t>CykWDl@IykWV~l</a:t>
             </a:r>
             <a:r>
-              <a:rPr lang="en-US" sz="2000">
+              <a:rPr lang="en-US" sz="2400" dirty="0">
                 <a:latin typeface="DevLys 010" pitchFamily="2" charset="0"/>
                 <a:ea typeface="Calibri" panose="020F0502020204030204" pitchFamily="34" charset="0"/>
                 <a:cs typeface="Mangal" panose="02040503050203030202" pitchFamily="18" charset="0"/>
@@ -34088,7 +33966,7 @@
               <a:t> dk </a:t>
             </a:r>
             <a:r>
-              <a:rPr lang="en-US" sz="2000" err="1">
+              <a:rPr lang="en-US" sz="2400" dirty="0" err="1">
                 <a:latin typeface="DevLys 010" pitchFamily="2" charset="0"/>
                 <a:ea typeface="Calibri" panose="020F0502020204030204" pitchFamily="34" charset="0"/>
                 <a:cs typeface="Mangal" panose="02040503050203030202" pitchFamily="18" charset="0"/>
@@ -34096,7 +33974,7 @@
               <a:t>fpUghdj.k</a:t>
             </a:r>
             <a:r>
-              <a:rPr lang="en-US" sz="2000">
+              <a:rPr lang="en-US" sz="2400" dirty="0">
                 <a:latin typeface="DevLys 010" pitchFamily="2" charset="0"/>
                 <a:ea typeface="Calibri" panose="020F0502020204030204" pitchFamily="34" charset="0"/>
                 <a:cs typeface="Mangal" panose="02040503050203030202" pitchFamily="18" charset="0"/>
@@ -34104,14 +33982,14 @@
               <a:t> o </a:t>
             </a:r>
             <a:r>
-              <a:rPr lang="en-US" sz="2000" err="1">
+              <a:rPr lang="en-US" sz="2400" dirty="0" err="1">
                 <a:latin typeface="DevLys 010" pitchFamily="2" charset="0"/>
                 <a:ea typeface="Calibri" panose="020F0502020204030204" pitchFamily="34" charset="0"/>
                 <a:cs typeface="Mangal" panose="02040503050203030202" pitchFamily="18" charset="0"/>
               </a:rPr>
               <a:t>uhykeh</a:t>
             </a:r>
-            <a:endParaRPr lang="en-US" sz="2000">
+            <a:endParaRPr lang="en-US" sz="2400" dirty="0">
               <a:latin typeface="DevLys 010" pitchFamily="2" charset="0"/>
               <a:ea typeface="Calibri" panose="020F0502020204030204" pitchFamily="34" charset="0"/>
               <a:cs typeface="Mangal" panose="02040503050203030202" pitchFamily="18" charset="0"/>
@@ -34120,7 +33998,7 @@
           <a:p>
             <a:pPr marL="342900" indent="-342900" algn="just">
               <a:lnSpc>
-                <a:spcPct val="150000"/>
+                <a:spcPct val="200000"/>
               </a:lnSpc>
               <a:spcAft>
                 <a:spcPts val="800"/>
@@ -34129,7 +34007,7 @@
               <a:buChar char="q"/>
             </a:pPr>
             <a:r>
-              <a:rPr lang="en-US" sz="2000" err="1">
+              <a:rPr lang="en-US" sz="2400" dirty="0" err="1">
                 <a:latin typeface="DevLys 010" pitchFamily="2" charset="0"/>
                 <a:ea typeface="Calibri" panose="020F0502020204030204" pitchFamily="34" charset="0"/>
                 <a:cs typeface="Mangal" panose="02040503050203030202" pitchFamily="18" charset="0"/>
@@ -34137,7 +34015,7 @@
               <a:t>vjkoyh</a:t>
             </a:r>
             <a:r>
-              <a:rPr lang="en-US" sz="2000">
+              <a:rPr lang="en-US" sz="2400" dirty="0">
                 <a:latin typeface="DevLys 010" pitchFamily="2" charset="0"/>
                 <a:ea typeface="Calibri" panose="020F0502020204030204" pitchFamily="34" charset="0"/>
                 <a:cs typeface="Mangal" panose="02040503050203030202" pitchFamily="18" charset="0"/>
@@ -34145,7 +34023,7 @@
               <a:t> </a:t>
             </a:r>
             <a:r>
-              <a:rPr lang="en-US" sz="2000" err="1">
+              <a:rPr lang="en-US" sz="2400" dirty="0" err="1">
                 <a:latin typeface="DevLys 010" pitchFamily="2" charset="0"/>
                 <a:ea typeface="Calibri" panose="020F0502020204030204" pitchFamily="34" charset="0"/>
                 <a:cs typeface="Mangal" panose="02040503050203030202" pitchFamily="18" charset="0"/>
@@ -34153,7 +34031,7 @@
               <a:t>ekeys</a:t>
             </a:r>
             <a:r>
-              <a:rPr lang="en-US" sz="2000">
+              <a:rPr lang="en-US" sz="2400" dirty="0">
                 <a:latin typeface="DevLys 010" pitchFamily="2" charset="0"/>
                 <a:ea typeface="Calibri" panose="020F0502020204030204" pitchFamily="34" charset="0"/>
                 <a:cs typeface="Mangal" panose="02040503050203030202" pitchFamily="18" charset="0"/>
@@ -34161,7 +34039,7 @@
               <a:t> </a:t>
             </a:r>
             <a:r>
-              <a:rPr lang="en-US" sz="2000" err="1">
+              <a:rPr lang="en-US" sz="2400" dirty="0" err="1">
                 <a:latin typeface="DevLys 010" pitchFamily="2" charset="0"/>
                 <a:ea typeface="Calibri" panose="020F0502020204030204" pitchFamily="34" charset="0"/>
                 <a:cs typeface="Mangal" panose="02040503050203030202" pitchFamily="18" charset="0"/>
@@ -34169,7 +34047,7 @@
               <a:t>esa</a:t>
             </a:r>
             <a:r>
-              <a:rPr lang="en-US" sz="2000">
+              <a:rPr lang="en-US" sz="2400" dirty="0">
                 <a:latin typeface="DevLys 010" pitchFamily="2" charset="0"/>
                 <a:ea typeface="Calibri" panose="020F0502020204030204" pitchFamily="34" charset="0"/>
                 <a:cs typeface="Mangal" panose="02040503050203030202" pitchFamily="18" charset="0"/>
@@ -34177,7 +34055,7 @@
               <a:t> ek- </a:t>
             </a:r>
             <a:r>
-              <a:rPr lang="en-US" sz="2000" err="1">
+              <a:rPr lang="en-US" sz="2400" dirty="0" err="1">
                 <a:latin typeface="DevLys 010" pitchFamily="2" charset="0"/>
                 <a:ea typeface="Calibri" panose="020F0502020204030204" pitchFamily="34" charset="0"/>
                 <a:cs typeface="Mangal" panose="02040503050203030202" pitchFamily="18" charset="0"/>
@@ -34185,7 +34063,7 @@
               <a:t>loksZPp</a:t>
             </a:r>
             <a:r>
-              <a:rPr lang="en-US" sz="2000">
+              <a:rPr lang="en-US" sz="2400" dirty="0">
                 <a:latin typeface="DevLys 010" pitchFamily="2" charset="0"/>
                 <a:ea typeface="Calibri" panose="020F0502020204030204" pitchFamily="34" charset="0"/>
                 <a:cs typeface="Mangal" panose="02040503050203030202" pitchFamily="18" charset="0"/>
@@ -34193,7 +34071,7 @@
               <a:t> </a:t>
             </a:r>
             <a:r>
-              <a:rPr lang="en-US" sz="2000" err="1">
+              <a:rPr lang="en-US" sz="2400" dirty="0" err="1">
                 <a:latin typeface="DevLys 010" pitchFamily="2" charset="0"/>
                 <a:ea typeface="Calibri" panose="020F0502020204030204" pitchFamily="34" charset="0"/>
                 <a:cs typeface="Mangal" panose="02040503050203030202" pitchFamily="18" charset="0"/>
@@ -34201,7 +34079,7 @@
               <a:t>U;k;ky</a:t>
             </a:r>
             <a:r>
-              <a:rPr lang="en-US" sz="2000">
+              <a:rPr lang="en-US" sz="2400" dirty="0">
                 <a:latin typeface="DevLys 010" pitchFamily="2" charset="0"/>
                 <a:ea typeface="Calibri" panose="020F0502020204030204" pitchFamily="34" charset="0"/>
                 <a:cs typeface="Mangal" panose="02040503050203030202" pitchFamily="18" charset="0"/>
@@ -34209,7 +34087,7 @@
               <a:t>; ds </a:t>
             </a:r>
             <a:r>
-              <a:rPr lang="en-US" sz="2000" err="1">
+              <a:rPr lang="en-US" sz="2400" dirty="0" err="1">
                 <a:latin typeface="DevLys 010" pitchFamily="2" charset="0"/>
                 <a:ea typeface="Calibri" panose="020F0502020204030204" pitchFamily="34" charset="0"/>
                 <a:cs typeface="Mangal" panose="02040503050203030202" pitchFamily="18" charset="0"/>
@@ -34217,7 +34095,7 @@
               <a:t>vkns'k</a:t>
             </a:r>
             <a:r>
-              <a:rPr lang="en-US" sz="2000">
+              <a:rPr lang="en-US" sz="2400" dirty="0">
                 <a:latin typeface="DevLys 010" pitchFamily="2" charset="0"/>
                 <a:ea typeface="Calibri" panose="020F0502020204030204" pitchFamily="34" charset="0"/>
                 <a:cs typeface="Mangal" panose="02040503050203030202" pitchFamily="18" charset="0"/>
@@ -34225,7 +34103,7 @@
               <a:t> </a:t>
             </a:r>
             <a:r>
-              <a:rPr lang="en-US" sz="2000" err="1">
+              <a:rPr lang="en-US" sz="2400" dirty="0" err="1">
                 <a:latin typeface="DevLys 010" pitchFamily="2" charset="0"/>
                 <a:ea typeface="Calibri" panose="020F0502020204030204" pitchFamily="34" charset="0"/>
                 <a:cs typeface="Mangal" panose="02040503050203030202" pitchFamily="18" charset="0"/>
@@ -34233,7 +34111,7 @@
               <a:t>fnukad</a:t>
             </a:r>
             <a:r>
-              <a:rPr lang="en-US" sz="2000">
+              <a:rPr lang="en-US" sz="2400" dirty="0">
                 <a:latin typeface="DevLys 010" pitchFamily="2" charset="0"/>
                 <a:ea typeface="Calibri" panose="020F0502020204030204" pitchFamily="34" charset="0"/>
                 <a:cs typeface="Mangal" panose="02040503050203030202" pitchFamily="18" charset="0"/>
@@ -34241,7 +34119,7 @@
               <a:t> 29-12-2025 </a:t>
             </a:r>
             <a:r>
-              <a:rPr lang="en-US" sz="2000" err="1">
+              <a:rPr lang="en-US" sz="2400" dirty="0" err="1">
                 <a:latin typeface="DevLys 010" pitchFamily="2" charset="0"/>
                 <a:ea typeface="Calibri" panose="020F0502020204030204" pitchFamily="34" charset="0"/>
                 <a:cs typeface="Mangal" panose="02040503050203030202" pitchFamily="18" charset="0"/>
@@ -34249,7 +34127,7 @@
               <a:t>esa</a:t>
             </a:r>
             <a:r>
-              <a:rPr lang="en-US" sz="2000">
+              <a:rPr lang="en-US" sz="2400" dirty="0">
                 <a:latin typeface="DevLys 010" pitchFamily="2" charset="0"/>
                 <a:ea typeface="Calibri" panose="020F0502020204030204" pitchFamily="34" charset="0"/>
                 <a:cs typeface="Mangal" panose="02040503050203030202" pitchFamily="18" charset="0"/>
@@ -34257,7 +34135,7 @@
               <a:t> </a:t>
             </a:r>
             <a:r>
-              <a:rPr lang="en-US" sz="2000" err="1">
+              <a:rPr lang="en-US" sz="2400" dirty="0" err="1">
                 <a:latin typeface="DevLys 010" pitchFamily="2" charset="0"/>
                 <a:ea typeface="Calibri" panose="020F0502020204030204" pitchFamily="34" charset="0"/>
                 <a:cs typeface="Mangal" panose="02040503050203030202" pitchFamily="18" charset="0"/>
@@ -34265,7 +34143,7 @@
               <a:t>la'kks</a:t>
             </a:r>
             <a:r>
-              <a:rPr lang="en-US" sz="2000">
+              <a:rPr lang="en-US" sz="2400" dirty="0">
                 <a:latin typeface="DevLys 010" pitchFamily="2" charset="0"/>
                 <a:ea typeface="Calibri" panose="020F0502020204030204" pitchFamily="34" charset="0"/>
                 <a:cs typeface="Mangal" panose="02040503050203030202" pitchFamily="18" charset="0"/>
@@ -34273,7 +34151,7 @@
               <a:t>/</a:t>
             </a:r>
             <a:r>
-              <a:rPr lang="en-US" sz="2000" err="1">
+              <a:rPr lang="en-US" sz="2400" dirty="0" err="1">
                 <a:latin typeface="DevLys 010" pitchFamily="2" charset="0"/>
                 <a:ea typeface="Calibri" panose="020F0502020204030204" pitchFamily="34" charset="0"/>
                 <a:cs typeface="Mangal" panose="02040503050203030202" pitchFamily="18" charset="0"/>
@@ -34281,7 +34159,7 @@
               <a:t>ku</a:t>
             </a:r>
             <a:r>
-              <a:rPr lang="en-US" sz="2000">
+              <a:rPr lang="en-US" sz="2400" dirty="0">
                 <a:latin typeface="DevLys 010" pitchFamily="2" charset="0"/>
                 <a:ea typeface="Calibri" panose="020F0502020204030204" pitchFamily="34" charset="0"/>
                 <a:cs typeface="Mangal" panose="02040503050203030202" pitchFamily="18" charset="0"/>
@@ -34289,14 +34167,14 @@
               <a:t> ds </a:t>
             </a:r>
             <a:r>
-              <a:rPr lang="en-US" sz="2000" err="1">
+              <a:rPr lang="en-US" sz="2400" dirty="0" err="1">
                 <a:latin typeface="DevLys 010" pitchFamily="2" charset="0"/>
                 <a:ea typeface="Calibri" panose="020F0502020204030204" pitchFamily="34" charset="0"/>
                 <a:cs typeface="Mangal" panose="02040503050203030202" pitchFamily="18" charset="0"/>
               </a:rPr>
               <a:t>ç;klA</a:t>
             </a:r>
-            <a:endParaRPr lang="en-US" sz="2000">
+            <a:endParaRPr lang="en-US" sz="2400" dirty="0">
               <a:latin typeface="DevLys 010" pitchFamily="2" charset="0"/>
               <a:ea typeface="Calibri" panose="020F0502020204030204" pitchFamily="34" charset="0"/>
               <a:cs typeface="Mangal" panose="02040503050203030202" pitchFamily="18" charset="0"/>
@@ -34305,7 +34183,7 @@
           <a:p>
             <a:pPr marL="342900" indent="-342900" algn="just">
               <a:lnSpc>
-                <a:spcPct val="150000"/>
+                <a:spcPct val="200000"/>
               </a:lnSpc>
               <a:spcAft>
                 <a:spcPts val="800"/>
@@ -34314,7 +34192,7 @@
               <a:buChar char="q"/>
             </a:pPr>
             <a:r>
-              <a:rPr lang="en-US" sz="2000">
+              <a:rPr lang="en-US" sz="2400" dirty="0">
                 <a:latin typeface="DevLys 010" pitchFamily="2" charset="0"/>
                 <a:ea typeface="Calibri" panose="020F0502020204030204" pitchFamily="34" charset="0"/>
                 <a:cs typeface="Mangal" panose="02040503050203030202" pitchFamily="18" charset="0"/>
@@ -34322,7 +34200,7 @@
               <a:t>4 </a:t>
             </a:r>
             <a:r>
-              <a:rPr lang="en-US" sz="2000" err="1">
+              <a:rPr lang="en-US" sz="2400" dirty="0" err="1">
                 <a:latin typeface="DevLys 010" pitchFamily="2" charset="0"/>
                 <a:ea typeface="Calibri" panose="020F0502020204030204" pitchFamily="34" charset="0"/>
                 <a:cs typeface="Mangal" panose="02040503050203030202" pitchFamily="18" charset="0"/>
@@ -34330,7 +34208,7 @@
               <a:t>ftyksa</a:t>
             </a:r>
             <a:r>
-              <a:rPr lang="en-US" sz="2000">
+              <a:rPr lang="en-US" sz="2400" dirty="0">
                 <a:latin typeface="DevLys 010" pitchFamily="2" charset="0"/>
                 <a:ea typeface="Calibri" panose="020F0502020204030204" pitchFamily="34" charset="0"/>
                 <a:cs typeface="Mangal" panose="02040503050203030202" pitchFamily="18" charset="0"/>
@@ -34338,7 +34216,7 @@
               <a:t> </a:t>
             </a:r>
             <a:r>
-              <a:rPr lang="en-US" sz="2000" err="1">
+              <a:rPr lang="en-US" sz="2400" dirty="0" err="1">
                 <a:latin typeface="DevLys 010" pitchFamily="2" charset="0"/>
                 <a:ea typeface="Calibri" panose="020F0502020204030204" pitchFamily="34" charset="0"/>
                 <a:cs typeface="Mangal" panose="02040503050203030202" pitchFamily="18" charset="0"/>
@@ -34346,7 +34224,7 @@
               <a:t>esa</a:t>
             </a:r>
             <a:r>
-              <a:rPr lang="en-US" sz="2000">
+              <a:rPr lang="en-US" sz="2400" dirty="0">
                 <a:latin typeface="DevLys 010" pitchFamily="2" charset="0"/>
                 <a:ea typeface="Calibri" panose="020F0502020204030204" pitchFamily="34" charset="0"/>
                 <a:cs typeface="Mangal" panose="02040503050203030202" pitchFamily="18" charset="0"/>
@@ -34354,7 +34232,7 @@
               <a:t> </a:t>
             </a:r>
             <a:r>
-              <a:rPr lang="en-US" sz="2000" err="1">
+              <a:rPr lang="en-US" sz="2400" dirty="0" err="1">
                 <a:latin typeface="DevLys 010" pitchFamily="2" charset="0"/>
                 <a:ea typeface="Calibri" panose="020F0502020204030204" pitchFamily="34" charset="0"/>
                 <a:cs typeface="Mangal" panose="02040503050203030202" pitchFamily="18" charset="0"/>
@@ -34362,7 +34240,7 @@
               <a:t>ctjh</a:t>
             </a:r>
             <a:r>
-              <a:rPr lang="en-US" sz="2000">
+              <a:rPr lang="en-US" sz="2400" dirty="0">
                 <a:latin typeface="DevLys 010" pitchFamily="2" charset="0"/>
                 <a:ea typeface="Calibri" panose="020F0502020204030204" pitchFamily="34" charset="0"/>
                 <a:cs typeface="Mangal" panose="02040503050203030202" pitchFamily="18" charset="0"/>
@@ -34370,7 +34248,7 @@
               <a:t> [</a:t>
             </a:r>
             <a:r>
-              <a:rPr lang="en-US" sz="2000" err="1">
+              <a:rPr lang="en-US" sz="2400" dirty="0" err="1">
                 <a:latin typeface="DevLys 010" pitchFamily="2" charset="0"/>
                 <a:ea typeface="Calibri" panose="020F0502020204030204" pitchFamily="34" charset="0"/>
                 <a:cs typeface="Mangal" panose="02040503050203030202" pitchFamily="18" charset="0"/>
@@ -34378,7 +34256,7 @@
               <a:t>kuu</a:t>
             </a:r>
             <a:r>
-              <a:rPr lang="en-US" sz="2000">
+              <a:rPr lang="en-US" sz="2400" dirty="0">
                 <a:latin typeface="DevLys 010" pitchFamily="2" charset="0"/>
                 <a:ea typeface="Calibri" panose="020F0502020204030204" pitchFamily="34" charset="0"/>
                 <a:cs typeface="Mangal" panose="02040503050203030202" pitchFamily="18" charset="0"/>
@@ -34386,7 +34264,7 @@
               <a:t> ds </a:t>
             </a:r>
             <a:r>
-              <a:rPr lang="en-US" sz="2000" err="1">
+              <a:rPr lang="en-US" sz="2400" dirty="0" err="1">
                 <a:latin typeface="DevLys 010" pitchFamily="2" charset="0"/>
                 <a:ea typeface="Calibri" panose="020F0502020204030204" pitchFamily="34" charset="0"/>
                 <a:cs typeface="Mangal" panose="02040503050203030202" pitchFamily="18" charset="0"/>
@@ -34394,7 +34272,7 @@
               <a:t>laca</a:t>
             </a:r>
             <a:r>
-              <a:rPr lang="en-US" sz="2000">
+              <a:rPr lang="en-US" sz="2400" dirty="0">
                 <a:latin typeface="DevLys 010" pitchFamily="2" charset="0"/>
                 <a:ea typeface="Calibri" panose="020F0502020204030204" pitchFamily="34" charset="0"/>
                 <a:cs typeface="Mangal" panose="02040503050203030202" pitchFamily="18" charset="0"/>
@@ -34402,7 +34280,7 @@
               <a:t>/k </a:t>
             </a:r>
             <a:r>
-              <a:rPr lang="en-US" sz="2000" err="1">
+              <a:rPr lang="en-US" sz="2400" dirty="0" err="1">
                 <a:latin typeface="DevLys 010" pitchFamily="2" charset="0"/>
                 <a:ea typeface="Calibri" panose="020F0502020204030204" pitchFamily="34" charset="0"/>
                 <a:cs typeface="Mangal" panose="02040503050203030202" pitchFamily="18" charset="0"/>
@@ -34410,7 +34288,7 @@
               <a:t>esa</a:t>
             </a:r>
             <a:r>
-              <a:rPr lang="en-US" sz="2000">
+              <a:rPr lang="en-US" sz="2400" dirty="0">
                 <a:latin typeface="DevLys 010" pitchFamily="2" charset="0"/>
                 <a:ea typeface="Calibri" panose="020F0502020204030204" pitchFamily="34" charset="0"/>
                 <a:cs typeface="Mangal" panose="02040503050203030202" pitchFamily="18" charset="0"/>
@@ -34418,7 +34296,7 @@
               <a:t> ek- </a:t>
             </a:r>
             <a:r>
-              <a:rPr lang="en-US" sz="2000" err="1">
+              <a:rPr lang="en-US" sz="2400" dirty="0" err="1">
                 <a:latin typeface="DevLys 010" pitchFamily="2" charset="0"/>
                 <a:ea typeface="Calibri" panose="020F0502020204030204" pitchFamily="34" charset="0"/>
                 <a:cs typeface="Mangal" panose="02040503050203030202" pitchFamily="18" charset="0"/>
@@ -34426,7 +34304,7 @@
               <a:t>U;k;ky</a:t>
             </a:r>
             <a:r>
-              <a:rPr lang="en-US" sz="2000">
+              <a:rPr lang="en-US" sz="2400" dirty="0">
                 <a:latin typeface="DevLys 010" pitchFamily="2" charset="0"/>
                 <a:ea typeface="Calibri" panose="020F0502020204030204" pitchFamily="34" charset="0"/>
                 <a:cs typeface="Mangal" panose="02040503050203030202" pitchFamily="18" charset="0"/>
@@ -34434,7 +34312,7 @@
               <a:t>; </a:t>
             </a:r>
             <a:r>
-              <a:rPr lang="en-US" sz="2000" err="1">
+              <a:rPr lang="en-US" sz="2400" dirty="0" err="1">
                 <a:latin typeface="DevLys 010" pitchFamily="2" charset="0"/>
                 <a:ea typeface="Calibri" panose="020F0502020204030204" pitchFamily="34" charset="0"/>
                 <a:cs typeface="Mangal" panose="02040503050203030202" pitchFamily="18" charset="0"/>
@@ -34442,7 +34320,7 @@
               <a:t>esa</a:t>
             </a:r>
             <a:r>
-              <a:rPr lang="en-US" sz="2000">
+              <a:rPr lang="en-US" sz="2400" dirty="0">
                 <a:latin typeface="DevLys 010" pitchFamily="2" charset="0"/>
                 <a:ea typeface="Calibri" panose="020F0502020204030204" pitchFamily="34" charset="0"/>
                 <a:cs typeface="Mangal" panose="02040503050203030202" pitchFamily="18" charset="0"/>
@@ -34450,7 +34328,7 @@
               <a:t> </a:t>
             </a:r>
             <a:r>
-              <a:rPr lang="en-US" sz="2000" err="1">
+              <a:rPr lang="en-US" sz="2400" dirty="0" err="1">
                 <a:latin typeface="DevLys 010" pitchFamily="2" charset="0"/>
                 <a:ea typeface="Calibri" panose="020F0502020204030204" pitchFamily="34" charset="0"/>
                 <a:cs typeface="Mangal" panose="02040503050203030202" pitchFamily="18" charset="0"/>
@@ -34458,7 +34336,7 @@
               <a:t>fopkjk</a:t>
             </a:r>
             <a:r>
-              <a:rPr lang="en-US" sz="2000">
+              <a:rPr lang="en-US" sz="2400" dirty="0">
                 <a:latin typeface="DevLys 010" pitchFamily="2" charset="0"/>
                 <a:ea typeface="Calibri" panose="020F0502020204030204" pitchFamily="34" charset="0"/>
                 <a:cs typeface="Mangal" panose="02040503050203030202" pitchFamily="18" charset="0"/>
@@ -34466,7 +34344,7 @@
               <a:t>/</a:t>
             </a:r>
             <a:r>
-              <a:rPr lang="en-US" sz="2000" err="1">
+              <a:rPr lang="en-US" sz="2400" dirty="0" err="1">
                 <a:latin typeface="DevLys 010" pitchFamily="2" charset="0"/>
                 <a:ea typeface="Calibri" panose="020F0502020204030204" pitchFamily="34" charset="0"/>
                 <a:cs typeface="Mangal" panose="02040503050203030202" pitchFamily="18" charset="0"/>
@@ -34474,7 +34352,7 @@
               <a:t>khu</a:t>
             </a:r>
             <a:r>
-              <a:rPr lang="en-US" sz="2000">
+              <a:rPr lang="en-US" sz="2400" dirty="0">
                 <a:latin typeface="DevLys 010" pitchFamily="2" charset="0"/>
                 <a:ea typeface="Calibri" panose="020F0502020204030204" pitchFamily="34" charset="0"/>
                 <a:cs typeface="Mangal" panose="02040503050203030202" pitchFamily="18" charset="0"/>
@@ -34482,7 +34360,7 @@
               <a:t> </a:t>
             </a:r>
             <a:r>
-              <a:rPr lang="en-US" sz="2000" err="1">
+              <a:rPr lang="en-US" sz="2400" dirty="0" err="1">
                 <a:latin typeface="DevLys 010" pitchFamily="2" charset="0"/>
                 <a:ea typeface="Calibri" panose="020F0502020204030204" pitchFamily="34" charset="0"/>
                 <a:cs typeface="Mangal" panose="02040503050203030202" pitchFamily="18" charset="0"/>
@@ -34490,7 +34368,7 @@
               <a:t>izdj.k</a:t>
             </a:r>
             <a:r>
-              <a:rPr lang="en-US" sz="2000">
+              <a:rPr lang="en-US" sz="2400" dirty="0">
                 <a:latin typeface="DevLys 010" pitchFamily="2" charset="0"/>
                 <a:ea typeface="Calibri" panose="020F0502020204030204" pitchFamily="34" charset="0"/>
                 <a:cs typeface="Mangal" panose="02040503050203030202" pitchFamily="18" charset="0"/>
@@ -34498,7 +34376,7 @@
               <a:t> ds </a:t>
             </a:r>
             <a:r>
-              <a:rPr lang="en-US" sz="2000" err="1">
+              <a:rPr lang="en-US" sz="2400" dirty="0" err="1">
                 <a:latin typeface="DevLys 010" pitchFamily="2" charset="0"/>
                 <a:ea typeface="Calibri" panose="020F0502020204030204" pitchFamily="34" charset="0"/>
                 <a:cs typeface="Mangal" panose="02040503050203030202" pitchFamily="18" charset="0"/>
@@ -34506,7 +34384,7 @@
               <a:t>fuLrkj.k</a:t>
             </a:r>
             <a:r>
-              <a:rPr lang="en-US" sz="2000">
+              <a:rPr lang="en-US" sz="2400" dirty="0">
                 <a:latin typeface="DevLys 010" pitchFamily="2" charset="0"/>
                 <a:ea typeface="Calibri" panose="020F0502020204030204" pitchFamily="34" charset="0"/>
                 <a:cs typeface="Mangal" panose="02040503050203030202" pitchFamily="18" charset="0"/>
@@ -34514,14 +34392,14 @@
               <a:t> ds </a:t>
             </a:r>
             <a:r>
-              <a:rPr lang="en-US" sz="2000" err="1">
+              <a:rPr lang="en-US" sz="2400" dirty="0" err="1">
                 <a:latin typeface="DevLys 010" pitchFamily="2" charset="0"/>
                 <a:ea typeface="Calibri" panose="020F0502020204030204" pitchFamily="34" charset="0"/>
                 <a:cs typeface="Mangal" panose="02040503050203030202" pitchFamily="18" charset="0"/>
               </a:rPr>
               <a:t>ç;klA</a:t>
             </a:r>
-            <a:endParaRPr lang="en-US" sz="2000">
+            <a:endParaRPr lang="en-US" sz="2400" dirty="0">
               <a:latin typeface="DevLys 010" pitchFamily="2" charset="0"/>
               <a:ea typeface="Calibri" panose="020F0502020204030204" pitchFamily="34" charset="0"/>
               <a:cs typeface="Mangal" panose="02040503050203030202" pitchFamily="18" charset="0"/>
@@ -34530,7 +34408,7 @@
           <a:p>
             <a:pPr marL="342900" indent="-342900" algn="just">
               <a:lnSpc>
-                <a:spcPct val="150000"/>
+                <a:spcPct val="200000"/>
               </a:lnSpc>
               <a:spcAft>
                 <a:spcPts val="800"/>
@@ -34539,7 +34417,7 @@
               <a:buChar char="q"/>
             </a:pPr>
             <a:r>
-              <a:rPr lang="en-US" sz="2000" err="1">
+              <a:rPr lang="en-US" sz="2400" dirty="0" err="1">
                 <a:latin typeface="DevLys 010" pitchFamily="2" charset="0"/>
                 <a:ea typeface="Calibri" panose="020F0502020204030204" pitchFamily="34" charset="0"/>
                 <a:cs typeface="Mangal" panose="02040503050203030202" pitchFamily="18" charset="0"/>
@@ -34547,7 +34425,7 @@
               <a:t>izHkkoh</a:t>
             </a:r>
             <a:r>
-              <a:rPr lang="en-US" sz="2000">
+              <a:rPr lang="en-US" sz="2400" dirty="0">
                 <a:latin typeface="DevLys 010" pitchFamily="2" charset="0"/>
                 <a:ea typeface="Calibri" panose="020F0502020204030204" pitchFamily="34" charset="0"/>
                 <a:cs typeface="Mangal" panose="02040503050203030202" pitchFamily="18" charset="0"/>
@@ -34555,7 +34433,7 @@
               <a:t> </a:t>
             </a:r>
             <a:r>
-              <a:rPr lang="en-US" sz="2000">
+              <a:rPr lang="en-US" sz="2400" dirty="0">
                 <a:latin typeface="Times New Roman" pitchFamily="18" charset="0"/>
                 <a:ea typeface="Calibri" panose="020F0502020204030204" pitchFamily="34" charset="0"/>
                 <a:cs typeface="Times New Roman" pitchFamily="18" charset="0"/>
@@ -34563,7 +34441,7 @@
               <a:t>non-operational </a:t>
             </a:r>
             <a:r>
-              <a:rPr lang="en-US" sz="2000">
+              <a:rPr lang="en-US" sz="2400" dirty="0">
                 <a:latin typeface="DevLys 010" pitchFamily="2" charset="0"/>
                 <a:ea typeface="Calibri" panose="020F0502020204030204" pitchFamily="34" charset="0"/>
                 <a:cs typeface="Mangal" panose="02040503050203030202" pitchFamily="18" charset="0"/>
@@ -34571,7 +34449,7 @@
               <a:t>[</a:t>
             </a:r>
             <a:r>
-              <a:rPr lang="en-US" sz="2000" err="1">
+              <a:rPr lang="en-US" sz="2400" dirty="0" err="1">
                 <a:latin typeface="DevLys 010" pitchFamily="2" charset="0"/>
                 <a:ea typeface="Calibri" panose="020F0502020204030204" pitchFamily="34" charset="0"/>
                 <a:cs typeface="Mangal" panose="02040503050203030202" pitchFamily="18" charset="0"/>
@@ -34579,7 +34457,7 @@
               <a:t>kkuksa</a:t>
             </a:r>
             <a:r>
-              <a:rPr lang="en-US" sz="2000">
+              <a:rPr lang="en-US" sz="2400" dirty="0">
                 <a:latin typeface="DevLys 010" pitchFamily="2" charset="0"/>
                 <a:ea typeface="Calibri" panose="020F0502020204030204" pitchFamily="34" charset="0"/>
                 <a:cs typeface="Mangal" panose="02040503050203030202" pitchFamily="18" charset="0"/>
@@ -34587,7 +34465,7 @@
               <a:t> ls [</a:t>
             </a:r>
             <a:r>
-              <a:rPr lang="en-US" sz="2000" err="1">
+              <a:rPr lang="en-US" sz="2400" dirty="0" err="1">
                 <a:latin typeface="DevLys 010" pitchFamily="2" charset="0"/>
                 <a:ea typeface="Calibri" panose="020F0502020204030204" pitchFamily="34" charset="0"/>
                 <a:cs typeface="Mangal" panose="02040503050203030202" pitchFamily="18" charset="0"/>
@@ -34595,7 +34473,7 @@
               <a:t>kfut</a:t>
             </a:r>
             <a:r>
-              <a:rPr lang="en-US" sz="2000">
+              <a:rPr lang="en-US" sz="2400" dirty="0">
                 <a:latin typeface="DevLys 010" pitchFamily="2" charset="0"/>
                 <a:ea typeface="Calibri" panose="020F0502020204030204" pitchFamily="34" charset="0"/>
                 <a:cs typeface="Mangal" panose="02040503050203030202" pitchFamily="18" charset="0"/>
@@ -34603,7 +34481,7 @@
               <a:t> </a:t>
             </a:r>
             <a:r>
-              <a:rPr lang="en-US" sz="2000" err="1">
+              <a:rPr lang="en-US" sz="2400" dirty="0" err="1">
                 <a:latin typeface="DevLys 010" pitchFamily="2" charset="0"/>
                 <a:ea typeface="Calibri" panose="020F0502020204030204" pitchFamily="34" charset="0"/>
                 <a:cs typeface="Mangal" panose="02040503050203030202" pitchFamily="18" charset="0"/>
@@ -34611,7 +34489,7 @@
               <a:t>mRiknu</a:t>
             </a:r>
             <a:r>
-              <a:rPr lang="en-US" sz="2000">
+              <a:rPr lang="en-US" sz="2400" dirty="0">
                 <a:latin typeface="DevLys 010" pitchFamily="2" charset="0"/>
                 <a:ea typeface="Calibri" panose="020F0502020204030204" pitchFamily="34" charset="0"/>
                 <a:cs typeface="Mangal" panose="02040503050203030202" pitchFamily="18" charset="0"/>
@@ -34619,7 +34497,7 @@
               <a:t> </a:t>
             </a:r>
             <a:r>
-              <a:rPr lang="en-US" sz="2000" err="1">
+              <a:rPr lang="en-US" sz="2400" dirty="0" err="1">
                 <a:latin typeface="DevLys 010" pitchFamily="2" charset="0"/>
                 <a:ea typeface="Calibri" panose="020F0502020204030204" pitchFamily="34" charset="0"/>
                 <a:cs typeface="Mangal" panose="02040503050203030202" pitchFamily="18" charset="0"/>
@@ -34627,7 +34505,7 @@
               <a:t>izkjEHk</a:t>
             </a:r>
             <a:r>
-              <a:rPr lang="en-US" sz="2000">
+              <a:rPr lang="en-US" sz="2400" dirty="0">
                 <a:latin typeface="DevLys 010" pitchFamily="2" charset="0"/>
                 <a:ea typeface="Calibri" panose="020F0502020204030204" pitchFamily="34" charset="0"/>
                 <a:cs typeface="Mangal" panose="02040503050203030202" pitchFamily="18" charset="0"/>
@@ -34635,7 +34513,7 @@
               <a:t> </a:t>
             </a:r>
             <a:r>
-              <a:rPr lang="en-US" sz="2000" err="1">
+              <a:rPr lang="en-US" sz="2400" dirty="0" err="1">
                 <a:latin typeface="DevLys 010" pitchFamily="2" charset="0"/>
                 <a:ea typeface="Calibri" panose="020F0502020204030204" pitchFamily="34" charset="0"/>
                 <a:cs typeface="Mangal" panose="02040503050203030202" pitchFamily="18" charset="0"/>
@@ -34643,7 +34521,7 @@
               <a:t>djus</a:t>
             </a:r>
             <a:r>
-              <a:rPr lang="en-US" sz="2000">
+              <a:rPr lang="en-US" sz="2400" dirty="0">
                 <a:latin typeface="DevLys 010" pitchFamily="2" charset="0"/>
                 <a:ea typeface="Calibri" panose="020F0502020204030204" pitchFamily="34" charset="0"/>
                 <a:cs typeface="Mangal" panose="02040503050203030202" pitchFamily="18" charset="0"/>
@@ -34651,14 +34529,14 @@
               <a:t> ds </a:t>
             </a:r>
             <a:r>
-              <a:rPr lang="en-US" sz="2000" err="1">
+              <a:rPr lang="en-US" sz="2400" dirty="0" err="1">
                 <a:latin typeface="DevLys 010" pitchFamily="2" charset="0"/>
                 <a:ea typeface="Calibri" panose="020F0502020204030204" pitchFamily="34" charset="0"/>
                 <a:cs typeface="Mangal" panose="02040503050203030202" pitchFamily="18" charset="0"/>
               </a:rPr>
               <a:t>ç;klA</a:t>
             </a:r>
-            <a:endParaRPr lang="en-US" sz="2000">
+            <a:endParaRPr lang="en-US" sz="2400" dirty="0">
               <a:latin typeface="DevLys 010" pitchFamily="2" charset="0"/>
               <a:ea typeface="Calibri" panose="020F0502020204030204" pitchFamily="34" charset="0"/>
               <a:cs typeface="Mangal" panose="02040503050203030202" pitchFamily="18" charset="0"/>
@@ -34667,7 +34545,7 @@
           <a:p>
             <a:pPr marL="342900" indent="-342900" algn="just">
               <a:lnSpc>
-                <a:spcPct val="150000"/>
+                <a:spcPct val="200000"/>
               </a:lnSpc>
               <a:spcAft>
                 <a:spcPts val="800"/>
@@ -34676,7 +34554,7 @@
               <a:buChar char="q"/>
             </a:pPr>
             <a:r>
-              <a:rPr lang="en-US" sz="2000" err="1">
+              <a:rPr lang="en-US" sz="2400" dirty="0" err="1">
                 <a:latin typeface="DevLys 010" pitchFamily="2" charset="0"/>
                 <a:ea typeface="Calibri" panose="020F0502020204030204" pitchFamily="34" charset="0"/>
                 <a:cs typeface="Mangal" panose="02040503050203030202" pitchFamily="18" charset="0"/>
@@ -34684,7 +34562,7 @@
               <a:t>uhyke</a:t>
             </a:r>
             <a:r>
-              <a:rPr lang="en-US" sz="2000">
+              <a:rPr lang="en-US" sz="2400" dirty="0">
                 <a:latin typeface="DevLys 010" pitchFamily="2" charset="0"/>
                 <a:ea typeface="Calibri" panose="020F0502020204030204" pitchFamily="34" charset="0"/>
                 <a:cs typeface="Mangal" panose="02040503050203030202" pitchFamily="18" charset="0"/>
@@ -34692,7 +34570,7 @@
               <a:t> </a:t>
             </a:r>
             <a:r>
-              <a:rPr lang="en-US" sz="2000" err="1">
+              <a:rPr lang="en-US" sz="2400" dirty="0" err="1">
                 <a:latin typeface="DevLys 010" pitchFamily="2" charset="0"/>
                 <a:ea typeface="Calibri" panose="020F0502020204030204" pitchFamily="34" charset="0"/>
                 <a:cs typeface="Mangal" panose="02040503050203030202" pitchFamily="18" charset="0"/>
@@ -34700,7 +34578,7 @@
               <a:t>fd;s</a:t>
             </a:r>
             <a:r>
-              <a:rPr lang="en-US" sz="2000">
+              <a:rPr lang="en-US" sz="2400" dirty="0">
                 <a:latin typeface="DevLys 010" pitchFamily="2" charset="0"/>
                 <a:ea typeface="Calibri" panose="020F0502020204030204" pitchFamily="34" charset="0"/>
                 <a:cs typeface="Mangal" panose="02040503050203030202" pitchFamily="18" charset="0"/>
@@ -34708,7 +34586,7 @@
               <a:t> </a:t>
             </a:r>
             <a:r>
-              <a:rPr lang="en-US" sz="2000" err="1">
+              <a:rPr lang="en-US" sz="2400" dirty="0" err="1">
                 <a:latin typeface="DevLys 010" pitchFamily="2" charset="0"/>
                 <a:ea typeface="Calibri" panose="020F0502020204030204" pitchFamily="34" charset="0"/>
                 <a:cs typeface="Mangal" panose="02040503050203030202" pitchFamily="18" charset="0"/>
@@ -34716,7 +34594,7 @@
               <a:t>x;s</a:t>
             </a:r>
             <a:r>
-              <a:rPr lang="en-US" sz="2000">
+              <a:rPr lang="en-US" sz="2400" dirty="0">
                 <a:latin typeface="DevLys 010" pitchFamily="2" charset="0"/>
                 <a:ea typeface="Calibri" panose="020F0502020204030204" pitchFamily="34" charset="0"/>
                 <a:cs typeface="Mangal" panose="02040503050203030202" pitchFamily="18" charset="0"/>
@@ -34724,7 +34602,7 @@
               <a:t> </a:t>
             </a:r>
             <a:r>
-              <a:rPr lang="en-US" sz="2000" err="1">
+              <a:rPr lang="en-US" sz="2400" dirty="0" err="1">
                 <a:latin typeface="DevLys 010" pitchFamily="2" charset="0"/>
                 <a:ea typeface="Calibri" panose="020F0502020204030204" pitchFamily="34" charset="0"/>
                 <a:cs typeface="Mangal" panose="02040503050203030202" pitchFamily="18" charset="0"/>
@@ -34732,7 +34610,7 @@
               <a:t>CykWDl</a:t>
             </a:r>
             <a:r>
-              <a:rPr lang="en-US" sz="2000">
+              <a:rPr lang="en-US" sz="2400" dirty="0">
                 <a:latin typeface="DevLys 010" pitchFamily="2" charset="0"/>
                 <a:ea typeface="Calibri" panose="020F0502020204030204" pitchFamily="34" charset="0"/>
                 <a:cs typeface="Mangal" panose="02040503050203030202" pitchFamily="18" charset="0"/>
@@ -34740,7 +34618,7 @@
               <a:t> ds </a:t>
             </a:r>
             <a:r>
-              <a:rPr lang="en-US" sz="2000">
+              <a:rPr lang="en-US" sz="2400" dirty="0">
                 <a:latin typeface="Times New Roman" pitchFamily="18" charset="0"/>
                 <a:ea typeface="Calibri" panose="020F0502020204030204" pitchFamily="34" charset="0"/>
                 <a:cs typeface="Times New Roman" pitchFamily="18" charset="0"/>
@@ -34748,7 +34626,7 @@
               <a:t>early operationalization</a:t>
             </a:r>
             <a:r>
-              <a:rPr lang="en-US" sz="2000">
+              <a:rPr lang="en-US" sz="2400" dirty="0">
                 <a:latin typeface="DevLys 010" pitchFamily="2" charset="0"/>
                 <a:ea typeface="Calibri" panose="020F0502020204030204" pitchFamily="34" charset="0"/>
                 <a:cs typeface="Mangal" panose="02040503050203030202" pitchFamily="18" charset="0"/>
@@ -34756,7 +34634,7 @@
               <a:t> </a:t>
             </a:r>
             <a:r>
-              <a:rPr lang="en-US" sz="2000" err="1">
+              <a:rPr lang="en-US" sz="2400" dirty="0" err="1">
                 <a:latin typeface="DevLys 010" pitchFamily="2" charset="0"/>
                 <a:ea typeface="Calibri" panose="020F0502020204030204" pitchFamily="34" charset="0"/>
                 <a:cs typeface="Mangal" panose="02040503050203030202" pitchFamily="18" charset="0"/>
@@ -34764,7 +34642,7 @@
               <a:t>gsrq</a:t>
             </a:r>
             <a:r>
-              <a:rPr lang="en-US" sz="2000">
+              <a:rPr lang="en-US" sz="2400" dirty="0">
                 <a:latin typeface="DevLys 010" pitchFamily="2" charset="0"/>
                 <a:ea typeface="Calibri" panose="020F0502020204030204" pitchFamily="34" charset="0"/>
                 <a:cs typeface="Mangal" panose="02040503050203030202" pitchFamily="18" charset="0"/>
@@ -34772,7 +34650,7 @@
               <a:t> </a:t>
             </a:r>
             <a:r>
-              <a:rPr lang="en-US" sz="2000" err="1">
+              <a:rPr lang="en-US" sz="2400" dirty="0" err="1">
                 <a:latin typeface="DevLys 010" pitchFamily="2" charset="0"/>
                 <a:ea typeface="Calibri" panose="020F0502020204030204" pitchFamily="34" charset="0"/>
                 <a:cs typeface="Mangal" panose="02040503050203030202" pitchFamily="18" charset="0"/>
@@ -34780,7 +34658,7 @@
               <a:t>xfBr</a:t>
             </a:r>
             <a:r>
-              <a:rPr lang="en-US" sz="2000">
+              <a:rPr lang="en-US" sz="2400" dirty="0">
                 <a:latin typeface="DevLys 010" pitchFamily="2" charset="0"/>
                 <a:ea typeface="Calibri" panose="020F0502020204030204" pitchFamily="34" charset="0"/>
                 <a:cs typeface="Mangal" panose="02040503050203030202" pitchFamily="18" charset="0"/>
@@ -34788,7 +34666,7 @@
               <a:t> </a:t>
             </a:r>
             <a:r>
-              <a:rPr lang="en-US" sz="2000">
+              <a:rPr lang="en-US" sz="2400" dirty="0">
                 <a:latin typeface="Times New Roman" pitchFamily="18" charset="0"/>
                 <a:ea typeface="Calibri" panose="020F0502020204030204" pitchFamily="34" charset="0"/>
                 <a:cs typeface="Times New Roman" pitchFamily="18" charset="0"/>
@@ -34796,7 +34674,7 @@
               <a:t>Post Auction Cell </a:t>
             </a:r>
             <a:r>
-              <a:rPr lang="en-US" sz="2000">
+              <a:rPr lang="en-US" sz="2400" dirty="0">
                 <a:latin typeface="DevLys 010" pitchFamily="2" charset="0"/>
                 <a:ea typeface="Calibri" panose="020F0502020204030204" pitchFamily="34" charset="0"/>
                 <a:cs typeface="Mangal" panose="02040503050203030202" pitchFamily="18" charset="0"/>
@@ -34804,7 +34682,7 @@
               <a:t>dk </a:t>
             </a:r>
             <a:r>
-              <a:rPr lang="en-US" sz="2000" err="1">
+              <a:rPr lang="en-US" sz="2400" dirty="0" err="1">
                 <a:latin typeface="DevLys 010" pitchFamily="2" charset="0"/>
                 <a:ea typeface="Calibri" panose="020F0502020204030204" pitchFamily="34" charset="0"/>
                 <a:cs typeface="Mangal" panose="02040503050203030202" pitchFamily="18" charset="0"/>
@@ -34812,7 +34690,7 @@
               <a:t>lqn</a:t>
             </a:r>
             <a:r>
-              <a:rPr lang="en-US" sz="2000">
+              <a:rPr lang="en-US" sz="2400" dirty="0">
                 <a:latin typeface="DevLys 010" pitchFamily="2" charset="0"/>
                 <a:ea typeface="Calibri" panose="020F0502020204030204" pitchFamily="34" charset="0"/>
                 <a:cs typeface="Mangal" panose="02040503050203030202" pitchFamily="18" charset="0"/>
@@ -34820,14 +34698,14 @@
               <a:t>`&lt;</a:t>
             </a:r>
             <a:r>
-              <a:rPr lang="en-US" sz="2000" err="1">
+              <a:rPr lang="en-US" sz="2400" dirty="0" err="1">
                 <a:latin typeface="DevLys 010" pitchFamily="2" charset="0"/>
                 <a:ea typeface="Calibri" panose="020F0502020204030204" pitchFamily="34" charset="0"/>
                 <a:cs typeface="Mangal" panose="02040503050203030202" pitchFamily="18" charset="0"/>
               </a:rPr>
               <a:t>hdj.kA</a:t>
             </a:r>
-            <a:endParaRPr lang="en-US" sz="2000">
+            <a:endParaRPr lang="en-US" sz="2400" dirty="0">
               <a:latin typeface="DevLys 010" pitchFamily="2" charset="0"/>
               <a:ea typeface="Calibri" panose="020F0502020204030204" pitchFamily="34" charset="0"/>
               <a:cs typeface="Mangal" panose="02040503050203030202" pitchFamily="18" charset="0"/>
@@ -34836,7 +34714,7 @@
           <a:p>
             <a:pPr marL="285750" indent="-285750" algn="just">
               <a:lnSpc>
-                <a:spcPct val="150000"/>
+                <a:spcPct val="200000"/>
               </a:lnSpc>
               <a:spcAft>
                 <a:spcPts val="600"/>
@@ -34844,7 +34722,7 @@
               <a:buFont typeface="Wingdings" panose="05000000000000000000" pitchFamily="2" charset="2"/>
               <a:buChar char="q"/>
             </a:pPr>
-            <a:endParaRPr lang="en-US">
+            <a:endParaRPr lang="en-US" sz="2400" dirty="0">
               <a:latin typeface="DevLys 010 " pitchFamily="2" charset="0"/>
             </a:endParaRPr>
           </a:p>

--- a/HCM_Meeting_5_5_2026.pptx
+++ b/HCM_Meeting_5_5_2026.pptx
@@ -6,7 +6,7 @@
     <p:sldMasterId id="2147483661" r:id="rId2"/>
   </p:sldMasterIdLst>
   <p:notesMasterIdLst>
-    <p:notesMasterId r:id="rId19"/>
+    <p:notesMasterId r:id="rId20"/>
   </p:notesMasterIdLst>
   <p:sldIdLst>
     <p:sldId id="300" r:id="rId3"/>
@@ -20,11 +20,12 @@
     <p:sldId id="369" r:id="rId11"/>
     <p:sldId id="370" r:id="rId12"/>
     <p:sldId id="371" r:id="rId13"/>
-    <p:sldId id="350" r:id="rId14"/>
-    <p:sldId id="366" r:id="rId15"/>
-    <p:sldId id="363" r:id="rId16"/>
-    <p:sldId id="364" r:id="rId17"/>
-    <p:sldId id="365" r:id="rId18"/>
+    <p:sldId id="372" r:id="rId14"/>
+    <p:sldId id="350" r:id="rId15"/>
+    <p:sldId id="366" r:id="rId16"/>
+    <p:sldId id="363" r:id="rId17"/>
+    <p:sldId id="364" r:id="rId18"/>
+    <p:sldId id="365" r:id="rId19"/>
   </p:sldIdLst>
   <p:sldSz cx="12192000" cy="6858000"/>
   <p:notesSz cx="6858000" cy="9144000"/>
@@ -5330,6 +5331,174 @@
         <p:cNvPr id="1" name="">
           <a:extLst>
             <a:ext uri="{FF2B5EF4-FFF2-40B4-BE49-F238E27FC236}">
+              <a16:creationId xmlns:a16="http://schemas.microsoft.com/office/drawing/2014/main" id="{6C6F10F2-4645-62F5-2779-9B285C05CE12}"/>
+            </a:ext>
+          </a:extLst>
+        </p:cNvPr>
+        <p:cNvGrpSpPr/>
+        <p:nvPr/>
+      </p:nvGrpSpPr>
+      <p:grpSpPr>
+        <a:xfrm>
+          <a:off x="0" y="0"/>
+          <a:ext cx="0" cy="0"/>
+          <a:chOff x="0" y="0"/>
+          <a:chExt cx="0" cy="0"/>
+        </a:xfrm>
+      </p:grpSpPr>
+      <p:sp>
+        <p:nvSpPr>
+          <p:cNvPr id="2" name="Slide Image Placeholder 1">
+            <a:extLst>
+              <a:ext uri="{FF2B5EF4-FFF2-40B4-BE49-F238E27FC236}">
+                <a16:creationId xmlns:a16="http://schemas.microsoft.com/office/drawing/2014/main" id="{D0B767C9-4AE0-DF15-F893-3F8A3306E4EA}"/>
+              </a:ext>
+            </a:extLst>
+          </p:cNvPr>
+          <p:cNvSpPr>
+            <a:spLocks noGrp="1" noRot="1" noChangeAspect="1"/>
+          </p:cNvSpPr>
+          <p:nvPr>
+            <p:ph type="sldImg"/>
+          </p:nvPr>
+        </p:nvSpPr>
+        <p:spPr/>
+      </p:sp>
+      <p:sp>
+        <p:nvSpPr>
+          <p:cNvPr id="3" name="Notes Placeholder 2">
+            <a:extLst>
+              <a:ext uri="{FF2B5EF4-FFF2-40B4-BE49-F238E27FC236}">
+                <a16:creationId xmlns:a16="http://schemas.microsoft.com/office/drawing/2014/main" id="{74B309EB-DC02-337D-9408-8406A1467FD3}"/>
+              </a:ext>
+            </a:extLst>
+          </p:cNvPr>
+          <p:cNvSpPr>
+            <a:spLocks noGrp="1"/>
+          </p:cNvSpPr>
+          <p:nvPr>
+            <p:ph type="body" idx="1"/>
+          </p:nvPr>
+        </p:nvSpPr>
+        <p:spPr/>
+        <p:txBody>
+          <a:bodyPr/>
+          <a:lstStyle/>
+          <a:p>
+            <a:endParaRPr lang="en-IN"/>
+          </a:p>
+        </p:txBody>
+      </p:sp>
+      <p:sp>
+        <p:nvSpPr>
+          <p:cNvPr id="4" name="Slide Number Placeholder 3">
+            <a:extLst>
+              <a:ext uri="{FF2B5EF4-FFF2-40B4-BE49-F238E27FC236}">
+                <a16:creationId xmlns:a16="http://schemas.microsoft.com/office/drawing/2014/main" id="{7C290671-E847-5135-1A22-12782BC96621}"/>
+              </a:ext>
+            </a:extLst>
+          </p:cNvPr>
+          <p:cNvSpPr>
+            <a:spLocks noGrp="1"/>
+          </p:cNvSpPr>
+          <p:nvPr>
+            <p:ph type="sldNum" sz="quarter" idx="5"/>
+          </p:nvPr>
+        </p:nvSpPr>
+        <p:spPr/>
+        <p:txBody>
+          <a:bodyPr/>
+          <a:lstStyle/>
+          <a:p>
+            <a:pPr marL="0" marR="0" lvl="0" indent="0" algn="r" defTabSz="914400" rtl="0" eaLnBrk="1" fontAlgn="auto" latinLnBrk="0" hangingPunct="1">
+              <a:lnSpc>
+                <a:spcPct val="100000"/>
+              </a:lnSpc>
+              <a:spcBef>
+                <a:spcPts val="0"/>
+              </a:spcBef>
+              <a:spcAft>
+                <a:spcPts val="0"/>
+              </a:spcAft>
+              <a:buClrTx/>
+              <a:buSzTx/>
+              <a:buFontTx/>
+              <a:buNone/>
+              <a:tabLst/>
+              <a:defRPr/>
+            </a:pPr>
+            <a:fld id="{9194480D-BAD5-42D1-B62D-16376DEED2F9}" type="slidenum">
+              <a:rPr kumimoji="0" lang="en-IN" sz="1200" b="0" i="0" u="none" strike="noStrike" kern="1200" cap="none" spc="0" normalizeH="0" baseline="0" noProof="0" smtClean="0">
+                <a:ln>
+                  <a:noFill/>
+                </a:ln>
+                <a:solidFill>
+                  <a:prstClr val="black"/>
+                </a:solidFill>
+                <a:effectLst/>
+                <a:uLnTx/>
+                <a:uFillTx/>
+                <a:latin typeface="Aptos" panose="02110004020202020204"/>
+                <a:ea typeface="+mn-ea"/>
+                <a:cs typeface="+mn-cs"/>
+              </a:rPr>
+              <a:pPr marL="0" marR="0" lvl="0" indent="0" algn="r" defTabSz="914400" rtl="0" eaLnBrk="1" fontAlgn="auto" latinLnBrk="0" hangingPunct="1">
+                <a:lnSpc>
+                  <a:spcPct val="100000"/>
+                </a:lnSpc>
+                <a:spcBef>
+                  <a:spcPts val="0"/>
+                </a:spcBef>
+                <a:spcAft>
+                  <a:spcPts val="0"/>
+                </a:spcAft>
+                <a:buClrTx/>
+                <a:buSzTx/>
+                <a:buFontTx/>
+                <a:buNone/>
+                <a:tabLst/>
+                <a:defRPr/>
+              </a:pPr>
+              <a:t>12</a:t>
+            </a:fld>
+            <a:endParaRPr kumimoji="0" lang="en-IN" sz="1200" b="0" i="0" u="none" strike="noStrike" kern="1200" cap="none" spc="0" normalizeH="0" baseline="0" noProof="0">
+              <a:ln>
+                <a:noFill/>
+              </a:ln>
+              <a:solidFill>
+                <a:prstClr val="black"/>
+              </a:solidFill>
+              <a:effectLst/>
+              <a:uLnTx/>
+              <a:uFillTx/>
+              <a:latin typeface="Aptos" panose="02110004020202020204"/>
+              <a:ea typeface="+mn-ea"/>
+              <a:cs typeface="+mn-cs"/>
+            </a:endParaRPr>
+          </a:p>
+        </p:txBody>
+      </p:sp>
+    </p:spTree>
+    <p:extLst>
+      <p:ext uri="{BB962C8B-B14F-4D97-AF65-F5344CB8AC3E}">
+        <p14:creationId xmlns:p14="http://schemas.microsoft.com/office/powerpoint/2010/main" val="3018408779"/>
+      </p:ext>
+    </p:extLst>
+  </p:cSld>
+  <p:clrMapOvr>
+    <a:masterClrMapping/>
+  </p:clrMapOvr>
+</p:notes>
+</file>
+
+<file path=ppt/notesSlides/notesSlide12.xml><?xml version="1.0" encoding="utf-8"?>
+<p:notes xmlns:a="http://schemas.openxmlformats.org/drawingml/2006/main" xmlns:r="http://schemas.openxmlformats.org/officeDocument/2006/relationships" xmlns:p="http://schemas.openxmlformats.org/presentationml/2006/main">
+  <p:cSld>
+    <p:spTree>
+      <p:nvGrpSpPr>
+        <p:cNvPr id="1" name="">
+          <a:extLst>
+            <a:ext uri="{FF2B5EF4-FFF2-40B4-BE49-F238E27FC236}">
               <a16:creationId xmlns:a16="http://schemas.microsoft.com/office/drawing/2014/main" id="{6C7601A6-1F11-502F-6072-729C70BAC76C}"/>
             </a:ext>
           </a:extLst>
@@ -5411,7 +5580,7 @@
           <a:p>
             <a:fld id="{9194480D-BAD5-42D1-B62D-16376DEED2F9}" type="slidenum">
               <a:rPr lang="en-IN" smtClean="0"/>
-              <a:t>12</a:t>
+              <a:t>13</a:t>
             </a:fld>
             <a:endParaRPr lang="en-IN"/>
           </a:p>
@@ -5430,7 +5599,7 @@
 </p:notes>
 </file>
 
-<file path=ppt/notesSlides/notesSlide12.xml><?xml version="1.0" encoding="utf-8"?>
+<file path=ppt/notesSlides/notesSlide13.xml><?xml version="1.0" encoding="utf-8"?>
 <p:notes xmlns:a="http://schemas.openxmlformats.org/drawingml/2006/main" xmlns:r="http://schemas.openxmlformats.org/officeDocument/2006/relationships" xmlns:p="http://schemas.openxmlformats.org/presentationml/2006/main">
   <p:cSld>
     <p:spTree>
@@ -5519,7 +5688,7 @@
           <a:p>
             <a:fld id="{9194480D-BAD5-42D1-B62D-16376DEED2F9}" type="slidenum">
               <a:rPr lang="en-IN" smtClean="0"/>
-              <a:t>13</a:t>
+              <a:t>14</a:t>
             </a:fld>
             <a:endParaRPr lang="en-IN"/>
           </a:p>
@@ -5538,7 +5707,7 @@
 </p:notes>
 </file>
 
-<file path=ppt/notesSlides/notesSlide13.xml><?xml version="1.0" encoding="utf-8"?>
+<file path=ppt/notesSlides/notesSlide14.xml><?xml version="1.0" encoding="utf-8"?>
 <p:notes xmlns:a="http://schemas.openxmlformats.org/drawingml/2006/main" xmlns:r="http://schemas.openxmlformats.org/officeDocument/2006/relationships" xmlns:p="http://schemas.openxmlformats.org/presentationml/2006/main">
   <p:cSld>
     <p:spTree>
@@ -5627,7 +5796,7 @@
           <a:p>
             <a:fld id="{9194480D-BAD5-42D1-B62D-16376DEED2F9}" type="slidenum">
               <a:rPr lang="en-IN" smtClean="0"/>
-              <a:t>14</a:t>
+              <a:t>15</a:t>
             </a:fld>
             <a:endParaRPr lang="en-IN"/>
           </a:p>
@@ -5646,7 +5815,7 @@
 </p:notes>
 </file>
 
-<file path=ppt/notesSlides/notesSlide14.xml><?xml version="1.0" encoding="utf-8"?>
+<file path=ppt/notesSlides/notesSlide15.xml><?xml version="1.0" encoding="utf-8"?>
 <p:notes xmlns:a="http://schemas.openxmlformats.org/drawingml/2006/main" xmlns:r="http://schemas.openxmlformats.org/officeDocument/2006/relationships" xmlns:p="http://schemas.openxmlformats.org/presentationml/2006/main">
   <p:cSld>
     <p:spTree>
@@ -5735,7 +5904,7 @@
           <a:p>
             <a:fld id="{9194480D-BAD5-42D1-B62D-16376DEED2F9}" type="slidenum">
               <a:rPr lang="en-IN" smtClean="0"/>
-              <a:t>15</a:t>
+              <a:t>16</a:t>
             </a:fld>
             <a:endParaRPr lang="en-IN"/>
           </a:p>
@@ -5754,7 +5923,7 @@
 </p:notes>
 </file>
 
-<file path=ppt/notesSlides/notesSlide15.xml><?xml version="1.0" encoding="utf-8"?>
+<file path=ppt/notesSlides/notesSlide16.xml><?xml version="1.0" encoding="utf-8"?>
 <p:notes xmlns:a="http://schemas.openxmlformats.org/drawingml/2006/main" xmlns:r="http://schemas.openxmlformats.org/officeDocument/2006/relationships" xmlns:p="http://schemas.openxmlformats.org/presentationml/2006/main">
   <p:cSld>
     <p:spTree>
@@ -5843,7 +6012,7 @@
           <a:p>
             <a:fld id="{9194480D-BAD5-42D1-B62D-16376DEED2F9}" type="slidenum">
               <a:rPr lang="en-IN" smtClean="0"/>
-              <a:t>16</a:t>
+              <a:t>17</a:t>
             </a:fld>
             <a:endParaRPr lang="en-IN"/>
           </a:p>
@@ -16942,7 +17111,7 @@
                 <a:ea typeface="Calibri" panose="020F0502020204030204" pitchFamily="34" charset="0"/>
                 <a:cs typeface="Mangal" panose="02040503050203030202" pitchFamily="18" charset="0"/>
               </a:rPr>
-              <a:t>------------ </a:t>
+              <a:t>54 </a:t>
             </a:r>
             <a:r>
               <a:rPr lang="en-US" sz="2400" dirty="0" err="1">
@@ -16958,7 +17127,7 @@
                 <a:ea typeface="Calibri" panose="020F0502020204030204" pitchFamily="34" charset="0"/>
                 <a:cs typeface="Mangal" panose="02040503050203030202" pitchFamily="18" charset="0"/>
               </a:rPr>
-              <a:t> ¼xksYM------] </a:t>
+              <a:t> ¼xksYM 1 ] </a:t>
             </a:r>
             <a:r>
               <a:rPr lang="en-US" sz="2400" dirty="0" err="1">
@@ -16974,7 +17143,7 @@
                 <a:ea typeface="Calibri" panose="020F0502020204030204" pitchFamily="34" charset="0"/>
                 <a:cs typeface="Mangal" panose="02040503050203030202" pitchFamily="18" charset="0"/>
               </a:rPr>
-              <a:t> -----------------] </a:t>
+              <a:t> 4] </a:t>
             </a:r>
             <a:r>
               <a:rPr lang="en-US" sz="2400" dirty="0" err="1">
@@ -16990,15 +17159,23 @@
                 <a:ea typeface="Calibri" panose="020F0502020204030204" pitchFamily="34" charset="0"/>
                 <a:cs typeface="Mangal" panose="02040503050203030202" pitchFamily="18" charset="0"/>
               </a:rPr>
-              <a:t> -----] </a:t>
-            </a:r>
-            <a:r>
-              <a:rPr lang="en-US" sz="2400" dirty="0" err="1">
-                <a:latin typeface="DevLys 010" pitchFamily="2" charset="0"/>
-                <a:ea typeface="Calibri" panose="020F0502020204030204" pitchFamily="34" charset="0"/>
-                <a:cs typeface="Mangal" panose="02040503050203030202" pitchFamily="18" charset="0"/>
-              </a:rPr>
-              <a:t>vk;ju</a:t>
+              <a:t> 46] </a:t>
+            </a:r>
+            <a:r>
+              <a:rPr lang="hi-IN" dirty="0"/>
+              <a:t>गार्नेट</a:t>
+            </a:r>
+            <a:r>
+              <a:rPr lang="en-US" dirty="0"/>
+              <a:t> 2</a:t>
+            </a:r>
+            <a:r>
+              <a:rPr lang="en-US" u="sng" dirty="0"/>
+              <a:t>,</a:t>
+            </a:r>
+            <a:r>
+              <a:rPr lang="hi-IN" dirty="0"/>
+              <a:t>लेड–जिंक – 1</a:t>
             </a:r>
             <a:r>
               <a:rPr lang="en-US" sz="2400" dirty="0">
@@ -17006,23 +17183,7 @@
                 <a:ea typeface="Calibri" panose="020F0502020204030204" pitchFamily="34" charset="0"/>
                 <a:cs typeface="Mangal" panose="02040503050203030202" pitchFamily="18" charset="0"/>
               </a:rPr>
-              <a:t> </a:t>
-            </a:r>
-            <a:r>
-              <a:rPr lang="en-US" sz="2400" dirty="0" err="1">
-                <a:latin typeface="DevLys 010" pitchFamily="2" charset="0"/>
-                <a:ea typeface="Calibri" panose="020F0502020204030204" pitchFamily="34" charset="0"/>
-                <a:cs typeface="Mangal" panose="02040503050203030202" pitchFamily="18" charset="0"/>
-              </a:rPr>
-              <a:t>vksj</a:t>
-            </a:r>
-            <a:r>
-              <a:rPr lang="en-US" sz="2400" dirty="0">
-                <a:latin typeface="DevLys 010" pitchFamily="2" charset="0"/>
-                <a:ea typeface="Calibri" panose="020F0502020204030204" pitchFamily="34" charset="0"/>
-                <a:cs typeface="Mangal" panose="02040503050203030202" pitchFamily="18" charset="0"/>
-              </a:rPr>
-              <a:t> ------½</a:t>
+              <a:t>-½</a:t>
             </a:r>
           </a:p>
           <a:p>
@@ -17311,7 +17472,7 @@
                 <a:ea typeface="Calibri" panose="020F0502020204030204" pitchFamily="34" charset="0"/>
                 <a:cs typeface="Mangal" panose="02040503050203030202" pitchFamily="18" charset="0"/>
               </a:rPr>
-              <a:t> % ------------ </a:t>
+              <a:t> % 10 </a:t>
             </a:r>
             <a:r>
               <a:rPr lang="en-US" sz="2400" dirty="0" err="1">
@@ -17397,6 +17558,52 @@
           </a:p>
         </p:txBody>
       </p:sp>
+      <p:sp>
+        <p:nvSpPr>
+          <p:cNvPr id="3" name="TextBox 2">
+            <a:extLst>
+              <a:ext uri="{FF2B5EF4-FFF2-40B4-BE49-F238E27FC236}">
+                <a16:creationId xmlns:a16="http://schemas.microsoft.com/office/drawing/2014/main" id="{87F9ABA9-DD8A-82CD-BFBC-19694C33BE52}"/>
+              </a:ext>
+            </a:extLst>
+          </p:cNvPr>
+          <p:cNvSpPr txBox="1"/>
+          <p:nvPr/>
+        </p:nvSpPr>
+        <p:spPr>
+          <a:xfrm>
+            <a:off x="10810729" y="162448"/>
+            <a:ext cx="1146468" cy="646331"/>
+          </a:xfrm>
+          <a:prstGeom prst="rect">
+            <a:avLst/>
+          </a:prstGeom>
+          <a:noFill/>
+        </p:spPr>
+        <p:txBody>
+          <a:bodyPr wrap="none" rtlCol="0">
+            <a:spAutoFit/>
+          </a:bodyPr>
+          <a:lstStyle/>
+          <a:p>
+            <a:r>
+              <a:rPr lang="en-US" b="1" dirty="0" err="1">
+                <a:latin typeface="DevLys 010" pitchFamily="2" charset="0"/>
+              </a:rPr>
+              <a:t>o"kZ</a:t>
+            </a:r>
+            <a:r>
+              <a:rPr lang="en-US" b="1" dirty="0">
+                <a:latin typeface="DevLys 010" pitchFamily="2" charset="0"/>
+              </a:rPr>
+              <a:t> 2025&amp;26</a:t>
+            </a:r>
+          </a:p>
+          <a:p>
+            <a:endParaRPr lang="en-IN" dirty="0"/>
+          </a:p>
+        </p:txBody>
+      </p:sp>
     </p:spTree>
     <p:extLst>
       <p:ext uri="{BB962C8B-B14F-4D97-AF65-F5344CB8AC3E}">
@@ -17411,6 +17618,1269 @@
 </file>
 
 <file path=ppt/slides/slide12.xml><?xml version="1.0" encoding="utf-8"?>
+<p:sld xmlns:a="http://schemas.openxmlformats.org/drawingml/2006/main" xmlns:r="http://schemas.openxmlformats.org/officeDocument/2006/relationships" xmlns:p="http://schemas.openxmlformats.org/presentationml/2006/main">
+  <p:cSld>
+    <p:spTree>
+      <p:nvGrpSpPr>
+        <p:cNvPr id="1" name="">
+          <a:extLst>
+            <a:ext uri="{FF2B5EF4-FFF2-40B4-BE49-F238E27FC236}">
+              <a16:creationId xmlns:a16="http://schemas.microsoft.com/office/drawing/2014/main" id="{A8BB0903-DF6F-98C0-7F72-6035EF34BF16}"/>
+            </a:ext>
+          </a:extLst>
+        </p:cNvPr>
+        <p:cNvGrpSpPr/>
+        <p:nvPr/>
+      </p:nvGrpSpPr>
+      <p:grpSpPr>
+        <a:xfrm>
+          <a:off x="0" y="0"/>
+          <a:ext cx="0" cy="0"/>
+          <a:chOff x="0" y="0"/>
+          <a:chExt cx="0" cy="0"/>
+        </a:xfrm>
+      </p:grpSpPr>
+      <p:sp>
+        <p:nvSpPr>
+          <p:cNvPr id="8" name="Slide Number Placeholder 1">
+            <a:extLst>
+              <a:ext uri="{FF2B5EF4-FFF2-40B4-BE49-F238E27FC236}">
+                <a16:creationId xmlns:a16="http://schemas.microsoft.com/office/drawing/2014/main" id="{4793ADC6-42C1-85E2-4D0F-4C57E3E2CD87}"/>
+              </a:ext>
+            </a:extLst>
+          </p:cNvPr>
+          <p:cNvSpPr>
+            <a:spLocks noGrp="1"/>
+          </p:cNvSpPr>
+          <p:nvPr>
+            <p:ph type="sldNum" sz="quarter" idx="12"/>
+          </p:nvPr>
+        </p:nvSpPr>
+        <p:spPr>
+          <a:xfrm>
+            <a:off x="8640763" y="5169769"/>
+            <a:ext cx="2743200" cy="365125"/>
+          </a:xfrm>
+          <a:prstGeom prst="rect">
+            <a:avLst/>
+          </a:prstGeom>
+        </p:spPr>
+        <p:txBody>
+          <a:bodyPr/>
+          <a:lstStyle/>
+          <a:p>
+            <a:pPr marL="0" marR="0" lvl="0" indent="0" algn="r" defTabSz="914400" rtl="0" eaLnBrk="1" fontAlgn="auto" latinLnBrk="0" hangingPunct="1">
+              <a:lnSpc>
+                <a:spcPct val="100000"/>
+              </a:lnSpc>
+              <a:spcBef>
+                <a:spcPts val="0"/>
+              </a:spcBef>
+              <a:spcAft>
+                <a:spcPts val="0"/>
+              </a:spcAft>
+              <a:buClrTx/>
+              <a:buSzTx/>
+              <a:buFontTx/>
+              <a:buNone/>
+              <a:tabLst/>
+              <a:defRPr/>
+            </a:pPr>
+            <a:fld id="{C3F78ADD-73C9-4183-AFDA-6039D928B4EE}" type="slidenum">
+              <a:rPr kumimoji="0" lang="en-IN" altLang="en-US" sz="1200" b="0" i="0" u="none" strike="noStrike" kern="1200" cap="none" spc="0" normalizeH="0" baseline="0" noProof="0" smtClean="0">
+                <a:ln>
+                  <a:noFill/>
+                </a:ln>
+                <a:solidFill>
+                  <a:prstClr val="black">
+                    <a:tint val="82000"/>
+                  </a:prstClr>
+                </a:solidFill>
+                <a:effectLst/>
+                <a:uLnTx/>
+                <a:uFillTx/>
+                <a:latin typeface="Aptos" panose="02110004020202020204"/>
+                <a:ea typeface="+mn-ea"/>
+                <a:cs typeface="+mn-cs"/>
+              </a:rPr>
+              <a:pPr marL="0" marR="0" lvl="0" indent="0" algn="r" defTabSz="914400" rtl="0" eaLnBrk="1" fontAlgn="auto" latinLnBrk="0" hangingPunct="1">
+                <a:lnSpc>
+                  <a:spcPct val="100000"/>
+                </a:lnSpc>
+                <a:spcBef>
+                  <a:spcPts val="0"/>
+                </a:spcBef>
+                <a:spcAft>
+                  <a:spcPts val="0"/>
+                </a:spcAft>
+                <a:buClrTx/>
+                <a:buSzTx/>
+                <a:buFontTx/>
+                <a:buNone/>
+                <a:tabLst/>
+                <a:defRPr/>
+              </a:pPr>
+              <a:t>12</a:t>
+            </a:fld>
+            <a:endParaRPr kumimoji="0" lang="en-IN" altLang="en-US" sz="1200" b="0" i="0" u="none" strike="noStrike" kern="1200" cap="none" spc="0" normalizeH="0" baseline="0" noProof="0">
+              <a:ln>
+                <a:noFill/>
+              </a:ln>
+              <a:solidFill>
+                <a:prstClr val="black">
+                  <a:tint val="82000"/>
+                </a:prstClr>
+              </a:solidFill>
+              <a:effectLst/>
+              <a:uLnTx/>
+              <a:uFillTx/>
+              <a:latin typeface="Aptos" panose="02110004020202020204"/>
+              <a:ea typeface="+mn-ea"/>
+              <a:cs typeface="+mn-cs"/>
+            </a:endParaRPr>
+          </a:p>
+        </p:txBody>
+      </p:sp>
+      <p:grpSp>
+        <p:nvGrpSpPr>
+          <p:cNvPr id="6" name="Group 5">
+            <a:extLst>
+              <a:ext uri="{FF2B5EF4-FFF2-40B4-BE49-F238E27FC236}">
+                <a16:creationId xmlns:a16="http://schemas.microsoft.com/office/drawing/2014/main" id="{5C5A9723-F561-DF3C-95F5-53BD82118068}"/>
+              </a:ext>
+            </a:extLst>
+          </p:cNvPr>
+          <p:cNvGrpSpPr/>
+          <p:nvPr/>
+        </p:nvGrpSpPr>
+        <p:grpSpPr>
+          <a:xfrm>
+            <a:off x="71421" y="859734"/>
+            <a:ext cx="11982034" cy="5861699"/>
+            <a:chOff x="100407" y="888336"/>
+            <a:chExt cx="11747210" cy="5919873"/>
+          </a:xfrm>
+          <a:scene3d>
+            <a:camera prst="orthographicFront">
+              <a:rot lat="0" lon="0" rev="0"/>
+            </a:camera>
+            <a:lightRig rig="soft" dir="t">
+              <a:rot lat="0" lon="0" rev="0"/>
+            </a:lightRig>
+          </a:scene3d>
+        </p:grpSpPr>
+        <p:sp>
+          <p:nvSpPr>
+            <p:cNvPr id="4" name="Rectangle 3">
+              <a:extLst>
+                <a:ext uri="{FF2B5EF4-FFF2-40B4-BE49-F238E27FC236}">
+                  <a16:creationId xmlns:a16="http://schemas.microsoft.com/office/drawing/2014/main" id="{92200084-B160-22AB-A3F1-9D54EBF8569E}"/>
+                </a:ext>
+              </a:extLst>
+            </p:cNvPr>
+            <p:cNvSpPr/>
+            <p:nvPr/>
+          </p:nvSpPr>
+          <p:spPr>
+            <a:xfrm>
+              <a:off x="100407" y="888336"/>
+              <a:ext cx="11747210" cy="5919873"/>
+            </a:xfrm>
+            <a:prstGeom prst="rect">
+              <a:avLst/>
+            </a:prstGeom>
+            <a:solidFill>
+              <a:schemeClr val="bg1">
+                <a:lumMod val="95000"/>
+              </a:schemeClr>
+            </a:solidFill>
+            <a:ln>
+              <a:noFill/>
+            </a:ln>
+            <a:effectLst>
+              <a:outerShdw blurRad="107950" dist="12700" dir="5400000" algn="ctr">
+                <a:srgbClr val="000000"/>
+              </a:outerShdw>
+            </a:effectLst>
+            <a:sp3d contourW="44450" prstMaterial="matte">
+              <a:bevelT w="63500" h="63500" prst="artDeco"/>
+              <a:contourClr>
+                <a:srgbClr val="FFFFFF"/>
+              </a:contourClr>
+            </a:sp3d>
+          </p:spPr>
+          <p:style>
+            <a:lnRef idx="2">
+              <a:schemeClr val="accent1">
+                <a:shade val="15000"/>
+              </a:schemeClr>
+            </a:lnRef>
+            <a:fillRef idx="1">
+              <a:schemeClr val="accent1"/>
+            </a:fillRef>
+            <a:effectRef idx="0">
+              <a:schemeClr val="accent1"/>
+            </a:effectRef>
+            <a:fontRef idx="minor">
+              <a:schemeClr val="lt1"/>
+            </a:fontRef>
+          </p:style>
+          <p:txBody>
+            <a:bodyPr rtlCol="0" anchor="ctr"/>
+            <a:lstStyle/>
+            <a:p>
+              <a:pPr marL="0" marR="0" lvl="0" indent="0" algn="ctr" defTabSz="914400" rtl="0" eaLnBrk="1" fontAlgn="auto" latinLnBrk="0" hangingPunct="1">
+                <a:lnSpc>
+                  <a:spcPct val="100000"/>
+                </a:lnSpc>
+                <a:spcBef>
+                  <a:spcPts val="0"/>
+                </a:spcBef>
+                <a:spcAft>
+                  <a:spcPts val="0"/>
+                </a:spcAft>
+                <a:buClrTx/>
+                <a:buSzTx/>
+                <a:buFontTx/>
+                <a:buNone/>
+                <a:tabLst/>
+                <a:defRPr/>
+              </a:pPr>
+              <a:endParaRPr kumimoji="0" lang="en-IN" sz="1800" b="0" i="0" u="none" strike="noStrike" kern="1200" cap="none" spc="0" normalizeH="0" baseline="0" noProof="0">
+                <a:ln>
+                  <a:noFill/>
+                </a:ln>
+                <a:solidFill>
+                  <a:prstClr val="white"/>
+                </a:solidFill>
+                <a:effectLst/>
+                <a:uLnTx/>
+                <a:uFillTx/>
+                <a:latin typeface="Aptos" panose="02110004020202020204"/>
+                <a:ea typeface="+mn-ea"/>
+                <a:cs typeface="+mn-cs"/>
+              </a:endParaRPr>
+            </a:p>
+          </p:txBody>
+        </p:sp>
+        <p:sp>
+          <p:nvSpPr>
+            <p:cNvPr id="10" name="Rectangle 9">
+              <a:extLst>
+                <a:ext uri="{FF2B5EF4-FFF2-40B4-BE49-F238E27FC236}">
+                  <a16:creationId xmlns:a16="http://schemas.microsoft.com/office/drawing/2014/main" id="{3BFEBDD7-4E97-AEAA-BA3B-02F2E9DA4CFF}"/>
+                </a:ext>
+              </a:extLst>
+            </p:cNvPr>
+            <p:cNvSpPr/>
+            <p:nvPr/>
+          </p:nvSpPr>
+          <p:spPr bwMode="gray">
+            <a:xfrm>
+              <a:off x="344384" y="1091379"/>
+              <a:ext cx="11305310" cy="5451925"/>
+            </a:xfrm>
+            <a:prstGeom prst="rect">
+              <a:avLst/>
+            </a:prstGeom>
+            <a:solidFill>
+              <a:schemeClr val="bg1"/>
+            </a:solidFill>
+            <a:ln w="19050" algn="ctr">
+              <a:noFill/>
+              <a:miter lim="800000"/>
+              <a:headEnd/>
+              <a:tailEnd/>
+            </a:ln>
+            <a:effectLst>
+              <a:outerShdw blurRad="107950" dist="12700" dir="5400000" algn="ctr">
+                <a:srgbClr val="000000"/>
+              </a:outerShdw>
+            </a:effectLst>
+            <a:sp3d contourW="44450" prstMaterial="matte">
+              <a:bevelT w="63500" h="63500" prst="artDeco"/>
+              <a:contourClr>
+                <a:srgbClr val="FFFFFF"/>
+              </a:contourClr>
+            </a:sp3d>
+          </p:spPr>
+          <p:txBody>
+            <a:bodyPr lIns="88900" tIns="88900" rIns="88900" bIns="88900" anchor="t"/>
+            <a:lstStyle/>
+            <a:p>
+              <a:pPr marL="0" marR="0" lvl="0" indent="0" algn="l" defTabSz="914400" rtl="0" eaLnBrk="1" fontAlgn="base" latinLnBrk="0" hangingPunct="1">
+                <a:lnSpc>
+                  <a:spcPct val="150000"/>
+                </a:lnSpc>
+                <a:spcBef>
+                  <a:spcPts val="0"/>
+                </a:spcBef>
+                <a:spcAft>
+                  <a:spcPts val="600"/>
+                </a:spcAft>
+                <a:buClrTx/>
+                <a:buSzTx/>
+                <a:buFontTx/>
+                <a:buNone/>
+                <a:tabLst/>
+                <a:defRPr/>
+              </a:pPr>
+              <a:endParaRPr kumimoji="0" lang="en-IN" sz="2200" b="0" i="0" u="none" strike="noStrike" kern="1200" cap="none" spc="0" normalizeH="0" baseline="0" noProof="0">
+                <a:ln>
+                  <a:noFill/>
+                </a:ln>
+                <a:solidFill>
+                  <a:prstClr val="black"/>
+                </a:solidFill>
+                <a:effectLst/>
+                <a:uLnTx/>
+                <a:uFillTx/>
+                <a:latin typeface="DevLys 010" pitchFamily="2" charset="0"/>
+                <a:ea typeface="+mn-ea"/>
+                <a:cs typeface="+mn-cs"/>
+              </a:endParaRPr>
+            </a:p>
+            <a:p>
+              <a:pPr marL="342900" marR="0" lvl="0" indent="-342900" algn="l" defTabSz="914400" rtl="0" eaLnBrk="1" fontAlgn="base" latinLnBrk="0" hangingPunct="1">
+                <a:lnSpc>
+                  <a:spcPct val="150000"/>
+                </a:lnSpc>
+                <a:spcBef>
+                  <a:spcPts val="0"/>
+                </a:spcBef>
+                <a:spcAft>
+                  <a:spcPts val="600"/>
+                </a:spcAft>
+                <a:buClrTx/>
+                <a:buSzTx/>
+                <a:buFont typeface="Wingdings" panose="05000000000000000000" pitchFamily="2" charset="2"/>
+                <a:buChar char="q"/>
+                <a:tabLst/>
+                <a:defRPr/>
+              </a:pPr>
+              <a:endParaRPr kumimoji="0" lang="fr-FR" sz="2200" b="0" i="0" u="none" strike="noStrike" kern="1200" cap="none" spc="0" normalizeH="0" baseline="0" noProof="0">
+                <a:ln>
+                  <a:noFill/>
+                </a:ln>
+                <a:solidFill>
+                  <a:prstClr val="black"/>
+                </a:solidFill>
+                <a:effectLst/>
+                <a:uLnTx/>
+                <a:uFillTx/>
+                <a:latin typeface="DevLys 010" pitchFamily="2" charset="0"/>
+                <a:ea typeface="+mn-ea"/>
+                <a:cs typeface="+mn-cs"/>
+              </a:endParaRPr>
+            </a:p>
+            <a:p>
+              <a:pPr marL="342900" marR="0" lvl="0" indent="-342900" algn="l" defTabSz="914400" rtl="0" eaLnBrk="1" fontAlgn="base" latinLnBrk="0" hangingPunct="1">
+                <a:lnSpc>
+                  <a:spcPct val="150000"/>
+                </a:lnSpc>
+                <a:spcBef>
+                  <a:spcPts val="0"/>
+                </a:spcBef>
+                <a:spcAft>
+                  <a:spcPts val="600"/>
+                </a:spcAft>
+                <a:buClrTx/>
+                <a:buSzTx/>
+                <a:buFont typeface="Wingdings" panose="05000000000000000000" pitchFamily="2" charset="2"/>
+                <a:buChar char="q"/>
+                <a:tabLst/>
+                <a:defRPr/>
+              </a:pPr>
+              <a:endParaRPr kumimoji="0" lang="fr-FR" sz="2200" b="0" i="0" u="none" strike="noStrike" kern="1200" cap="none" spc="0" normalizeH="0" baseline="0" noProof="0">
+                <a:ln>
+                  <a:noFill/>
+                </a:ln>
+                <a:solidFill>
+                  <a:prstClr val="black"/>
+                </a:solidFill>
+                <a:effectLst/>
+                <a:uLnTx/>
+                <a:uFillTx/>
+                <a:latin typeface="DevLys 010" pitchFamily="2" charset="0"/>
+                <a:ea typeface="+mn-ea"/>
+                <a:cs typeface="+mn-cs"/>
+              </a:endParaRPr>
+            </a:p>
+            <a:p>
+              <a:pPr marL="342900" marR="0" lvl="0" indent="-342900" algn="l" defTabSz="914400" rtl="0" eaLnBrk="1" fontAlgn="base" latinLnBrk="0" hangingPunct="1">
+                <a:lnSpc>
+                  <a:spcPct val="150000"/>
+                </a:lnSpc>
+                <a:spcBef>
+                  <a:spcPts val="0"/>
+                </a:spcBef>
+                <a:spcAft>
+                  <a:spcPts val="600"/>
+                </a:spcAft>
+                <a:buClrTx/>
+                <a:buSzTx/>
+                <a:buFont typeface="Wingdings" panose="05000000000000000000" pitchFamily="2" charset="2"/>
+                <a:buChar char="q"/>
+                <a:tabLst/>
+                <a:defRPr/>
+              </a:pPr>
+              <a:endParaRPr kumimoji="0" lang="en-IN" sz="2200" b="0" i="0" u="none" strike="noStrike" kern="1200" cap="none" spc="0" normalizeH="0" baseline="0" noProof="0">
+                <a:ln>
+                  <a:noFill/>
+                </a:ln>
+                <a:solidFill>
+                  <a:prstClr val="black"/>
+                </a:solidFill>
+                <a:effectLst/>
+                <a:uLnTx/>
+                <a:uFillTx/>
+                <a:latin typeface="DevLys 010" pitchFamily="2" charset="0"/>
+                <a:ea typeface="+mn-ea"/>
+                <a:cs typeface="+mn-cs"/>
+              </a:endParaRPr>
+            </a:p>
+          </p:txBody>
+        </p:sp>
+      </p:grpSp>
+      <p:cxnSp>
+        <p:nvCxnSpPr>
+          <p:cNvPr id="7" name="Straight Connector 6">
+            <a:extLst>
+              <a:ext uri="{FF2B5EF4-FFF2-40B4-BE49-F238E27FC236}">
+                <a16:creationId xmlns:a16="http://schemas.microsoft.com/office/drawing/2014/main" id="{E31772B6-E844-9C93-C042-72829C4CB1EF}"/>
+              </a:ext>
+            </a:extLst>
+          </p:cNvPr>
+          <p:cNvCxnSpPr/>
+          <p:nvPr/>
+        </p:nvCxnSpPr>
+        <p:spPr>
+          <a:xfrm>
+            <a:off x="0" y="757824"/>
+            <a:ext cx="12192000" cy="0"/>
+          </a:xfrm>
+          <a:prstGeom prst="line">
+            <a:avLst/>
+          </a:prstGeom>
+          <a:ln w="38100">
+            <a:solidFill>
+              <a:schemeClr val="tx2">
+                <a:lumMod val="75000"/>
+                <a:lumOff val="25000"/>
+              </a:schemeClr>
+            </a:solidFill>
+          </a:ln>
+        </p:spPr>
+        <p:style>
+          <a:lnRef idx="2">
+            <a:schemeClr val="accent1"/>
+          </a:lnRef>
+          <a:fillRef idx="0">
+            <a:schemeClr val="accent1"/>
+          </a:fillRef>
+          <a:effectRef idx="1">
+            <a:schemeClr val="accent1"/>
+          </a:effectRef>
+          <a:fontRef idx="minor">
+            <a:schemeClr val="tx1"/>
+          </a:fontRef>
+        </p:style>
+      </p:cxnSp>
+      <p:sp>
+        <p:nvSpPr>
+          <p:cNvPr id="2" name="Title 1">
+            <a:extLst>
+              <a:ext uri="{FF2B5EF4-FFF2-40B4-BE49-F238E27FC236}">
+                <a16:creationId xmlns:a16="http://schemas.microsoft.com/office/drawing/2014/main" id="{9E9FBFB1-9BF7-BE63-EBAC-B1F9182D8FB8}"/>
+              </a:ext>
+            </a:extLst>
+          </p:cNvPr>
+          <p:cNvSpPr txBox="1">
+            <a:spLocks/>
+          </p:cNvSpPr>
+          <p:nvPr/>
+        </p:nvSpPr>
+        <p:spPr>
+          <a:xfrm>
+            <a:off x="135429" y="100419"/>
+            <a:ext cx="8505334" cy="596900"/>
+          </a:xfrm>
+          <a:prstGeom prst="rect">
+            <a:avLst/>
+          </a:prstGeom>
+        </p:spPr>
+        <p:txBody>
+          <a:bodyPr vert="horz" lIns="91440" tIns="45720" rIns="91440" bIns="45720" rtlCol="0" anchor="b">
+            <a:noAutofit/>
+          </a:bodyPr>
+          <a:lstStyle>
+            <a:lvl1pPr algn="ctr" defTabSz="914400" rtl="0" eaLnBrk="1" latinLnBrk="0" hangingPunct="1">
+              <a:lnSpc>
+                <a:spcPct val="90000"/>
+              </a:lnSpc>
+              <a:spcBef>
+                <a:spcPct val="0"/>
+              </a:spcBef>
+              <a:buNone/>
+              <a:defRPr sz="6000" kern="1200">
+                <a:solidFill>
+                  <a:schemeClr val="tx1"/>
+                </a:solidFill>
+                <a:latin typeface="+mj-lt"/>
+                <a:ea typeface="+mj-ea"/>
+                <a:cs typeface="+mj-cs"/>
+              </a:defRPr>
+            </a:lvl1pPr>
+          </a:lstStyle>
+          <a:p>
+            <a:pPr algn="l"/>
+            <a:r>
+              <a:rPr lang="en-US" sz="3600" b="1" dirty="0">
+                <a:latin typeface="DevLys 010 " pitchFamily="2" charset="0"/>
+              </a:rPr>
+              <a:t>[</a:t>
+            </a:r>
+            <a:r>
+              <a:rPr lang="en-US" sz="3600" b="1" dirty="0" err="1">
+                <a:latin typeface="DevLys 010 " pitchFamily="2" charset="0"/>
+              </a:rPr>
+              <a:t>kfut</a:t>
+            </a:r>
+            <a:r>
+              <a:rPr lang="en-US" sz="3600" b="1" dirty="0">
+                <a:latin typeface="DevLys 010 " pitchFamily="2" charset="0"/>
+              </a:rPr>
+              <a:t> </a:t>
+            </a:r>
+            <a:r>
+              <a:rPr lang="en-US" sz="3600" b="1" dirty="0" err="1">
+                <a:latin typeface="DevLys 010 " pitchFamily="2" charset="0"/>
+              </a:rPr>
+              <a:t>Cy‚Dl</a:t>
+            </a:r>
+            <a:r>
+              <a:rPr lang="en-US" sz="3600" b="1" dirty="0">
+                <a:latin typeface="DevLys 010 " pitchFamily="2" charset="0"/>
+              </a:rPr>
+              <a:t> dh </a:t>
+            </a:r>
+            <a:r>
+              <a:rPr lang="en-US" sz="3600" b="1" dirty="0" err="1">
+                <a:latin typeface="DevLys 010 " pitchFamily="2" charset="0"/>
+              </a:rPr>
+              <a:t>çLrkfor</a:t>
+            </a:r>
+            <a:r>
+              <a:rPr lang="en-US" sz="3600" b="1" dirty="0">
+                <a:latin typeface="DevLys 010 " pitchFamily="2" charset="0"/>
+              </a:rPr>
+              <a:t> </a:t>
+            </a:r>
+            <a:r>
+              <a:rPr lang="en-US" sz="3600" b="1" dirty="0" err="1">
+                <a:latin typeface="DevLys 010 " pitchFamily="2" charset="0"/>
+              </a:rPr>
+              <a:t>uhykeh</a:t>
+            </a:r>
+            <a:r>
+              <a:rPr lang="en-US" sz="3600" b="1" dirty="0">
+                <a:latin typeface="DevLys 010 " pitchFamily="2" charset="0"/>
+              </a:rPr>
+              <a:t> </a:t>
+            </a:r>
+            <a:r>
+              <a:rPr lang="en-US" sz="3600" dirty="0">
+                <a:latin typeface="+mn-lt"/>
+              </a:rPr>
+              <a:t>2026-27</a:t>
+            </a:r>
+          </a:p>
+        </p:txBody>
+      </p:sp>
+      <p:sp>
+        <p:nvSpPr>
+          <p:cNvPr id="9" name="Title 1">
+            <a:extLst>
+              <a:ext uri="{FF2B5EF4-FFF2-40B4-BE49-F238E27FC236}">
+                <a16:creationId xmlns:a16="http://schemas.microsoft.com/office/drawing/2014/main" id="{EA3177E1-358E-6C51-2C52-289357FFA38D}"/>
+              </a:ext>
+            </a:extLst>
+          </p:cNvPr>
+          <p:cNvSpPr txBox="1">
+            <a:spLocks/>
+          </p:cNvSpPr>
+          <p:nvPr/>
+        </p:nvSpPr>
+        <p:spPr>
+          <a:xfrm>
+            <a:off x="597266" y="2969258"/>
+            <a:ext cx="10930344" cy="2438400"/>
+          </a:xfrm>
+          <a:prstGeom prst="rect">
+            <a:avLst/>
+          </a:prstGeom>
+        </p:spPr>
+        <p:txBody>
+          <a:bodyPr vert="horz" lIns="91440" tIns="45720" rIns="91440" bIns="45720" rtlCol="0" anchor="b">
+            <a:noAutofit/>
+          </a:bodyPr>
+          <a:lstStyle>
+            <a:lvl1pPr algn="ctr" defTabSz="914400" rtl="0" eaLnBrk="1" latinLnBrk="0" hangingPunct="1">
+              <a:lnSpc>
+                <a:spcPct val="90000"/>
+              </a:lnSpc>
+              <a:spcBef>
+                <a:spcPct val="0"/>
+              </a:spcBef>
+              <a:buNone/>
+              <a:defRPr sz="6000" kern="1200">
+                <a:solidFill>
+                  <a:schemeClr val="tx1"/>
+                </a:solidFill>
+                <a:latin typeface="+mj-lt"/>
+                <a:ea typeface="+mj-ea"/>
+                <a:cs typeface="+mj-cs"/>
+              </a:defRPr>
+            </a:lvl1pPr>
+          </a:lstStyle>
+          <a:p>
+            <a:pPr marL="180000" indent="-342900" algn="just">
+              <a:lnSpc>
+                <a:spcPct val="170000"/>
+              </a:lnSpc>
+              <a:spcAft>
+                <a:spcPts val="600"/>
+              </a:spcAft>
+              <a:buFont typeface="Wingdings" panose="05000000000000000000" pitchFamily="2" charset="2"/>
+              <a:buChar char="q"/>
+            </a:pPr>
+            <a:endParaRPr lang="en-US" sz="2000">
+              <a:latin typeface="DevLys 010" pitchFamily="2" charset="0"/>
+              <a:ea typeface="Calibri" panose="020F0502020204030204" pitchFamily="34" charset="0"/>
+              <a:cs typeface="Mangal" panose="02040503050203030202" pitchFamily="18" charset="0"/>
+            </a:endParaRPr>
+          </a:p>
+        </p:txBody>
+      </p:sp>
+      <p:sp>
+        <p:nvSpPr>
+          <p:cNvPr id="12" name="TextBox 11">
+            <a:extLst>
+              <a:ext uri="{FF2B5EF4-FFF2-40B4-BE49-F238E27FC236}">
+                <a16:creationId xmlns:a16="http://schemas.microsoft.com/office/drawing/2014/main" id="{C1F71302-7CBF-65F5-0895-34F66BFD3ED3}"/>
+              </a:ext>
+            </a:extLst>
+          </p:cNvPr>
+          <p:cNvSpPr txBox="1"/>
+          <p:nvPr/>
+        </p:nvSpPr>
+        <p:spPr>
+          <a:xfrm>
+            <a:off x="515041" y="1196667"/>
+            <a:ext cx="11161918" cy="5191229"/>
+          </a:xfrm>
+          <a:prstGeom prst="rect">
+            <a:avLst/>
+          </a:prstGeom>
+          <a:noFill/>
+        </p:spPr>
+        <p:txBody>
+          <a:bodyPr wrap="square">
+            <a:spAutoFit/>
+          </a:bodyPr>
+          <a:lstStyle/>
+          <a:p>
+            <a:pPr marL="342900" indent="-342900" algn="just">
+              <a:lnSpc>
+                <a:spcPct val="150000"/>
+              </a:lnSpc>
+              <a:spcAft>
+                <a:spcPts val="800"/>
+              </a:spcAft>
+              <a:buFont typeface="Wingdings" panose="05000000000000000000" pitchFamily="2" charset="2"/>
+              <a:buChar char="q"/>
+            </a:pPr>
+            <a:r>
+              <a:rPr lang="en-US" sz="2400" dirty="0" err="1">
+                <a:latin typeface="DevLys 010" pitchFamily="2" charset="0"/>
+                <a:ea typeface="Calibri" panose="020F0502020204030204" pitchFamily="34" charset="0"/>
+                <a:cs typeface="Mangal" panose="02040503050203030202" pitchFamily="18" charset="0"/>
+              </a:rPr>
+              <a:t>iz</a:t>
+            </a:r>
+            <a:r>
+              <a:rPr lang="en-US" sz="2400" dirty="0">
+                <a:latin typeface="DevLys 010" pitchFamily="2" charset="0"/>
+                <a:ea typeface="Calibri" panose="020F0502020204030204" pitchFamily="34" charset="0"/>
+                <a:cs typeface="Mangal" panose="02040503050203030202" pitchFamily="18" charset="0"/>
+              </a:rPr>
+              <a:t>/</a:t>
+            </a:r>
+            <a:r>
+              <a:rPr lang="en-US" sz="2400" dirty="0" err="1">
+                <a:latin typeface="DevLys 010" pitchFamily="2" charset="0"/>
+                <a:ea typeface="Calibri" panose="020F0502020204030204" pitchFamily="34" charset="0"/>
+                <a:cs typeface="Mangal" panose="02040503050203030202" pitchFamily="18" charset="0"/>
+              </a:rPr>
+              <a:t>kku</a:t>
+            </a:r>
+            <a:r>
+              <a:rPr lang="en-US" sz="2400" dirty="0">
+                <a:latin typeface="DevLys 010" pitchFamily="2" charset="0"/>
+                <a:ea typeface="Calibri" panose="020F0502020204030204" pitchFamily="34" charset="0"/>
+                <a:cs typeface="Mangal" panose="02040503050203030202" pitchFamily="18" charset="0"/>
+              </a:rPr>
+              <a:t> [</a:t>
+            </a:r>
+            <a:r>
+              <a:rPr lang="en-US" sz="2400" dirty="0" err="1">
+                <a:latin typeface="DevLys 010" pitchFamily="2" charset="0"/>
+                <a:ea typeface="Calibri" panose="020F0502020204030204" pitchFamily="34" charset="0"/>
+                <a:cs typeface="Mangal" panose="02040503050203030202" pitchFamily="18" charset="0"/>
+              </a:rPr>
+              <a:t>kfut</a:t>
+            </a:r>
+            <a:r>
+              <a:rPr lang="en-US" sz="2400" dirty="0">
+                <a:latin typeface="DevLys 010" pitchFamily="2" charset="0"/>
+                <a:ea typeface="Calibri" panose="020F0502020204030204" pitchFamily="34" charset="0"/>
+                <a:cs typeface="Mangal" panose="02040503050203030202" pitchFamily="18" charset="0"/>
+              </a:rPr>
+              <a:t> %</a:t>
+            </a:r>
+          </a:p>
+          <a:p>
+            <a:pPr marL="1139825" indent="-403225" algn="just">
+              <a:lnSpc>
+                <a:spcPct val="150000"/>
+              </a:lnSpc>
+              <a:spcAft>
+                <a:spcPts val="800"/>
+              </a:spcAft>
+              <a:buFont typeface="Wingdings" panose="05000000000000000000" pitchFamily="2" charset="2"/>
+              <a:buChar char="v"/>
+            </a:pPr>
+            <a:r>
+              <a:rPr lang="en-US" sz="2400" dirty="0">
+                <a:latin typeface="DevLys 010" pitchFamily="2" charset="0"/>
+                <a:ea typeface="Calibri" panose="020F0502020204030204" pitchFamily="34" charset="0"/>
+                <a:cs typeface="Mangal" panose="02040503050203030202" pitchFamily="18" charset="0"/>
+              </a:rPr>
+              <a:t>54 </a:t>
+            </a:r>
+            <a:r>
+              <a:rPr lang="en-US" sz="2400" dirty="0" err="1">
+                <a:latin typeface="DevLys 010" pitchFamily="2" charset="0"/>
+                <a:ea typeface="Calibri" panose="020F0502020204030204" pitchFamily="34" charset="0"/>
+                <a:cs typeface="Mangal" panose="02040503050203030202" pitchFamily="18" charset="0"/>
+              </a:rPr>
+              <a:t>CykWDl</a:t>
+            </a:r>
+            <a:r>
+              <a:rPr lang="en-US" sz="2400" dirty="0">
+                <a:latin typeface="DevLys 010" pitchFamily="2" charset="0"/>
+                <a:ea typeface="Calibri" panose="020F0502020204030204" pitchFamily="34" charset="0"/>
+                <a:cs typeface="Mangal" panose="02040503050203030202" pitchFamily="18" charset="0"/>
+              </a:rPr>
+              <a:t> ¼xksYM 1 ] </a:t>
+            </a:r>
+            <a:r>
+              <a:rPr lang="en-US" sz="2400" dirty="0" err="1">
+                <a:latin typeface="DevLys 010" pitchFamily="2" charset="0"/>
+                <a:ea typeface="Calibri" panose="020F0502020204030204" pitchFamily="34" charset="0"/>
+                <a:cs typeface="Mangal" panose="02040503050203030202" pitchFamily="18" charset="0"/>
+              </a:rPr>
+              <a:t>dkWij</a:t>
+            </a:r>
+            <a:r>
+              <a:rPr lang="en-US" sz="2400" dirty="0">
+                <a:latin typeface="DevLys 010" pitchFamily="2" charset="0"/>
+                <a:ea typeface="Calibri" panose="020F0502020204030204" pitchFamily="34" charset="0"/>
+                <a:cs typeface="Mangal" panose="02040503050203030202" pitchFamily="18" charset="0"/>
+              </a:rPr>
+              <a:t> 4] </a:t>
+            </a:r>
+            <a:r>
+              <a:rPr lang="en-US" sz="2400" dirty="0" err="1">
+                <a:latin typeface="DevLys 010" pitchFamily="2" charset="0"/>
+                <a:ea typeface="Calibri" panose="020F0502020204030204" pitchFamily="34" charset="0"/>
+                <a:cs typeface="Mangal" panose="02040503050203030202" pitchFamily="18" charset="0"/>
+              </a:rPr>
+              <a:t>ykbZeLVksu</a:t>
+            </a:r>
+            <a:r>
+              <a:rPr lang="en-US" sz="2400" dirty="0">
+                <a:latin typeface="DevLys 010" pitchFamily="2" charset="0"/>
+                <a:ea typeface="Calibri" panose="020F0502020204030204" pitchFamily="34" charset="0"/>
+                <a:cs typeface="Mangal" panose="02040503050203030202" pitchFamily="18" charset="0"/>
+              </a:rPr>
+              <a:t> 46] </a:t>
+            </a:r>
+            <a:r>
+              <a:rPr lang="hi-IN" dirty="0">
+                <a:latin typeface="DevLys 010" pitchFamily="2" charset="0"/>
+              </a:rPr>
+              <a:t>गार्नेट</a:t>
+            </a:r>
+            <a:r>
+              <a:rPr lang="en-US" dirty="0">
+                <a:latin typeface="DevLys 010" pitchFamily="2" charset="0"/>
+              </a:rPr>
+              <a:t> 2</a:t>
+            </a:r>
+            <a:r>
+              <a:rPr lang="en-US" u="sng" dirty="0">
+                <a:latin typeface="DevLys 010" pitchFamily="2" charset="0"/>
+              </a:rPr>
+              <a:t>,</a:t>
+            </a:r>
+            <a:r>
+              <a:rPr lang="hi-IN" dirty="0">
+                <a:latin typeface="DevLys 010" pitchFamily="2" charset="0"/>
+              </a:rPr>
+              <a:t>लेड–जिंक – 1</a:t>
+            </a:r>
+            <a:r>
+              <a:rPr lang="en-US" sz="2400" dirty="0">
+                <a:latin typeface="DevLys 010" pitchFamily="2" charset="0"/>
+                <a:ea typeface="Calibri" panose="020F0502020204030204" pitchFamily="34" charset="0"/>
+                <a:cs typeface="Mangal" panose="02040503050203030202" pitchFamily="18" charset="0"/>
+              </a:rPr>
+              <a:t>-½</a:t>
+            </a:r>
+          </a:p>
+          <a:p>
+            <a:pPr marL="342900" indent="-342900" algn="just">
+              <a:lnSpc>
+                <a:spcPct val="150000"/>
+              </a:lnSpc>
+              <a:spcAft>
+                <a:spcPts val="800"/>
+              </a:spcAft>
+              <a:buFont typeface="Wingdings" panose="05000000000000000000" pitchFamily="2" charset="2"/>
+              <a:buChar char="q"/>
+            </a:pPr>
+            <a:r>
+              <a:rPr lang="en-US" sz="2400" dirty="0">
+                <a:latin typeface="DevLys 010" pitchFamily="2" charset="0"/>
+                <a:ea typeface="Calibri" panose="020F0502020204030204" pitchFamily="34" charset="0"/>
+                <a:cs typeface="Mangal" panose="02040503050203030202" pitchFamily="18" charset="0"/>
+              </a:rPr>
+              <a:t>viz/</a:t>
+            </a:r>
+            <a:r>
+              <a:rPr lang="en-US" sz="2400" dirty="0" err="1">
+                <a:latin typeface="DevLys 010" pitchFamily="2" charset="0"/>
+                <a:ea typeface="Calibri" panose="020F0502020204030204" pitchFamily="34" charset="0"/>
+                <a:cs typeface="Mangal" panose="02040503050203030202" pitchFamily="18" charset="0"/>
+              </a:rPr>
+              <a:t>kku</a:t>
+            </a:r>
+            <a:r>
+              <a:rPr lang="en-US" sz="2400" dirty="0">
+                <a:latin typeface="DevLys 010" pitchFamily="2" charset="0"/>
+                <a:ea typeface="Calibri" panose="020F0502020204030204" pitchFamily="34" charset="0"/>
+                <a:cs typeface="Mangal" panose="02040503050203030202" pitchFamily="18" charset="0"/>
+              </a:rPr>
+              <a:t> [</a:t>
+            </a:r>
+            <a:r>
+              <a:rPr lang="en-US" sz="2400" dirty="0" err="1">
+                <a:latin typeface="DevLys 010" pitchFamily="2" charset="0"/>
+                <a:ea typeface="Calibri" panose="020F0502020204030204" pitchFamily="34" charset="0"/>
+                <a:cs typeface="Mangal" panose="02040503050203030202" pitchFamily="18" charset="0"/>
+              </a:rPr>
+              <a:t>kfut</a:t>
+            </a:r>
+            <a:r>
+              <a:rPr lang="en-US" sz="2400" dirty="0">
+                <a:latin typeface="DevLys 010" pitchFamily="2" charset="0"/>
+                <a:ea typeface="Calibri" panose="020F0502020204030204" pitchFamily="34" charset="0"/>
+                <a:cs typeface="Mangal" panose="02040503050203030202" pitchFamily="18" charset="0"/>
+              </a:rPr>
+              <a:t> %</a:t>
+            </a:r>
+          </a:p>
+          <a:p>
+            <a:pPr marL="1081088" indent="-403225" algn="just">
+              <a:lnSpc>
+                <a:spcPct val="150000"/>
+              </a:lnSpc>
+              <a:spcAft>
+                <a:spcPts val="800"/>
+              </a:spcAft>
+              <a:buFont typeface="Wingdings" panose="05000000000000000000" pitchFamily="2" charset="2"/>
+              <a:buChar char="v"/>
+            </a:pPr>
+            <a:r>
+              <a:rPr lang="en-US" sz="2400" dirty="0">
+                <a:latin typeface="DevLys 010" pitchFamily="2" charset="0"/>
+                <a:ea typeface="Calibri" panose="020F0502020204030204" pitchFamily="34" charset="0"/>
+                <a:cs typeface="Mangal" panose="02040503050203030202" pitchFamily="18" charset="0"/>
+              </a:rPr>
+              <a:t>------------ </a:t>
+            </a:r>
+            <a:r>
+              <a:rPr lang="en-US" sz="2400" dirty="0" err="1">
+                <a:latin typeface="DevLys 010" pitchFamily="2" charset="0"/>
+                <a:ea typeface="Calibri" panose="020F0502020204030204" pitchFamily="34" charset="0"/>
+                <a:cs typeface="Mangal" panose="02040503050203030202" pitchFamily="18" charset="0"/>
+              </a:rPr>
+              <a:t>IykWV</a:t>
+            </a:r>
+            <a:r>
+              <a:rPr lang="en-US" sz="2400" dirty="0">
+                <a:latin typeface="DevLys 010" pitchFamily="2" charset="0"/>
+                <a:ea typeface="Calibri" panose="020F0502020204030204" pitchFamily="34" charset="0"/>
+                <a:cs typeface="Mangal" panose="02040503050203030202" pitchFamily="18" charset="0"/>
+              </a:rPr>
+              <a:t>~~l ¼ekcZy------] </a:t>
+            </a:r>
+            <a:r>
+              <a:rPr lang="en-US" sz="2400" dirty="0" err="1">
+                <a:latin typeface="DevLys 010" pitchFamily="2" charset="0"/>
+                <a:ea typeface="Calibri" panose="020F0502020204030204" pitchFamily="34" charset="0"/>
+                <a:cs typeface="Mangal" panose="02040503050203030202" pitchFamily="18" charset="0"/>
+              </a:rPr>
+              <a:t>xszukbZV</a:t>
+            </a:r>
+            <a:r>
+              <a:rPr lang="en-US" sz="2400" dirty="0">
+                <a:latin typeface="DevLys 010" pitchFamily="2" charset="0"/>
+                <a:ea typeface="Calibri" panose="020F0502020204030204" pitchFamily="34" charset="0"/>
+                <a:cs typeface="Mangal" panose="02040503050203030202" pitchFamily="18" charset="0"/>
+              </a:rPr>
+              <a:t> -----------------] </a:t>
+            </a:r>
+            <a:r>
+              <a:rPr lang="en-US" sz="2400" dirty="0" err="1">
+                <a:latin typeface="DevLys 010" pitchFamily="2" charset="0"/>
+                <a:ea typeface="Calibri" panose="020F0502020204030204" pitchFamily="34" charset="0"/>
+                <a:cs typeface="Mangal" panose="02040503050203030202" pitchFamily="18" charset="0"/>
+              </a:rPr>
+              <a:t>ls.MLVksu</a:t>
+            </a:r>
+            <a:r>
+              <a:rPr lang="en-US" sz="2400" dirty="0">
+                <a:latin typeface="DevLys 010" pitchFamily="2" charset="0"/>
+                <a:ea typeface="Calibri" panose="020F0502020204030204" pitchFamily="34" charset="0"/>
+                <a:cs typeface="Mangal" panose="02040503050203030202" pitchFamily="18" charset="0"/>
+              </a:rPr>
+              <a:t> -----] </a:t>
+            </a:r>
+            <a:r>
+              <a:rPr lang="en-US" sz="2400" dirty="0" err="1">
+                <a:latin typeface="DevLys 010" pitchFamily="2" charset="0"/>
+                <a:ea typeface="Calibri" panose="020F0502020204030204" pitchFamily="34" charset="0"/>
+                <a:cs typeface="Mangal" panose="02040503050203030202" pitchFamily="18" charset="0"/>
+              </a:rPr>
+              <a:t>eslujhLVksu</a:t>
+            </a:r>
+            <a:r>
+              <a:rPr lang="en-US" sz="2400" dirty="0">
+                <a:latin typeface="DevLys 010" pitchFamily="2" charset="0"/>
+                <a:ea typeface="Calibri" panose="020F0502020204030204" pitchFamily="34" charset="0"/>
+                <a:cs typeface="Mangal" panose="02040503050203030202" pitchFamily="18" charset="0"/>
+              </a:rPr>
+              <a:t> -----½</a:t>
+            </a:r>
+          </a:p>
+          <a:p>
+            <a:pPr marL="1081088" indent="-403225" algn="just">
+              <a:lnSpc>
+                <a:spcPct val="150000"/>
+              </a:lnSpc>
+              <a:spcAft>
+                <a:spcPts val="800"/>
+              </a:spcAft>
+              <a:buFont typeface="Wingdings" panose="05000000000000000000" pitchFamily="2" charset="2"/>
+              <a:buChar char="v"/>
+            </a:pPr>
+            <a:r>
+              <a:rPr lang="en-US" sz="2400" dirty="0">
+                <a:latin typeface="DevLys 010" pitchFamily="2" charset="0"/>
+                <a:ea typeface="Calibri" panose="020F0502020204030204" pitchFamily="34" charset="0"/>
+                <a:cs typeface="Mangal" panose="02040503050203030202" pitchFamily="18" charset="0"/>
+              </a:rPr>
+              <a:t>------------ </a:t>
+            </a:r>
+            <a:r>
+              <a:rPr lang="en-US" sz="2400" dirty="0" err="1">
+                <a:latin typeface="DevLys 010" pitchFamily="2" charset="0"/>
+                <a:ea typeface="Calibri" panose="020F0502020204030204" pitchFamily="34" charset="0"/>
+                <a:cs typeface="Mangal" panose="02040503050203030202" pitchFamily="18" charset="0"/>
+              </a:rPr>
+              <a:t>IykWV</a:t>
+            </a:r>
+            <a:r>
+              <a:rPr lang="en-US" sz="2400" dirty="0">
+                <a:latin typeface="DevLys 010" pitchFamily="2" charset="0"/>
+                <a:ea typeface="Calibri" panose="020F0502020204030204" pitchFamily="34" charset="0"/>
+                <a:cs typeface="Mangal" panose="02040503050203030202" pitchFamily="18" charset="0"/>
+              </a:rPr>
+              <a:t>~~l ¼ctjh----------½</a:t>
+            </a:r>
+          </a:p>
+          <a:p>
+            <a:pPr marL="342900" indent="-342900" algn="just">
+              <a:lnSpc>
+                <a:spcPct val="150000"/>
+              </a:lnSpc>
+              <a:spcAft>
+                <a:spcPts val="800"/>
+              </a:spcAft>
+              <a:buFont typeface="Wingdings" panose="05000000000000000000" pitchFamily="2" charset="2"/>
+              <a:buChar char="q"/>
+            </a:pPr>
+            <a:r>
+              <a:rPr lang="en-US" sz="2400" dirty="0" err="1">
+                <a:latin typeface="DevLys 010" pitchFamily="2" charset="0"/>
+                <a:ea typeface="Calibri" panose="020F0502020204030204" pitchFamily="34" charset="0"/>
+                <a:cs typeface="Mangal" panose="02040503050203030202" pitchFamily="18" charset="0"/>
+              </a:rPr>
+              <a:t>izh</a:t>
+            </a:r>
+            <a:r>
+              <a:rPr lang="en-US" sz="2400" dirty="0">
+                <a:latin typeface="DevLys 010" pitchFamily="2" charset="0"/>
+                <a:ea typeface="Calibri" panose="020F0502020204030204" pitchFamily="34" charset="0"/>
+                <a:cs typeface="Mangal" panose="02040503050203030202" pitchFamily="18" charset="0"/>
+              </a:rPr>
+              <a:t>&amp;,</a:t>
+            </a:r>
+            <a:r>
+              <a:rPr lang="en-US" sz="2400" dirty="0" err="1">
+                <a:latin typeface="DevLys 010" pitchFamily="2" charset="0"/>
+                <a:ea typeface="Calibri" panose="020F0502020204030204" pitchFamily="34" charset="0"/>
+                <a:cs typeface="Mangal" panose="02040503050203030202" pitchFamily="18" charset="0"/>
+              </a:rPr>
+              <a:t>EcsMsM</a:t>
+            </a:r>
+            <a:r>
+              <a:rPr lang="en-US" sz="2400" dirty="0">
+                <a:latin typeface="DevLys 010" pitchFamily="2" charset="0"/>
+                <a:ea typeface="Calibri" panose="020F0502020204030204" pitchFamily="34" charset="0"/>
+                <a:cs typeface="Mangal" panose="02040503050203030202" pitchFamily="18" charset="0"/>
+              </a:rPr>
+              <a:t> </a:t>
+            </a:r>
+            <a:r>
+              <a:rPr lang="en-US" sz="2400" dirty="0" err="1">
+                <a:latin typeface="DevLys 010" pitchFamily="2" charset="0"/>
+                <a:ea typeface="Calibri" panose="020F0502020204030204" pitchFamily="34" charset="0"/>
+                <a:cs typeface="Mangal" panose="02040503050203030202" pitchFamily="18" charset="0"/>
+              </a:rPr>
+              <a:t>CykWDl@IykWV~l</a:t>
+            </a:r>
+            <a:endParaRPr lang="en-US" sz="2400" dirty="0">
+              <a:latin typeface="DevLys 010" pitchFamily="2" charset="0"/>
+              <a:ea typeface="Calibri" panose="020F0502020204030204" pitchFamily="34" charset="0"/>
+              <a:cs typeface="Mangal" panose="02040503050203030202" pitchFamily="18" charset="0"/>
+            </a:endParaRPr>
+          </a:p>
+          <a:p>
+            <a:pPr marL="1081088" indent="-403225" algn="just">
+              <a:lnSpc>
+                <a:spcPct val="150000"/>
+              </a:lnSpc>
+              <a:spcAft>
+                <a:spcPts val="800"/>
+              </a:spcAft>
+              <a:buFont typeface="Wingdings" panose="05000000000000000000" pitchFamily="2" charset="2"/>
+              <a:buChar char="v"/>
+            </a:pPr>
+            <a:r>
+              <a:rPr lang="en-US" sz="2400" dirty="0" err="1">
+                <a:latin typeface="DevLys 010" pitchFamily="2" charset="0"/>
+                <a:ea typeface="Calibri" panose="020F0502020204030204" pitchFamily="34" charset="0"/>
+                <a:cs typeface="Mangal" panose="02040503050203030202" pitchFamily="18" charset="0"/>
+              </a:rPr>
+              <a:t>iz</a:t>
+            </a:r>
+            <a:r>
+              <a:rPr lang="en-US" sz="2400" dirty="0">
+                <a:latin typeface="DevLys 010" pitchFamily="2" charset="0"/>
+                <a:ea typeface="Calibri" panose="020F0502020204030204" pitchFamily="34" charset="0"/>
+                <a:cs typeface="Mangal" panose="02040503050203030202" pitchFamily="18" charset="0"/>
+              </a:rPr>
+              <a:t>/</a:t>
+            </a:r>
+            <a:r>
+              <a:rPr lang="en-US" sz="2400" dirty="0" err="1">
+                <a:latin typeface="DevLys 010" pitchFamily="2" charset="0"/>
+                <a:ea typeface="Calibri" panose="020F0502020204030204" pitchFamily="34" charset="0"/>
+                <a:cs typeface="Mangal" panose="02040503050203030202" pitchFamily="18" charset="0"/>
+              </a:rPr>
+              <a:t>kku</a:t>
+            </a:r>
+            <a:r>
+              <a:rPr lang="en-US" sz="2400" dirty="0">
+                <a:latin typeface="DevLys 010" pitchFamily="2" charset="0"/>
+                <a:ea typeface="Calibri" panose="020F0502020204030204" pitchFamily="34" charset="0"/>
+                <a:cs typeface="Mangal" panose="02040503050203030202" pitchFamily="18" charset="0"/>
+              </a:rPr>
+              <a:t> [</a:t>
+            </a:r>
+            <a:r>
+              <a:rPr lang="en-US" sz="2400" dirty="0" err="1">
+                <a:latin typeface="DevLys 010" pitchFamily="2" charset="0"/>
+                <a:ea typeface="Calibri" panose="020F0502020204030204" pitchFamily="34" charset="0"/>
+                <a:cs typeface="Mangal" panose="02040503050203030202" pitchFamily="18" charset="0"/>
+              </a:rPr>
+              <a:t>kfut</a:t>
+            </a:r>
+            <a:r>
+              <a:rPr lang="en-US" sz="2400" dirty="0">
+                <a:latin typeface="DevLys 010" pitchFamily="2" charset="0"/>
+                <a:ea typeface="Calibri" panose="020F0502020204030204" pitchFamily="34" charset="0"/>
+                <a:cs typeface="Mangal" panose="02040503050203030202" pitchFamily="18" charset="0"/>
+              </a:rPr>
+              <a:t> % 10 </a:t>
+            </a:r>
+            <a:r>
+              <a:rPr lang="en-US" sz="2400" dirty="0" err="1">
+                <a:latin typeface="DevLys 010" pitchFamily="2" charset="0"/>
+                <a:ea typeface="Calibri" panose="020F0502020204030204" pitchFamily="34" charset="0"/>
+                <a:cs typeface="Mangal" panose="02040503050203030202" pitchFamily="18" charset="0"/>
+              </a:rPr>
+              <a:t>CykWDl</a:t>
+            </a:r>
+            <a:endParaRPr lang="en-US" sz="2400" dirty="0">
+              <a:latin typeface="DevLys 010" pitchFamily="2" charset="0"/>
+              <a:ea typeface="Calibri" panose="020F0502020204030204" pitchFamily="34" charset="0"/>
+              <a:cs typeface="Mangal" panose="02040503050203030202" pitchFamily="18" charset="0"/>
+            </a:endParaRPr>
+          </a:p>
+          <a:p>
+            <a:pPr marL="1081088" indent="-403225" algn="just">
+              <a:lnSpc>
+                <a:spcPct val="150000"/>
+              </a:lnSpc>
+              <a:spcAft>
+                <a:spcPts val="800"/>
+              </a:spcAft>
+              <a:buFont typeface="Wingdings" panose="05000000000000000000" pitchFamily="2" charset="2"/>
+              <a:buChar char="v"/>
+            </a:pPr>
+            <a:r>
+              <a:rPr lang="en-US" sz="2400" dirty="0">
+                <a:latin typeface="DevLys 010" pitchFamily="2" charset="0"/>
+                <a:ea typeface="Calibri" panose="020F0502020204030204" pitchFamily="34" charset="0"/>
+                <a:cs typeface="Mangal" panose="02040503050203030202" pitchFamily="18" charset="0"/>
+              </a:rPr>
+              <a:t>viz/</a:t>
+            </a:r>
+            <a:r>
+              <a:rPr lang="en-US" sz="2400" dirty="0" err="1">
+                <a:latin typeface="DevLys 010" pitchFamily="2" charset="0"/>
+                <a:ea typeface="Calibri" panose="020F0502020204030204" pitchFamily="34" charset="0"/>
+                <a:cs typeface="Mangal" panose="02040503050203030202" pitchFamily="18" charset="0"/>
+              </a:rPr>
+              <a:t>kku</a:t>
+            </a:r>
+            <a:r>
+              <a:rPr lang="en-US" sz="2400" dirty="0">
+                <a:latin typeface="DevLys 010" pitchFamily="2" charset="0"/>
+                <a:ea typeface="Calibri" panose="020F0502020204030204" pitchFamily="34" charset="0"/>
+                <a:cs typeface="Mangal" panose="02040503050203030202" pitchFamily="18" charset="0"/>
+              </a:rPr>
+              <a:t> [</a:t>
+            </a:r>
+            <a:r>
+              <a:rPr lang="en-US" sz="2400" dirty="0" err="1">
+                <a:latin typeface="DevLys 010" pitchFamily="2" charset="0"/>
+                <a:ea typeface="Calibri" panose="020F0502020204030204" pitchFamily="34" charset="0"/>
+                <a:cs typeface="Mangal" panose="02040503050203030202" pitchFamily="18" charset="0"/>
+              </a:rPr>
+              <a:t>kfut</a:t>
+            </a:r>
+            <a:r>
+              <a:rPr lang="en-US" sz="2400" dirty="0">
+                <a:latin typeface="DevLys 010" pitchFamily="2" charset="0"/>
+                <a:ea typeface="Calibri" panose="020F0502020204030204" pitchFamily="34" charset="0"/>
+                <a:cs typeface="Mangal" panose="02040503050203030202" pitchFamily="18" charset="0"/>
+              </a:rPr>
+              <a:t> % ------------ </a:t>
+            </a:r>
+            <a:r>
+              <a:rPr lang="en-US" sz="2400" dirty="0" err="1">
+                <a:latin typeface="DevLys 010" pitchFamily="2" charset="0"/>
+                <a:ea typeface="Calibri" panose="020F0502020204030204" pitchFamily="34" charset="0"/>
+                <a:cs typeface="Mangal" panose="02040503050203030202" pitchFamily="18" charset="0"/>
+              </a:rPr>
+              <a:t>IykWV</a:t>
+            </a:r>
+            <a:r>
+              <a:rPr lang="en-US" sz="2400" dirty="0">
+                <a:latin typeface="DevLys 010" pitchFamily="2" charset="0"/>
+                <a:ea typeface="Calibri" panose="020F0502020204030204" pitchFamily="34" charset="0"/>
+                <a:cs typeface="Mangal" panose="02040503050203030202" pitchFamily="18" charset="0"/>
+              </a:rPr>
+              <a:t>~~l</a:t>
+            </a:r>
+          </a:p>
+        </p:txBody>
+      </p:sp>
+      <p:sp>
+        <p:nvSpPr>
+          <p:cNvPr id="3" name="TextBox 2">
+            <a:extLst>
+              <a:ext uri="{FF2B5EF4-FFF2-40B4-BE49-F238E27FC236}">
+                <a16:creationId xmlns:a16="http://schemas.microsoft.com/office/drawing/2014/main" id="{69E446C7-BDB6-C87B-E072-F1BF6F505713}"/>
+              </a:ext>
+            </a:extLst>
+          </p:cNvPr>
+          <p:cNvSpPr txBox="1"/>
+          <p:nvPr/>
+        </p:nvSpPr>
+        <p:spPr>
+          <a:xfrm>
+            <a:off x="10810729" y="162448"/>
+            <a:ext cx="1146468" cy="646331"/>
+          </a:xfrm>
+          <a:prstGeom prst="rect">
+            <a:avLst/>
+          </a:prstGeom>
+          <a:noFill/>
+        </p:spPr>
+        <p:txBody>
+          <a:bodyPr wrap="none" rtlCol="0">
+            <a:spAutoFit/>
+          </a:bodyPr>
+          <a:lstStyle/>
+          <a:p>
+            <a:r>
+              <a:rPr lang="en-US" b="1" dirty="0" err="1">
+                <a:latin typeface="DevLys 010" pitchFamily="2" charset="0"/>
+              </a:rPr>
+              <a:t>o"kZ</a:t>
+            </a:r>
+            <a:r>
+              <a:rPr lang="en-US" b="1" dirty="0">
+                <a:latin typeface="DevLys 010" pitchFamily="2" charset="0"/>
+              </a:rPr>
+              <a:t> 2025&amp;26</a:t>
+            </a:r>
+          </a:p>
+          <a:p>
+            <a:endParaRPr lang="en-IN" dirty="0"/>
+          </a:p>
+        </p:txBody>
+      </p:sp>
+    </p:spTree>
+    <p:extLst>
+      <p:ext uri="{BB962C8B-B14F-4D97-AF65-F5344CB8AC3E}">
+        <p14:creationId xmlns:p14="http://schemas.microsoft.com/office/powerpoint/2010/main" val="1810803092"/>
+      </p:ext>
+    </p:extLst>
+  </p:cSld>
+  <p:clrMapOvr>
+    <a:masterClrMapping/>
+  </p:clrMapOvr>
+</p:sld>
+</file>
+
+<file path=ppt/slides/slide13.xml><?xml version="1.0" encoding="utf-8"?>
 <p:sld xmlns:a="http://schemas.openxmlformats.org/drawingml/2006/main" xmlns:r="http://schemas.openxmlformats.org/officeDocument/2006/relationships" xmlns:p="http://schemas.openxmlformats.org/presentationml/2006/main">
   <p:cSld>
     <p:spTree>
@@ -17470,7 +18940,7 @@
               <a:pPr>
                 <a:defRPr/>
               </a:pPr>
-              <a:t>12</a:t>
+              <a:t>13</a:t>
             </a:fld>
             <a:endParaRPr lang="en-IN" altLang="en-US"/>
           </a:p>
@@ -19395,7 +20865,7 @@
 </p:sld>
 </file>
 
-<file path=ppt/slides/slide13.xml><?xml version="1.0" encoding="utf-8"?>
+<file path=ppt/slides/slide14.xml><?xml version="1.0" encoding="utf-8"?>
 <p:sld xmlns:a="http://schemas.openxmlformats.org/drawingml/2006/main" xmlns:r="http://schemas.openxmlformats.org/officeDocument/2006/relationships" xmlns:p="http://schemas.openxmlformats.org/presentationml/2006/main">
   <p:cSld>
     <p:spTree>
@@ -19455,7 +20925,7 @@
               <a:pPr>
                 <a:defRPr/>
               </a:pPr>
-              <a:t>13</a:t>
+              <a:t>14</a:t>
             </a:fld>
             <a:endParaRPr lang="en-IN" altLang="en-US"/>
           </a:p>
@@ -21369,7 +22839,7 @@
 </p:sld>
 </file>
 
-<file path=ppt/slides/slide14.xml><?xml version="1.0" encoding="utf-8"?>
+<file path=ppt/slides/slide15.xml><?xml version="1.0" encoding="utf-8"?>
 <p:sld xmlns:a="http://schemas.openxmlformats.org/drawingml/2006/main" xmlns:r="http://schemas.openxmlformats.org/officeDocument/2006/relationships" xmlns:p="http://schemas.openxmlformats.org/presentationml/2006/main">
   <p:cSld>
     <p:spTree>
@@ -21429,7 +22899,7 @@
               <a:pPr>
                 <a:defRPr/>
               </a:pPr>
-              <a:t>14</a:t>
+              <a:t>15</a:t>
             </a:fld>
             <a:endParaRPr lang="en-IN" altLang="en-US"/>
           </a:p>
@@ -22841,7 +24311,7 @@
 </p:sld>
 </file>
 
-<file path=ppt/slides/slide15.xml><?xml version="1.0" encoding="utf-8"?>
+<file path=ppt/slides/slide16.xml><?xml version="1.0" encoding="utf-8"?>
 <p:sld xmlns:a="http://schemas.openxmlformats.org/drawingml/2006/main" xmlns:r="http://schemas.openxmlformats.org/officeDocument/2006/relationships" xmlns:p="http://schemas.openxmlformats.org/presentationml/2006/main">
   <p:cSld>
     <p:spTree>
@@ -22901,7 +24371,7 @@
               <a:pPr>
                 <a:defRPr/>
               </a:pPr>
-              <a:t>15</a:t>
+              <a:t>16</a:t>
             </a:fld>
             <a:endParaRPr lang="en-IN" altLang="en-US"/>
           </a:p>
@@ -24322,7 +25792,7 @@
 </p:sld>
 </file>
 
-<file path=ppt/slides/slide16.xml><?xml version="1.0" encoding="utf-8"?>
+<file path=ppt/slides/slide17.xml><?xml version="1.0" encoding="utf-8"?>
 <p:sld xmlns:a="http://schemas.openxmlformats.org/drawingml/2006/main" xmlns:r="http://schemas.openxmlformats.org/officeDocument/2006/relationships" xmlns:p="http://schemas.openxmlformats.org/presentationml/2006/main">
   <p:cSld>
     <p:spTree>
@@ -24382,7 +25852,7 @@
               <a:pPr>
                 <a:defRPr/>
               </a:pPr>
-              <a:t>16</a:t>
+              <a:t>17</a:t>
             </a:fld>
             <a:endParaRPr lang="en-IN" altLang="en-US"/>
           </a:p>
